--- a/Appendix_민간투자방식_비교_및_사례.pptx
+++ b/Appendix_민간투자방식_비교_및_사례.pptx
@@ -4891,2072 +4891,1965 @@
                 <a:ea typeface="신세계 민부리 Bold(TTF)" pitchFamily="34" charset="-122"/>
                 <a:cs typeface="신세계 민부리 Bold(TTF)" pitchFamily="34" charset="-120"/>
               </a:rPr>
-              <a:t>■ 대표 사례 및 추진 절차</a:t>
+              <a:t>■ 대표 사례</a:t>
             </a:r>
             <a:endParaRPr lang="en-US" sz="1200" dirty="0"/>
           </a:p>
         </p:txBody>
       </p:sp>
+      <p:graphicFrame>
+        <p:nvGraphicFramePr>
+          <p:cNvPr id="3" name="CaseTable"/>
+          <p:cNvGraphicFramePr>
+            <a:graphicFrameLocks noGrp="1"/>
+          </p:cNvGraphicFramePr>
+          <p:nvPr>
+            <p:extLst>
+              <p:ext uri="{D42A27DB-BD31-4B8C-83A1-F6EECF244321}">
+                <p14:modId xmlns:p14="http://schemas.microsoft.com/office/powerpoint/2010/main" val="1579011935"/>
+              </p:ext>
+            </p:extLst>
+          </p:nvPr>
+        </p:nvGraphicFramePr>
+        <p:xfrm>
+          <a:off x="274320" y="5385816"/>
+          <a:ext cx="6309360" cy="914400"/>
+        </p:xfrm>
+        <a:graphic>
+          <a:graphicData uri="http://schemas.openxmlformats.org/drawingml/2006/table">
+            <a:tbl>
+              <a:tblPr/>
+              <a:tblGrid>
+                <a:gridCol w="740664"/>
+                <a:gridCol w="1856232"/>
+                <a:gridCol w="1856232"/>
+                <a:gridCol w="1856232"/>
+              </a:tblGrid>
+              <a:tr h="274320">
+                <a:tc>
+                  <a:txBody>
+                    <a:bodyPr/>
+                    <a:lstStyle/>
+                    <a:p>
+                      <a:pPr algn="ctr" indent="0" marL="0">
+                        <a:buNone/>
+                      </a:pPr>
+                      <a:r>
+                        <a:rPr lang="en-US" sz="950" b="1" dirty="0">
+                          <a:solidFill>
+                            <a:srgbClr val="FFFFFF"/>
+                          </a:solidFill>
+                          <a:latin typeface="신세계 민부리 Bold(TTF)" pitchFamily="34" charset="0"/>
+                          <a:ea typeface="신세계 민부리 Bold(TTF)" pitchFamily="34" charset="-122"/>
+                          <a:cs typeface="신세계 민부리 Bold(TTF)" pitchFamily="34" charset="-120"/>
+                        </a:rPr>
+                        <a:t>사 례</a:t>
+                      </a:r>
+                      <a:endParaRPr lang="en-US" sz="950" dirty="0">
+                        <a:latin typeface="신세계 민부리 Bold(TTF)" charset="0"/>
+                        <a:ea typeface="신세계 민부리 Bold(TTF)" charset="0"/>
+                        <a:cs typeface="신세계 민부리 Bold(TTF)" charset="0"/>
+                      </a:endParaRPr>
+                    </a:p>
+                  </a:txBody>
+                  <a:tcPr marL="54864" marR="54864" marT="27432" marB="27432" anchor="ctr">
+                    <a:lnL w="6350" cap="flat" cmpd="sng" algn="ctr">
+                      <a:solidFill>
+                        <a:srgbClr val="BFBFBF"/>
+                      </a:solidFill>
+                      <a:prstDash val="solid"/>
+                      <a:round/>
+                      <a:headEnd type="none" w="med" len="med"/>
+                      <a:tailEnd type="none" w="med" len="med"/>
+                    </a:lnL>
+                    <a:lnR w="6350" cap="flat" cmpd="sng" algn="ctr">
+                      <a:solidFill>
+                        <a:srgbClr val="BFBFBF"/>
+                      </a:solidFill>
+                      <a:prstDash val="solid"/>
+                      <a:round/>
+                      <a:headEnd type="none" w="med" len="med"/>
+                      <a:tailEnd type="none" w="med" len="med"/>
+                    </a:lnR>
+                    <a:lnT w="6350" cap="flat" cmpd="sng" algn="ctr">
+                      <a:solidFill>
+                        <a:srgbClr val="BFBFBF"/>
+                      </a:solidFill>
+                      <a:prstDash val="solid"/>
+                      <a:round/>
+                      <a:headEnd type="none" w="med" len="med"/>
+                      <a:tailEnd type="none" w="med" len="med"/>
+                    </a:lnT>
+                    <a:lnB w="6350" cap="flat" cmpd="sng" algn="ctr">
+                      <a:solidFill>
+                        <a:srgbClr val="BFBFBF"/>
+                      </a:solidFill>
+                      <a:prstDash val="solid"/>
+                      <a:round/>
+                      <a:headEnd type="none" w="med" len="med"/>
+                      <a:tailEnd type="none" w="med" len="med"/>
+                    </a:lnB>
+                    <a:solidFill>
+                      <a:srgbClr val="595959"/>
+                    </a:solidFill>
+                  </a:tcPr>
+                </a:tc>
+                <a:tc>
+                  <a:txBody>
+                    <a:bodyPr/>
+                    <a:lstStyle/>
+                    <a:p>
+                      <a:pPr algn="ctr" indent="0" marL="0">
+                        <a:buNone/>
+                      </a:pPr>
+                      <a:r>
+                        <a:rPr lang="en-US" sz="950" b="1" dirty="0">
+                          <a:solidFill>
+                            <a:srgbClr val="FFFFFF"/>
+                          </a:solidFill>
+                          <a:latin typeface="신세계 민부리 Bold(TTF)" pitchFamily="34" charset="0"/>
+                          <a:ea typeface="신세계 민부리 Bold(TTF)" pitchFamily="34" charset="-122"/>
+                          <a:cs typeface="신세계 민부리 Bold(TTF)" pitchFamily="34" charset="-120"/>
+                        </a:rPr>
+                        <a:t>잠실 스포츠 · MICE</a:t>
+                      </a:r>
+                      <a:endParaRPr lang="en-US" sz="950" dirty="0">
+                        <a:latin typeface="신세계 민부리 Bold(TTF)" charset="0"/>
+                        <a:ea typeface="신세계 민부리 Bold(TTF)" charset="0"/>
+                        <a:cs typeface="신세계 민부리 Bold(TTF)" charset="0"/>
+                      </a:endParaRPr>
+                    </a:p>
+                  </a:txBody>
+                  <a:tcPr marL="54864" marR="54864" marT="27432" marB="27432" anchor="ctr">
+                    <a:lnL w="6350" cap="flat" cmpd="sng" algn="ctr">
+                      <a:solidFill>
+                        <a:srgbClr val="BFBFBF"/>
+                      </a:solidFill>
+                      <a:prstDash val="solid"/>
+                      <a:round/>
+                      <a:headEnd type="none" w="med" len="med"/>
+                      <a:tailEnd type="none" w="med" len="med"/>
+                    </a:lnL>
+                    <a:lnR w="6350" cap="flat" cmpd="sng" algn="ctr">
+                      <a:solidFill>
+                        <a:srgbClr val="BFBFBF"/>
+                      </a:solidFill>
+                      <a:prstDash val="solid"/>
+                      <a:round/>
+                      <a:headEnd type="none" w="med" len="med"/>
+                      <a:tailEnd type="none" w="med" len="med"/>
+                    </a:lnR>
+                    <a:lnT w="6350" cap="flat" cmpd="sng" algn="ctr">
+                      <a:solidFill>
+                        <a:srgbClr val="BFBFBF"/>
+                      </a:solidFill>
+                      <a:prstDash val="solid"/>
+                      <a:round/>
+                      <a:headEnd type="none" w="med" len="med"/>
+                      <a:tailEnd type="none" w="med" len="med"/>
+                    </a:lnT>
+                    <a:lnB w="6350" cap="flat" cmpd="sng" algn="ctr">
+                      <a:solidFill>
+                        <a:srgbClr val="BFBFBF"/>
+                      </a:solidFill>
+                      <a:prstDash val="solid"/>
+                      <a:round/>
+                      <a:headEnd type="none" w="med" len="med"/>
+                      <a:tailEnd type="none" w="med" len="med"/>
+                    </a:lnB>
+                    <a:solidFill>
+                      <a:srgbClr val="1F3A6E"/>
+                    </a:solidFill>
+                  </a:tcPr>
+                </a:tc>
+                <a:tc>
+                  <a:txBody>
+                    <a:bodyPr/>
+                    <a:lstStyle/>
+                    <a:p>
+                      <a:pPr algn="ctr" indent="0" marL="0">
+                        <a:buNone/>
+                      </a:pPr>
+                      <a:r>
+                        <a:rPr lang="en-US" sz="950" b="1" dirty="0">
+                          <a:solidFill>
+                            <a:srgbClr val="FFFFFF"/>
+                          </a:solidFill>
+                          <a:latin typeface="신세계 민부리 Bold(TTF)" pitchFamily="34" charset="0"/>
+                          <a:ea typeface="신세계 민부리 Bold(TTF)" pitchFamily="34" charset="-122"/>
+                          <a:cs typeface="신세계 민부리 Bold(TTF)" pitchFamily="34" charset="-120"/>
+                        </a:rPr>
+                        <a:t>서울링 (대관람차)</a:t>
+                      </a:r>
+                      <a:endParaRPr lang="en-US" sz="950" dirty="0">
+                        <a:latin typeface="신세계 민부리 Bold(TTF)" charset="0"/>
+                        <a:ea typeface="신세계 민부리 Bold(TTF)" charset="0"/>
+                        <a:cs typeface="신세계 민부리 Bold(TTF)" charset="0"/>
+                      </a:endParaRPr>
+                    </a:p>
+                  </a:txBody>
+                  <a:tcPr marL="54864" marR="54864" marT="27432" marB="27432" anchor="ctr">
+                    <a:lnL w="6350" cap="flat" cmpd="sng" algn="ctr">
+                      <a:solidFill>
+                        <a:srgbClr val="BFBFBF"/>
+                      </a:solidFill>
+                      <a:prstDash val="solid"/>
+                      <a:round/>
+                      <a:headEnd type="none" w="med" len="med"/>
+                      <a:tailEnd type="none" w="med" len="med"/>
+                    </a:lnL>
+                    <a:lnR w="6350" cap="flat" cmpd="sng" algn="ctr">
+                      <a:solidFill>
+                        <a:srgbClr val="BFBFBF"/>
+                      </a:solidFill>
+                      <a:prstDash val="solid"/>
+                      <a:round/>
+                      <a:headEnd type="none" w="med" len="med"/>
+                      <a:tailEnd type="none" w="med" len="med"/>
+                    </a:lnR>
+                    <a:lnT w="6350" cap="flat" cmpd="sng" algn="ctr">
+                      <a:solidFill>
+                        <a:srgbClr val="BFBFBF"/>
+                      </a:solidFill>
+                      <a:prstDash val="solid"/>
+                      <a:round/>
+                      <a:headEnd type="none" w="med" len="med"/>
+                      <a:tailEnd type="none" w="med" len="med"/>
+                    </a:lnT>
+                    <a:lnB w="6350" cap="flat" cmpd="sng" algn="ctr">
+                      <a:solidFill>
+                        <a:srgbClr val="BFBFBF"/>
+                      </a:solidFill>
+                      <a:prstDash val="solid"/>
+                      <a:round/>
+                      <a:headEnd type="none" w="med" len="med"/>
+                      <a:tailEnd type="none" w="med" len="med"/>
+                    </a:lnB>
+                    <a:solidFill>
+                      <a:srgbClr val="1F3A6E"/>
+                    </a:solidFill>
+                  </a:tcPr>
+                </a:tc>
+                <a:tc>
+                  <a:txBody>
+                    <a:bodyPr/>
+                    <a:lstStyle/>
+                    <a:p>
+                      <a:pPr algn="ctr" indent="0" marL="0">
+                        <a:buNone/>
+                      </a:pPr>
+                      <a:r>
+                        <a:rPr lang="en-US" sz="950" b="1" dirty="0">
+                          <a:solidFill>
+                            <a:srgbClr val="FFFFFF"/>
+                          </a:solidFill>
+                          <a:latin typeface="신세계 민부리 Bold(TTF)" pitchFamily="34" charset="0"/>
+                          <a:ea typeface="신세계 민부리 Bold(TTF)" pitchFamily="34" charset="-122"/>
+                          <a:cs typeface="신세계 민부리 Bold(TTF)" pitchFamily="34" charset="-120"/>
+                        </a:rPr>
+                        <a:t>세빛섬 (現 협약)</a:t>
+                      </a:r>
+                      <a:endParaRPr lang="en-US" sz="950" dirty="0">
+                        <a:latin typeface="신세계 민부리 Bold(TTF)" charset="0"/>
+                        <a:ea typeface="신세계 민부리 Bold(TTF)" charset="0"/>
+                        <a:cs typeface="신세계 민부리 Bold(TTF)" charset="0"/>
+                      </a:endParaRPr>
+                    </a:p>
+                  </a:txBody>
+                  <a:tcPr marL="54864" marR="54864" marT="27432" marB="27432" anchor="ctr">
+                    <a:lnL w="6350" cap="flat" cmpd="sng" algn="ctr">
+                      <a:solidFill>
+                        <a:srgbClr val="BFBFBF"/>
+                      </a:solidFill>
+                      <a:prstDash val="solid"/>
+                      <a:round/>
+                      <a:headEnd type="none" w="med" len="med"/>
+                      <a:tailEnd type="none" w="med" len="med"/>
+                    </a:lnL>
+                    <a:lnR w="6350" cap="flat" cmpd="sng" algn="ctr">
+                      <a:solidFill>
+                        <a:srgbClr val="BFBFBF"/>
+                      </a:solidFill>
+                      <a:prstDash val="solid"/>
+                      <a:round/>
+                      <a:headEnd type="none" w="med" len="med"/>
+                      <a:tailEnd type="none" w="med" len="med"/>
+                    </a:lnR>
+                    <a:lnT w="6350" cap="flat" cmpd="sng" algn="ctr">
+                      <a:solidFill>
+                        <a:srgbClr val="BFBFBF"/>
+                      </a:solidFill>
+                      <a:prstDash val="solid"/>
+                      <a:round/>
+                      <a:headEnd type="none" w="med" len="med"/>
+                      <a:tailEnd type="none" w="med" len="med"/>
+                    </a:lnT>
+                    <a:lnB w="6350" cap="flat" cmpd="sng" algn="ctr">
+                      <a:solidFill>
+                        <a:srgbClr val="BFBFBF"/>
+                      </a:solidFill>
+                      <a:prstDash val="solid"/>
+                      <a:round/>
+                      <a:headEnd type="none" w="med" len="med"/>
+                      <a:tailEnd type="none" w="med" len="med"/>
+                    </a:lnB>
+                    <a:solidFill>
+                      <a:srgbClr val="E2572B"/>
+                    </a:solidFill>
+                  </a:tcPr>
+                </a:tc>
+              </a:tr>
+              <a:tr h="457200">
+                <a:tc>
+                  <a:txBody>
+                    <a:bodyPr/>
+                    <a:lstStyle/>
+                    <a:p>
+                      <a:pPr algn="ctr" indent="0" marL="0">
+                        <a:buNone/>
+                      </a:pPr>
+                      <a:r>
+                        <a:rPr lang="en-US" sz="850" b="1" dirty="0">
+                          <a:solidFill>
+                            <a:srgbClr val="262626"/>
+                          </a:solidFill>
+                          <a:latin typeface="신세계 민부리 Bold(TTF)" pitchFamily="34" charset="0"/>
+                          <a:ea typeface="신세계 민부리 Bold(TTF)" pitchFamily="34" charset="-122"/>
+                          <a:cs typeface="신세계 민부리 Bold(TTF)" pitchFamily="34" charset="-120"/>
+                        </a:rPr>
+                        <a:t>사업 내용</a:t>
+                      </a:r>
+                      <a:endParaRPr lang="en-US" sz="850" dirty="0">
+                        <a:latin typeface="신세계 민부리 Bold(TTF)" charset="0"/>
+                        <a:ea typeface="신세계 민부리 Bold(TTF)" charset="0"/>
+                        <a:cs typeface="신세계 민부리 Bold(TTF)" charset="0"/>
+                      </a:endParaRPr>
+                    </a:p>
+                  </a:txBody>
+                  <a:tcPr marL="54864" marR="54864" marT="27432" marB="27432" anchor="ctr">
+                    <a:lnL w="6350" cap="flat" cmpd="sng" algn="ctr">
+                      <a:solidFill>
+                        <a:srgbClr val="BFBFBF"/>
+                      </a:solidFill>
+                      <a:prstDash val="solid"/>
+                      <a:round/>
+                      <a:headEnd type="none" w="med" len="med"/>
+                      <a:tailEnd type="none" w="med" len="med"/>
+                    </a:lnL>
+                    <a:lnR w="6350" cap="flat" cmpd="sng" algn="ctr">
+                      <a:solidFill>
+                        <a:srgbClr val="BFBFBF"/>
+                      </a:solidFill>
+                      <a:prstDash val="solid"/>
+                      <a:round/>
+                      <a:headEnd type="none" w="med" len="med"/>
+                      <a:tailEnd type="none" w="med" len="med"/>
+                    </a:lnR>
+                    <a:lnT w="6350" cap="flat" cmpd="sng" algn="ctr">
+                      <a:solidFill>
+                        <a:srgbClr val="BFBFBF"/>
+                      </a:solidFill>
+                      <a:prstDash val="solid"/>
+                      <a:round/>
+                      <a:headEnd type="none" w="med" len="med"/>
+                      <a:tailEnd type="none" w="med" len="med"/>
+                    </a:lnT>
+                    <a:lnB w="6350" cap="flat" cmpd="sng" algn="ctr">
+                      <a:solidFill>
+                        <a:srgbClr val="BFBFBF"/>
+                      </a:solidFill>
+                      <a:prstDash val="solid"/>
+                      <a:round/>
+                      <a:headEnd type="none" w="med" len="med"/>
+                      <a:tailEnd type="none" w="med" len="med"/>
+                    </a:lnB>
+                    <a:solidFill>
+                      <a:srgbClr val="F2F2F2"/>
+                    </a:solidFill>
+                  </a:tcPr>
+                </a:tc>
+                <a:tc>
+                  <a:txBody>
+                    <a:bodyPr/>
+                    <a:lstStyle/>
+                    <a:p>
+                      <a:pPr indent="0" marL="0">
+                        <a:buNone/>
+                      </a:pPr>
+                      <a:r>
+                        <a:rPr lang="en-US" sz="850" dirty="0">
+                          <a:solidFill>
+                            <a:srgbClr val="262626"/>
+                          </a:solidFill>
+                          <a:latin typeface="신세계 민부리 Light(TTF)" pitchFamily="34" charset="0"/>
+                          <a:ea typeface="신세계 민부리 Light(TTF)" pitchFamily="34" charset="-122"/>
+                          <a:cs typeface="신세계 민부리 Light(TTF)" pitchFamily="34" charset="-120"/>
+                        </a:rPr>
+                        <a:t>전시 (8.9만㎡) · 컨벤션 (1.9만㎡) + 돔야구장 + 호텔 · 업무 · 상업 복합단지 (코엑스의 2.5배)</a:t>
+                      </a:r>
+                      <a:endParaRPr lang="en-US" sz="850" dirty="0">
+                        <a:latin typeface="신세계 민부리 Light(TTF)" charset="0"/>
+                        <a:ea typeface="신세계 민부리 Light(TTF)" charset="0"/>
+                        <a:cs typeface="신세계 민부리 Light(TTF)" charset="0"/>
+                      </a:endParaRPr>
+                    </a:p>
+                  </a:txBody>
+                  <a:tcPr marL="54864" marR="54864" marT="27432" marB="27432" anchor="ctr">
+                    <a:lnL w="6350" cap="flat" cmpd="sng" algn="ctr">
+                      <a:solidFill>
+                        <a:srgbClr val="BFBFBF"/>
+                      </a:solidFill>
+                      <a:prstDash val="solid"/>
+                      <a:round/>
+                      <a:headEnd type="none" w="med" len="med"/>
+                      <a:tailEnd type="none" w="med" len="med"/>
+                    </a:lnL>
+                    <a:lnR w="6350" cap="flat" cmpd="sng" algn="ctr">
+                      <a:solidFill>
+                        <a:srgbClr val="BFBFBF"/>
+                      </a:solidFill>
+                      <a:prstDash val="solid"/>
+                      <a:round/>
+                      <a:headEnd type="none" w="med" len="med"/>
+                      <a:tailEnd type="none" w="med" len="med"/>
+                    </a:lnR>
+                    <a:lnT w="6350" cap="flat" cmpd="sng" algn="ctr">
+                      <a:solidFill>
+                        <a:srgbClr val="BFBFBF"/>
+                      </a:solidFill>
+                      <a:prstDash val="solid"/>
+                      <a:round/>
+                      <a:headEnd type="none" w="med" len="med"/>
+                      <a:tailEnd type="none" w="med" len="med"/>
+                    </a:lnT>
+                    <a:lnB w="6350" cap="flat" cmpd="sng" algn="ctr">
+                      <a:solidFill>
+                        <a:srgbClr val="BFBFBF"/>
+                      </a:solidFill>
+                      <a:prstDash val="solid"/>
+                      <a:round/>
+                      <a:headEnd type="none" w="med" len="med"/>
+                      <a:tailEnd type="none" w="med" len="med"/>
+                    </a:lnB>
+                  </a:tcPr>
+                </a:tc>
+                <a:tc>
+                  <a:txBody>
+                    <a:bodyPr/>
+                    <a:lstStyle/>
+                    <a:p>
+                      <a:pPr indent="0" marL="0">
+                        <a:buNone/>
+                      </a:pPr>
+                      <a:r>
+                        <a:rPr lang="en-US" sz="850" dirty="0">
+                          <a:solidFill>
+                            <a:srgbClr val="262626"/>
+                          </a:solidFill>
+                          <a:latin typeface="신세계 민부리 Light(TTF)" pitchFamily="34" charset="0"/>
+                          <a:ea typeface="신세계 민부리 Light(TTF)" pitchFamily="34" charset="-122"/>
+                          <a:cs typeface="신세계 민부리 Light(TTF)" pitchFamily="34" charset="-120"/>
+                        </a:rPr>
+                        <a:t>높이 180m 고리형 대관람차 (캡슐 36개, 각 25인) — 고리형 기준 세계 최대</a:t>
+                      </a:r>
+                      <a:endParaRPr lang="en-US" sz="850" dirty="0">
+                        <a:latin typeface="신세계 민부리 Light(TTF)" charset="0"/>
+                        <a:ea typeface="신세계 민부리 Light(TTF)" charset="0"/>
+                        <a:cs typeface="신세계 민부리 Light(TTF)" charset="0"/>
+                      </a:endParaRPr>
+                    </a:p>
+                  </a:txBody>
+                  <a:tcPr marL="54864" marR="54864" marT="27432" marB="27432" anchor="ctr">
+                    <a:lnL w="6350" cap="flat" cmpd="sng" algn="ctr">
+                      <a:solidFill>
+                        <a:srgbClr val="BFBFBF"/>
+                      </a:solidFill>
+                      <a:prstDash val="solid"/>
+                      <a:round/>
+                      <a:headEnd type="none" w="med" len="med"/>
+                      <a:tailEnd type="none" w="med" len="med"/>
+                    </a:lnL>
+                    <a:lnR w="6350" cap="flat" cmpd="sng" algn="ctr">
+                      <a:solidFill>
+                        <a:srgbClr val="BFBFBF"/>
+                      </a:solidFill>
+                      <a:prstDash val="solid"/>
+                      <a:round/>
+                      <a:headEnd type="none" w="med" len="med"/>
+                      <a:tailEnd type="none" w="med" len="med"/>
+                    </a:lnR>
+                    <a:lnT w="6350" cap="flat" cmpd="sng" algn="ctr">
+                      <a:solidFill>
+                        <a:srgbClr val="BFBFBF"/>
+                      </a:solidFill>
+                      <a:prstDash val="solid"/>
+                      <a:round/>
+                      <a:headEnd type="none" w="med" len="med"/>
+                      <a:tailEnd type="none" w="med" len="med"/>
+                    </a:lnT>
+                    <a:lnB w="6350" cap="flat" cmpd="sng" algn="ctr">
+                      <a:solidFill>
+                        <a:srgbClr val="BFBFBF"/>
+                      </a:solidFill>
+                      <a:prstDash val="solid"/>
+                      <a:round/>
+                      <a:headEnd type="none" w="med" len="med"/>
+                      <a:tailEnd type="none" w="med" len="med"/>
+                    </a:lnB>
+                  </a:tcPr>
+                </a:tc>
+                <a:tc>
+                  <a:txBody>
+                    <a:bodyPr/>
+                    <a:lstStyle/>
+                    <a:p>
+                      <a:pPr indent="0" marL="0">
+                        <a:buNone/>
+                      </a:pPr>
+                      <a:r>
+                        <a:rPr lang="en-US" sz="850" dirty="0">
+                          <a:solidFill>
+                            <a:srgbClr val="262626"/>
+                          </a:solidFill>
+                          <a:latin typeface="신세계 민부리 Light(TTF)" pitchFamily="34" charset="0"/>
+                          <a:ea typeface="신세계 민부리 Light(TTF)" pitchFamily="34" charset="-122"/>
+                          <a:cs typeface="신세계 민부리 Light(TTF)" pitchFamily="34" charset="-120"/>
+                        </a:rPr>
+                        <a:t>한강 위 인공섬 3개 (가빛 · 채빛 · 솔빛) + 예빛 — 컨벤션 · 웨딩 · F&amp;B · 전시</a:t>
+                      </a:r>
+                      <a:endParaRPr lang="en-US" sz="850" dirty="0">
+                        <a:latin typeface="신세계 민부리 Light(TTF)" charset="0"/>
+                        <a:ea typeface="신세계 민부리 Light(TTF)" charset="0"/>
+                        <a:cs typeface="신세계 민부리 Light(TTF)" charset="0"/>
+                      </a:endParaRPr>
+                    </a:p>
+                  </a:txBody>
+                  <a:tcPr marL="54864" marR="54864" marT="27432" marB="27432" anchor="ctr">
+                    <a:lnL w="6350" cap="flat" cmpd="sng" algn="ctr">
+                      <a:solidFill>
+                        <a:srgbClr val="BFBFBF"/>
+                      </a:solidFill>
+                      <a:prstDash val="solid"/>
+                      <a:round/>
+                      <a:headEnd type="none" w="med" len="med"/>
+                      <a:tailEnd type="none" w="med" len="med"/>
+                    </a:lnL>
+                    <a:lnR w="6350" cap="flat" cmpd="sng" algn="ctr">
+                      <a:solidFill>
+                        <a:srgbClr val="BFBFBF"/>
+                      </a:solidFill>
+                      <a:prstDash val="solid"/>
+                      <a:round/>
+                      <a:headEnd type="none" w="med" len="med"/>
+                      <a:tailEnd type="none" w="med" len="med"/>
+                    </a:lnR>
+                    <a:lnT w="6350" cap="flat" cmpd="sng" algn="ctr">
+                      <a:solidFill>
+                        <a:srgbClr val="BFBFBF"/>
+                      </a:solidFill>
+                      <a:prstDash val="solid"/>
+                      <a:round/>
+                      <a:headEnd type="none" w="med" len="med"/>
+                      <a:tailEnd type="none" w="med" len="med"/>
+                    </a:lnT>
+                    <a:lnB w="6350" cap="flat" cmpd="sng" algn="ctr">
+                      <a:solidFill>
+                        <a:srgbClr val="BFBFBF"/>
+                      </a:solidFill>
+                      <a:prstDash val="solid"/>
+                      <a:round/>
+                      <a:headEnd type="none" w="med" len="med"/>
+                      <a:tailEnd type="none" w="med" len="med"/>
+                    </a:lnB>
+                  </a:tcPr>
+                </a:tc>
+              </a:tr>
+              <a:tr h="384048">
+                <a:tc>
+                  <a:txBody>
+                    <a:bodyPr/>
+                    <a:lstStyle/>
+                    <a:p>
+                      <a:pPr algn="ctr" indent="0" marL="0">
+                        <a:buNone/>
+                      </a:pPr>
+                      <a:r>
+                        <a:rPr lang="en-US" sz="850" b="1" dirty="0">
+                          <a:solidFill>
+                            <a:srgbClr val="262626"/>
+                          </a:solidFill>
+                          <a:latin typeface="신세계 민부리 Bold(TTF)" pitchFamily="34" charset="0"/>
+                          <a:ea typeface="신세계 민부리 Bold(TTF)" pitchFamily="34" charset="-122"/>
+                          <a:cs typeface="신세계 민부리 Bold(TTF)" pitchFamily="34" charset="-120"/>
+                        </a:rPr>
+                        <a:t>위치 · 규모</a:t>
+                      </a:r>
+                      <a:endParaRPr lang="en-US" sz="850" dirty="0">
+                        <a:latin typeface="신세계 민부리 Bold(TTF)" charset="0"/>
+                        <a:ea typeface="신세계 민부리 Bold(TTF)" charset="0"/>
+                        <a:cs typeface="신세계 민부리 Bold(TTF)" charset="0"/>
+                      </a:endParaRPr>
+                    </a:p>
+                  </a:txBody>
+                  <a:tcPr marL="54864" marR="54864" marT="27432" marB="27432" anchor="ctr">
+                    <a:lnL w="6350" cap="flat" cmpd="sng" algn="ctr">
+                      <a:solidFill>
+                        <a:srgbClr val="BFBFBF"/>
+                      </a:solidFill>
+                      <a:prstDash val="solid"/>
+                      <a:round/>
+                      <a:headEnd type="none" w="med" len="med"/>
+                      <a:tailEnd type="none" w="med" len="med"/>
+                    </a:lnL>
+                    <a:lnR w="6350" cap="flat" cmpd="sng" algn="ctr">
+                      <a:solidFill>
+                        <a:srgbClr val="BFBFBF"/>
+                      </a:solidFill>
+                      <a:prstDash val="solid"/>
+                      <a:round/>
+                      <a:headEnd type="none" w="med" len="med"/>
+                      <a:tailEnd type="none" w="med" len="med"/>
+                    </a:lnR>
+                    <a:lnT w="6350" cap="flat" cmpd="sng" algn="ctr">
+                      <a:solidFill>
+                        <a:srgbClr val="BFBFBF"/>
+                      </a:solidFill>
+                      <a:prstDash val="solid"/>
+                      <a:round/>
+                      <a:headEnd type="none" w="med" len="med"/>
+                      <a:tailEnd type="none" w="med" len="med"/>
+                    </a:lnT>
+                    <a:lnB w="6350" cap="flat" cmpd="sng" algn="ctr">
+                      <a:solidFill>
+                        <a:srgbClr val="BFBFBF"/>
+                      </a:solidFill>
+                      <a:prstDash val="solid"/>
+                      <a:round/>
+                      <a:headEnd type="none" w="med" len="med"/>
+                      <a:tailEnd type="none" w="med" len="med"/>
+                    </a:lnB>
+                    <a:solidFill>
+                      <a:srgbClr val="F2F2F2"/>
+                    </a:solidFill>
+                  </a:tcPr>
+                </a:tc>
+                <a:tc>
+                  <a:txBody>
+                    <a:bodyPr/>
+                    <a:lstStyle/>
+                    <a:p>
+                      <a:pPr indent="0" marL="0">
+                        <a:buNone/>
+                      </a:pPr>
+                      <a:r>
+                        <a:rPr lang="en-US" sz="850" dirty="0">
+                          <a:solidFill>
+                            <a:srgbClr val="262626"/>
+                          </a:solidFill>
+                          <a:latin typeface="신세계 민부리 Light(TTF)" pitchFamily="34" charset="0"/>
+                          <a:ea typeface="신세계 민부리 Light(TTF)" pitchFamily="34" charset="-122"/>
+                          <a:cs typeface="신세계 민부리 Light(TTF)" pitchFamily="34" charset="-120"/>
+                        </a:rPr>
+                        <a:t>송파구 잠실종합운동장 일대 약 35만㎡ / 총사업비 2.7조</a:t>
+                      </a:r>
+                      <a:endParaRPr lang="en-US" sz="850" dirty="0">
+                        <a:latin typeface="신세계 민부리 Light(TTF)" charset="0"/>
+                        <a:ea typeface="신세계 민부리 Light(TTF)" charset="0"/>
+                        <a:cs typeface="신세계 민부리 Light(TTF)" charset="0"/>
+                      </a:endParaRPr>
+                    </a:p>
+                  </a:txBody>
+                  <a:tcPr marL="54864" marR="54864" marT="27432" marB="27432" anchor="ctr">
+                    <a:lnL w="6350" cap="flat" cmpd="sng" algn="ctr">
+                      <a:solidFill>
+                        <a:srgbClr val="BFBFBF"/>
+                      </a:solidFill>
+                      <a:prstDash val="solid"/>
+                      <a:round/>
+                      <a:headEnd type="none" w="med" len="med"/>
+                      <a:tailEnd type="none" w="med" len="med"/>
+                    </a:lnL>
+                    <a:lnR w="6350" cap="flat" cmpd="sng" algn="ctr">
+                      <a:solidFill>
+                        <a:srgbClr val="BFBFBF"/>
+                      </a:solidFill>
+                      <a:prstDash val="solid"/>
+                      <a:round/>
+                      <a:headEnd type="none" w="med" len="med"/>
+                      <a:tailEnd type="none" w="med" len="med"/>
+                    </a:lnR>
+                    <a:lnT w="6350" cap="flat" cmpd="sng" algn="ctr">
+                      <a:solidFill>
+                        <a:srgbClr val="BFBFBF"/>
+                      </a:solidFill>
+                      <a:prstDash val="solid"/>
+                      <a:round/>
+                      <a:headEnd type="none" w="med" len="med"/>
+                      <a:tailEnd type="none" w="med" len="med"/>
+                    </a:lnT>
+                    <a:lnB w="6350" cap="flat" cmpd="sng" algn="ctr">
+                      <a:solidFill>
+                        <a:srgbClr val="BFBFBF"/>
+                      </a:solidFill>
+                      <a:prstDash val="solid"/>
+                      <a:round/>
+                      <a:headEnd type="none" w="med" len="med"/>
+                      <a:tailEnd type="none" w="med" len="med"/>
+                    </a:lnB>
+                  </a:tcPr>
+                </a:tc>
+                <a:tc>
+                  <a:txBody>
+                    <a:bodyPr/>
+                    <a:lstStyle/>
+                    <a:p>
+                      <a:pPr indent="0" marL="0">
+                        <a:buNone/>
+                      </a:pPr>
+                      <a:r>
+                        <a:rPr lang="en-US" sz="850" dirty="0">
+                          <a:solidFill>
+                            <a:srgbClr val="262626"/>
+                          </a:solidFill>
+                          <a:latin typeface="신세계 민부리 Light(TTF)" pitchFamily="34" charset="0"/>
+                          <a:ea typeface="신세계 민부리 Light(TTF)" pitchFamily="34" charset="-122"/>
+                          <a:cs typeface="신세계 민부리 Light(TTF)" pitchFamily="34" charset="-120"/>
+                        </a:rPr>
+                        <a:t>마포구 상암동 (하늘공원 → 평화의공원 변경) / 사업비 4,000억 → 1.08조</a:t>
+                      </a:r>
+                      <a:endParaRPr lang="en-US" sz="850" dirty="0">
+                        <a:latin typeface="신세계 민부리 Light(TTF)" charset="0"/>
+                        <a:ea typeface="신세계 민부리 Light(TTF)" charset="0"/>
+                        <a:cs typeface="신세계 민부리 Light(TTF)" charset="0"/>
+                      </a:endParaRPr>
+                    </a:p>
+                  </a:txBody>
+                  <a:tcPr marL="54864" marR="54864" marT="27432" marB="27432" anchor="ctr">
+                    <a:lnL w="6350" cap="flat" cmpd="sng" algn="ctr">
+                      <a:solidFill>
+                        <a:srgbClr val="BFBFBF"/>
+                      </a:solidFill>
+                      <a:prstDash val="solid"/>
+                      <a:round/>
+                      <a:headEnd type="none" w="med" len="med"/>
+                      <a:tailEnd type="none" w="med" len="med"/>
+                    </a:lnL>
+                    <a:lnR w="6350" cap="flat" cmpd="sng" algn="ctr">
+                      <a:solidFill>
+                        <a:srgbClr val="BFBFBF"/>
+                      </a:solidFill>
+                      <a:prstDash val="solid"/>
+                      <a:round/>
+                      <a:headEnd type="none" w="med" len="med"/>
+                      <a:tailEnd type="none" w="med" len="med"/>
+                    </a:lnR>
+                    <a:lnT w="6350" cap="flat" cmpd="sng" algn="ctr">
+                      <a:solidFill>
+                        <a:srgbClr val="BFBFBF"/>
+                      </a:solidFill>
+                      <a:prstDash val="solid"/>
+                      <a:round/>
+                      <a:headEnd type="none" w="med" len="med"/>
+                      <a:tailEnd type="none" w="med" len="med"/>
+                    </a:lnT>
+                    <a:lnB w="6350" cap="flat" cmpd="sng" algn="ctr">
+                      <a:solidFill>
+                        <a:srgbClr val="BFBFBF"/>
+                      </a:solidFill>
+                      <a:prstDash val="solid"/>
+                      <a:round/>
+                      <a:headEnd type="none" w="med" len="med"/>
+                      <a:tailEnd type="none" w="med" len="med"/>
+                    </a:lnB>
+                  </a:tcPr>
+                </a:tc>
+                <a:tc>
+                  <a:txBody>
+                    <a:bodyPr/>
+                    <a:lstStyle/>
+                    <a:p>
+                      <a:pPr indent="0" marL="0">
+                        <a:buNone/>
+                      </a:pPr>
+                      <a:r>
+                        <a:rPr lang="en-US" sz="850" dirty="0">
+                          <a:solidFill>
+                            <a:srgbClr val="262626"/>
+                          </a:solidFill>
+                          <a:latin typeface="신세계 민부리 Light(TTF)" pitchFamily="34" charset="0"/>
+                          <a:ea typeface="신세계 민부리 Light(TTF)" pitchFamily="34" charset="-122"/>
+                          <a:cs typeface="신세계 민부리 Light(TTF)" pitchFamily="34" charset="-120"/>
+                        </a:rPr>
+                        <a:t>서초구 반포한강공원 / 총투자비 1,390억</a:t>
+                      </a:r>
+                      <a:endParaRPr lang="en-US" sz="850" dirty="0">
+                        <a:latin typeface="신세계 민부리 Light(TTF)" charset="0"/>
+                        <a:ea typeface="신세계 민부리 Light(TTF)" charset="0"/>
+                        <a:cs typeface="신세계 민부리 Light(TTF)" charset="0"/>
+                      </a:endParaRPr>
+                    </a:p>
+                  </a:txBody>
+                  <a:tcPr marL="54864" marR="54864" marT="27432" marB="27432" anchor="ctr">
+                    <a:lnL w="6350" cap="flat" cmpd="sng" algn="ctr">
+                      <a:solidFill>
+                        <a:srgbClr val="BFBFBF"/>
+                      </a:solidFill>
+                      <a:prstDash val="solid"/>
+                      <a:round/>
+                      <a:headEnd type="none" w="med" len="med"/>
+                      <a:tailEnd type="none" w="med" len="med"/>
+                    </a:lnL>
+                    <a:lnR w="6350" cap="flat" cmpd="sng" algn="ctr">
+                      <a:solidFill>
+                        <a:srgbClr val="BFBFBF"/>
+                      </a:solidFill>
+                      <a:prstDash val="solid"/>
+                      <a:round/>
+                      <a:headEnd type="none" w="med" len="med"/>
+                      <a:tailEnd type="none" w="med" len="med"/>
+                    </a:lnR>
+                    <a:lnT w="6350" cap="flat" cmpd="sng" algn="ctr">
+                      <a:solidFill>
+                        <a:srgbClr val="BFBFBF"/>
+                      </a:solidFill>
+                      <a:prstDash val="solid"/>
+                      <a:round/>
+                      <a:headEnd type="none" w="med" len="med"/>
+                      <a:tailEnd type="none" w="med" len="med"/>
+                    </a:lnT>
+                    <a:lnB w="6350" cap="flat" cmpd="sng" algn="ctr">
+                      <a:solidFill>
+                        <a:srgbClr val="BFBFBF"/>
+                      </a:solidFill>
+                      <a:prstDash val="solid"/>
+                      <a:round/>
+                      <a:headEnd type="none" w="med" len="med"/>
+                      <a:tailEnd type="none" w="med" len="med"/>
+                    </a:lnB>
+                  </a:tcPr>
+                </a:tc>
+              </a:tr>
+              <a:tr h="365760">
+                <a:tc>
+                  <a:txBody>
+                    <a:bodyPr/>
+                    <a:lstStyle/>
+                    <a:p>
+                      <a:pPr algn="ctr" indent="0" marL="0">
+                        <a:buNone/>
+                      </a:pPr>
+                      <a:r>
+                        <a:rPr lang="en-US" sz="850" b="1" dirty="0">
+                          <a:solidFill>
+                            <a:srgbClr val="262626"/>
+                          </a:solidFill>
+                          <a:latin typeface="신세계 민부리 Bold(TTF)" pitchFamily="34" charset="0"/>
+                          <a:ea typeface="신세계 민부리 Bold(TTF)" pitchFamily="34" charset="-122"/>
+                          <a:cs typeface="신세계 민부리 Bold(TTF)" pitchFamily="34" charset="-120"/>
+                        </a:rPr>
+                        <a:t>방식 · 기간</a:t>
+                      </a:r>
+                      <a:endParaRPr lang="en-US" sz="850" dirty="0">
+                        <a:latin typeface="신세계 민부리 Bold(TTF)" charset="0"/>
+                        <a:ea typeface="신세계 민부리 Bold(TTF)" charset="0"/>
+                        <a:cs typeface="신세계 민부리 Bold(TTF)" charset="0"/>
+                      </a:endParaRPr>
+                    </a:p>
+                  </a:txBody>
+                  <a:tcPr marL="54864" marR="54864" marT="27432" marB="27432" anchor="ctr">
+                    <a:lnL w="6350" cap="flat" cmpd="sng" algn="ctr">
+                      <a:solidFill>
+                        <a:srgbClr val="BFBFBF"/>
+                      </a:solidFill>
+                      <a:prstDash val="solid"/>
+                      <a:round/>
+                      <a:headEnd type="none" w="med" len="med"/>
+                      <a:tailEnd type="none" w="med" len="med"/>
+                    </a:lnL>
+                    <a:lnR w="6350" cap="flat" cmpd="sng" algn="ctr">
+                      <a:solidFill>
+                        <a:srgbClr val="BFBFBF"/>
+                      </a:solidFill>
+                      <a:prstDash val="solid"/>
+                      <a:round/>
+                      <a:headEnd type="none" w="med" len="med"/>
+                      <a:tailEnd type="none" w="med" len="med"/>
+                    </a:lnR>
+                    <a:lnT w="6350" cap="flat" cmpd="sng" algn="ctr">
+                      <a:solidFill>
+                        <a:srgbClr val="BFBFBF"/>
+                      </a:solidFill>
+                      <a:prstDash val="solid"/>
+                      <a:round/>
+                      <a:headEnd type="none" w="med" len="med"/>
+                      <a:tailEnd type="none" w="med" len="med"/>
+                    </a:lnT>
+                    <a:lnB w="6350" cap="flat" cmpd="sng" algn="ctr">
+                      <a:solidFill>
+                        <a:srgbClr val="BFBFBF"/>
+                      </a:solidFill>
+                      <a:prstDash val="solid"/>
+                      <a:round/>
+                      <a:headEnd type="none" w="med" len="med"/>
+                      <a:tailEnd type="none" w="med" len="med"/>
+                    </a:lnB>
+                    <a:solidFill>
+                      <a:srgbClr val="F2F2F2"/>
+                    </a:solidFill>
+                  </a:tcPr>
+                </a:tc>
+                <a:tc>
+                  <a:txBody>
+                    <a:bodyPr/>
+                    <a:lstStyle/>
+                    <a:p>
+                      <a:pPr indent="0" marL="0">
+                        <a:buNone/>
+                      </a:pPr>
+                      <a:r>
+                        <a:rPr lang="en-US" sz="850" b="1" dirty="0">
+                          <a:solidFill>
+                            <a:srgbClr val="262626"/>
+                          </a:solidFill>
+                          <a:latin typeface="신세계 민부리 Bold(TTF)" pitchFamily="34" charset="0"/>
+                          <a:ea typeface="신세계 민부리 Bold(TTF)" pitchFamily="34" charset="-122"/>
+                          <a:cs typeface="신세계 민부리 Bold(TTF)" pitchFamily="34" charset="-120"/>
+                        </a:rPr>
+                        <a:t>BTO (민간제안)</a:t>
+                      </a:r>
+                      <a:endParaRPr lang="en-US" sz="850" dirty="0"/>
+                    </a:p>
+                    <a:p>
+                      <a:pPr indent="0" marL="0">
+                        <a:buNone/>
+                      </a:pPr>
+                      <a:r>
+                        <a:rPr lang="en-US" sz="850" dirty="0">
+                          <a:solidFill>
+                            <a:srgbClr val="262626"/>
+                          </a:solidFill>
+                          <a:latin typeface="신세계 민부리 Light(TTF)" pitchFamily="34" charset="0"/>
+                          <a:ea typeface="신세계 민부리 Light(TTF)" pitchFamily="34" charset="-122"/>
+                          <a:cs typeface="신세계 민부리 Light(TTF)" pitchFamily="34" charset="-120"/>
+                        </a:rPr>
+                        <a:t>운영 40년</a:t>
+                      </a:r>
+                      <a:endParaRPr lang="en-US" sz="850" dirty="0"/>
+                    </a:p>
+                  </a:txBody>
+                  <a:tcPr marL="54864" marR="54864" marT="27432" marB="27432" anchor="ctr">
+                    <a:lnL w="6350" cap="flat" cmpd="sng" algn="ctr">
+                      <a:solidFill>
+                        <a:srgbClr val="BFBFBF"/>
+                      </a:solidFill>
+                      <a:prstDash val="solid"/>
+                      <a:round/>
+                      <a:headEnd type="none" w="med" len="med"/>
+                      <a:tailEnd type="none" w="med" len="med"/>
+                    </a:lnL>
+                    <a:lnR w="6350" cap="flat" cmpd="sng" algn="ctr">
+                      <a:solidFill>
+                        <a:srgbClr val="BFBFBF"/>
+                      </a:solidFill>
+                      <a:prstDash val="solid"/>
+                      <a:round/>
+                      <a:headEnd type="none" w="med" len="med"/>
+                      <a:tailEnd type="none" w="med" len="med"/>
+                    </a:lnR>
+                    <a:lnT w="6350" cap="flat" cmpd="sng" algn="ctr">
+                      <a:solidFill>
+                        <a:srgbClr val="BFBFBF"/>
+                      </a:solidFill>
+                      <a:prstDash val="solid"/>
+                      <a:round/>
+                      <a:headEnd type="none" w="med" len="med"/>
+                      <a:tailEnd type="none" w="med" len="med"/>
+                    </a:lnT>
+                    <a:lnB w="6350" cap="flat" cmpd="sng" algn="ctr">
+                      <a:solidFill>
+                        <a:srgbClr val="BFBFBF"/>
+                      </a:solidFill>
+                      <a:prstDash val="solid"/>
+                      <a:round/>
+                      <a:headEnd type="none" w="med" len="med"/>
+                      <a:tailEnd type="none" w="med" len="med"/>
+                    </a:lnB>
+                  </a:tcPr>
+                </a:tc>
+                <a:tc>
+                  <a:txBody>
+                    <a:bodyPr/>
+                    <a:lstStyle/>
+                    <a:p>
+                      <a:pPr indent="0" marL="0">
+                        <a:buNone/>
+                      </a:pPr>
+                      <a:r>
+                        <a:rPr lang="en-US" sz="850" b="1" dirty="0">
+                          <a:solidFill>
+                            <a:srgbClr val="262626"/>
+                          </a:solidFill>
+                          <a:latin typeface="신세계 민부리 Bold(TTF)" pitchFamily="34" charset="0"/>
+                          <a:ea typeface="신세계 민부리 Bold(TTF)" pitchFamily="34" charset="-122"/>
+                          <a:cs typeface="신세계 민부리 Bold(TTF)" pitchFamily="34" charset="-120"/>
+                        </a:rPr>
+                        <a:t>BTO (민간제안)</a:t>
+                      </a:r>
+                      <a:endParaRPr lang="en-US" sz="850" dirty="0"/>
+                    </a:p>
+                    <a:p>
+                      <a:pPr indent="0" marL="0">
+                        <a:buNone/>
+                      </a:pPr>
+                      <a:r>
+                        <a:rPr lang="en-US" sz="850" dirty="0">
+                          <a:solidFill>
+                            <a:srgbClr val="262626"/>
+                          </a:solidFill>
+                          <a:latin typeface="신세계 민부리 Light(TTF)" pitchFamily="34" charset="0"/>
+                          <a:ea typeface="신세계 민부리 Light(TTF)" pitchFamily="34" charset="-122"/>
+                          <a:cs typeface="신세계 민부리 Light(TTF)" pitchFamily="34" charset="-120"/>
+                        </a:rPr>
+                        <a:t>운영기간 협상 전</a:t>
+                      </a:r>
+                      <a:endParaRPr lang="en-US" sz="850" dirty="0"/>
+                    </a:p>
+                  </a:txBody>
+                  <a:tcPr marL="54864" marR="54864" marT="27432" marB="27432" anchor="ctr">
+                    <a:lnL w="6350" cap="flat" cmpd="sng" algn="ctr">
+                      <a:solidFill>
+                        <a:srgbClr val="BFBFBF"/>
+                      </a:solidFill>
+                      <a:prstDash val="solid"/>
+                      <a:round/>
+                      <a:headEnd type="none" w="med" len="med"/>
+                      <a:tailEnd type="none" w="med" len="med"/>
+                    </a:lnL>
+                    <a:lnR w="6350" cap="flat" cmpd="sng" algn="ctr">
+                      <a:solidFill>
+                        <a:srgbClr val="BFBFBF"/>
+                      </a:solidFill>
+                      <a:prstDash val="solid"/>
+                      <a:round/>
+                      <a:headEnd type="none" w="med" len="med"/>
+                      <a:tailEnd type="none" w="med" len="med"/>
+                    </a:lnR>
+                    <a:lnT w="6350" cap="flat" cmpd="sng" algn="ctr">
+                      <a:solidFill>
+                        <a:srgbClr val="BFBFBF"/>
+                      </a:solidFill>
+                      <a:prstDash val="solid"/>
+                      <a:round/>
+                      <a:headEnd type="none" w="med" len="med"/>
+                      <a:tailEnd type="none" w="med" len="med"/>
+                    </a:lnT>
+                    <a:lnB w="6350" cap="flat" cmpd="sng" algn="ctr">
+                      <a:solidFill>
+                        <a:srgbClr val="BFBFBF"/>
+                      </a:solidFill>
+                      <a:prstDash val="solid"/>
+                      <a:round/>
+                      <a:headEnd type="none" w="med" len="med"/>
+                      <a:tailEnd type="none" w="med" len="med"/>
+                    </a:lnB>
+                  </a:tcPr>
+                </a:tc>
+                <a:tc>
+                  <a:txBody>
+                    <a:bodyPr/>
+                    <a:lstStyle/>
+                    <a:p>
+                      <a:pPr indent="0" marL="0">
+                        <a:buNone/>
+                      </a:pPr>
+                      <a:r>
+                        <a:rPr lang="en-US" sz="850" b="1" dirty="0">
+                          <a:solidFill>
+                            <a:srgbClr val="262626"/>
+                          </a:solidFill>
+                          <a:latin typeface="신세계 민부리 Bold(TTF)" pitchFamily="34" charset="0"/>
+                          <a:ea typeface="신세계 민부리 Bold(TTF)" pitchFamily="34" charset="-122"/>
+                          <a:cs typeface="신세계 민부리 Bold(TTF)" pitchFamily="34" charset="-120"/>
+                        </a:rPr>
+                        <a:t>BOT (市 공모)</a:t>
+                      </a:r>
+                      <a:endParaRPr lang="en-US" sz="850" dirty="0"/>
+                    </a:p>
+                    <a:p>
+                      <a:pPr indent="0" marL="0">
+                        <a:buNone/>
+                      </a:pPr>
+                      <a:r>
+                        <a:rPr lang="en-US" sz="850" dirty="0">
+                          <a:solidFill>
+                            <a:srgbClr val="262626"/>
+                          </a:solidFill>
+                          <a:latin typeface="신세계 민부리 Light(TTF)" pitchFamily="34" charset="0"/>
+                          <a:ea typeface="신세계 민부리 Light(TTF)" pitchFamily="34" charset="-122"/>
+                          <a:cs typeface="신세계 민부리 Light(TTF)" pitchFamily="34" charset="-120"/>
+                        </a:rPr>
+                        <a:t>무상 20년 + 유상 10년</a:t>
+                      </a:r>
+                      <a:endParaRPr lang="en-US" sz="850" dirty="0"/>
+                    </a:p>
+                  </a:txBody>
+                  <a:tcPr marL="54864" marR="54864" marT="27432" marB="27432" anchor="ctr">
+                    <a:lnL w="6350" cap="flat" cmpd="sng" algn="ctr">
+                      <a:solidFill>
+                        <a:srgbClr val="BFBFBF"/>
+                      </a:solidFill>
+                      <a:prstDash val="solid"/>
+                      <a:round/>
+                      <a:headEnd type="none" w="med" len="med"/>
+                      <a:tailEnd type="none" w="med" len="med"/>
+                    </a:lnL>
+                    <a:lnR w="6350" cap="flat" cmpd="sng" algn="ctr">
+                      <a:solidFill>
+                        <a:srgbClr val="BFBFBF"/>
+                      </a:solidFill>
+                      <a:prstDash val="solid"/>
+                      <a:round/>
+                      <a:headEnd type="none" w="med" len="med"/>
+                      <a:tailEnd type="none" w="med" len="med"/>
+                    </a:lnR>
+                    <a:lnT w="6350" cap="flat" cmpd="sng" algn="ctr">
+                      <a:solidFill>
+                        <a:srgbClr val="BFBFBF"/>
+                      </a:solidFill>
+                      <a:prstDash val="solid"/>
+                      <a:round/>
+                      <a:headEnd type="none" w="med" len="med"/>
+                      <a:tailEnd type="none" w="med" len="med"/>
+                    </a:lnT>
+                    <a:lnB w="6350" cap="flat" cmpd="sng" algn="ctr">
+                      <a:solidFill>
+                        <a:srgbClr val="BFBFBF"/>
+                      </a:solidFill>
+                      <a:prstDash val="solid"/>
+                      <a:round/>
+                      <a:headEnd type="none" w="med" len="med"/>
+                      <a:tailEnd type="none" w="med" len="med"/>
+                    </a:lnB>
+                  </a:tcPr>
+                </a:tc>
+              </a:tr>
+              <a:tr h="329184">
+                <a:tc>
+                  <a:txBody>
+                    <a:bodyPr/>
+                    <a:lstStyle/>
+                    <a:p>
+                      <a:pPr algn="ctr" indent="0" marL="0">
+                        <a:buNone/>
+                      </a:pPr>
+                      <a:r>
+                        <a:rPr lang="en-US" sz="850" b="1" dirty="0">
+                          <a:solidFill>
+                            <a:srgbClr val="262626"/>
+                          </a:solidFill>
+                          <a:latin typeface="신세계 민부리 Bold(TTF)" pitchFamily="34" charset="0"/>
+                          <a:ea typeface="신세계 민부리 Bold(TTF)" pitchFamily="34" charset="-122"/>
+                          <a:cs typeface="신세계 민부리 Bold(TTF)" pitchFamily="34" charset="-120"/>
+                        </a:rPr>
+                        <a:t>사업자</a:t>
+                      </a:r>
+                      <a:endParaRPr lang="en-US" sz="850" dirty="0">
+                        <a:latin typeface="신세계 민부리 Bold(TTF)" charset="0"/>
+                        <a:ea typeface="신세계 민부리 Bold(TTF)" charset="0"/>
+                        <a:cs typeface="신세계 민부리 Bold(TTF)" charset="0"/>
+                      </a:endParaRPr>
+                    </a:p>
+                  </a:txBody>
+                  <a:tcPr marL="54864" marR="54864" marT="27432" marB="27432" anchor="ctr">
+                    <a:lnL w="6350" cap="flat" cmpd="sng" algn="ctr">
+                      <a:solidFill>
+                        <a:srgbClr val="BFBFBF"/>
+                      </a:solidFill>
+                      <a:prstDash val="solid"/>
+                      <a:round/>
+                      <a:headEnd type="none" w="med" len="med"/>
+                      <a:tailEnd type="none" w="med" len="med"/>
+                    </a:lnL>
+                    <a:lnR w="6350" cap="flat" cmpd="sng" algn="ctr">
+                      <a:solidFill>
+                        <a:srgbClr val="BFBFBF"/>
+                      </a:solidFill>
+                      <a:prstDash val="solid"/>
+                      <a:round/>
+                      <a:headEnd type="none" w="med" len="med"/>
+                      <a:tailEnd type="none" w="med" len="med"/>
+                    </a:lnR>
+                    <a:lnT w="6350" cap="flat" cmpd="sng" algn="ctr">
+                      <a:solidFill>
+                        <a:srgbClr val="BFBFBF"/>
+                      </a:solidFill>
+                      <a:prstDash val="solid"/>
+                      <a:round/>
+                      <a:headEnd type="none" w="med" len="med"/>
+                      <a:tailEnd type="none" w="med" len="med"/>
+                    </a:lnT>
+                    <a:lnB w="6350" cap="flat" cmpd="sng" algn="ctr">
+                      <a:solidFill>
+                        <a:srgbClr val="BFBFBF"/>
+                      </a:solidFill>
+                      <a:prstDash val="solid"/>
+                      <a:round/>
+                      <a:headEnd type="none" w="med" len="med"/>
+                      <a:tailEnd type="none" w="med" len="med"/>
+                    </a:lnB>
+                    <a:solidFill>
+                      <a:srgbClr val="F2F2F2"/>
+                    </a:solidFill>
+                  </a:tcPr>
+                </a:tc>
+                <a:tc>
+                  <a:txBody>
+                    <a:bodyPr/>
+                    <a:lstStyle/>
+                    <a:p>
+                      <a:pPr indent="0" marL="0">
+                        <a:buNone/>
+                      </a:pPr>
+                      <a:r>
+                        <a:rPr lang="en-US" sz="850" dirty="0">
+                          <a:solidFill>
+                            <a:srgbClr val="262626"/>
+                          </a:solidFill>
+                          <a:latin typeface="신세계 민부리 Light(TTF)" pitchFamily="34" charset="0"/>
+                          <a:ea typeface="신세계 민부리 Light(TTF)" pitchFamily="34" charset="-122"/>
+                          <a:cs typeface="신세계 민부리 Light(TTF)" pitchFamily="34" charset="-120"/>
+                        </a:rPr>
+                        <a:t>㈜서울 스마트 마이스파크 (한화 건설부문 주관)</a:t>
+                      </a:r>
+                      <a:endParaRPr lang="en-US" sz="850" dirty="0">
+                        <a:latin typeface="신세계 민부리 Light(TTF)" charset="0"/>
+                        <a:ea typeface="신세계 민부리 Light(TTF)" charset="0"/>
+                        <a:cs typeface="신세계 민부리 Light(TTF)" charset="0"/>
+                      </a:endParaRPr>
+                    </a:p>
+                  </a:txBody>
+                  <a:tcPr marL="54864" marR="54864" marT="27432" marB="27432" anchor="ctr">
+                    <a:lnL w="6350" cap="flat" cmpd="sng" algn="ctr">
+                      <a:solidFill>
+                        <a:srgbClr val="BFBFBF"/>
+                      </a:solidFill>
+                      <a:prstDash val="solid"/>
+                      <a:round/>
+                      <a:headEnd type="none" w="med" len="med"/>
+                      <a:tailEnd type="none" w="med" len="med"/>
+                    </a:lnL>
+                    <a:lnR w="6350" cap="flat" cmpd="sng" algn="ctr">
+                      <a:solidFill>
+                        <a:srgbClr val="BFBFBF"/>
+                      </a:solidFill>
+                      <a:prstDash val="solid"/>
+                      <a:round/>
+                      <a:headEnd type="none" w="med" len="med"/>
+                      <a:tailEnd type="none" w="med" len="med"/>
+                    </a:lnR>
+                    <a:lnT w="6350" cap="flat" cmpd="sng" algn="ctr">
+                      <a:solidFill>
+                        <a:srgbClr val="BFBFBF"/>
+                      </a:solidFill>
+                      <a:prstDash val="solid"/>
+                      <a:round/>
+                      <a:headEnd type="none" w="med" len="med"/>
+                      <a:tailEnd type="none" w="med" len="med"/>
+                    </a:lnT>
+                    <a:lnB w="6350" cap="flat" cmpd="sng" algn="ctr">
+                      <a:solidFill>
+                        <a:srgbClr val="BFBFBF"/>
+                      </a:solidFill>
+                      <a:prstDash val="solid"/>
+                      <a:round/>
+                      <a:headEnd type="none" w="med" len="med"/>
+                      <a:tailEnd type="none" w="med" len="med"/>
+                    </a:lnB>
+                  </a:tcPr>
+                </a:tc>
+                <a:tc>
+                  <a:txBody>
+                    <a:bodyPr/>
+                    <a:lstStyle/>
+                    <a:p>
+                      <a:pPr indent="0" marL="0">
+                        <a:buNone/>
+                      </a:pPr>
+                      <a:r>
+                        <a:rPr lang="en-US" sz="850" dirty="0">
+                          <a:solidFill>
+                            <a:srgbClr val="262626"/>
+                          </a:solidFill>
+                          <a:latin typeface="신세계 민부리 Light(TTF)" pitchFamily="34" charset="0"/>
+                          <a:ea typeface="신세계 민부리 Light(TTF)" pitchFamily="34" charset="-122"/>
+                          <a:cs typeface="신세계 민부리 Light(TTF)" pitchFamily="34" charset="-120"/>
+                        </a:rPr>
+                        <a:t>민간 제안 컨소시엄 (제3자 공고 후 확정)</a:t>
+                      </a:r>
+                      <a:endParaRPr lang="en-US" sz="850" dirty="0">
+                        <a:latin typeface="신세계 민부리 Light(TTF)" charset="0"/>
+                        <a:ea typeface="신세계 민부리 Light(TTF)" charset="0"/>
+                        <a:cs typeface="신세계 민부리 Light(TTF)" charset="0"/>
+                      </a:endParaRPr>
+                    </a:p>
+                  </a:txBody>
+                  <a:tcPr marL="54864" marR="54864" marT="27432" marB="27432" anchor="ctr">
+                    <a:lnL w="6350" cap="flat" cmpd="sng" algn="ctr">
+                      <a:solidFill>
+                        <a:srgbClr val="BFBFBF"/>
+                      </a:solidFill>
+                      <a:prstDash val="solid"/>
+                      <a:round/>
+                      <a:headEnd type="none" w="med" len="med"/>
+                      <a:tailEnd type="none" w="med" len="med"/>
+                    </a:lnL>
+                    <a:lnR w="6350" cap="flat" cmpd="sng" algn="ctr">
+                      <a:solidFill>
+                        <a:srgbClr val="BFBFBF"/>
+                      </a:solidFill>
+                      <a:prstDash val="solid"/>
+                      <a:round/>
+                      <a:headEnd type="none" w="med" len="med"/>
+                      <a:tailEnd type="none" w="med" len="med"/>
+                    </a:lnR>
+                    <a:lnT w="6350" cap="flat" cmpd="sng" algn="ctr">
+                      <a:solidFill>
+                        <a:srgbClr val="BFBFBF"/>
+                      </a:solidFill>
+                      <a:prstDash val="solid"/>
+                      <a:round/>
+                      <a:headEnd type="none" w="med" len="med"/>
+                      <a:tailEnd type="none" w="med" len="med"/>
+                    </a:lnT>
+                    <a:lnB w="6350" cap="flat" cmpd="sng" algn="ctr">
+                      <a:solidFill>
+                        <a:srgbClr val="BFBFBF"/>
+                      </a:solidFill>
+                      <a:prstDash val="solid"/>
+                      <a:round/>
+                      <a:headEnd type="none" w="med" len="med"/>
+                      <a:tailEnd type="none" w="med" len="med"/>
+                    </a:lnB>
+                  </a:tcPr>
+                </a:tc>
+                <a:tc>
+                  <a:txBody>
+                    <a:bodyPr/>
+                    <a:lstStyle/>
+                    <a:p>
+                      <a:pPr indent="0" marL="0">
+                        <a:buNone/>
+                      </a:pPr>
+                      <a:r>
+                        <a:rPr lang="en-US" sz="850" dirty="0">
+                          <a:solidFill>
+                            <a:srgbClr val="262626"/>
+                          </a:solidFill>
+                          <a:latin typeface="신세계 민부리 Light(TTF)" pitchFamily="34" charset="0"/>
+                          <a:ea typeface="신세계 민부리 Light(TTF)" pitchFamily="34" charset="-122"/>
+                          <a:cs typeface="신세계 민부리 Light(TTF)" pitchFamily="34" charset="-120"/>
+                        </a:rPr>
+                        <a:t>㈜세빛섬 (효성 최대주주)</a:t>
+                      </a:r>
+                      <a:endParaRPr lang="en-US" sz="850" dirty="0">
+                        <a:latin typeface="신세계 민부리 Light(TTF)" charset="0"/>
+                        <a:ea typeface="신세계 민부리 Light(TTF)" charset="0"/>
+                        <a:cs typeface="신세계 민부리 Light(TTF)" charset="0"/>
+                      </a:endParaRPr>
+                    </a:p>
+                  </a:txBody>
+                  <a:tcPr marL="54864" marR="54864" marT="27432" marB="27432" anchor="ctr">
+                    <a:lnL w="6350" cap="flat" cmpd="sng" algn="ctr">
+                      <a:solidFill>
+                        <a:srgbClr val="BFBFBF"/>
+                      </a:solidFill>
+                      <a:prstDash val="solid"/>
+                      <a:round/>
+                      <a:headEnd type="none" w="med" len="med"/>
+                      <a:tailEnd type="none" w="med" len="med"/>
+                    </a:lnL>
+                    <a:lnR w="6350" cap="flat" cmpd="sng" algn="ctr">
+                      <a:solidFill>
+                        <a:srgbClr val="BFBFBF"/>
+                      </a:solidFill>
+                      <a:prstDash val="solid"/>
+                      <a:round/>
+                      <a:headEnd type="none" w="med" len="med"/>
+                      <a:tailEnd type="none" w="med" len="med"/>
+                    </a:lnR>
+                    <a:lnT w="6350" cap="flat" cmpd="sng" algn="ctr">
+                      <a:solidFill>
+                        <a:srgbClr val="BFBFBF"/>
+                      </a:solidFill>
+                      <a:prstDash val="solid"/>
+                      <a:round/>
+                      <a:headEnd type="none" w="med" len="med"/>
+                      <a:tailEnd type="none" w="med" len="med"/>
+                    </a:lnT>
+                    <a:lnB w="6350" cap="flat" cmpd="sng" algn="ctr">
+                      <a:solidFill>
+                        <a:srgbClr val="BFBFBF"/>
+                      </a:solidFill>
+                      <a:prstDash val="solid"/>
+                      <a:round/>
+                      <a:headEnd type="none" w="med" len="med"/>
+                      <a:tailEnd type="none" w="med" len="med"/>
+                    </a:lnB>
+                  </a:tcPr>
+                </a:tc>
+              </a:tr>
+              <a:tr h="502920">
+                <a:tc>
+                  <a:txBody>
+                    <a:bodyPr/>
+                    <a:lstStyle/>
+                    <a:p>
+                      <a:pPr algn="ctr" indent="0" marL="0">
+                        <a:buNone/>
+                      </a:pPr>
+                      <a:r>
+                        <a:rPr lang="en-US" sz="850" b="1" dirty="0">
+                          <a:solidFill>
+                            <a:srgbClr val="262626"/>
+                          </a:solidFill>
+                          <a:latin typeface="신세계 민부리 Bold(TTF)" pitchFamily="34" charset="0"/>
+                          <a:ea typeface="신세계 민부리 Bold(TTF)" pitchFamily="34" charset="-122"/>
+                          <a:cs typeface="신세계 민부리 Bold(TTF)" pitchFamily="34" charset="-120"/>
+                        </a:rPr>
+                        <a:t>추진 경과</a:t>
+                      </a:r>
+                      <a:endParaRPr lang="en-US" sz="850" dirty="0">
+                        <a:latin typeface="신세계 민부리 Bold(TTF)" charset="0"/>
+                        <a:ea typeface="신세계 민부리 Bold(TTF)" charset="0"/>
+                        <a:cs typeface="신세계 민부리 Bold(TTF)" charset="0"/>
+                      </a:endParaRPr>
+                    </a:p>
+                  </a:txBody>
+                  <a:tcPr marL="54864" marR="54864" marT="27432" marB="27432" anchor="ctr">
+                    <a:lnL w="6350" cap="flat" cmpd="sng" algn="ctr">
+                      <a:solidFill>
+                        <a:srgbClr val="BFBFBF"/>
+                      </a:solidFill>
+                      <a:prstDash val="solid"/>
+                      <a:round/>
+                      <a:headEnd type="none" w="med" len="med"/>
+                      <a:tailEnd type="none" w="med" len="med"/>
+                    </a:lnL>
+                    <a:lnR w="6350" cap="flat" cmpd="sng" algn="ctr">
+                      <a:solidFill>
+                        <a:srgbClr val="BFBFBF"/>
+                      </a:solidFill>
+                      <a:prstDash val="solid"/>
+                      <a:round/>
+                      <a:headEnd type="none" w="med" len="med"/>
+                      <a:tailEnd type="none" w="med" len="med"/>
+                    </a:lnR>
+                    <a:lnT w="6350" cap="flat" cmpd="sng" algn="ctr">
+                      <a:solidFill>
+                        <a:srgbClr val="BFBFBF"/>
+                      </a:solidFill>
+                      <a:prstDash val="solid"/>
+                      <a:round/>
+                      <a:headEnd type="none" w="med" len="med"/>
+                      <a:tailEnd type="none" w="med" len="med"/>
+                    </a:lnT>
+                    <a:lnB w="6350" cap="flat" cmpd="sng" algn="ctr">
+                      <a:solidFill>
+                        <a:srgbClr val="BFBFBF"/>
+                      </a:solidFill>
+                      <a:prstDash val="solid"/>
+                      <a:round/>
+                      <a:headEnd type="none" w="med" len="med"/>
+                      <a:tailEnd type="none" w="med" len="med"/>
+                    </a:lnB>
+                    <a:solidFill>
+                      <a:srgbClr val="F2F2F2"/>
+                    </a:solidFill>
+                  </a:tcPr>
+                </a:tc>
+                <a:tc>
+                  <a:txBody>
+                    <a:bodyPr/>
+                    <a:lstStyle/>
+                    <a:p>
+                      <a:pPr indent="0" marL="0">
+                        <a:buNone/>
+                      </a:pPr>
+                      <a:r>
+                        <a:rPr lang="en-US" sz="850" dirty="0">
+                          <a:solidFill>
+                            <a:srgbClr val="262626"/>
+                          </a:solidFill>
+                          <a:latin typeface="신세계 민부리 Light(TTF)" pitchFamily="34" charset="0"/>
+                          <a:ea typeface="신세계 민부리 Light(TTF)" pitchFamily="34" charset="-122"/>
+                          <a:cs typeface="신세계 민부리 Light(TTF)" pitchFamily="34" charset="-120"/>
+                        </a:rPr>
+                        <a:t>’16 최초제안 (무역협회) → ’21.12 한화 우선협상 선정 → ’26.7 실시협약 → ’32 준공 목표</a:t>
+                      </a:r>
+                      <a:endParaRPr lang="en-US" sz="850" dirty="0">
+                        <a:latin typeface="신세계 민부리 Light(TTF)" charset="0"/>
+                        <a:ea typeface="신세계 민부리 Light(TTF)" charset="0"/>
+                        <a:cs typeface="신세계 민부리 Light(TTF)" charset="0"/>
+                      </a:endParaRPr>
+                    </a:p>
+                  </a:txBody>
+                  <a:tcPr marL="54864" marR="54864" marT="27432" marB="27432" anchor="ctr">
+                    <a:lnL w="6350" cap="flat" cmpd="sng" algn="ctr">
+                      <a:solidFill>
+                        <a:srgbClr val="BFBFBF"/>
+                      </a:solidFill>
+                      <a:prstDash val="solid"/>
+                      <a:round/>
+                      <a:headEnd type="none" w="med" len="med"/>
+                      <a:tailEnd type="none" w="med" len="med"/>
+                    </a:lnL>
+                    <a:lnR w="6350" cap="flat" cmpd="sng" algn="ctr">
+                      <a:solidFill>
+                        <a:srgbClr val="BFBFBF"/>
+                      </a:solidFill>
+                      <a:prstDash val="solid"/>
+                      <a:round/>
+                      <a:headEnd type="none" w="med" len="med"/>
+                      <a:tailEnd type="none" w="med" len="med"/>
+                    </a:lnR>
+                    <a:lnT w="6350" cap="flat" cmpd="sng" algn="ctr">
+                      <a:solidFill>
+                        <a:srgbClr val="BFBFBF"/>
+                      </a:solidFill>
+                      <a:prstDash val="solid"/>
+                      <a:round/>
+                      <a:headEnd type="none" w="med" len="med"/>
+                      <a:tailEnd type="none" w="med" len="med"/>
+                    </a:lnT>
+                    <a:lnB w="6350" cap="flat" cmpd="sng" algn="ctr">
+                      <a:solidFill>
+                        <a:srgbClr val="BFBFBF"/>
+                      </a:solidFill>
+                      <a:prstDash val="solid"/>
+                      <a:round/>
+                      <a:headEnd type="none" w="med" len="med"/>
+                      <a:tailEnd type="none" w="med" len="med"/>
+                    </a:lnB>
+                  </a:tcPr>
+                </a:tc>
+                <a:tc>
+                  <a:txBody>
+                    <a:bodyPr/>
+                    <a:lstStyle/>
+                    <a:p>
+                      <a:pPr indent="0" marL="0">
+                        <a:buNone/>
+                      </a:pPr>
+                      <a:r>
+                        <a:rPr lang="en-US" sz="850" dirty="0">
+                          <a:solidFill>
+                            <a:srgbClr val="262626"/>
+                          </a:solidFill>
+                          <a:latin typeface="신세계 민부리 Light(TTF)" pitchFamily="34" charset="0"/>
+                          <a:ea typeface="신세계 민부리 Light(TTF)" pitchFamily="34" charset="-122"/>
+                          <a:cs typeface="신세계 민부리 Light(TTF)" pitchFamily="34" charset="-120"/>
+                        </a:rPr>
+                        <a:t>’23.9 민투심 대상시설 인정 → 적격성조사 → ’25.8 사업비 증가로 민투심 연기, 제3자 공고 대기</a:t>
+                      </a:r>
+                      <a:endParaRPr lang="en-US" sz="850" dirty="0">
+                        <a:latin typeface="신세계 민부리 Light(TTF)" charset="0"/>
+                        <a:ea typeface="신세계 민부리 Light(TTF)" charset="0"/>
+                        <a:cs typeface="신세계 민부리 Light(TTF)" charset="0"/>
+                      </a:endParaRPr>
+                    </a:p>
+                  </a:txBody>
+                  <a:tcPr marL="54864" marR="54864" marT="27432" marB="27432" anchor="ctr">
+                    <a:lnL w="6350" cap="flat" cmpd="sng" algn="ctr">
+                      <a:solidFill>
+                        <a:srgbClr val="BFBFBF"/>
+                      </a:solidFill>
+                      <a:prstDash val="solid"/>
+                      <a:round/>
+                      <a:headEnd type="none" w="med" len="med"/>
+                      <a:tailEnd type="none" w="med" len="med"/>
+                    </a:lnL>
+                    <a:lnR w="6350" cap="flat" cmpd="sng" algn="ctr">
+                      <a:solidFill>
+                        <a:srgbClr val="BFBFBF"/>
+                      </a:solidFill>
+                      <a:prstDash val="solid"/>
+                      <a:round/>
+                      <a:headEnd type="none" w="med" len="med"/>
+                      <a:tailEnd type="none" w="med" len="med"/>
+                    </a:lnR>
+                    <a:lnT w="6350" cap="flat" cmpd="sng" algn="ctr">
+                      <a:solidFill>
+                        <a:srgbClr val="BFBFBF"/>
+                      </a:solidFill>
+                      <a:prstDash val="solid"/>
+                      <a:round/>
+                      <a:headEnd type="none" w="med" len="med"/>
+                      <a:tailEnd type="none" w="med" len="med"/>
+                    </a:lnT>
+                    <a:lnB w="6350" cap="flat" cmpd="sng" algn="ctr">
+                      <a:solidFill>
+                        <a:srgbClr val="BFBFBF"/>
+                      </a:solidFill>
+                      <a:prstDash val="solid"/>
+                      <a:round/>
+                      <a:headEnd type="none" w="med" len="med"/>
+                      <a:tailEnd type="none" w="med" len="med"/>
+                    </a:lnB>
+                  </a:tcPr>
+                </a:tc>
+                <a:tc>
+                  <a:txBody>
+                    <a:bodyPr/>
+                    <a:lstStyle/>
+                    <a:p>
+                      <a:pPr indent="0" marL="0">
+                        <a:buNone/>
+                      </a:pPr>
+                      <a:r>
+                        <a:rPr lang="en-US" sz="850" dirty="0">
+                          <a:solidFill>
+                            <a:srgbClr val="262626"/>
+                          </a:solidFill>
+                          <a:latin typeface="신세계 민부리 Light(TTF)" pitchFamily="34" charset="0"/>
+                          <a:ea typeface="신세계 민부리 Light(TTF)" pitchFamily="34" charset="-122"/>
+                          <a:cs typeface="신세계 민부리 Light(TTF)" pitchFamily="34" charset="-120"/>
+                        </a:rPr>
+                        <a:t>’09 협약 → ’11 준공 · 市 감사 (협약 불리 지적) → ’13 협약 정상화 → ’14 전면 개장</a:t>
+                      </a:r>
+                      <a:endParaRPr lang="en-US" sz="850" dirty="0">
+                        <a:latin typeface="신세계 민부리 Light(TTF)" charset="0"/>
+                        <a:ea typeface="신세계 민부리 Light(TTF)" charset="0"/>
+                        <a:cs typeface="신세계 민부리 Light(TTF)" charset="0"/>
+                      </a:endParaRPr>
+                    </a:p>
+                  </a:txBody>
+                  <a:tcPr marL="54864" marR="54864" marT="27432" marB="27432" anchor="ctr">
+                    <a:lnL w="6350" cap="flat" cmpd="sng" algn="ctr">
+                      <a:solidFill>
+                        <a:srgbClr val="BFBFBF"/>
+                      </a:solidFill>
+                      <a:prstDash val="solid"/>
+                      <a:round/>
+                      <a:headEnd type="none" w="med" len="med"/>
+                      <a:tailEnd type="none" w="med" len="med"/>
+                    </a:lnL>
+                    <a:lnR w="6350" cap="flat" cmpd="sng" algn="ctr">
+                      <a:solidFill>
+                        <a:srgbClr val="BFBFBF"/>
+                      </a:solidFill>
+                      <a:prstDash val="solid"/>
+                      <a:round/>
+                      <a:headEnd type="none" w="med" len="med"/>
+                      <a:tailEnd type="none" w="med" len="med"/>
+                    </a:lnR>
+                    <a:lnT w="6350" cap="flat" cmpd="sng" algn="ctr">
+                      <a:solidFill>
+                        <a:srgbClr val="BFBFBF"/>
+                      </a:solidFill>
+                      <a:prstDash val="solid"/>
+                      <a:round/>
+                      <a:headEnd type="none" w="med" len="med"/>
+                      <a:tailEnd type="none" w="med" len="med"/>
+                    </a:lnT>
+                    <a:lnB w="6350" cap="flat" cmpd="sng" algn="ctr">
+                      <a:solidFill>
+                        <a:srgbClr val="BFBFBF"/>
+                      </a:solidFill>
+                      <a:prstDash val="solid"/>
+                      <a:round/>
+                      <a:headEnd type="none" w="med" len="med"/>
+                      <a:tailEnd type="none" w="med" len="med"/>
+                    </a:lnB>
+                  </a:tcPr>
+                </a:tc>
+              </a:tr>
+              <a:tr h="502920">
+                <a:tc>
+                  <a:txBody>
+                    <a:bodyPr/>
+                    <a:lstStyle/>
+                    <a:p>
+                      <a:pPr algn="ctr" indent="0" marL="0">
+                        <a:buNone/>
+                      </a:pPr>
+                      <a:r>
+                        <a:rPr lang="en-US" sz="850" b="1" dirty="0">
+                          <a:solidFill>
+                            <a:srgbClr val="262626"/>
+                          </a:solidFill>
+                          <a:latin typeface="신세계 민부리 Bold(TTF)" pitchFamily="34" charset="0"/>
+                          <a:ea typeface="신세계 민부리 Bold(TTF)" pitchFamily="34" charset="-122"/>
+                          <a:cs typeface="신세계 민부리 Bold(TTF)" pitchFamily="34" charset="-120"/>
+                        </a:rPr>
+                        <a:t>당사 시사점</a:t>
+                      </a:r>
+                      <a:endParaRPr lang="en-US" sz="850" dirty="0">
+                        <a:latin typeface="신세계 민부리 Bold(TTF)" charset="0"/>
+                        <a:ea typeface="신세계 민부리 Bold(TTF)" charset="0"/>
+                        <a:cs typeface="신세계 민부리 Bold(TTF)" charset="0"/>
+                      </a:endParaRPr>
+                    </a:p>
+                  </a:txBody>
+                  <a:tcPr marL="54864" marR="54864" marT="27432" marB="27432" anchor="ctr">
+                    <a:lnL w="6350" cap="flat" cmpd="sng" algn="ctr">
+                      <a:solidFill>
+                        <a:srgbClr val="BFBFBF"/>
+                      </a:solidFill>
+                      <a:prstDash val="solid"/>
+                      <a:round/>
+                      <a:headEnd type="none" w="med" len="med"/>
+                      <a:tailEnd type="none" w="med" len="med"/>
+                    </a:lnL>
+                    <a:lnR w="6350" cap="flat" cmpd="sng" algn="ctr">
+                      <a:solidFill>
+                        <a:srgbClr val="BFBFBF"/>
+                      </a:solidFill>
+                      <a:prstDash val="solid"/>
+                      <a:round/>
+                      <a:headEnd type="none" w="med" len="med"/>
+                      <a:tailEnd type="none" w="med" len="med"/>
+                    </a:lnR>
+                    <a:lnT w="6350" cap="flat" cmpd="sng" algn="ctr">
+                      <a:solidFill>
+                        <a:srgbClr val="BFBFBF"/>
+                      </a:solidFill>
+                      <a:prstDash val="solid"/>
+                      <a:round/>
+                      <a:headEnd type="none" w="med" len="med"/>
+                      <a:tailEnd type="none" w="med" len="med"/>
+                    </a:lnT>
+                    <a:lnB w="6350" cap="flat" cmpd="sng" algn="ctr">
+                      <a:solidFill>
+                        <a:srgbClr val="BFBFBF"/>
+                      </a:solidFill>
+                      <a:prstDash val="solid"/>
+                      <a:round/>
+                      <a:headEnd type="none" w="med" len="med"/>
+                      <a:tailEnd type="none" w="med" len="med"/>
+                    </a:lnB>
+                    <a:solidFill>
+                      <a:srgbClr val="F2F2F2"/>
+                    </a:solidFill>
+                  </a:tcPr>
+                </a:tc>
+                <a:tc>
+                  <a:txBody>
+                    <a:bodyPr/>
+                    <a:lstStyle/>
+                    <a:p>
+                      <a:pPr indent="0" marL="0">
+                        <a:buNone/>
+                      </a:pPr>
+                      <a:r>
+                        <a:rPr lang="en-US" sz="850" dirty="0">
+                          <a:solidFill>
+                            <a:srgbClr val="262626"/>
+                          </a:solidFill>
+                          <a:latin typeface="신세계 민부리 Light(TTF)" pitchFamily="34" charset="0"/>
+                          <a:ea typeface="신세계 민부리 Light(TTF)" pitchFamily="34" charset="-122"/>
+                          <a:cs typeface="신세계 민부리 Light(TTF)" pitchFamily="34" charset="-120"/>
+                        </a:rPr>
+                        <a:t>최초제안자도 경쟁에서 탈락 가능 → 제안 가점보다 콘텐츠 차별화가 관건 / 제안 → 협약 약 10년</a:t>
+                      </a:r>
+                      <a:endParaRPr lang="en-US" sz="850" dirty="0">
+                        <a:latin typeface="신세계 민부리 Light(TTF)" charset="0"/>
+                        <a:ea typeface="신세계 민부리 Light(TTF)" charset="0"/>
+                        <a:cs typeface="신세계 민부리 Light(TTF)" charset="0"/>
+                      </a:endParaRPr>
+                    </a:p>
+                  </a:txBody>
+                  <a:tcPr marL="54864" marR="54864" marT="27432" marB="27432" anchor="ctr">
+                    <a:lnL w="6350" cap="flat" cmpd="sng" algn="ctr">
+                      <a:solidFill>
+                        <a:srgbClr val="BFBFBF"/>
+                      </a:solidFill>
+                      <a:prstDash val="solid"/>
+                      <a:round/>
+                      <a:headEnd type="none" w="med" len="med"/>
+                      <a:tailEnd type="none" w="med" len="med"/>
+                    </a:lnL>
+                    <a:lnR w="6350" cap="flat" cmpd="sng" algn="ctr">
+                      <a:solidFill>
+                        <a:srgbClr val="BFBFBF"/>
+                      </a:solidFill>
+                      <a:prstDash val="solid"/>
+                      <a:round/>
+                      <a:headEnd type="none" w="med" len="med"/>
+                      <a:tailEnd type="none" w="med" len="med"/>
+                    </a:lnR>
+                    <a:lnT w="6350" cap="flat" cmpd="sng" algn="ctr">
+                      <a:solidFill>
+                        <a:srgbClr val="BFBFBF"/>
+                      </a:solidFill>
+                      <a:prstDash val="solid"/>
+                      <a:round/>
+                      <a:headEnd type="none" w="med" len="med"/>
+                      <a:tailEnd type="none" w="med" len="med"/>
+                    </a:lnT>
+                    <a:lnB w="6350" cap="flat" cmpd="sng" algn="ctr">
+                      <a:solidFill>
+                        <a:srgbClr val="BFBFBF"/>
+                      </a:solidFill>
+                      <a:prstDash val="solid"/>
+                      <a:round/>
+                      <a:headEnd type="none" w="med" len="med"/>
+                      <a:tailEnd type="none" w="med" len="med"/>
+                    </a:lnB>
+                    <a:solidFill>
+                      <a:srgbClr val="EEF2F8"/>
+                    </a:solidFill>
+                  </a:tcPr>
+                </a:tc>
+                <a:tc>
+                  <a:txBody>
+                    <a:bodyPr/>
+                    <a:lstStyle/>
+                    <a:p>
+                      <a:pPr indent="0" marL="0">
+                        <a:buNone/>
+                      </a:pPr>
+                      <a:r>
+                        <a:rPr lang="en-US" sz="850" dirty="0">
+                          <a:solidFill>
+                            <a:srgbClr val="262626"/>
+                          </a:solidFill>
+                          <a:latin typeface="신세계 민부리 Light(TTF)" pitchFamily="34" charset="0"/>
+                          <a:ea typeface="신세계 민부리 Light(TTF)" pitchFamily="34" charset="-122"/>
+                          <a:cs typeface="신세계 민부리 Light(TTF)" pitchFamily="34" charset="-120"/>
+                        </a:rPr>
+                        <a:t>비전형 시설도 포괄주의로 민자 대상 인정 → 「세빛섬 + 푸드존 = 공공 수변시설」 논리의 선례</a:t>
+                      </a:r>
+                      <a:endParaRPr lang="en-US" sz="850" dirty="0">
+                        <a:latin typeface="신세계 민부리 Light(TTF)" charset="0"/>
+                        <a:ea typeface="신세계 민부리 Light(TTF)" charset="0"/>
+                        <a:cs typeface="신세계 민부리 Light(TTF)" charset="0"/>
+                      </a:endParaRPr>
+                    </a:p>
+                  </a:txBody>
+                  <a:tcPr marL="54864" marR="54864" marT="27432" marB="27432" anchor="ctr">
+                    <a:lnL w="6350" cap="flat" cmpd="sng" algn="ctr">
+                      <a:solidFill>
+                        <a:srgbClr val="BFBFBF"/>
+                      </a:solidFill>
+                      <a:prstDash val="solid"/>
+                      <a:round/>
+                      <a:headEnd type="none" w="med" len="med"/>
+                      <a:tailEnd type="none" w="med" len="med"/>
+                    </a:lnL>
+                    <a:lnR w="6350" cap="flat" cmpd="sng" algn="ctr">
+                      <a:solidFill>
+                        <a:srgbClr val="BFBFBF"/>
+                      </a:solidFill>
+                      <a:prstDash val="solid"/>
+                      <a:round/>
+                      <a:headEnd type="none" w="med" len="med"/>
+                      <a:tailEnd type="none" w="med" len="med"/>
+                    </a:lnR>
+                    <a:lnT w="6350" cap="flat" cmpd="sng" algn="ctr">
+                      <a:solidFill>
+                        <a:srgbClr val="BFBFBF"/>
+                      </a:solidFill>
+                      <a:prstDash val="solid"/>
+                      <a:round/>
+                      <a:headEnd type="none" w="med" len="med"/>
+                      <a:tailEnd type="none" w="med" len="med"/>
+                    </a:lnT>
+                    <a:lnB w="6350" cap="flat" cmpd="sng" algn="ctr">
+                      <a:solidFill>
+                        <a:srgbClr val="BFBFBF"/>
+                      </a:solidFill>
+                      <a:prstDash val="solid"/>
+                      <a:round/>
+                      <a:headEnd type="none" w="med" len="med"/>
+                      <a:tailEnd type="none" w="med" len="med"/>
+                    </a:lnB>
+                    <a:solidFill>
+                      <a:srgbClr val="EEF2F8"/>
+                    </a:solidFill>
+                  </a:tcPr>
+                </a:tc>
+                <a:tc>
+                  <a:txBody>
+                    <a:bodyPr/>
+                    <a:lstStyle/>
+                    <a:p>
+                      <a:pPr indent="0" marL="0">
+                        <a:buNone/>
+                      </a:pPr>
+                      <a:r>
+                        <a:rPr lang="en-US" sz="850" dirty="0">
+                          <a:solidFill>
+                            <a:srgbClr val="262626"/>
+                          </a:solidFill>
+                          <a:latin typeface="신세계 민부리 Light(TTF)" pitchFamily="34" charset="0"/>
+                          <a:ea typeface="신세계 민부리 Light(TTF)" pitchFamily="34" charset="-122"/>
+                          <a:cs typeface="신세계 민부리 Light(TTF)" pitchFamily="34" charset="-120"/>
+                        </a:rPr>
+                        <a:t>기간 연장이 특혜 논란 · 감사로 이어진 이력 → 50년 요구 시 공공기여로 정당성 확보 필수</a:t>
+                      </a:r>
+                      <a:endParaRPr lang="en-US" sz="850" dirty="0">
+                        <a:latin typeface="신세계 민부리 Light(TTF)" charset="0"/>
+                        <a:ea typeface="신세계 민부리 Light(TTF)" charset="0"/>
+                        <a:cs typeface="신세계 민부리 Light(TTF)" charset="0"/>
+                      </a:endParaRPr>
+                    </a:p>
+                  </a:txBody>
+                  <a:tcPr marL="54864" marR="54864" marT="27432" marB="27432" anchor="ctr">
+                    <a:lnL w="6350" cap="flat" cmpd="sng" algn="ctr">
+                      <a:solidFill>
+                        <a:srgbClr val="BFBFBF"/>
+                      </a:solidFill>
+                      <a:prstDash val="solid"/>
+                      <a:round/>
+                      <a:headEnd type="none" w="med" len="med"/>
+                      <a:tailEnd type="none" w="med" len="med"/>
+                    </a:lnL>
+                    <a:lnR w="6350" cap="flat" cmpd="sng" algn="ctr">
+                      <a:solidFill>
+                        <a:srgbClr val="BFBFBF"/>
+                      </a:solidFill>
+                      <a:prstDash val="solid"/>
+                      <a:round/>
+                      <a:headEnd type="none" w="med" len="med"/>
+                      <a:tailEnd type="none" w="med" len="med"/>
+                    </a:lnR>
+                    <a:lnT w="6350" cap="flat" cmpd="sng" algn="ctr">
+                      <a:solidFill>
+                        <a:srgbClr val="BFBFBF"/>
+                      </a:solidFill>
+                      <a:prstDash val="solid"/>
+                      <a:round/>
+                      <a:headEnd type="none" w="med" len="med"/>
+                      <a:tailEnd type="none" w="med" len="med"/>
+                    </a:lnT>
+                    <a:lnB w="6350" cap="flat" cmpd="sng" algn="ctr">
+                      <a:solidFill>
+                        <a:srgbClr val="BFBFBF"/>
+                      </a:solidFill>
+                      <a:prstDash val="solid"/>
+                      <a:round/>
+                      <a:headEnd type="none" w="med" len="med"/>
+                      <a:tailEnd type="none" w="med" len="med"/>
+                    </a:lnB>
+                    <a:solidFill>
+                      <a:srgbClr val="EEF2F8"/>
+                    </a:solidFill>
+                  </a:tcPr>
+                </a:tc>
+              </a:tr>
+            </a:tbl>
+          </a:graphicData>
+        </a:graphic>
+      </p:graphicFrame>
       <p:sp>
         <p:nvSpPr>
-          <p:cNvPr id="8" name="Case1Card"/>
-          <p:cNvSpPr/>
-          <p:nvPr/>
-        </p:nvSpPr>
-        <p:spPr>
-          <a:xfrm>
-            <a:off x="274320" y="5404104"/>
-            <a:ext cx="1325880" cy="749808"/>
-          </a:xfrm>
-          <a:prstGeom prst="rect">
-            <a:avLst/>
-          </a:prstGeom>
-          <a:solidFill>
-            <a:srgbClr val="1F3A6E"/>
-          </a:solidFill>
-          <a:ln w="12700">
-            <a:solidFill>
-              <a:srgbClr val="1F3A6E"/>
-            </a:solidFill>
-            <a:prstDash val="solid"/>
-          </a:ln>
-        </p:spPr>
-      </p:sp>
-      <p:sp>
-        <p:nvSpPr>
-          <p:cNvPr id="9" name="Case1Label"/>
+          <p:cNvPr id="9" name="Source"/>
           <p:cNvSpPr txBox="1"/>
           <p:nvPr/>
         </p:nvSpPr>
         <p:spPr>
           <a:xfrm>
-            <a:off x="347472" y="5404104"/>
-            <a:ext cx="1216152" cy="749808"/>
-          </a:xfrm>
-          <a:prstGeom prst="rect">
-            <a:avLst/>
-          </a:prstGeom>
-          <a:noFill/>
-          <a:ln/>
-        </p:spPr>
-        <p:txBody>
-          <a:bodyPr wrap="square" lIns="0" tIns="114300" rIns="114300" bIns="0" rtlCol="0" anchor="ctr"/>
-          <a:lstStyle/>
-          <a:p>
-            <a:pPr indent="0" marL="0">
-              <a:buNone/>
-            </a:pPr>
-            <a:r>
-              <a:rPr lang="en-US" sz="1000" b="1" dirty="0">
-                <a:solidFill>
-                  <a:srgbClr val="FFFFFF"/>
-                </a:solidFill>
-                <a:latin typeface="신세계 민부리 Bold(TTF)" pitchFamily="34" charset="0"/>
-                <a:ea typeface="신세계 민부리 Bold(TTF)" pitchFamily="34" charset="-122"/>
-                <a:cs typeface="신세계 민부리 Bold(TTF)" pitchFamily="34" charset="-120"/>
-              </a:rPr>
-              <a:t>잠실 스포츠·MICE</a:t>
-            </a:r>
-            <a:endParaRPr lang="en-US" sz="1000" dirty="0"/>
-          </a:p>
-          <a:p>
-            <a:pPr indent="0" marL="0">
-              <a:buNone/>
-            </a:pPr>
-            <a:r>
-              <a:rPr lang="en-US" sz="850" dirty="0">
-                <a:solidFill>
-                  <a:srgbClr val="FFFFFF"/>
-                </a:solidFill>
-                <a:latin typeface="신세계 민부리 Bold(TTF)" pitchFamily="34" charset="0"/>
-                <a:ea typeface="신세계 민부리 Bold(TTF)" pitchFamily="34" charset="-122"/>
-                <a:cs typeface="신세계 민부리 Bold(TTF)" pitchFamily="34" charset="-120"/>
-              </a:rPr>
-              <a:t>BTO · 민간제안</a:t>
-            </a:r>
-            <a:endParaRPr lang="en-US" sz="1000" dirty="0"/>
-          </a:p>
-          <a:p>
-            <a:pPr indent="0" marL="0">
-              <a:buNone/>
-            </a:pPr>
-            <a:r>
-              <a:rPr lang="en-US" sz="750" dirty="0">
-                <a:solidFill>
-                  <a:srgbClr val="FFFFFF"/>
-                </a:solidFill>
-                <a:latin typeface="신세계 민부리 Light(TTF)" pitchFamily="34" charset="0"/>
-                <a:ea typeface="신세계 민부리 Light(TTF)" pitchFamily="34" charset="-122"/>
-                <a:cs typeface="신세계 민부리 Light(TTF)" pitchFamily="34" charset="-120"/>
-              </a:rPr>
-              <a:t>2.7조 · 운영 40년</a:t>
-            </a:r>
-            <a:endParaRPr lang="en-US" sz="1000" dirty="0"/>
-          </a:p>
-        </p:txBody>
-      </p:sp>
-      <p:sp>
-        <p:nvSpPr>
-          <p:cNvPr id="10" name="Case1Step1"/>
-          <p:cNvSpPr/>
-          <p:nvPr/>
-        </p:nvSpPr>
-        <p:spPr>
-          <a:xfrm>
-            <a:off x="1673352" y="5404104"/>
-            <a:ext cx="856488" cy="749808"/>
-          </a:xfrm>
-          <a:prstGeom prst="homePlate">
-            <a:avLst/>
-          </a:prstGeom>
-          <a:solidFill>
-            <a:srgbClr val="F2F2F2"/>
-          </a:solidFill>
-          <a:ln w="19050">
-            <a:solidFill>
-              <a:srgbClr val="FFFFFF"/>
-            </a:solidFill>
-            <a:prstDash val="solid"/>
-          </a:ln>
-        </p:spPr>
-      </p:sp>
-      <p:sp>
-        <p:nvSpPr>
-          <p:cNvPr id="11" name="Case1Step1Text"/>
-          <p:cNvSpPr txBox="1"/>
-          <p:nvPr/>
-        </p:nvSpPr>
-        <p:spPr>
-          <a:xfrm>
-            <a:off x="1709928" y="5404104"/>
-            <a:ext cx="582168" cy="749808"/>
-          </a:xfrm>
-          <a:prstGeom prst="rect">
-            <a:avLst/>
-          </a:prstGeom>
-          <a:noFill/>
-          <a:ln/>
-        </p:spPr>
-        <p:txBody>
-          <a:bodyPr wrap="square" lIns="0" tIns="0" rIns="0" bIns="0" rtlCol="0" anchor="ctr"/>
-          <a:lstStyle/>
-          <a:p>
-            <a:pPr algn="ctr" indent="0" marL="0">
-              <a:buNone/>
-            </a:pPr>
-            <a:r>
-              <a:rPr lang="en-US" sz="800" b="1" dirty="0">
-                <a:solidFill>
-                  <a:srgbClr val="1F3A6E"/>
-                </a:solidFill>
-                <a:latin typeface="신세계 민부리 Bold(TTF)" pitchFamily="34" charset="0"/>
-                <a:ea typeface="신세계 민부리 Bold(TTF)" pitchFamily="34" charset="-122"/>
-                <a:cs typeface="신세계 민부리 Bold(TTF)" pitchFamily="34" charset="-120"/>
-              </a:rPr>
-              <a:t>’16</a:t>
-            </a:r>
-            <a:endParaRPr lang="en-US" sz="800" dirty="0"/>
-          </a:p>
-          <a:p>
-            <a:pPr algn="ctr" indent="0" marL="0">
-              <a:buNone/>
-            </a:pPr>
-            <a:r>
-              <a:rPr lang="en-US" sz="800" b="1" dirty="0">
-                <a:solidFill>
-                  <a:srgbClr val="262626"/>
-                </a:solidFill>
-                <a:latin typeface="신세계 민부리 Bold(TTF)" pitchFamily="34" charset="0"/>
-                <a:ea typeface="신세계 민부리 Bold(TTF)" pitchFamily="34" charset="-122"/>
-                <a:cs typeface="신세계 민부리 Bold(TTF)" pitchFamily="34" charset="-120"/>
-              </a:rPr>
-              <a:t>최초 제안</a:t>
-            </a:r>
-            <a:endParaRPr lang="en-US" sz="800" dirty="0"/>
-          </a:p>
-          <a:p>
-            <a:pPr algn="ctr" indent="0" marL="0">
-              <a:buNone/>
-            </a:pPr>
-            <a:r>
-              <a:rPr lang="en-US" sz="700" dirty="0">
-                <a:solidFill>
-                  <a:srgbClr val="595959"/>
-                </a:solidFill>
-                <a:latin typeface="신세계 민부리 Light(TTF)" pitchFamily="34" charset="0"/>
-                <a:ea typeface="신세계 민부리 Light(TTF)" pitchFamily="34" charset="-122"/>
-                <a:cs typeface="신세계 민부리 Light(TTF)" pitchFamily="34" charset="-120"/>
-              </a:rPr>
-              <a:t>(무역협회)</a:t>
-            </a:r>
-            <a:endParaRPr lang="en-US" sz="800" dirty="0"/>
-          </a:p>
-        </p:txBody>
-      </p:sp>
-      <p:sp>
-        <p:nvSpPr>
-          <p:cNvPr id="12" name="Case1Step2"/>
-          <p:cNvSpPr/>
-          <p:nvPr/>
-        </p:nvSpPr>
-        <p:spPr>
-          <a:xfrm>
-            <a:off x="2484120" y="5404104"/>
-            <a:ext cx="856488" cy="749808"/>
-          </a:xfrm>
-          <a:prstGeom prst="chevron">
-            <a:avLst/>
-          </a:prstGeom>
-          <a:solidFill>
-            <a:srgbClr val="F2F2F2"/>
-          </a:solidFill>
-          <a:ln w="19050">
-            <a:solidFill>
-              <a:srgbClr val="FFFFFF"/>
-            </a:solidFill>
-            <a:prstDash val="solid"/>
-          </a:ln>
-        </p:spPr>
-      </p:sp>
-      <p:sp>
-        <p:nvSpPr>
-          <p:cNvPr id="13" name="Case1Step2Text"/>
-          <p:cNvSpPr txBox="1"/>
-          <p:nvPr/>
-        </p:nvSpPr>
-        <p:spPr>
-          <a:xfrm>
-            <a:off x="2630424" y="5404104"/>
-            <a:ext cx="582168" cy="749808"/>
-          </a:xfrm>
-          <a:prstGeom prst="rect">
-            <a:avLst/>
-          </a:prstGeom>
-          <a:noFill/>
-          <a:ln/>
-        </p:spPr>
-        <p:txBody>
-          <a:bodyPr wrap="square" lIns="0" tIns="0" rIns="0" bIns="0" rtlCol="0" anchor="ctr"/>
-          <a:lstStyle/>
-          <a:p>
-            <a:pPr algn="ctr" indent="0" marL="0">
-              <a:buNone/>
-            </a:pPr>
-            <a:r>
-              <a:rPr lang="en-US" sz="800" b="1" dirty="0">
-                <a:solidFill>
-                  <a:srgbClr val="1F3A6E"/>
-                </a:solidFill>
-                <a:latin typeface="신세계 민부리 Bold(TTF)" pitchFamily="34" charset="0"/>
-                <a:ea typeface="신세계 민부리 Bold(TTF)" pitchFamily="34" charset="-122"/>
-                <a:cs typeface="신세계 민부리 Bold(TTF)" pitchFamily="34" charset="-120"/>
-              </a:rPr>
-              <a:t>’17~’20.5</a:t>
-            </a:r>
-            <a:endParaRPr lang="en-US" sz="800" dirty="0"/>
-          </a:p>
-          <a:p>
-            <a:pPr algn="ctr" indent="0" marL="0">
-              <a:buNone/>
-            </a:pPr>
-            <a:r>
-              <a:rPr lang="en-US" sz="800" b="1" dirty="0">
-                <a:solidFill>
-                  <a:srgbClr val="262626"/>
-                </a:solidFill>
-                <a:latin typeface="신세계 민부리 Bold(TTF)" pitchFamily="34" charset="0"/>
-                <a:ea typeface="신세계 민부리 Bold(TTF)" pitchFamily="34" charset="-122"/>
-                <a:cs typeface="신세계 민부리 Bold(TTF)" pitchFamily="34" charset="-120"/>
-              </a:rPr>
-              <a:t>적격성조사</a:t>
-            </a:r>
-            <a:endParaRPr lang="en-US" sz="800" dirty="0"/>
-          </a:p>
-          <a:p>
-            <a:pPr algn="ctr" indent="0" marL="0">
-              <a:buNone/>
-            </a:pPr>
-            <a:r>
-              <a:rPr lang="en-US" sz="700" dirty="0">
-                <a:solidFill>
-                  <a:srgbClr val="595959"/>
-                </a:solidFill>
-                <a:latin typeface="신세계 민부리 Light(TTF)" pitchFamily="34" charset="0"/>
-                <a:ea typeface="신세계 민부리 Light(TTF)" pitchFamily="34" charset="-122"/>
-                <a:cs typeface="신세계 민부리 Light(TTF)" pitchFamily="34" charset="-120"/>
-              </a:rPr>
-              <a:t>(PIMAC)</a:t>
-            </a:r>
-            <a:endParaRPr lang="en-US" sz="800" dirty="0"/>
-          </a:p>
-        </p:txBody>
-      </p:sp>
-      <p:sp>
-        <p:nvSpPr>
-          <p:cNvPr id="14" name="Case1Step3"/>
-          <p:cNvSpPr/>
-          <p:nvPr/>
-        </p:nvSpPr>
-        <p:spPr>
-          <a:xfrm>
-            <a:off x="3294888" y="5404104"/>
-            <a:ext cx="856488" cy="749808"/>
-          </a:xfrm>
-          <a:prstGeom prst="chevron">
-            <a:avLst/>
-          </a:prstGeom>
-          <a:solidFill>
-            <a:srgbClr val="F2F2F2"/>
-          </a:solidFill>
-          <a:ln w="19050">
-            <a:solidFill>
-              <a:srgbClr val="FFFFFF"/>
-            </a:solidFill>
-            <a:prstDash val="solid"/>
-          </a:ln>
-        </p:spPr>
-      </p:sp>
-      <p:sp>
-        <p:nvSpPr>
-          <p:cNvPr id="15" name="Case1Step3Text"/>
-          <p:cNvSpPr txBox="1"/>
-          <p:nvPr/>
-        </p:nvSpPr>
-        <p:spPr>
-          <a:xfrm>
-            <a:off x="3441192" y="5404104"/>
-            <a:ext cx="582168" cy="749808"/>
-          </a:xfrm>
-          <a:prstGeom prst="rect">
-            <a:avLst/>
-          </a:prstGeom>
-          <a:noFill/>
-          <a:ln/>
-        </p:spPr>
-        <p:txBody>
-          <a:bodyPr wrap="square" lIns="0" tIns="0" rIns="0" bIns="0" rtlCol="0" anchor="ctr"/>
-          <a:lstStyle/>
-          <a:p>
-            <a:pPr algn="ctr" indent="0" marL="0">
-              <a:buNone/>
-            </a:pPr>
-            <a:r>
-              <a:rPr lang="en-US" sz="800" b="1" dirty="0">
-                <a:solidFill>
-                  <a:srgbClr val="1F3A6E"/>
-                </a:solidFill>
-                <a:latin typeface="신세계 민부리 Bold(TTF)" pitchFamily="34" charset="0"/>
-                <a:ea typeface="신세계 민부리 Bold(TTF)" pitchFamily="34" charset="-122"/>
-                <a:cs typeface="신세계 민부리 Bold(TTF)" pitchFamily="34" charset="-120"/>
-              </a:rPr>
-              <a:t>’21</a:t>
-            </a:r>
-            <a:endParaRPr lang="en-US" sz="800" dirty="0"/>
-          </a:p>
-          <a:p>
-            <a:pPr algn="ctr" indent="0" marL="0">
-              <a:buNone/>
-            </a:pPr>
-            <a:r>
-              <a:rPr lang="en-US" sz="800" b="1" dirty="0">
-                <a:solidFill>
-                  <a:srgbClr val="262626"/>
-                </a:solidFill>
-                <a:latin typeface="신세계 민부리 Bold(TTF)" pitchFamily="34" charset="0"/>
-                <a:ea typeface="신세계 민부리 Bold(TTF)" pitchFamily="34" charset="-122"/>
-                <a:cs typeface="신세계 민부리 Bold(TTF)" pitchFamily="34" charset="-120"/>
-              </a:rPr>
-              <a:t>제3자</a:t>
-            </a:r>
-            <a:endParaRPr lang="en-US" sz="800" dirty="0"/>
-          </a:p>
-          <a:p>
-            <a:pPr algn="ctr" indent="0" marL="0">
-              <a:buNone/>
-            </a:pPr>
-            <a:r>
-              <a:rPr lang="en-US" sz="700" dirty="0">
-                <a:solidFill>
-                  <a:srgbClr val="595959"/>
-                </a:solidFill>
-                <a:latin typeface="신세계 민부리 Light(TTF)" pitchFamily="34" charset="0"/>
-                <a:ea typeface="신세계 민부리 Light(TTF)" pitchFamily="34" charset="-122"/>
-                <a:cs typeface="신세계 민부리 Light(TTF)" pitchFamily="34" charset="-120"/>
-              </a:rPr>
-              <a:t>제안공고</a:t>
-            </a:r>
-            <a:endParaRPr lang="en-US" sz="800" dirty="0"/>
-          </a:p>
-        </p:txBody>
-      </p:sp>
-      <p:sp>
-        <p:nvSpPr>
-          <p:cNvPr id="16" name="Case1Step4"/>
-          <p:cNvSpPr/>
-          <p:nvPr/>
-        </p:nvSpPr>
-        <p:spPr>
-          <a:xfrm>
-            <a:off x="4105656" y="5404104"/>
-            <a:ext cx="856488" cy="749808"/>
-          </a:xfrm>
-          <a:prstGeom prst="chevron">
-            <a:avLst/>
-          </a:prstGeom>
-          <a:solidFill>
-            <a:srgbClr val="F2F2F2"/>
-          </a:solidFill>
-          <a:ln w="19050">
-            <a:solidFill>
-              <a:srgbClr val="FFFFFF"/>
-            </a:solidFill>
-            <a:prstDash val="solid"/>
-          </a:ln>
-        </p:spPr>
-      </p:sp>
-      <p:sp>
-        <p:nvSpPr>
-          <p:cNvPr id="17" name="Case1Step4Text"/>
-          <p:cNvSpPr txBox="1"/>
-          <p:nvPr/>
-        </p:nvSpPr>
-        <p:spPr>
-          <a:xfrm>
-            <a:off x="4251960" y="5404104"/>
-            <a:ext cx="582168" cy="749808"/>
-          </a:xfrm>
-          <a:prstGeom prst="rect">
-            <a:avLst/>
-          </a:prstGeom>
-          <a:noFill/>
-          <a:ln/>
-        </p:spPr>
-        <p:txBody>
-          <a:bodyPr wrap="square" lIns="0" tIns="0" rIns="0" bIns="0" rtlCol="0" anchor="ctr"/>
-          <a:lstStyle/>
-          <a:p>
-            <a:pPr algn="ctr" indent="0" marL="0">
-              <a:buNone/>
-            </a:pPr>
-            <a:r>
-              <a:rPr lang="en-US" sz="800" b="1" dirty="0">
-                <a:solidFill>
-                  <a:srgbClr val="1F3A6E"/>
-                </a:solidFill>
-                <a:latin typeface="신세계 민부리 Bold(TTF)" pitchFamily="34" charset="0"/>
-                <a:ea typeface="신세계 민부리 Bold(TTF)" pitchFamily="34" charset="-122"/>
-                <a:cs typeface="신세계 민부리 Bold(TTF)" pitchFamily="34" charset="-120"/>
-              </a:rPr>
-              <a:t>’21.12</a:t>
-            </a:r>
-            <a:endParaRPr lang="en-US" sz="800" dirty="0"/>
-          </a:p>
-          <a:p>
-            <a:pPr algn="ctr" indent="0" marL="0">
-              <a:buNone/>
-            </a:pPr>
-            <a:r>
-              <a:rPr lang="en-US" sz="800" b="1" dirty="0">
-                <a:solidFill>
-                  <a:srgbClr val="262626"/>
-                </a:solidFill>
-                <a:latin typeface="신세계 민부리 Bold(TTF)" pitchFamily="34" charset="0"/>
-                <a:ea typeface="신세계 민부리 Bold(TTF)" pitchFamily="34" charset="-122"/>
-                <a:cs typeface="신세계 민부리 Bold(TTF)" pitchFamily="34" charset="-120"/>
-              </a:rPr>
-              <a:t>우선협상</a:t>
-            </a:r>
-            <a:endParaRPr lang="en-US" sz="800" dirty="0"/>
-          </a:p>
-          <a:p>
-            <a:pPr algn="ctr" indent="0" marL="0">
-              <a:buNone/>
-            </a:pPr>
-            <a:r>
-              <a:rPr lang="en-US" sz="700" dirty="0">
-                <a:solidFill>
-                  <a:srgbClr val="595959"/>
-                </a:solidFill>
-                <a:latin typeface="신세계 민부리 Light(TTF)" pitchFamily="34" charset="0"/>
-                <a:ea typeface="신세계 민부리 Light(TTF)" pitchFamily="34" charset="-122"/>
-                <a:cs typeface="신세계 민부리 Light(TTF)" pitchFamily="34" charset="-120"/>
-              </a:rPr>
-              <a:t>한화 선정</a:t>
-            </a:r>
-            <a:endParaRPr lang="en-US" sz="800" dirty="0"/>
-          </a:p>
-        </p:txBody>
-      </p:sp>
-      <p:sp>
-        <p:nvSpPr>
-          <p:cNvPr id="18" name="Case1Step5"/>
-          <p:cNvSpPr/>
-          <p:nvPr/>
-        </p:nvSpPr>
-        <p:spPr>
-          <a:xfrm>
-            <a:off x="4916424" y="5404104"/>
-            <a:ext cx="856488" cy="749808"/>
-          </a:xfrm>
-          <a:prstGeom prst="chevron">
-            <a:avLst/>
-          </a:prstGeom>
-          <a:solidFill>
-            <a:srgbClr val="F2F2F2"/>
-          </a:solidFill>
-          <a:ln w="19050">
-            <a:solidFill>
-              <a:srgbClr val="FFFFFF"/>
-            </a:solidFill>
-            <a:prstDash val="solid"/>
-          </a:ln>
-        </p:spPr>
-      </p:sp>
-      <p:sp>
-        <p:nvSpPr>
-          <p:cNvPr id="19" name="Case1Step5Text"/>
-          <p:cNvSpPr txBox="1"/>
-          <p:nvPr/>
-        </p:nvSpPr>
-        <p:spPr>
-          <a:xfrm>
-            <a:off x="5062728" y="5404104"/>
-            <a:ext cx="582168" cy="749808"/>
-          </a:xfrm>
-          <a:prstGeom prst="rect">
-            <a:avLst/>
-          </a:prstGeom>
-          <a:noFill/>
-          <a:ln/>
-        </p:spPr>
-        <p:txBody>
-          <a:bodyPr wrap="square" lIns="0" tIns="0" rIns="0" bIns="0" rtlCol="0" anchor="ctr"/>
-          <a:lstStyle/>
-          <a:p>
-            <a:pPr algn="ctr" indent="0" marL="0">
-              <a:buNone/>
-            </a:pPr>
-            <a:r>
-              <a:rPr lang="en-US" sz="800" b="1" dirty="0">
-                <a:solidFill>
-                  <a:srgbClr val="1F3A6E"/>
-                </a:solidFill>
-                <a:latin typeface="신세계 민부리 Bold(TTF)" pitchFamily="34" charset="0"/>
-                <a:ea typeface="신세계 민부리 Bold(TTF)" pitchFamily="34" charset="-122"/>
-                <a:cs typeface="신세계 민부리 Bold(TTF)" pitchFamily="34" charset="-120"/>
-              </a:rPr>
-              <a:t>’26.7</a:t>
-            </a:r>
-            <a:endParaRPr lang="en-US" sz="800" dirty="0"/>
-          </a:p>
-          <a:p>
-            <a:pPr algn="ctr" indent="0" marL="0">
-              <a:buNone/>
-            </a:pPr>
-            <a:r>
-              <a:rPr lang="en-US" sz="800" b="1" dirty="0">
-                <a:solidFill>
-                  <a:srgbClr val="262626"/>
-                </a:solidFill>
-                <a:latin typeface="신세계 민부리 Bold(TTF)" pitchFamily="34" charset="0"/>
-                <a:ea typeface="신세계 민부리 Bold(TTF)" pitchFamily="34" charset="-122"/>
-                <a:cs typeface="신세계 민부리 Bold(TTF)" pitchFamily="34" charset="-120"/>
-              </a:rPr>
-              <a:t>실시협약</a:t>
-            </a:r>
-            <a:endParaRPr lang="en-US" sz="800" dirty="0"/>
-          </a:p>
-          <a:p>
-            <a:pPr algn="ctr" indent="0" marL="0">
-              <a:buNone/>
-            </a:pPr>
-            <a:r>
-              <a:rPr lang="en-US" sz="700" dirty="0">
-                <a:solidFill>
-                  <a:srgbClr val="595959"/>
-                </a:solidFill>
-                <a:latin typeface="신세계 민부리 Light(TTF)" pitchFamily="34" charset="0"/>
-                <a:ea typeface="신세계 민부리 Light(TTF)" pitchFamily="34" charset="-122"/>
-                <a:cs typeface="신세계 민부리 Light(TTF)" pitchFamily="34" charset="-120"/>
-              </a:rPr>
-              <a:t>(협상 160여 회)</a:t>
-            </a:r>
-            <a:endParaRPr lang="en-US" sz="800" dirty="0"/>
-          </a:p>
-        </p:txBody>
-      </p:sp>
-      <p:sp>
-        <p:nvSpPr>
-          <p:cNvPr id="20" name="Case1Step6"/>
-          <p:cNvSpPr/>
-          <p:nvPr/>
-        </p:nvSpPr>
-        <p:spPr>
-          <a:xfrm>
-            <a:off x="5727192" y="5404104"/>
-            <a:ext cx="856488" cy="749808"/>
-          </a:xfrm>
-          <a:prstGeom prst="chevron">
-            <a:avLst/>
-          </a:prstGeom>
-          <a:solidFill>
-            <a:srgbClr val="DCE3EF"/>
-          </a:solidFill>
-          <a:ln w="19050">
-            <a:solidFill>
-              <a:srgbClr val="FFFFFF"/>
-            </a:solidFill>
-            <a:prstDash val="solid"/>
-          </a:ln>
-        </p:spPr>
-      </p:sp>
-      <p:sp>
-        <p:nvSpPr>
-          <p:cNvPr id="21" name="Case1Step6Text"/>
-          <p:cNvSpPr txBox="1"/>
-          <p:nvPr/>
-        </p:nvSpPr>
-        <p:spPr>
-          <a:xfrm>
-            <a:off x="5873496" y="5404104"/>
-            <a:ext cx="582168" cy="749808"/>
-          </a:xfrm>
-          <a:prstGeom prst="rect">
-            <a:avLst/>
-          </a:prstGeom>
-          <a:noFill/>
-          <a:ln/>
-        </p:spPr>
-        <p:txBody>
-          <a:bodyPr wrap="square" lIns="0" tIns="0" rIns="0" bIns="0" rtlCol="0" anchor="ctr"/>
-          <a:lstStyle/>
-          <a:p>
-            <a:pPr algn="ctr" indent="0" marL="0">
-              <a:buNone/>
-            </a:pPr>
-            <a:r>
-              <a:rPr lang="en-US" sz="800" b="1" dirty="0">
-                <a:solidFill>
-                  <a:srgbClr val="1F3A6E"/>
-                </a:solidFill>
-                <a:latin typeface="신세계 민부리 Bold(TTF)" pitchFamily="34" charset="0"/>
-                <a:ea typeface="신세계 민부리 Bold(TTF)" pitchFamily="34" charset="-122"/>
-                <a:cs typeface="신세계 민부리 Bold(TTF)" pitchFamily="34" charset="-120"/>
-              </a:rPr>
-              <a:t>’32</a:t>
-            </a:r>
-            <a:endParaRPr lang="en-US" sz="800" dirty="0"/>
-          </a:p>
-          <a:p>
-            <a:pPr algn="ctr" indent="0" marL="0">
-              <a:buNone/>
-            </a:pPr>
-            <a:r>
-              <a:rPr lang="en-US" sz="800" b="1" dirty="0">
-                <a:solidFill>
-                  <a:srgbClr val="262626"/>
-                </a:solidFill>
-                <a:latin typeface="신세계 민부리 Bold(TTF)" pitchFamily="34" charset="0"/>
-                <a:ea typeface="신세계 민부리 Bold(TTF)" pitchFamily="34" charset="-122"/>
-                <a:cs typeface="신세계 민부리 Bold(TTF)" pitchFamily="34" charset="-120"/>
-              </a:rPr>
-              <a:t>준공 목표</a:t>
-            </a:r>
-            <a:endParaRPr lang="en-US" sz="800" dirty="0"/>
-          </a:p>
-        </p:txBody>
-      </p:sp>
-      <p:sp>
-        <p:nvSpPr>
-          <p:cNvPr id="22" name="Case1Lesson"/>
-          <p:cNvSpPr txBox="1"/>
-          <p:nvPr/>
-        </p:nvSpPr>
-        <p:spPr>
-          <a:xfrm>
-            <a:off x="274320" y="6208776"/>
-            <a:ext cx="6309360" cy="420624"/>
-          </a:xfrm>
-          <a:prstGeom prst="rect">
-            <a:avLst/>
-          </a:prstGeom>
-          <a:noFill/>
-          <a:ln/>
-        </p:spPr>
-        <p:txBody>
-          <a:bodyPr wrap="square" lIns="0" tIns="50800" rIns="50800" bIns="0" rtlCol="0" anchor="t"/>
-          <a:lstStyle/>
-          <a:p>
-            <a:pPr indent="0" marL="0">
-              <a:buNone/>
-            </a:pPr>
-            <a:r>
-              <a:rPr lang="en-US" sz="850" b="1" dirty="0">
-                <a:solidFill>
-                  <a:srgbClr val="1F3A6E"/>
-                </a:solidFill>
-                <a:latin typeface="신세계 민부리 Bold(TTF)" pitchFamily="34" charset="0"/>
-                <a:ea typeface="신세계 민부리 Bold(TTF)" pitchFamily="34" charset="-122"/>
-                <a:cs typeface="신세계 민부리 Bold(TTF)" pitchFamily="34" charset="-120"/>
-              </a:rPr>
-              <a:t>→ 시사점  </a:t>
-            </a:r>
-            <a:pPr indent="0" marL="0">
-              <a:buNone/>
-            </a:pPr>
-            <a:r>
-              <a:rPr lang="en-US" sz="850" dirty="0">
-                <a:solidFill>
-                  <a:srgbClr val="262626"/>
-                </a:solidFill>
-                <a:latin typeface="신세계 민부리 Light(TTF)" pitchFamily="34" charset="0"/>
-                <a:ea typeface="신세계 민부리 Light(TTF)" pitchFamily="34" charset="-122"/>
-                <a:cs typeface="신세계 민부리 Light(TTF)" pitchFamily="34" charset="-120"/>
-              </a:rPr>
-              <a:t>최초제안자 (무역협회)도 제3자 공고에서 한화에 밀려 탈락 → 제안 우대점수만으로는 부족, 콘텐츠 차별화 필수 / 제안 → 협약 10년 소요</a:t>
-            </a:r>
-            <a:endParaRPr lang="en-US" sz="850" dirty="0"/>
-          </a:p>
-        </p:txBody>
-      </p:sp>
-      <p:sp>
-        <p:nvSpPr>
-          <p:cNvPr id="23" name="Case2Card"/>
-          <p:cNvSpPr/>
-          <p:nvPr/>
-        </p:nvSpPr>
-        <p:spPr>
-          <a:xfrm>
-            <a:off x="274320" y="6812280"/>
-            <a:ext cx="1325880" cy="749808"/>
-          </a:xfrm>
-          <a:prstGeom prst="rect">
-            <a:avLst/>
-          </a:prstGeom>
-          <a:solidFill>
-            <a:srgbClr val="1F3A6E"/>
-          </a:solidFill>
-          <a:ln w="12700">
-            <a:solidFill>
-              <a:srgbClr val="1F3A6E"/>
-            </a:solidFill>
-            <a:prstDash val="solid"/>
-          </a:ln>
-        </p:spPr>
-      </p:sp>
-      <p:sp>
-        <p:nvSpPr>
-          <p:cNvPr id="24" name="Case2Label"/>
-          <p:cNvSpPr txBox="1"/>
-          <p:nvPr/>
-        </p:nvSpPr>
-        <p:spPr>
-          <a:xfrm>
-            <a:off x="347472" y="6812280"/>
-            <a:ext cx="1216152" cy="749808"/>
-          </a:xfrm>
-          <a:prstGeom prst="rect">
-            <a:avLst/>
-          </a:prstGeom>
-          <a:noFill/>
-          <a:ln/>
-        </p:spPr>
-        <p:txBody>
-          <a:bodyPr wrap="square" lIns="0" tIns="114300" rIns="114300" bIns="0" rtlCol="0" anchor="ctr"/>
-          <a:lstStyle/>
-          <a:p>
-            <a:pPr indent="0" marL="0">
-              <a:buNone/>
-            </a:pPr>
-            <a:r>
-              <a:rPr lang="en-US" sz="1000" b="1" dirty="0">
-                <a:solidFill>
-                  <a:srgbClr val="FFFFFF"/>
-                </a:solidFill>
-                <a:latin typeface="신세계 민부리 Bold(TTF)" pitchFamily="34" charset="0"/>
-                <a:ea typeface="신세계 민부리 Bold(TTF)" pitchFamily="34" charset="-122"/>
-                <a:cs typeface="신세계 민부리 Bold(TTF)" pitchFamily="34" charset="-120"/>
-              </a:rPr>
-              <a:t>서울링 대관람차</a:t>
-            </a:r>
-            <a:endParaRPr lang="en-US" sz="1000" dirty="0"/>
-          </a:p>
-          <a:p>
-            <a:pPr indent="0" marL="0">
-              <a:buNone/>
-            </a:pPr>
-            <a:r>
-              <a:rPr lang="en-US" sz="850" dirty="0">
-                <a:solidFill>
-                  <a:srgbClr val="FFFFFF"/>
-                </a:solidFill>
-                <a:latin typeface="신세계 민부리 Bold(TTF)" pitchFamily="34" charset="0"/>
-                <a:ea typeface="신세계 민부리 Bold(TTF)" pitchFamily="34" charset="-122"/>
-                <a:cs typeface="신세계 민부리 Bold(TTF)" pitchFamily="34" charset="-120"/>
-              </a:rPr>
-              <a:t>BTO · 민간제안</a:t>
-            </a:r>
-            <a:endParaRPr lang="en-US" sz="1000" dirty="0"/>
-          </a:p>
-          <a:p>
-            <a:pPr indent="0" marL="0">
-              <a:buNone/>
-            </a:pPr>
-            <a:r>
-              <a:rPr lang="en-US" sz="750" dirty="0">
-                <a:solidFill>
-                  <a:srgbClr val="FFFFFF"/>
-                </a:solidFill>
-                <a:latin typeface="신세계 민부리 Light(TTF)" pitchFamily="34" charset="0"/>
-                <a:ea typeface="신세계 민부리 Light(TTF)" pitchFamily="34" charset="-122"/>
-                <a:cs typeface="신세계 민부리 Light(TTF)" pitchFamily="34" charset="-120"/>
-              </a:rPr>
-              <a:t>4,000억 → 1.08조</a:t>
-            </a:r>
-            <a:endParaRPr lang="en-US" sz="1000" dirty="0"/>
-          </a:p>
-        </p:txBody>
-      </p:sp>
-      <p:sp>
-        <p:nvSpPr>
-          <p:cNvPr id="25" name="Case2Step1"/>
-          <p:cNvSpPr/>
-          <p:nvPr/>
-        </p:nvSpPr>
-        <p:spPr>
-          <a:xfrm>
-            <a:off x="1673352" y="6812280"/>
-            <a:ext cx="856488" cy="749808"/>
-          </a:xfrm>
-          <a:prstGeom prst="homePlate">
-            <a:avLst/>
-          </a:prstGeom>
-          <a:solidFill>
-            <a:srgbClr val="F2F2F2"/>
-          </a:solidFill>
-          <a:ln w="19050">
-            <a:solidFill>
-              <a:srgbClr val="FFFFFF"/>
-            </a:solidFill>
-            <a:prstDash val="solid"/>
-          </a:ln>
-        </p:spPr>
-      </p:sp>
-      <p:sp>
-        <p:nvSpPr>
-          <p:cNvPr id="26" name="Case2Step1Text"/>
-          <p:cNvSpPr txBox="1"/>
-          <p:nvPr/>
-        </p:nvSpPr>
-        <p:spPr>
-          <a:xfrm>
-            <a:off x="1709928" y="6812280"/>
-            <a:ext cx="582168" cy="749808"/>
-          </a:xfrm>
-          <a:prstGeom prst="rect">
-            <a:avLst/>
-          </a:prstGeom>
-          <a:noFill/>
-          <a:ln/>
-        </p:spPr>
-        <p:txBody>
-          <a:bodyPr wrap="square" lIns="0" tIns="0" rIns="0" bIns="0" rtlCol="0" anchor="ctr"/>
-          <a:lstStyle/>
-          <a:p>
-            <a:pPr algn="ctr" indent="0" marL="0">
-              <a:buNone/>
-            </a:pPr>
-            <a:r>
-              <a:rPr lang="en-US" sz="800" b="1" dirty="0">
-                <a:solidFill>
-                  <a:srgbClr val="1F3A6E"/>
-                </a:solidFill>
-                <a:latin typeface="신세계 민부리 Bold(TTF)" pitchFamily="34" charset="0"/>
-                <a:ea typeface="신세계 민부리 Bold(TTF)" pitchFamily="34" charset="-122"/>
-                <a:cs typeface="신세계 민부리 Bold(TTF)" pitchFamily="34" charset="-120"/>
-              </a:rPr>
-              <a:t>’23.3</a:t>
-            </a:r>
-            <a:endParaRPr lang="en-US" sz="800" dirty="0"/>
-          </a:p>
-          <a:p>
-            <a:pPr algn="ctr" indent="0" marL="0">
-              <a:buNone/>
-            </a:pPr>
-            <a:r>
-              <a:rPr lang="en-US" sz="800" b="1" dirty="0">
-                <a:solidFill>
-                  <a:srgbClr val="262626"/>
-                </a:solidFill>
-                <a:latin typeface="신세계 민부리 Bold(TTF)" pitchFamily="34" charset="0"/>
-                <a:ea typeface="신세계 민부리 Bold(TTF)" pitchFamily="34" charset="-122"/>
-                <a:cs typeface="신세계 민부리 Bold(TTF)" pitchFamily="34" charset="-120"/>
-              </a:rPr>
-              <a:t>구상 발표</a:t>
-            </a:r>
-            <a:endParaRPr lang="en-US" sz="800" dirty="0"/>
-          </a:p>
-          <a:p>
-            <a:pPr algn="ctr" indent="0" marL="0">
-              <a:buNone/>
-            </a:pPr>
-            <a:r>
-              <a:rPr lang="en-US" sz="700" dirty="0">
-                <a:solidFill>
-                  <a:srgbClr val="595959"/>
-                </a:solidFill>
-                <a:latin typeface="신세계 민부리 Light(TTF)" pitchFamily="34" charset="0"/>
-                <a:ea typeface="신세계 민부리 Light(TTF)" pitchFamily="34" charset="-122"/>
-                <a:cs typeface="신세계 민부리 Light(TTF)" pitchFamily="34" charset="-120"/>
-              </a:rPr>
-              <a:t>· 민간 제안</a:t>
-            </a:r>
-            <a:endParaRPr lang="en-US" sz="800" dirty="0"/>
-          </a:p>
-        </p:txBody>
-      </p:sp>
-      <p:sp>
-        <p:nvSpPr>
-          <p:cNvPr id="27" name="Case2Step2"/>
-          <p:cNvSpPr/>
-          <p:nvPr/>
-        </p:nvSpPr>
-        <p:spPr>
-          <a:xfrm>
-            <a:off x="2484120" y="6812280"/>
-            <a:ext cx="856488" cy="749808"/>
-          </a:xfrm>
-          <a:prstGeom prst="chevron">
-            <a:avLst/>
-          </a:prstGeom>
-          <a:solidFill>
-            <a:srgbClr val="F2F2F2"/>
-          </a:solidFill>
-          <a:ln w="19050">
-            <a:solidFill>
-              <a:srgbClr val="FFFFFF"/>
-            </a:solidFill>
-            <a:prstDash val="solid"/>
-          </a:ln>
-        </p:spPr>
-      </p:sp>
-      <p:sp>
-        <p:nvSpPr>
-          <p:cNvPr id="28" name="Case2Step2Text"/>
-          <p:cNvSpPr txBox="1"/>
-          <p:nvPr/>
-        </p:nvSpPr>
-        <p:spPr>
-          <a:xfrm>
-            <a:off x="2630424" y="6812280"/>
-            <a:ext cx="582168" cy="749808"/>
-          </a:xfrm>
-          <a:prstGeom prst="rect">
-            <a:avLst/>
-          </a:prstGeom>
-          <a:noFill/>
-          <a:ln/>
-        </p:spPr>
-        <p:txBody>
-          <a:bodyPr wrap="square" lIns="0" tIns="0" rIns="0" bIns="0" rtlCol="0" anchor="ctr"/>
-          <a:lstStyle/>
-          <a:p>
-            <a:pPr algn="ctr" indent="0" marL="0">
-              <a:buNone/>
-            </a:pPr>
-            <a:r>
-              <a:rPr lang="en-US" sz="800" b="1" dirty="0">
-                <a:solidFill>
-                  <a:srgbClr val="1F3A6E"/>
-                </a:solidFill>
-                <a:latin typeface="신세계 민부리 Bold(TTF)" pitchFamily="34" charset="0"/>
-                <a:ea typeface="신세계 민부리 Bold(TTF)" pitchFamily="34" charset="-122"/>
-                <a:cs typeface="신세계 민부리 Bold(TTF)" pitchFamily="34" charset="-120"/>
-              </a:rPr>
-              <a:t>’23.9</a:t>
-            </a:r>
-            <a:endParaRPr lang="en-US" sz="800" dirty="0"/>
-          </a:p>
-          <a:p>
-            <a:pPr algn="ctr" indent="0" marL="0">
-              <a:buNone/>
-            </a:pPr>
-            <a:r>
-              <a:rPr lang="en-US" sz="800" b="1" dirty="0">
-                <a:solidFill>
-                  <a:srgbClr val="262626"/>
-                </a:solidFill>
-                <a:latin typeface="신세계 민부리 Bold(TTF)" pitchFamily="34" charset="0"/>
-                <a:ea typeface="신세계 민부리 Bold(TTF)" pitchFamily="34" charset="-122"/>
-                <a:cs typeface="신세계 민부리 Bold(TTF)" pitchFamily="34" charset="-120"/>
-              </a:rPr>
-              <a:t>민투심</a:t>
-            </a:r>
-            <a:endParaRPr lang="en-US" sz="800" dirty="0"/>
-          </a:p>
-          <a:p>
-            <a:pPr algn="ctr" indent="0" marL="0">
-              <a:buNone/>
-            </a:pPr>
-            <a:r>
-              <a:rPr lang="en-US" sz="700" dirty="0">
-                <a:solidFill>
-                  <a:srgbClr val="595959"/>
-                </a:solidFill>
-                <a:latin typeface="신세계 민부리 Light(TTF)" pitchFamily="34" charset="0"/>
-                <a:ea typeface="신세계 민부리 Light(TTF)" pitchFamily="34" charset="-122"/>
-                <a:cs typeface="신세계 민부리 Light(TTF)" pitchFamily="34" charset="-120"/>
-              </a:rPr>
-              <a:t>대상시설 인정</a:t>
-            </a:r>
-            <a:endParaRPr lang="en-US" sz="800" dirty="0"/>
-          </a:p>
-        </p:txBody>
-      </p:sp>
-      <p:sp>
-        <p:nvSpPr>
-          <p:cNvPr id="29" name="Case2Step3"/>
-          <p:cNvSpPr/>
-          <p:nvPr/>
-        </p:nvSpPr>
-        <p:spPr>
-          <a:xfrm>
-            <a:off x="3294888" y="6812280"/>
-            <a:ext cx="856488" cy="749808"/>
-          </a:xfrm>
-          <a:prstGeom prst="chevron">
-            <a:avLst/>
-          </a:prstGeom>
-          <a:solidFill>
-            <a:srgbClr val="F2F2F2"/>
-          </a:solidFill>
-          <a:ln w="19050">
-            <a:solidFill>
-              <a:srgbClr val="FFFFFF"/>
-            </a:solidFill>
-            <a:prstDash val="solid"/>
-          </a:ln>
-        </p:spPr>
-      </p:sp>
-      <p:sp>
-        <p:nvSpPr>
-          <p:cNvPr id="30" name="Case2Step3Text"/>
-          <p:cNvSpPr txBox="1"/>
-          <p:nvPr/>
-        </p:nvSpPr>
-        <p:spPr>
-          <a:xfrm>
-            <a:off x="3441192" y="6812280"/>
-            <a:ext cx="582168" cy="749808"/>
-          </a:xfrm>
-          <a:prstGeom prst="rect">
-            <a:avLst/>
-          </a:prstGeom>
-          <a:noFill/>
-          <a:ln/>
-        </p:spPr>
-        <p:txBody>
-          <a:bodyPr wrap="square" lIns="0" tIns="0" rIns="0" bIns="0" rtlCol="0" anchor="ctr"/>
-          <a:lstStyle/>
-          <a:p>
-            <a:pPr algn="ctr" indent="0" marL="0">
-              <a:buNone/>
-            </a:pPr>
-            <a:r>
-              <a:rPr lang="en-US" sz="800" b="1" dirty="0">
-                <a:solidFill>
-                  <a:srgbClr val="1F3A6E"/>
-                </a:solidFill>
-                <a:latin typeface="신세계 민부리 Bold(TTF)" pitchFamily="34" charset="0"/>
-                <a:ea typeface="신세계 민부리 Bold(TTF)" pitchFamily="34" charset="-122"/>
-                <a:cs typeface="신세계 민부리 Bold(TTF)" pitchFamily="34" charset="-120"/>
-              </a:rPr>
-              <a:t>’24~</a:t>
-            </a:r>
-            <a:endParaRPr lang="en-US" sz="800" dirty="0"/>
-          </a:p>
-          <a:p>
-            <a:pPr algn="ctr" indent="0" marL="0">
-              <a:buNone/>
-            </a:pPr>
-            <a:r>
-              <a:rPr lang="en-US" sz="800" b="1" dirty="0">
-                <a:solidFill>
-                  <a:srgbClr val="262626"/>
-                </a:solidFill>
-                <a:latin typeface="신세계 민부리 Bold(TTF)" pitchFamily="34" charset="0"/>
-                <a:ea typeface="신세계 민부리 Bold(TTF)" pitchFamily="34" charset="-122"/>
-                <a:cs typeface="신세계 민부리 Bold(TTF)" pitchFamily="34" charset="-120"/>
-              </a:rPr>
-              <a:t>적격성조사</a:t>
-            </a:r>
-            <a:endParaRPr lang="en-US" sz="800" dirty="0"/>
-          </a:p>
-          <a:p>
-            <a:pPr algn="ctr" indent="0" marL="0">
-              <a:buNone/>
-            </a:pPr>
-            <a:r>
-              <a:rPr lang="en-US" sz="700" dirty="0">
-                <a:solidFill>
-                  <a:srgbClr val="595959"/>
-                </a:solidFill>
-                <a:latin typeface="신세계 민부리 Light(TTF)" pitchFamily="34" charset="0"/>
-                <a:ea typeface="신세계 민부리 Light(TTF)" pitchFamily="34" charset="-122"/>
-                <a:cs typeface="신세계 민부리 Light(TTF)" pitchFamily="34" charset="-120"/>
-              </a:rPr>
-              <a:t>(PIMAC)</a:t>
-            </a:r>
-            <a:endParaRPr lang="en-US" sz="800" dirty="0"/>
-          </a:p>
-        </p:txBody>
-      </p:sp>
-      <p:sp>
-        <p:nvSpPr>
-          <p:cNvPr id="31" name="Case2Step4"/>
-          <p:cNvSpPr/>
-          <p:nvPr/>
-        </p:nvSpPr>
-        <p:spPr>
-          <a:xfrm>
-            <a:off x="4105656" y="6812280"/>
-            <a:ext cx="856488" cy="749808"/>
-          </a:xfrm>
-          <a:prstGeom prst="chevron">
-            <a:avLst/>
-          </a:prstGeom>
-          <a:solidFill>
-            <a:srgbClr val="F2F2F2"/>
-          </a:solidFill>
-          <a:ln w="19050">
-            <a:solidFill>
-              <a:srgbClr val="FFFFFF"/>
-            </a:solidFill>
-            <a:prstDash val="solid"/>
-          </a:ln>
-        </p:spPr>
-      </p:sp>
-      <p:sp>
-        <p:nvSpPr>
-          <p:cNvPr id="32" name="Case2Step4Text"/>
-          <p:cNvSpPr txBox="1"/>
-          <p:nvPr/>
-        </p:nvSpPr>
-        <p:spPr>
-          <a:xfrm>
-            <a:off x="4251960" y="6812280"/>
-            <a:ext cx="582168" cy="749808"/>
-          </a:xfrm>
-          <a:prstGeom prst="rect">
-            <a:avLst/>
-          </a:prstGeom>
-          <a:noFill/>
-          <a:ln/>
-        </p:spPr>
-        <p:txBody>
-          <a:bodyPr wrap="square" lIns="0" tIns="0" rIns="0" bIns="0" rtlCol="0" anchor="ctr"/>
-          <a:lstStyle/>
-          <a:p>
-            <a:pPr algn="ctr" indent="0" marL="0">
-              <a:buNone/>
-            </a:pPr>
-            <a:r>
-              <a:rPr lang="en-US" sz="800" b="1" dirty="0">
-                <a:solidFill>
-                  <a:srgbClr val="1F3A6E"/>
-                </a:solidFill>
-                <a:latin typeface="신세계 민부리 Bold(TTF)" pitchFamily="34" charset="0"/>
-                <a:ea typeface="신세계 민부리 Bold(TTF)" pitchFamily="34" charset="-122"/>
-                <a:cs typeface="신세계 민부리 Bold(TTF)" pitchFamily="34" charset="-120"/>
-              </a:rPr>
-              <a:t>’25.8</a:t>
-            </a:r>
-            <a:endParaRPr lang="en-US" sz="800" dirty="0"/>
-          </a:p>
-          <a:p>
-            <a:pPr algn="ctr" indent="0" marL="0">
-              <a:buNone/>
-            </a:pPr>
-            <a:r>
-              <a:rPr lang="en-US" sz="800" b="1" dirty="0">
-                <a:solidFill>
-                  <a:srgbClr val="262626"/>
-                </a:solidFill>
-                <a:latin typeface="신세계 민부리 Bold(TTF)" pitchFamily="34" charset="0"/>
-                <a:ea typeface="신세계 민부리 Bold(TTF)" pitchFamily="34" charset="-122"/>
-                <a:cs typeface="신세계 민부리 Bold(TTF)" pitchFamily="34" charset="-120"/>
-              </a:rPr>
-              <a:t>민투심 연기</a:t>
-            </a:r>
-            <a:endParaRPr lang="en-US" sz="800" dirty="0"/>
-          </a:p>
-          <a:p>
-            <a:pPr algn="ctr" indent="0" marL="0">
-              <a:buNone/>
-            </a:pPr>
-            <a:r>
-              <a:rPr lang="en-US" sz="700" dirty="0">
-                <a:solidFill>
-                  <a:srgbClr val="595959"/>
-                </a:solidFill>
-                <a:latin typeface="신세계 민부리 Light(TTF)" pitchFamily="34" charset="0"/>
-                <a:ea typeface="신세계 민부리 Light(TTF)" pitchFamily="34" charset="-122"/>
-                <a:cs typeface="신세계 민부리 Light(TTF)" pitchFamily="34" charset="-120"/>
-              </a:rPr>
-              <a:t>(사업비 증가)</a:t>
-            </a:r>
-            <a:endParaRPr lang="en-US" sz="800" dirty="0"/>
-          </a:p>
-        </p:txBody>
-      </p:sp>
-      <p:sp>
-        <p:nvSpPr>
-          <p:cNvPr id="33" name="Case2Step5"/>
-          <p:cNvSpPr/>
-          <p:nvPr/>
-        </p:nvSpPr>
-        <p:spPr>
-          <a:xfrm>
-            <a:off x="4916424" y="6812280"/>
-            <a:ext cx="856488" cy="749808"/>
-          </a:xfrm>
-          <a:prstGeom prst="chevron">
-            <a:avLst/>
-          </a:prstGeom>
-          <a:solidFill>
-            <a:srgbClr val="DCE3EF"/>
-          </a:solidFill>
-          <a:ln w="19050">
-            <a:solidFill>
-              <a:srgbClr val="FFFFFF"/>
-            </a:solidFill>
-            <a:prstDash val="solid"/>
-          </a:ln>
-        </p:spPr>
-      </p:sp>
-      <p:sp>
-        <p:nvSpPr>
-          <p:cNvPr id="34" name="Case2Step5Text"/>
-          <p:cNvSpPr txBox="1"/>
-          <p:nvPr/>
-        </p:nvSpPr>
-        <p:spPr>
-          <a:xfrm>
-            <a:off x="5062728" y="6812280"/>
-            <a:ext cx="582168" cy="749808"/>
-          </a:xfrm>
-          <a:prstGeom prst="rect">
-            <a:avLst/>
-          </a:prstGeom>
-          <a:noFill/>
-          <a:ln/>
-        </p:spPr>
-        <p:txBody>
-          <a:bodyPr wrap="square" lIns="0" tIns="0" rIns="0" bIns="0" rtlCol="0" anchor="ctr"/>
-          <a:lstStyle/>
-          <a:p>
-            <a:pPr algn="ctr" indent="0" marL="0">
-              <a:buNone/>
-            </a:pPr>
-            <a:r>
-              <a:rPr lang="en-US" sz="800" b="1" dirty="0">
-                <a:solidFill>
-                  <a:srgbClr val="1F3A6E"/>
-                </a:solidFill>
-                <a:latin typeface="신세계 민부리 Bold(TTF)" pitchFamily="34" charset="0"/>
-                <a:ea typeface="신세계 민부리 Bold(TTF)" pitchFamily="34" charset="-122"/>
-                <a:cs typeface="신세계 민부리 Bold(TTF)" pitchFamily="34" charset="-120"/>
-              </a:rPr>
-              <a:t>진행 중</a:t>
-            </a:r>
-            <a:endParaRPr lang="en-US" sz="800" dirty="0"/>
-          </a:p>
-          <a:p>
-            <a:pPr algn="ctr" indent="0" marL="0">
-              <a:buNone/>
-            </a:pPr>
-            <a:r>
-              <a:rPr lang="en-US" sz="800" b="1" dirty="0">
-                <a:solidFill>
-                  <a:srgbClr val="262626"/>
-                </a:solidFill>
-                <a:latin typeface="신세계 민부리 Bold(TTF)" pitchFamily="34" charset="0"/>
-                <a:ea typeface="신세계 민부리 Bold(TTF)" pitchFamily="34" charset="-122"/>
-                <a:cs typeface="신세계 민부리 Bold(TTF)" pitchFamily="34" charset="-120"/>
-              </a:rPr>
-              <a:t>제3자 공고</a:t>
-            </a:r>
-            <a:endParaRPr lang="en-US" sz="800" dirty="0"/>
-          </a:p>
-          <a:p>
-            <a:pPr algn="ctr" indent="0" marL="0">
-              <a:buNone/>
-            </a:pPr>
-            <a:r>
-              <a:rPr lang="en-US" sz="700" dirty="0">
-                <a:solidFill>
-                  <a:srgbClr val="595959"/>
-                </a:solidFill>
-                <a:latin typeface="신세계 민부리 Light(TTF)" pitchFamily="34" charset="0"/>
-                <a:ea typeface="신세계 민부리 Light(TTF)" pitchFamily="34" charset="-122"/>
-                <a:cs typeface="신세계 민부리 Light(TTF)" pitchFamily="34" charset="-120"/>
-              </a:rPr>
-              <a:t>→ 우선협상</a:t>
-            </a:r>
-            <a:endParaRPr lang="en-US" sz="800" dirty="0"/>
-          </a:p>
-        </p:txBody>
-      </p:sp>
-      <p:sp>
-        <p:nvSpPr>
-          <p:cNvPr id="35" name="Case2Lesson"/>
-          <p:cNvSpPr txBox="1"/>
-          <p:nvPr/>
-        </p:nvSpPr>
-        <p:spPr>
-          <a:xfrm>
-            <a:off x="274320" y="7616952"/>
-            <a:ext cx="6309360" cy="420624"/>
-          </a:xfrm>
-          <a:prstGeom prst="rect">
-            <a:avLst/>
-          </a:prstGeom>
-          <a:noFill/>
-          <a:ln/>
-        </p:spPr>
-        <p:txBody>
-          <a:bodyPr wrap="square" lIns="0" tIns="50800" rIns="50800" bIns="0" rtlCol="0" anchor="t"/>
-          <a:lstStyle/>
-          <a:p>
-            <a:pPr indent="0" marL="0">
-              <a:buNone/>
-            </a:pPr>
-            <a:r>
-              <a:rPr lang="en-US" sz="850" b="1" dirty="0">
-                <a:solidFill>
-                  <a:srgbClr val="1F3A6E"/>
-                </a:solidFill>
-                <a:latin typeface="신세계 민부리 Bold(TTF)" pitchFamily="34" charset="0"/>
-                <a:ea typeface="신세계 민부리 Bold(TTF)" pitchFamily="34" charset="-122"/>
-                <a:cs typeface="신세계 민부리 Bold(TTF)" pitchFamily="34" charset="-120"/>
-              </a:rPr>
-              <a:t>→ 시사점  </a:t>
-            </a:r>
-            <a:pPr indent="0" marL="0">
-              <a:buNone/>
-            </a:pPr>
-            <a:r>
-              <a:rPr lang="en-US" sz="850" dirty="0">
-                <a:solidFill>
-                  <a:srgbClr val="262626"/>
-                </a:solidFill>
-                <a:latin typeface="신세계 민부리 Light(TTF)" pitchFamily="34" charset="0"/>
-                <a:ea typeface="신세계 민부리 Light(TTF)" pitchFamily="34" charset="-122"/>
-                <a:cs typeface="신세계 민부리 Light(TTF)" pitchFamily="34" charset="-120"/>
-              </a:rPr>
-              <a:t>관람차 같은 비전형 시설도 포괄주의로 민자 대상 인정 → 「세빛섬 + 푸드존 = 공공 수변시설」 논리의 선례 / 사업비 증가 시 재심의로 지연</a:t>
-            </a:r>
-            <a:endParaRPr lang="en-US" sz="850" dirty="0"/>
-          </a:p>
-        </p:txBody>
-      </p:sp>
-      <p:sp>
-        <p:nvSpPr>
-          <p:cNvPr id="36" name="Case3Card"/>
-          <p:cNvSpPr/>
-          <p:nvPr/>
-        </p:nvSpPr>
-        <p:spPr>
-          <a:xfrm>
-            <a:off x="274320" y="8220456"/>
-            <a:ext cx="1325880" cy="749808"/>
-          </a:xfrm>
-          <a:prstGeom prst="rect">
-            <a:avLst/>
-          </a:prstGeom>
-          <a:solidFill>
-            <a:srgbClr val="E2572B"/>
-          </a:solidFill>
-          <a:ln w="12700">
-            <a:solidFill>
-              <a:srgbClr val="E2572B"/>
-            </a:solidFill>
-            <a:prstDash val="solid"/>
-          </a:ln>
-        </p:spPr>
-      </p:sp>
-      <p:sp>
-        <p:nvSpPr>
-          <p:cNvPr id="37" name="Case3Label"/>
-          <p:cNvSpPr txBox="1"/>
-          <p:nvPr/>
-        </p:nvSpPr>
-        <p:spPr>
-          <a:xfrm>
-            <a:off x="347472" y="8220456"/>
-            <a:ext cx="1216152" cy="749808"/>
-          </a:xfrm>
-          <a:prstGeom prst="rect">
-            <a:avLst/>
-          </a:prstGeom>
-          <a:noFill/>
-          <a:ln/>
-        </p:spPr>
-        <p:txBody>
-          <a:bodyPr wrap="square" lIns="0" tIns="114300" rIns="114300" bIns="0" rtlCol="0" anchor="ctr"/>
-          <a:lstStyle/>
-          <a:p>
-            <a:pPr indent="0" marL="0">
-              <a:buNone/>
-            </a:pPr>
-            <a:r>
-              <a:rPr lang="en-US" sz="1000" b="1" dirty="0">
-                <a:solidFill>
-                  <a:srgbClr val="FFFFFF"/>
-                </a:solidFill>
-                <a:latin typeface="신세계 민부리 Bold(TTF)" pitchFamily="34" charset="0"/>
-                <a:ea typeface="신세계 민부리 Bold(TTF)" pitchFamily="34" charset="-122"/>
-                <a:cs typeface="신세계 민부리 Bold(TTF)" pitchFamily="34" charset="-120"/>
-              </a:rPr>
-              <a:t>세빛섬 (現 협약)</a:t>
-            </a:r>
-            <a:endParaRPr lang="en-US" sz="1000" dirty="0"/>
-          </a:p>
-          <a:p>
-            <a:pPr indent="0" marL="0">
-              <a:buNone/>
-            </a:pPr>
-            <a:r>
-              <a:rPr lang="en-US" sz="850" dirty="0">
-                <a:solidFill>
-                  <a:srgbClr val="FFFFFF"/>
-                </a:solidFill>
-                <a:latin typeface="신세계 민부리 Bold(TTF)" pitchFamily="34" charset="0"/>
-                <a:ea typeface="신세계 민부리 Bold(TTF)" pitchFamily="34" charset="-122"/>
-                <a:cs typeface="신세계 민부리 Bold(TTF)" pitchFamily="34" charset="-120"/>
-              </a:rPr>
-              <a:t>BOT · 市 공모</a:t>
-            </a:r>
-            <a:endParaRPr lang="en-US" sz="1000" dirty="0"/>
-          </a:p>
-          <a:p>
-            <a:pPr indent="0" marL="0">
-              <a:buNone/>
-            </a:pPr>
-            <a:r>
-              <a:rPr lang="en-US" sz="750" dirty="0">
-                <a:solidFill>
-                  <a:srgbClr val="FFFFFF"/>
-                </a:solidFill>
-                <a:latin typeface="신세계 민부리 Light(TTF)" pitchFamily="34" charset="0"/>
-                <a:ea typeface="신세계 민부리 Light(TTF)" pitchFamily="34" charset="-122"/>
-                <a:cs typeface="신세계 민부리 Light(TTF)" pitchFamily="34" charset="-120"/>
-              </a:rPr>
-              <a:t>1,390억 · 무상20+유상10년</a:t>
-            </a:r>
-            <a:endParaRPr lang="en-US" sz="1000" dirty="0"/>
-          </a:p>
-        </p:txBody>
-      </p:sp>
-      <p:sp>
-        <p:nvSpPr>
-          <p:cNvPr id="38" name="Case3Step1"/>
-          <p:cNvSpPr/>
-          <p:nvPr/>
-        </p:nvSpPr>
-        <p:spPr>
-          <a:xfrm>
-            <a:off x="1673352" y="8220456"/>
-            <a:ext cx="856488" cy="749808"/>
-          </a:xfrm>
-          <a:prstGeom prst="homePlate">
-            <a:avLst/>
-          </a:prstGeom>
-          <a:solidFill>
-            <a:srgbClr val="F2F2F2"/>
-          </a:solidFill>
-          <a:ln w="19050">
-            <a:solidFill>
-              <a:srgbClr val="FFFFFF"/>
-            </a:solidFill>
-            <a:prstDash val="solid"/>
-          </a:ln>
-        </p:spPr>
-      </p:sp>
-      <p:sp>
-        <p:nvSpPr>
-          <p:cNvPr id="39" name="Case3Step1Text"/>
-          <p:cNvSpPr txBox="1"/>
-          <p:nvPr/>
-        </p:nvSpPr>
-        <p:spPr>
-          <a:xfrm>
-            <a:off x="1709928" y="8220456"/>
-            <a:ext cx="582168" cy="749808"/>
-          </a:xfrm>
-          <a:prstGeom prst="rect">
-            <a:avLst/>
-          </a:prstGeom>
-          <a:noFill/>
-          <a:ln/>
-        </p:spPr>
-        <p:txBody>
-          <a:bodyPr wrap="square" lIns="0" tIns="0" rIns="0" bIns="0" rtlCol="0" anchor="ctr"/>
-          <a:lstStyle/>
-          <a:p>
-            <a:pPr algn="ctr" indent="0" marL="0">
-              <a:buNone/>
-            </a:pPr>
-            <a:r>
-              <a:rPr lang="en-US" sz="800" b="1" dirty="0">
-                <a:solidFill>
-                  <a:srgbClr val="E2572B"/>
-                </a:solidFill>
-                <a:latin typeface="신세계 민부리 Bold(TTF)" pitchFamily="34" charset="0"/>
-                <a:ea typeface="신세계 민부리 Bold(TTF)" pitchFamily="34" charset="-122"/>
-                <a:cs typeface="신세계 민부리 Bold(TTF)" pitchFamily="34" charset="-120"/>
-              </a:rPr>
-              <a:t>’09</a:t>
-            </a:r>
-            <a:endParaRPr lang="en-US" sz="800" dirty="0"/>
-          </a:p>
-          <a:p>
-            <a:pPr algn="ctr" indent="0" marL="0">
-              <a:buNone/>
-            </a:pPr>
-            <a:r>
-              <a:rPr lang="en-US" sz="800" b="1" dirty="0">
-                <a:solidFill>
-                  <a:srgbClr val="262626"/>
-                </a:solidFill>
-                <a:latin typeface="신세계 민부리 Bold(TTF)" pitchFamily="34" charset="0"/>
-                <a:ea typeface="신세계 민부리 Bold(TTF)" pitchFamily="34" charset="-122"/>
-                <a:cs typeface="신세계 민부리 Bold(TTF)" pitchFamily="34" charset="-120"/>
-              </a:rPr>
-              <a:t>협약 체결</a:t>
-            </a:r>
-            <a:endParaRPr lang="en-US" sz="800" dirty="0"/>
-          </a:p>
-          <a:p>
-            <a:pPr algn="ctr" indent="0" marL="0">
-              <a:buNone/>
-            </a:pPr>
-            <a:r>
-              <a:rPr lang="en-US" sz="700" dirty="0">
-                <a:solidFill>
-                  <a:srgbClr val="595959"/>
-                </a:solidFill>
-                <a:latin typeface="신세계 민부리 Light(TTF)" pitchFamily="34" charset="0"/>
-                <a:ea typeface="신세계 민부리 Light(TTF)" pitchFamily="34" charset="-122"/>
-                <a:cs typeface="신세계 민부리 Light(TTF)" pitchFamily="34" charset="-120"/>
-              </a:rPr>
-              <a:t>(플로섬 · 효성)</a:t>
-            </a:r>
-            <a:endParaRPr lang="en-US" sz="800" dirty="0"/>
-          </a:p>
-        </p:txBody>
-      </p:sp>
-      <p:sp>
-        <p:nvSpPr>
-          <p:cNvPr id="40" name="Case3Step2"/>
-          <p:cNvSpPr/>
-          <p:nvPr/>
-        </p:nvSpPr>
-        <p:spPr>
-          <a:xfrm>
-            <a:off x="2484120" y="8220456"/>
-            <a:ext cx="856488" cy="749808"/>
-          </a:xfrm>
-          <a:prstGeom prst="chevron">
-            <a:avLst/>
-          </a:prstGeom>
-          <a:solidFill>
-            <a:srgbClr val="F2F2F2"/>
-          </a:solidFill>
-          <a:ln w="19050">
-            <a:solidFill>
-              <a:srgbClr val="FFFFFF"/>
-            </a:solidFill>
-            <a:prstDash val="solid"/>
-          </a:ln>
-        </p:spPr>
-      </p:sp>
-      <p:sp>
-        <p:nvSpPr>
-          <p:cNvPr id="41" name="Case3Step2Text"/>
-          <p:cNvSpPr txBox="1"/>
-          <p:nvPr/>
-        </p:nvSpPr>
-        <p:spPr>
-          <a:xfrm>
-            <a:off x="2630424" y="8220456"/>
-            <a:ext cx="582168" cy="749808"/>
-          </a:xfrm>
-          <a:prstGeom prst="rect">
-            <a:avLst/>
-          </a:prstGeom>
-          <a:noFill/>
-          <a:ln/>
-        </p:spPr>
-        <p:txBody>
-          <a:bodyPr wrap="square" lIns="0" tIns="0" rIns="0" bIns="0" rtlCol="0" anchor="ctr"/>
-          <a:lstStyle/>
-          <a:p>
-            <a:pPr algn="ctr" indent="0" marL="0">
-              <a:buNone/>
-            </a:pPr>
-            <a:r>
-              <a:rPr lang="en-US" sz="800" b="1" dirty="0">
-                <a:solidFill>
-                  <a:srgbClr val="E2572B"/>
-                </a:solidFill>
-                <a:latin typeface="신세계 민부리 Bold(TTF)" pitchFamily="34" charset="0"/>
-                <a:ea typeface="신세계 민부리 Bold(TTF)" pitchFamily="34" charset="-122"/>
-                <a:cs typeface="신세계 민부리 Bold(TTF)" pitchFamily="34" charset="-120"/>
-              </a:rPr>
-              <a:t>’11</a:t>
-            </a:r>
-            <a:endParaRPr lang="en-US" sz="800" dirty="0"/>
-          </a:p>
-          <a:p>
-            <a:pPr algn="ctr" indent="0" marL="0">
-              <a:buNone/>
-            </a:pPr>
-            <a:r>
-              <a:rPr lang="en-US" sz="800" b="1" dirty="0">
-                <a:solidFill>
-                  <a:srgbClr val="262626"/>
-                </a:solidFill>
-                <a:latin typeface="신세계 민부리 Bold(TTF)" pitchFamily="34" charset="0"/>
-                <a:ea typeface="신세계 민부리 Bold(TTF)" pitchFamily="34" charset="-122"/>
-                <a:cs typeface="신세계 민부리 Bold(TTF)" pitchFamily="34" charset="-120"/>
-              </a:rPr>
-              <a:t>준공</a:t>
-            </a:r>
-            <a:endParaRPr lang="en-US" sz="800" dirty="0"/>
-          </a:p>
-        </p:txBody>
-      </p:sp>
-      <p:sp>
-        <p:nvSpPr>
-          <p:cNvPr id="42" name="Case3Step3"/>
-          <p:cNvSpPr/>
-          <p:nvPr/>
-        </p:nvSpPr>
-        <p:spPr>
-          <a:xfrm>
-            <a:off x="3294888" y="8220456"/>
-            <a:ext cx="856488" cy="749808"/>
-          </a:xfrm>
-          <a:prstGeom prst="chevron">
-            <a:avLst/>
-          </a:prstGeom>
-          <a:solidFill>
-            <a:srgbClr val="F2F2F2"/>
-          </a:solidFill>
-          <a:ln w="19050">
-            <a:solidFill>
-              <a:srgbClr val="FFFFFF"/>
-            </a:solidFill>
-            <a:prstDash val="solid"/>
-          </a:ln>
-        </p:spPr>
-      </p:sp>
-      <p:sp>
-        <p:nvSpPr>
-          <p:cNvPr id="43" name="Case3Step3Text"/>
-          <p:cNvSpPr txBox="1"/>
-          <p:nvPr/>
-        </p:nvSpPr>
-        <p:spPr>
-          <a:xfrm>
-            <a:off x="3441192" y="8220456"/>
-            <a:ext cx="582168" cy="749808"/>
-          </a:xfrm>
-          <a:prstGeom prst="rect">
-            <a:avLst/>
-          </a:prstGeom>
-          <a:noFill/>
-          <a:ln/>
-        </p:spPr>
-        <p:txBody>
-          <a:bodyPr wrap="square" lIns="0" tIns="0" rIns="0" bIns="0" rtlCol="0" anchor="ctr"/>
-          <a:lstStyle/>
-          <a:p>
-            <a:pPr algn="ctr" indent="0" marL="0">
-              <a:buNone/>
-            </a:pPr>
-            <a:r>
-              <a:rPr lang="en-US" sz="800" b="1" dirty="0">
-                <a:solidFill>
-                  <a:srgbClr val="E2572B"/>
-                </a:solidFill>
-                <a:latin typeface="신세계 민부리 Bold(TTF)" pitchFamily="34" charset="0"/>
-                <a:ea typeface="신세계 민부리 Bold(TTF)" pitchFamily="34" charset="-122"/>
-                <a:cs typeface="신세계 민부리 Bold(TTF)" pitchFamily="34" charset="-120"/>
-              </a:rPr>
-              <a:t>’11</a:t>
-            </a:r>
-            <a:endParaRPr lang="en-US" sz="800" dirty="0"/>
-          </a:p>
-          <a:p>
-            <a:pPr algn="ctr" indent="0" marL="0">
-              <a:buNone/>
-            </a:pPr>
-            <a:r>
-              <a:rPr lang="en-US" sz="800" b="1" dirty="0">
-                <a:solidFill>
-                  <a:srgbClr val="262626"/>
-                </a:solidFill>
-                <a:latin typeface="신세계 민부리 Bold(TTF)" pitchFamily="34" charset="0"/>
-                <a:ea typeface="신세계 민부리 Bold(TTF)" pitchFamily="34" charset="-122"/>
-                <a:cs typeface="신세계 민부리 Bold(TTF)" pitchFamily="34" charset="-120"/>
-              </a:rPr>
-              <a:t>市 감사</a:t>
-            </a:r>
-            <a:endParaRPr lang="en-US" sz="800" dirty="0"/>
-          </a:p>
-          <a:p>
-            <a:pPr algn="ctr" indent="0" marL="0">
-              <a:buNone/>
-            </a:pPr>
-            <a:r>
-              <a:rPr lang="en-US" sz="700" dirty="0">
-                <a:solidFill>
-                  <a:srgbClr val="595959"/>
-                </a:solidFill>
-                <a:latin typeface="신세계 민부리 Light(TTF)" pitchFamily="34" charset="0"/>
-                <a:ea typeface="신세계 민부리 Light(TTF)" pitchFamily="34" charset="-122"/>
-                <a:cs typeface="신세계 민부리 Light(TTF)" pitchFamily="34" charset="-120"/>
-              </a:rPr>
-              <a:t>협약 불리 지적</a:t>
-            </a:r>
-            <a:endParaRPr lang="en-US" sz="800" dirty="0"/>
-          </a:p>
-        </p:txBody>
-      </p:sp>
-      <p:sp>
-        <p:nvSpPr>
-          <p:cNvPr id="44" name="Case3Step4"/>
-          <p:cNvSpPr/>
-          <p:nvPr/>
-        </p:nvSpPr>
-        <p:spPr>
-          <a:xfrm>
-            <a:off x="4105656" y="8220456"/>
-            <a:ext cx="856488" cy="749808"/>
-          </a:xfrm>
-          <a:prstGeom prst="chevron">
-            <a:avLst/>
-          </a:prstGeom>
-          <a:solidFill>
-            <a:srgbClr val="F2F2F2"/>
-          </a:solidFill>
-          <a:ln w="19050">
-            <a:solidFill>
-              <a:srgbClr val="FFFFFF"/>
-            </a:solidFill>
-            <a:prstDash val="solid"/>
-          </a:ln>
-        </p:spPr>
-      </p:sp>
-      <p:sp>
-        <p:nvSpPr>
-          <p:cNvPr id="45" name="Case3Step4Text"/>
-          <p:cNvSpPr txBox="1"/>
-          <p:nvPr/>
-        </p:nvSpPr>
-        <p:spPr>
-          <a:xfrm>
-            <a:off x="4251960" y="8220456"/>
-            <a:ext cx="582168" cy="749808"/>
-          </a:xfrm>
-          <a:prstGeom prst="rect">
-            <a:avLst/>
-          </a:prstGeom>
-          <a:noFill/>
-          <a:ln/>
-        </p:spPr>
-        <p:txBody>
-          <a:bodyPr wrap="square" lIns="0" tIns="0" rIns="0" bIns="0" rtlCol="0" anchor="ctr"/>
-          <a:lstStyle/>
-          <a:p>
-            <a:pPr algn="ctr" indent="0" marL="0">
-              <a:buNone/>
-            </a:pPr>
-            <a:r>
-              <a:rPr lang="en-US" sz="800" b="1" dirty="0">
-                <a:solidFill>
-                  <a:srgbClr val="E2572B"/>
-                </a:solidFill>
-                <a:latin typeface="신세계 민부리 Bold(TTF)" pitchFamily="34" charset="0"/>
-                <a:ea typeface="신세계 민부리 Bold(TTF)" pitchFamily="34" charset="-122"/>
-                <a:cs typeface="신세계 민부리 Bold(TTF)" pitchFamily="34" charset="-120"/>
-              </a:rPr>
-              <a:t>’13</a:t>
-            </a:r>
-            <a:endParaRPr lang="en-US" sz="800" dirty="0"/>
-          </a:p>
-          <a:p>
-            <a:pPr algn="ctr" indent="0" marL="0">
-              <a:buNone/>
-            </a:pPr>
-            <a:r>
-              <a:rPr lang="en-US" sz="800" b="1" dirty="0">
-                <a:solidFill>
-                  <a:srgbClr val="262626"/>
-                </a:solidFill>
-                <a:latin typeface="신세계 민부리 Bold(TTF)" pitchFamily="34" charset="0"/>
-                <a:ea typeface="신세계 민부리 Bold(TTF)" pitchFamily="34" charset="-122"/>
-                <a:cs typeface="신세계 민부리 Bold(TTF)" pitchFamily="34" charset="-120"/>
-              </a:rPr>
-              <a:t>협약 정상화</a:t>
-            </a:r>
-            <a:endParaRPr lang="en-US" sz="800" dirty="0"/>
-          </a:p>
-          <a:p>
-            <a:pPr algn="ctr" indent="0" marL="0">
-              <a:buNone/>
-            </a:pPr>
-            <a:r>
-              <a:rPr lang="en-US" sz="700" dirty="0">
-                <a:solidFill>
-                  <a:srgbClr val="595959"/>
-                </a:solidFill>
-                <a:latin typeface="신세계 민부리 Light(TTF)" pitchFamily="34" charset="0"/>
-                <a:ea typeface="신세계 민부리 Light(TTF)" pitchFamily="34" charset="-122"/>
-                <a:cs typeface="신세계 민부리 Light(TTF)" pitchFamily="34" charset="-120"/>
-              </a:rPr>
-              <a:t>무상 30 → 20 + 유상 10</a:t>
-            </a:r>
-            <a:endParaRPr lang="en-US" sz="800" dirty="0"/>
-          </a:p>
-        </p:txBody>
-      </p:sp>
-      <p:sp>
-        <p:nvSpPr>
-          <p:cNvPr id="46" name="Case3Step5"/>
-          <p:cNvSpPr/>
-          <p:nvPr/>
-        </p:nvSpPr>
-        <p:spPr>
-          <a:xfrm>
-            <a:off x="4916424" y="8220456"/>
-            <a:ext cx="856488" cy="749808"/>
-          </a:xfrm>
-          <a:prstGeom prst="chevron">
-            <a:avLst/>
-          </a:prstGeom>
-          <a:solidFill>
-            <a:srgbClr val="F2F2F2"/>
-          </a:solidFill>
-          <a:ln w="19050">
-            <a:solidFill>
-              <a:srgbClr val="FFFFFF"/>
-            </a:solidFill>
-            <a:prstDash val="solid"/>
-          </a:ln>
-        </p:spPr>
-      </p:sp>
-      <p:sp>
-        <p:nvSpPr>
-          <p:cNvPr id="47" name="Case3Step5Text"/>
-          <p:cNvSpPr txBox="1"/>
-          <p:nvPr/>
-        </p:nvSpPr>
-        <p:spPr>
-          <a:xfrm>
-            <a:off x="5062728" y="8220456"/>
-            <a:ext cx="582168" cy="749808"/>
-          </a:xfrm>
-          <a:prstGeom prst="rect">
-            <a:avLst/>
-          </a:prstGeom>
-          <a:noFill/>
-          <a:ln/>
-        </p:spPr>
-        <p:txBody>
-          <a:bodyPr wrap="square" lIns="0" tIns="0" rIns="0" bIns="0" rtlCol="0" anchor="ctr"/>
-          <a:lstStyle/>
-          <a:p>
-            <a:pPr algn="ctr" indent="0" marL="0">
-              <a:buNone/>
-            </a:pPr>
-            <a:r>
-              <a:rPr lang="en-US" sz="800" b="1" dirty="0">
-                <a:solidFill>
-                  <a:srgbClr val="E2572B"/>
-                </a:solidFill>
-                <a:latin typeface="신세계 민부리 Bold(TTF)" pitchFamily="34" charset="0"/>
-                <a:ea typeface="신세계 민부리 Bold(TTF)" pitchFamily="34" charset="-122"/>
-                <a:cs typeface="신세계 민부리 Bold(TTF)" pitchFamily="34" charset="-120"/>
-              </a:rPr>
-              <a:t>’14</a:t>
-            </a:r>
-            <a:endParaRPr lang="en-US" sz="800" dirty="0"/>
-          </a:p>
-          <a:p>
-            <a:pPr algn="ctr" indent="0" marL="0">
-              <a:buNone/>
-            </a:pPr>
-            <a:r>
-              <a:rPr lang="en-US" sz="800" b="1" dirty="0">
-                <a:solidFill>
-                  <a:srgbClr val="262626"/>
-                </a:solidFill>
-                <a:latin typeface="신세계 민부리 Bold(TTF)" pitchFamily="34" charset="0"/>
-                <a:ea typeface="신세계 민부리 Bold(TTF)" pitchFamily="34" charset="-122"/>
-                <a:cs typeface="신세계 민부리 Bold(TTF)" pitchFamily="34" charset="-120"/>
-              </a:rPr>
-              <a:t>전면 개장</a:t>
-            </a:r>
-            <a:endParaRPr lang="en-US" sz="800" dirty="0"/>
-          </a:p>
-        </p:txBody>
-      </p:sp>
-      <p:sp>
-        <p:nvSpPr>
-          <p:cNvPr id="48" name="Case3Step6"/>
-          <p:cNvSpPr/>
-          <p:nvPr/>
-        </p:nvSpPr>
-        <p:spPr>
-          <a:xfrm>
-            <a:off x="5727192" y="8220456"/>
-            <a:ext cx="856488" cy="749808"/>
-          </a:xfrm>
-          <a:prstGeom prst="chevron">
-            <a:avLst/>
-          </a:prstGeom>
-          <a:solidFill>
-            <a:srgbClr val="DCE3EF"/>
-          </a:solidFill>
-          <a:ln w="19050">
-            <a:solidFill>
-              <a:srgbClr val="FFFFFF"/>
-            </a:solidFill>
-            <a:prstDash val="solid"/>
-          </a:ln>
-        </p:spPr>
-      </p:sp>
-      <p:sp>
-        <p:nvSpPr>
-          <p:cNvPr id="49" name="Case3Step6Text"/>
-          <p:cNvSpPr txBox="1"/>
-          <p:nvPr/>
-        </p:nvSpPr>
-        <p:spPr>
-          <a:xfrm>
-            <a:off x="5873496" y="8220456"/>
-            <a:ext cx="582168" cy="749808"/>
-          </a:xfrm>
-          <a:prstGeom prst="rect">
-            <a:avLst/>
-          </a:prstGeom>
-          <a:noFill/>
-          <a:ln/>
-        </p:spPr>
-        <p:txBody>
-          <a:bodyPr wrap="square" lIns="0" tIns="0" rIns="0" bIns="0" rtlCol="0" anchor="ctr"/>
-          <a:lstStyle/>
-          <a:p>
-            <a:pPr algn="ctr" indent="0" marL="0">
-              <a:buNone/>
-            </a:pPr>
-            <a:r>
-              <a:rPr lang="en-US" sz="800" b="1" dirty="0">
-                <a:solidFill>
-                  <a:srgbClr val="E2572B"/>
-                </a:solidFill>
-                <a:latin typeface="신세계 민부리 Bold(TTF)" pitchFamily="34" charset="0"/>
-                <a:ea typeface="신세계 민부리 Bold(TTF)" pitchFamily="34" charset="-122"/>
-                <a:cs typeface="신세계 민부리 Bold(TTF)" pitchFamily="34" charset="-120"/>
-              </a:rPr>
-              <a:t>’34</a:t>
-            </a:r>
-            <a:endParaRPr lang="en-US" sz="800" dirty="0"/>
-          </a:p>
-          <a:p>
-            <a:pPr algn="ctr" indent="0" marL="0">
-              <a:buNone/>
-            </a:pPr>
-            <a:r>
-              <a:rPr lang="en-US" sz="800" b="1" dirty="0">
-                <a:solidFill>
-                  <a:srgbClr val="262626"/>
-                </a:solidFill>
-                <a:latin typeface="신세계 민부리 Bold(TTF)" pitchFamily="34" charset="0"/>
-                <a:ea typeface="신세계 민부리 Bold(TTF)" pitchFamily="34" charset="-122"/>
-                <a:cs typeface="신세계 민부리 Bold(TTF)" pitchFamily="34" charset="-120"/>
-              </a:rPr>
-              <a:t>무상기간 종료</a:t>
-            </a:r>
-            <a:endParaRPr lang="en-US" sz="800" dirty="0"/>
-          </a:p>
-        </p:txBody>
-      </p:sp>
-      <p:sp>
-        <p:nvSpPr>
-          <p:cNvPr id="50" name="Case3Lesson"/>
-          <p:cNvSpPr txBox="1"/>
-          <p:nvPr/>
-        </p:nvSpPr>
-        <p:spPr>
-          <a:xfrm>
-            <a:off x="274320" y="9025128"/>
-            <a:ext cx="6309360" cy="420624"/>
-          </a:xfrm>
-          <a:prstGeom prst="rect">
-            <a:avLst/>
-          </a:prstGeom>
-          <a:noFill/>
-          <a:ln/>
-        </p:spPr>
-        <p:txBody>
-          <a:bodyPr wrap="square" lIns="0" tIns="50800" rIns="50800" bIns="0" rtlCol="0" anchor="t"/>
-          <a:lstStyle/>
-          <a:p>
-            <a:pPr indent="0" marL="0">
-              <a:buNone/>
-            </a:pPr>
-            <a:r>
-              <a:rPr lang="en-US" sz="850" b="1" dirty="0">
-                <a:solidFill>
-                  <a:srgbClr val="E2572B"/>
-                </a:solidFill>
-                <a:latin typeface="신세계 민부리 Bold(TTF)" pitchFamily="34" charset="0"/>
-                <a:ea typeface="신세계 민부리 Bold(TTF)" pitchFamily="34" charset="-122"/>
-                <a:cs typeface="신세계 민부리 Bold(TTF)" pitchFamily="34" charset="-120"/>
-              </a:rPr>
-              <a:t>→ 시사점  </a:t>
-            </a:r>
-            <a:pPr indent="0" marL="0">
-              <a:buNone/>
-            </a:pPr>
-            <a:r>
-              <a:rPr lang="en-US" sz="850" dirty="0">
-                <a:solidFill>
-                  <a:srgbClr val="262626"/>
-                </a:solidFill>
-                <a:latin typeface="신세계 민부리 Light(TTF)" pitchFamily="34" charset="0"/>
-                <a:ea typeface="신세계 민부리 Light(TTF)" pitchFamily="34" charset="-122"/>
-                <a:cs typeface="신세계 민부리 Light(TTF)" pitchFamily="34" charset="-120"/>
-              </a:rPr>
-              <a:t>협약 변경으로 기간을 늘리면 특혜 논란 · 감사 리스크 → 50년 요구 시 공공기여 (시민 개방 · 초과수익 공유)로 정당성 확보 필수</a:t>
-            </a:r>
-            <a:endParaRPr lang="en-US" sz="850" dirty="0"/>
-          </a:p>
-        </p:txBody>
-      </p:sp>
-      <p:sp>
-        <p:nvSpPr>
-          <p:cNvPr id="51" name="Source"/>
-          <p:cNvSpPr txBox="1"/>
-          <p:nvPr/>
-        </p:nvSpPr>
-        <p:spPr>
-          <a:xfrm>
-            <a:off x="274320" y="9537192"/>
+            <a:off x="274320" y="8430768"/>
             <a:ext cx="6309360" cy="164592"/>
           </a:xfrm>
           <a:prstGeom prst="rect">
@@ -6981,7 +6874,7 @@
                 <a:ea typeface="신세계 민부리 Light(TTF)" pitchFamily="34" charset="-122"/>
                 <a:cs typeface="신세계 민부리 Light(TTF)" pitchFamily="34" charset="-120"/>
               </a:rPr>
-              <a:t>＊ 출처 : 서울시 · 기획재정부 보도자료 및 언론 보도 종합 (’26.10 기준), 서울링은 진행 중 사업으로 일정 변동 가능</a:t>
+              <a:t>＊ 출처 : 서울시 · 기획재정부 보도자료 및 언론 보도 종합 (’26.10 기준) / 서울링은 진행 중 사업으로 일정 변동 가능</a:t>
             </a:r>
             <a:endParaRPr lang="en-US" sz="700" dirty="0"/>
           </a:p>

--- a/Appendix_민간투자방식_비교_및_사례.pptx
+++ b/Appendix_민간투자방식_비교_및_사례.pptx
@@ -5147,7 +5147,7 @@
                           <a:ea typeface="신세계 민부리 Bold(TTF)" pitchFamily="34" charset="-122"/>
                           <a:cs typeface="신세계 민부리 Bold(TTF)" pitchFamily="34" charset="-120"/>
                         </a:rPr>
-                        <a:t>세빛섬 (現 협약)</a:t>
+                        <a:t>영등포역 상업시설</a:t>
                       </a:r>
                       <a:endParaRPr lang="en-US" sz="950" dirty="0">
                         <a:latin typeface="신세계 민부리 Bold(TTF)" charset="0"/>
@@ -5194,12 +5194,12 @@
                       <a:tailEnd type="none" w="med" len="med"/>
                     </a:lnB>
                     <a:solidFill>
-                      <a:srgbClr val="E2572B"/>
+                      <a:srgbClr val="1F3A6E"/>
                     </a:solidFill>
                   </a:tcPr>
                 </a:tc>
               </a:tr>
-              <a:tr h="457200">
+              <a:tr h="502920">
                 <a:tc>
                   <a:txBody>
                     <a:bodyPr/>
@@ -5415,7 +5415,7 @@
                           <a:ea typeface="신세계 민부리 Light(TTF)" pitchFamily="34" charset="-122"/>
                           <a:cs typeface="신세계 민부리 Light(TTF)" pitchFamily="34" charset="-120"/>
                         </a:rPr>
-                        <a:t>한강 위 인공섬 3개 (가빛 · 채빛 · 솔빛) + 예빛 — 컨벤션 · 웨딩 · F&amp;B · 전시</a:t>
+                        <a:t>철도 민자역사 내 백화점 (롯데百 영등포점) 등 상업시설 — 국가 귀속 후 재운영</a:t>
                       </a:r>
                       <a:endParaRPr lang="en-US" sz="850" dirty="0">
                         <a:latin typeface="신세계 민부리 Light(TTF)" charset="0"/>
@@ -5464,7 +5464,7 @@
                   </a:tcPr>
                 </a:tc>
               </a:tr>
-              <a:tr h="384048">
+              <a:tr h="457200">
                 <a:tc>
                   <a:txBody>
                     <a:bodyPr/>
@@ -5680,7 +5680,7 @@
                           <a:ea typeface="신세계 민부리 Light(TTF)" pitchFamily="34" charset="-122"/>
                           <a:cs typeface="신세계 민부리 Light(TTF)" pitchFamily="34" charset="-120"/>
                         </a:rPr>
-                        <a:t>서초구 반포한강공원 / 총투자비 1,390억</a:t>
+                        <a:t>영등포구 영등포역사 / 국가철도공단 관리 (국유재산)</a:t>
                       </a:r>
                       <a:endParaRPr lang="en-US" sz="850" dirty="0">
                         <a:latin typeface="신세계 민부리 Light(TTF)" charset="0"/>
@@ -5729,7 +5729,7 @@
                   </a:tcPr>
                 </a:tc>
               </a:tr>
-              <a:tr h="365760">
+              <a:tr h="411480">
                 <a:tc>
                   <a:txBody>
                     <a:bodyPr/>
@@ -5971,7 +5971,7 @@
                           <a:ea typeface="신세계 민부리 Bold(TTF)" pitchFamily="34" charset="-122"/>
                           <a:cs typeface="신세계 민부리 Bold(TTF)" pitchFamily="34" charset="-120"/>
                         </a:rPr>
-                        <a:t>BOT (市 공모)</a:t>
+                        <a:t>민자역사 → 국가 귀속</a:t>
                       </a:r>
                       <a:endParaRPr lang="en-US" sz="850" dirty="0"/>
                     </a:p>
@@ -5988,7 +5988,7 @@
                           <a:ea typeface="신세계 민부리 Light(TTF)" pitchFamily="34" charset="-122"/>
                           <a:cs typeface="신세계 민부리 Light(TTF)" pitchFamily="34" charset="-120"/>
                         </a:rPr>
-                        <a:t>무상 20년 + 유상 10년</a:t>
+                        <a:t>사용허가 5년 + 갱신 (최장 10년)</a:t>
                       </a:r>
                       <a:endParaRPr lang="en-US" sz="850" dirty="0"/>
                     </a:p>
@@ -6033,7 +6033,7 @@
                   </a:tcPr>
                 </a:tc>
               </a:tr>
-              <a:tr h="329184">
+              <a:tr h="365760">
                 <a:tc>
                   <a:txBody>
                     <a:bodyPr/>
@@ -6249,7 +6249,7 @@
                           <a:ea typeface="신세계 민부리 Light(TTF)" pitchFamily="34" charset="-122"/>
                           <a:cs typeface="신세계 민부리 Light(TTF)" pitchFamily="34" charset="-120"/>
                         </a:rPr>
-                        <a:t>㈜세빛섬 (효성 최대주주)</a:t>
+                        <a:t>롯데쇼핑 (기존 운영자 재선정)</a:t>
                       </a:r>
                       <a:endParaRPr lang="en-US" sz="850" dirty="0">
                         <a:latin typeface="신세계 민부리 Light(TTF)" charset="0"/>
@@ -6298,7 +6298,7 @@
                   </a:tcPr>
                 </a:tc>
               </a:tr>
-              <a:tr h="502920">
+              <a:tr h="658368">
                 <a:tc>
                   <a:txBody>
                     <a:bodyPr/>
@@ -6514,7 +6514,7 @@
                           <a:ea typeface="신세계 민부리 Light(TTF)" pitchFamily="34" charset="-122"/>
                           <a:cs typeface="신세계 민부리 Light(TTF)" pitchFamily="34" charset="-120"/>
                         </a:rPr>
-                        <a:t>’09 협약 → ’11 준공 · 市 감사 (협약 불리 지적) → ’13 협약 정상화 → ’14 전면 개장</a:t>
+                        <a:t>’87 민자역사 개장 → ’17.12 점용허가 30년 만료 · 국가 귀속 → ’19 공모, 롯데 재낙찰 → ’26.9 재입찰로 10년 사용권 확보</a:t>
                       </a:r>
                       <a:endParaRPr lang="en-US" sz="850" dirty="0">
                         <a:latin typeface="신세계 민부리 Light(TTF)" charset="0"/>
@@ -6563,7 +6563,7 @@
                   </a:tcPr>
                 </a:tc>
               </a:tr>
-              <a:tr h="502920">
+              <a:tr h="566928">
                 <a:tc>
                   <a:txBody>
                     <a:bodyPr/>
@@ -6785,7 +6785,7 @@
                           <a:ea typeface="신세계 민부리 Light(TTF)" pitchFamily="34" charset="-122"/>
                           <a:cs typeface="신세계 민부리 Light(TTF)" pitchFamily="34" charset="-120"/>
                         </a:rPr>
-                        <a:t>기간 연장이 특혜 논란 · 감사로 이어진 이력 → 50년 요구 시 공공기여로 정당성 확보 필수</a:t>
+                        <a:t>재공모 (사용허가) 방식은 최장 10년 수준 → 세빛섬은 민투법 경로로 50년 확보 필요</a:t>
                       </a:r>
                       <a:endParaRPr lang="en-US" sz="850" dirty="0">
                         <a:latin typeface="신세계 민부리 Light(TTF)" charset="0"/>
@@ -6849,7 +6849,7 @@
         </p:nvSpPr>
         <p:spPr>
           <a:xfrm>
-            <a:off x="274320" y="8430768"/>
+            <a:off x="274320" y="8732520"/>
             <a:ext cx="6309360" cy="164592"/>
           </a:xfrm>
           <a:prstGeom prst="rect">

--- a/Appendix_민간투자방식_비교_및_사례.pptx
+++ b/Appendix_민간투자방식_비교_및_사례.pptx
@@ -976,16 +976,19 @@
             <a:tbl>
               <a:tblPr/>
               <a:tblGrid>
-                <a:gridCol w="713232"/>
-                <a:gridCol w="1261872"/>
-                <a:gridCol w="1024128"/>
-                <a:gridCol w="1005840"/>
-                <a:gridCol w="978408"/>
-                <a:gridCol w="1005840"/>
-                <a:gridCol w="320040"/>
+                <a:gridCol w="411480"/>
+                <a:gridCol w="640080"/>
+                <a:gridCol w="457200"/>
+                <a:gridCol w="548640"/>
+                <a:gridCol w="457200"/>
+                <a:gridCol w="621792"/>
+                <a:gridCol w="548640"/>
+                <a:gridCol w="868680"/>
+                <a:gridCol w="877824"/>
+                <a:gridCol w="877824"/>
               </a:tblGrid>
-              <a:tr h="292608">
-                <a:tc>
+              <a:tr h="219456">
+                <a:tc rowSpan="2">
                   <a:txBody>
                     <a:bodyPr/>
                     <a:lstStyle/>
@@ -1002,7 +1005,7 @@
                           <a:ea typeface="신세계 민부리 Bold(TTF)" pitchFamily="34" charset="-122"/>
                           <a:cs typeface="신세계 민부리 Bold(TTF)" pitchFamily="34" charset="-120"/>
                         </a:rPr>
-                        <a:t>방 식</a:t>
+                        <a:t>구분</a:t>
                       </a:r>
                       <a:endParaRPr lang="en-US" sz="850" dirty="0">
                         <a:latin typeface="신세계 민부리 Bold(TTF)" charset="0"/>
@@ -1011,7 +1014,7 @@
                       </a:endParaRPr>
                     </a:p>
                   </a:txBody>
-                  <a:tcPr marL="45720" marR="45720" marT="18288" marB="18288" anchor="ctr">
+                  <a:tcPr marL="36576" marR="36576" marT="18288" marB="18288" anchor="ctr">
                     <a:lnL w="6350" cap="flat" cmpd="sng" algn="ctr">
                       <a:solidFill>
                         <a:srgbClr val="BFBFBF"/>
@@ -1053,7 +1056,7 @@
                     </a:solidFill>
                   </a:tcPr>
                 </a:tc>
-                <a:tc>
+                <a:tc rowSpan="2">
                   <a:txBody>
                     <a:bodyPr/>
                     <a:lstStyle/>
@@ -1070,7 +1073,7 @@
                           <a:ea typeface="신세계 민부리 Bold(TTF)" pitchFamily="34" charset="-122"/>
                           <a:cs typeface="신세계 민부리 Bold(TTF)" pitchFamily="34" charset="-120"/>
                         </a:rPr>
-                        <a:t>구 조 (소유권 · 운영)</a:t>
+                        <a:t>방 식</a:t>
                       </a:r>
                       <a:endParaRPr lang="en-US" sz="850" dirty="0">
                         <a:latin typeface="신세계 민부리 Bold(TTF)" charset="0"/>
@@ -1079,7 +1082,7 @@
                       </a:endParaRPr>
                     </a:p>
                   </a:txBody>
-                  <a:tcPr marL="45720" marR="45720" marT="18288" marB="18288" anchor="ctr">
+                  <a:tcPr marL="36576" marR="36576" marT="18288" marB="18288" anchor="ctr">
                     <a:lnL w="6350" cap="flat" cmpd="sng" algn="ctr">
                       <a:solidFill>
                         <a:srgbClr val="BFBFBF"/>
@@ -1121,7 +1124,7 @@
                     </a:solidFill>
                   </a:tcPr>
                 </a:tc>
-                <a:tc>
+                <a:tc gridSpan="3">
                   <a:txBody>
                     <a:bodyPr/>
                     <a:lstStyle/>
@@ -1138,7 +1141,7 @@
                           <a:ea typeface="신세계 민부리 Bold(TTF)" pitchFamily="34" charset="-122"/>
                           <a:cs typeface="신세계 민부리 Bold(TTF)" pitchFamily="34" charset="-120"/>
                         </a:rPr>
-                        <a:t>투자비 회수 · 위험</a:t>
+                        <a:t>구 조</a:t>
                       </a:r>
                       <a:endParaRPr lang="en-US" sz="850" dirty="0">
                         <a:latin typeface="신세계 민부리 Bold(TTF)" charset="0"/>
@@ -1147,7 +1150,7 @@
                       </a:endParaRPr>
                     </a:p>
                   </a:txBody>
-                  <a:tcPr marL="45720" marR="45720" marT="18288" marB="18288" anchor="ctr">
+                  <a:tcPr marL="36576" marR="36576" marT="18288" marB="18288" anchor="ctr">
                     <a:lnL w="6350" cap="flat" cmpd="sng" algn="ctr">
                       <a:solidFill>
                         <a:srgbClr val="BFBFBF"/>
@@ -1189,7 +1192,13 @@
                     </a:solidFill>
                   </a:tcPr>
                 </a:tc>
-                <a:tc>
+                <a:tc hMerge="1">
+                  <a:tcPr/>
+                </a:tc>
+                <a:tc hMerge="1">
+                  <a:tcPr/>
+                </a:tc>
+                <a:tc gridSpan="2">
                   <a:txBody>
                     <a:bodyPr/>
                     <a:lstStyle/>
@@ -1206,7 +1215,7 @@
                           <a:ea typeface="신세계 민부리 Bold(TTF)" pitchFamily="34" charset="-122"/>
                           <a:cs typeface="신세계 민부리 Bold(TTF)" pitchFamily="34" charset="-120"/>
                         </a:rPr>
-                        <a:t>주요 대상 · 사례</a:t>
+                        <a:t>투자비 회수 · 위험</a:t>
                       </a:r>
                       <a:endParaRPr lang="en-US" sz="850" dirty="0">
                         <a:latin typeface="신세계 민부리 Bold(TTF)" charset="0"/>
@@ -1215,7 +1224,7 @@
                       </a:endParaRPr>
                     </a:p>
                   </a:txBody>
-                  <a:tcPr marL="45720" marR="45720" marT="18288" marB="18288" anchor="ctr">
+                  <a:tcPr marL="36576" marR="36576" marT="18288" marB="18288" anchor="ctr">
                     <a:lnL w="6350" cap="flat" cmpd="sng" algn="ctr">
                       <a:solidFill>
                         <a:srgbClr val="BFBFBF"/>
@@ -1257,7 +1266,10 @@
                     </a:solidFill>
                   </a:tcPr>
                 </a:tc>
-                <a:tc>
+                <a:tc hMerge="1">
+                  <a:tcPr/>
+                </a:tc>
+                <a:tc rowSpan="2">
                   <a:txBody>
                     <a:bodyPr/>
                     <a:lstStyle/>
@@ -1274,7 +1286,7 @@
                           <a:ea typeface="신세계 민부리 Bold(TTF)" pitchFamily="34" charset="-122"/>
                           <a:cs typeface="신세계 민부리 Bold(TTF)" pitchFamily="34" charset="-120"/>
                         </a:rPr>
-                        <a:t>장 점</a:t>
+                        <a:t>주요 대상 · 사례</a:t>
                       </a:r>
                       <a:endParaRPr lang="en-US" sz="850" dirty="0">
                         <a:latin typeface="신세계 민부리 Bold(TTF)" charset="0"/>
@@ -1283,7 +1295,7 @@
                       </a:endParaRPr>
                     </a:p>
                   </a:txBody>
-                  <a:tcPr marL="45720" marR="45720" marT="18288" marB="18288" anchor="ctr">
+                  <a:tcPr marL="36576" marR="36576" marT="18288" marB="18288" anchor="ctr">
                     <a:lnL w="6350" cap="flat" cmpd="sng" algn="ctr">
                       <a:solidFill>
                         <a:srgbClr val="BFBFBF"/>
@@ -1325,7 +1337,7 @@
                     </a:solidFill>
                   </a:tcPr>
                 </a:tc>
-                <a:tc>
+                <a:tc rowSpan="2">
                   <a:txBody>
                     <a:bodyPr/>
                     <a:lstStyle/>
@@ -1342,7 +1354,7 @@
                           <a:ea typeface="신세계 민부리 Bold(TTF)" pitchFamily="34" charset="-122"/>
                           <a:cs typeface="신세계 민부리 Bold(TTF)" pitchFamily="34" charset="-120"/>
                         </a:rPr>
-                        <a:t>단 점</a:t>
+                        <a:t>장 점</a:t>
                       </a:r>
                       <a:endParaRPr lang="en-US" sz="850" dirty="0">
                         <a:latin typeface="신세계 민부리 Bold(TTF)" charset="0"/>
@@ -1351,7 +1363,7 @@
                       </a:endParaRPr>
                     </a:p>
                   </a:txBody>
-                  <a:tcPr marL="45720" marR="45720" marT="18288" marB="18288" anchor="ctr">
+                  <a:tcPr marL="36576" marR="36576" marT="18288" marB="18288" anchor="ctr">
                     <a:lnL w="6350" cap="flat" cmpd="sng" algn="ctr">
                       <a:solidFill>
                         <a:srgbClr val="BFBFBF"/>
@@ -1393,7 +1405,7 @@
                     </a:solidFill>
                   </a:tcPr>
                 </a:tc>
-                <a:tc>
+                <a:tc rowSpan="2">
                   <a:txBody>
                     <a:bodyPr/>
                     <a:lstStyle/>
@@ -1410,7 +1422,7 @@
                           <a:ea typeface="신세계 민부리 Bold(TTF)" pitchFamily="34" charset="-122"/>
                           <a:cs typeface="신세계 민부리 Bold(TTF)" pitchFamily="34" charset="-120"/>
                         </a:rPr>
-                        <a:t>적합</a:t>
+                        <a:t>단 점</a:t>
                       </a:r>
                       <a:endParaRPr lang="en-US" sz="850" dirty="0">
                         <a:latin typeface="신세계 민부리 Bold(TTF)" charset="0"/>
@@ -1419,7 +1431,7 @@
                       </a:endParaRPr>
                     </a:p>
                   </a:txBody>
-                  <a:tcPr marL="45720" marR="45720" marT="18288" marB="18288" anchor="ctr">
+                  <a:tcPr marL="36576" marR="36576" marT="18288" marB="18288" anchor="ctr">
                     <a:lnL w="6350" cap="flat" cmpd="sng" algn="ctr">
                       <a:solidFill>
                         <a:srgbClr val="BFBFBF"/>
@@ -1462,7 +1474,13 @@
                   </a:tcPr>
                 </a:tc>
               </a:tr>
-              <a:tr h="438912">
+              <a:tr h="219456">
+                <a:tc vMerge="1">
+                  <a:tcPr/>
+                </a:tc>
+                <a:tc vMerge="1">
+                  <a:tcPr/>
+                </a:tc>
                 <a:tc>
                   <a:txBody>
                     <a:bodyPr/>
@@ -1472,34 +1490,375 @@
                         <a:buNone/>
                       </a:pPr>
                       <a:r>
-                        <a:rPr lang="en-US" sz="900" b="1" dirty="0">
-                          <a:solidFill>
-                            <a:srgbClr val="000000"/>
+                        <a:rPr lang="en-US" sz="800" b="1" dirty="0">
+                          <a:solidFill>
+                            <a:srgbClr val="262626"/>
                           </a:solidFill>
                           <a:latin typeface="신세계 민부리 Bold(TTF)" pitchFamily="34" charset="0"/>
                           <a:ea typeface="신세계 민부리 Bold(TTF)" pitchFamily="34" charset="-122"/>
                           <a:cs typeface="신세계 민부리 Bold(TTF)" pitchFamily="34" charset="-120"/>
                         </a:rPr>
-                        <a:t>BTO</a:t>
-                      </a:r>
-                      <a:endParaRPr lang="en-US" sz="1200" dirty="0"/>
-                    </a:p>
+                        <a:t>개발</a:t>
+                      </a:r>
+                      <a:endParaRPr lang="en-US" sz="800" dirty="0">
+                        <a:latin typeface="신세계 민부리 Bold(TTF)" charset="0"/>
+                        <a:ea typeface="신세계 민부리 Bold(TTF)" charset="0"/>
+                        <a:cs typeface="신세계 민부리 Bold(TTF)" charset="0"/>
+                      </a:endParaRPr>
+                    </a:p>
+                  </a:txBody>
+                  <a:tcPr marL="36576" marR="36576" marT="18288" marB="18288" anchor="ctr">
+                    <a:lnL w="6350" cap="flat" cmpd="sng" algn="ctr">
+                      <a:solidFill>
+                        <a:srgbClr val="BFBFBF"/>
+                      </a:solidFill>
+                      <a:prstDash val="solid"/>
+                      <a:round/>
+                      <a:headEnd type="none" w="med" len="med"/>
+                      <a:tailEnd type="none" w="med" len="med"/>
+                    </a:lnL>
+                    <a:lnR w="6350" cap="flat" cmpd="sng" algn="ctr">
+                      <a:solidFill>
+                        <a:srgbClr val="BFBFBF"/>
+                      </a:solidFill>
+                      <a:prstDash val="solid"/>
+                      <a:round/>
+                      <a:headEnd type="none" w="med" len="med"/>
+                      <a:tailEnd type="none" w="med" len="med"/>
+                    </a:lnR>
+                    <a:lnT w="6350" cap="flat" cmpd="sng" algn="ctr">
+                      <a:solidFill>
+                        <a:srgbClr val="BFBFBF"/>
+                      </a:solidFill>
+                      <a:prstDash val="solid"/>
+                      <a:round/>
+                      <a:headEnd type="none" w="med" len="med"/>
+                      <a:tailEnd type="none" w="med" len="med"/>
+                    </a:lnT>
+                    <a:lnB w="6350" cap="flat" cmpd="sng" algn="ctr">
+                      <a:solidFill>
+                        <a:srgbClr val="BFBFBF"/>
+                      </a:solidFill>
+                      <a:prstDash val="solid"/>
+                      <a:round/>
+                      <a:headEnd type="none" w="med" len="med"/>
+                      <a:tailEnd type="none" w="med" len="med"/>
+                    </a:lnB>
+                    <a:solidFill>
+                      <a:srgbClr val="DCE3EF"/>
+                    </a:solidFill>
+                  </a:tcPr>
+                </a:tc>
+                <a:tc>
+                  <a:txBody>
+                    <a:bodyPr/>
+                    <a:lstStyle/>
                     <a:p>
                       <a:pPr algn="ctr" indent="0" marL="0">
                         <a:buNone/>
                       </a:pPr>
                       <a:r>
-                        <a:rPr lang="en-US" sz="750" dirty="0">
-                          <a:solidFill>
-                            <a:srgbClr val="595959"/>
-                          </a:solidFill>
-                        </a:rPr>
-                        <a:t>수익형</a:t>
-                      </a:r>
-                      <a:endParaRPr lang="en-US" sz="1200" dirty="0"/>
-                    </a:p>
-                  </a:txBody>
-                  <a:tcPr marL="45720" marR="45720" marT="18288" marB="18288" anchor="ctr">
+                        <a:rPr lang="en-US" sz="800" b="1" dirty="0">
+                          <a:solidFill>
+                            <a:srgbClr val="262626"/>
+                          </a:solidFill>
+                          <a:latin typeface="신세계 민부리 Bold(TTF)" pitchFamily="34" charset="0"/>
+                          <a:ea typeface="신세계 민부리 Bold(TTF)" pitchFamily="34" charset="-122"/>
+                          <a:cs typeface="신세계 민부리 Bold(TTF)" pitchFamily="34" charset="-120"/>
+                        </a:rPr>
+                        <a:t>소유</a:t>
+                      </a:r>
+                      <a:endParaRPr lang="en-US" sz="800" dirty="0">
+                        <a:latin typeface="신세계 민부리 Bold(TTF)" charset="0"/>
+                        <a:ea typeface="신세계 민부리 Bold(TTF)" charset="0"/>
+                        <a:cs typeface="신세계 민부리 Bold(TTF)" charset="0"/>
+                      </a:endParaRPr>
+                    </a:p>
+                  </a:txBody>
+                  <a:tcPr marL="36576" marR="36576" marT="18288" marB="18288" anchor="ctr">
+                    <a:lnL w="6350" cap="flat" cmpd="sng" algn="ctr">
+                      <a:solidFill>
+                        <a:srgbClr val="BFBFBF"/>
+                      </a:solidFill>
+                      <a:prstDash val="solid"/>
+                      <a:round/>
+                      <a:headEnd type="none" w="med" len="med"/>
+                      <a:tailEnd type="none" w="med" len="med"/>
+                    </a:lnL>
+                    <a:lnR w="6350" cap="flat" cmpd="sng" algn="ctr">
+                      <a:solidFill>
+                        <a:srgbClr val="BFBFBF"/>
+                      </a:solidFill>
+                      <a:prstDash val="solid"/>
+                      <a:round/>
+                      <a:headEnd type="none" w="med" len="med"/>
+                      <a:tailEnd type="none" w="med" len="med"/>
+                    </a:lnR>
+                    <a:lnT w="6350" cap="flat" cmpd="sng" algn="ctr">
+                      <a:solidFill>
+                        <a:srgbClr val="BFBFBF"/>
+                      </a:solidFill>
+                      <a:prstDash val="solid"/>
+                      <a:round/>
+                      <a:headEnd type="none" w="med" len="med"/>
+                      <a:tailEnd type="none" w="med" len="med"/>
+                    </a:lnT>
+                    <a:lnB w="6350" cap="flat" cmpd="sng" algn="ctr">
+                      <a:solidFill>
+                        <a:srgbClr val="BFBFBF"/>
+                      </a:solidFill>
+                      <a:prstDash val="solid"/>
+                      <a:round/>
+                      <a:headEnd type="none" w="med" len="med"/>
+                      <a:tailEnd type="none" w="med" len="med"/>
+                    </a:lnB>
+                    <a:solidFill>
+                      <a:srgbClr val="DCE3EF"/>
+                    </a:solidFill>
+                  </a:tcPr>
+                </a:tc>
+                <a:tc>
+                  <a:txBody>
+                    <a:bodyPr/>
+                    <a:lstStyle/>
+                    <a:p>
+                      <a:pPr algn="ctr" indent="0" marL="0">
+                        <a:buNone/>
+                      </a:pPr>
+                      <a:r>
+                        <a:rPr lang="en-US" sz="800" b="1" dirty="0">
+                          <a:solidFill>
+                            <a:srgbClr val="262626"/>
+                          </a:solidFill>
+                          <a:latin typeface="신세계 민부리 Bold(TTF)" pitchFamily="34" charset="0"/>
+                          <a:ea typeface="신세계 민부리 Bold(TTF)" pitchFamily="34" charset="-122"/>
+                          <a:cs typeface="신세계 민부리 Bold(TTF)" pitchFamily="34" charset="-120"/>
+                        </a:rPr>
+                        <a:t>운영</a:t>
+                      </a:r>
+                      <a:endParaRPr lang="en-US" sz="800" dirty="0">
+                        <a:latin typeface="신세계 민부리 Bold(TTF)" charset="0"/>
+                        <a:ea typeface="신세계 민부리 Bold(TTF)" charset="0"/>
+                        <a:cs typeface="신세계 민부리 Bold(TTF)" charset="0"/>
+                      </a:endParaRPr>
+                    </a:p>
+                  </a:txBody>
+                  <a:tcPr marL="36576" marR="36576" marT="18288" marB="18288" anchor="ctr">
+                    <a:lnL w="6350" cap="flat" cmpd="sng" algn="ctr">
+                      <a:solidFill>
+                        <a:srgbClr val="BFBFBF"/>
+                      </a:solidFill>
+                      <a:prstDash val="solid"/>
+                      <a:round/>
+                      <a:headEnd type="none" w="med" len="med"/>
+                      <a:tailEnd type="none" w="med" len="med"/>
+                    </a:lnL>
+                    <a:lnR w="6350" cap="flat" cmpd="sng" algn="ctr">
+                      <a:solidFill>
+                        <a:srgbClr val="BFBFBF"/>
+                      </a:solidFill>
+                      <a:prstDash val="solid"/>
+                      <a:round/>
+                      <a:headEnd type="none" w="med" len="med"/>
+                      <a:tailEnd type="none" w="med" len="med"/>
+                    </a:lnR>
+                    <a:lnT w="6350" cap="flat" cmpd="sng" algn="ctr">
+                      <a:solidFill>
+                        <a:srgbClr val="BFBFBF"/>
+                      </a:solidFill>
+                      <a:prstDash val="solid"/>
+                      <a:round/>
+                      <a:headEnd type="none" w="med" len="med"/>
+                      <a:tailEnd type="none" w="med" len="med"/>
+                    </a:lnT>
+                    <a:lnB w="6350" cap="flat" cmpd="sng" algn="ctr">
+                      <a:solidFill>
+                        <a:srgbClr val="BFBFBF"/>
+                      </a:solidFill>
+                      <a:prstDash val="solid"/>
+                      <a:round/>
+                      <a:headEnd type="none" w="med" len="med"/>
+                      <a:tailEnd type="none" w="med" len="med"/>
+                    </a:lnB>
+                    <a:solidFill>
+                      <a:srgbClr val="DCE3EF"/>
+                    </a:solidFill>
+                  </a:tcPr>
+                </a:tc>
+                <a:tc>
+                  <a:txBody>
+                    <a:bodyPr/>
+                    <a:lstStyle/>
+                    <a:p>
+                      <a:pPr algn="ctr" indent="0" marL="0">
+                        <a:buNone/>
+                      </a:pPr>
+                      <a:r>
+                        <a:rPr lang="en-US" sz="800" b="1" dirty="0">
+                          <a:solidFill>
+                            <a:srgbClr val="262626"/>
+                          </a:solidFill>
+                          <a:latin typeface="신세계 민부리 Bold(TTF)" pitchFamily="34" charset="0"/>
+                          <a:ea typeface="신세계 민부리 Bold(TTF)" pitchFamily="34" charset="-122"/>
+                          <a:cs typeface="신세계 민부리 Bold(TTF)" pitchFamily="34" charset="-120"/>
+                        </a:rPr>
+                        <a:t>수익</a:t>
+                      </a:r>
+                      <a:endParaRPr lang="en-US" sz="800" dirty="0">
+                        <a:latin typeface="신세계 민부리 Bold(TTF)" charset="0"/>
+                        <a:ea typeface="신세계 민부리 Bold(TTF)" charset="0"/>
+                        <a:cs typeface="신세계 민부리 Bold(TTF)" charset="0"/>
+                      </a:endParaRPr>
+                    </a:p>
+                  </a:txBody>
+                  <a:tcPr marL="36576" marR="36576" marT="18288" marB="18288" anchor="ctr">
+                    <a:lnL w="6350" cap="flat" cmpd="sng" algn="ctr">
+                      <a:solidFill>
+                        <a:srgbClr val="BFBFBF"/>
+                      </a:solidFill>
+                      <a:prstDash val="solid"/>
+                      <a:round/>
+                      <a:headEnd type="none" w="med" len="med"/>
+                      <a:tailEnd type="none" w="med" len="med"/>
+                    </a:lnL>
+                    <a:lnR w="6350" cap="flat" cmpd="sng" algn="ctr">
+                      <a:solidFill>
+                        <a:srgbClr val="BFBFBF"/>
+                      </a:solidFill>
+                      <a:prstDash val="solid"/>
+                      <a:round/>
+                      <a:headEnd type="none" w="med" len="med"/>
+                      <a:tailEnd type="none" w="med" len="med"/>
+                    </a:lnR>
+                    <a:lnT w="6350" cap="flat" cmpd="sng" algn="ctr">
+                      <a:solidFill>
+                        <a:srgbClr val="BFBFBF"/>
+                      </a:solidFill>
+                      <a:prstDash val="solid"/>
+                      <a:round/>
+                      <a:headEnd type="none" w="med" len="med"/>
+                      <a:tailEnd type="none" w="med" len="med"/>
+                    </a:lnT>
+                    <a:lnB w="6350" cap="flat" cmpd="sng" algn="ctr">
+                      <a:solidFill>
+                        <a:srgbClr val="BFBFBF"/>
+                      </a:solidFill>
+                      <a:prstDash val="solid"/>
+                      <a:round/>
+                      <a:headEnd type="none" w="med" len="med"/>
+                      <a:tailEnd type="none" w="med" len="med"/>
+                    </a:lnB>
+                    <a:solidFill>
+                      <a:srgbClr val="DCE3EF"/>
+                    </a:solidFill>
+                  </a:tcPr>
+                </a:tc>
+                <a:tc>
+                  <a:txBody>
+                    <a:bodyPr/>
+                    <a:lstStyle/>
+                    <a:p>
+                      <a:pPr algn="ctr" indent="0" marL="0">
+                        <a:buNone/>
+                      </a:pPr>
+                      <a:r>
+                        <a:rPr lang="en-US" sz="800" b="1" dirty="0">
+                          <a:solidFill>
+                            <a:srgbClr val="262626"/>
+                          </a:solidFill>
+                          <a:latin typeface="신세계 민부리 Bold(TTF)" pitchFamily="34" charset="0"/>
+                          <a:ea typeface="신세계 민부리 Bold(TTF)" pitchFamily="34" charset="-122"/>
+                          <a:cs typeface="신세계 민부리 Bold(TTF)" pitchFamily="34" charset="-120"/>
+                        </a:rPr>
+                        <a:t>위험부담</a:t>
+                      </a:r>
+                      <a:endParaRPr lang="en-US" sz="800" dirty="0">
+                        <a:latin typeface="신세계 민부리 Bold(TTF)" charset="0"/>
+                        <a:ea typeface="신세계 민부리 Bold(TTF)" charset="0"/>
+                        <a:cs typeface="신세계 민부리 Bold(TTF)" charset="0"/>
+                      </a:endParaRPr>
+                    </a:p>
+                  </a:txBody>
+                  <a:tcPr marL="36576" marR="36576" marT="18288" marB="18288" anchor="ctr">
+                    <a:lnL w="6350" cap="flat" cmpd="sng" algn="ctr">
+                      <a:solidFill>
+                        <a:srgbClr val="BFBFBF"/>
+                      </a:solidFill>
+                      <a:prstDash val="solid"/>
+                      <a:round/>
+                      <a:headEnd type="none" w="med" len="med"/>
+                      <a:tailEnd type="none" w="med" len="med"/>
+                    </a:lnL>
+                    <a:lnR w="6350" cap="flat" cmpd="sng" algn="ctr">
+                      <a:solidFill>
+                        <a:srgbClr val="BFBFBF"/>
+                      </a:solidFill>
+                      <a:prstDash val="solid"/>
+                      <a:round/>
+                      <a:headEnd type="none" w="med" len="med"/>
+                      <a:tailEnd type="none" w="med" len="med"/>
+                    </a:lnR>
+                    <a:lnT w="6350" cap="flat" cmpd="sng" algn="ctr">
+                      <a:solidFill>
+                        <a:srgbClr val="BFBFBF"/>
+                      </a:solidFill>
+                      <a:prstDash val="solid"/>
+                      <a:round/>
+                      <a:headEnd type="none" w="med" len="med"/>
+                      <a:tailEnd type="none" w="med" len="med"/>
+                    </a:lnT>
+                    <a:lnB w="6350" cap="flat" cmpd="sng" algn="ctr">
+                      <a:solidFill>
+                        <a:srgbClr val="BFBFBF"/>
+                      </a:solidFill>
+                      <a:prstDash val="solid"/>
+                      <a:round/>
+                      <a:headEnd type="none" w="med" len="med"/>
+                      <a:tailEnd type="none" w="med" len="med"/>
+                    </a:lnB>
+                    <a:solidFill>
+                      <a:srgbClr val="DCE3EF"/>
+                    </a:solidFill>
+                  </a:tcPr>
+                </a:tc>
+                <a:tc vMerge="1">
+                  <a:tcPr/>
+                </a:tc>
+                <a:tc vMerge="1">
+                  <a:tcPr/>
+                </a:tc>
+                <a:tc vMerge="1">
+                  <a:tcPr/>
+                </a:tc>
+              </a:tr>
+              <a:tr h="438912">
+                <a:tc rowSpan="4">
+                  <a:txBody>
+                    <a:bodyPr/>
+                    <a:lstStyle/>
+                    <a:p>
+                      <a:pPr algn="ctr" indent="0" marL="0">
+                        <a:buNone/>
+                      </a:pPr>
+                      <a:r>
+                        <a:rPr lang="en-US" sz="900" b="1" dirty="0">
+                          <a:solidFill>
+                            <a:srgbClr val="262626"/>
+                          </a:solidFill>
+                          <a:latin typeface="신세계 민부리 Bold(TTF)" pitchFamily="34" charset="0"/>
+                          <a:ea typeface="신세계 민부리 Bold(TTF)" pitchFamily="34" charset="-122"/>
+                          <a:cs typeface="신세계 민부리 Bold(TTF)" pitchFamily="34" charset="-120"/>
+                        </a:rPr>
+                        <a:t>건설</a:t>
+                      </a:r>
+                      <a:endParaRPr lang="en-US" sz="900" dirty="0">
+                        <a:latin typeface="신세계 민부리 Bold(TTF)" charset="0"/>
+                        <a:ea typeface="신세계 민부리 Bold(TTF)" charset="0"/>
+                        <a:cs typeface="신세계 민부리 Bold(TTF)" charset="0"/>
+                      </a:endParaRPr>
+                    </a:p>
+                  </a:txBody>
+                  <a:tcPr marL="36576" marR="36576" marT="18288" marB="18288" anchor="ctr">
                     <a:lnL w="6350" cap="flat" cmpd="sng" algn="ctr">
                       <a:solidFill>
                         <a:srgbClr val="BFBFBF"/>
@@ -1546,7 +1905,82 @@
                     <a:bodyPr/>
                     <a:lstStyle/>
                     <a:p>
-                      <a:pPr indent="0" marL="0">
+                      <a:pPr algn="ctr" indent="0" marL="0">
+                        <a:buNone/>
+                      </a:pPr>
+                      <a:r>
+                        <a:rPr lang="en-US" sz="900" b="1" dirty="0">
+                          <a:solidFill>
+                            <a:srgbClr val="000000"/>
+                          </a:solidFill>
+                          <a:latin typeface="신세계 민부리 Bold(TTF)" pitchFamily="34" charset="0"/>
+                          <a:ea typeface="신세계 민부리 Bold(TTF)" pitchFamily="34" charset="-122"/>
+                          <a:cs typeface="신세계 민부리 Bold(TTF)" pitchFamily="34" charset="-120"/>
+                        </a:rPr>
+                        <a:t>BTO</a:t>
+                      </a:r>
+                      <a:endParaRPr lang="en-US" sz="1200" dirty="0"/>
+                    </a:p>
+                    <a:p>
+                      <a:pPr algn="ctr" indent="0" marL="0">
+                        <a:buNone/>
+                      </a:pPr>
+                      <a:r>
+                        <a:rPr lang="en-US" sz="750" dirty="0">
+                          <a:solidFill>
+                            <a:srgbClr val="595959"/>
+                          </a:solidFill>
+                        </a:rPr>
+                        <a:t>수익형</a:t>
+                      </a:r>
+                      <a:endParaRPr lang="en-US" sz="1200" dirty="0"/>
+                    </a:p>
+                  </a:txBody>
+                  <a:tcPr marL="36576" marR="36576" marT="18288" marB="18288" anchor="ctr">
+                    <a:lnL w="6350" cap="flat" cmpd="sng" algn="ctr">
+                      <a:solidFill>
+                        <a:srgbClr val="BFBFBF"/>
+                      </a:solidFill>
+                      <a:prstDash val="solid"/>
+                      <a:round/>
+                      <a:headEnd type="none" w="med" len="med"/>
+                      <a:tailEnd type="none" w="med" len="med"/>
+                    </a:lnL>
+                    <a:lnR w="6350" cap="flat" cmpd="sng" algn="ctr">
+                      <a:solidFill>
+                        <a:srgbClr val="BFBFBF"/>
+                      </a:solidFill>
+                      <a:prstDash val="solid"/>
+                      <a:round/>
+                      <a:headEnd type="none" w="med" len="med"/>
+                      <a:tailEnd type="none" w="med" len="med"/>
+                    </a:lnR>
+                    <a:lnT w="6350" cap="flat" cmpd="sng" algn="ctr">
+                      <a:solidFill>
+                        <a:srgbClr val="BFBFBF"/>
+                      </a:solidFill>
+                      <a:prstDash val="solid"/>
+                      <a:round/>
+                      <a:headEnd type="none" w="med" len="med"/>
+                      <a:tailEnd type="none" w="med" len="med"/>
+                    </a:lnT>
+                    <a:lnB w="6350" cap="flat" cmpd="sng" algn="ctr">
+                      <a:solidFill>
+                        <a:srgbClr val="BFBFBF"/>
+                      </a:solidFill>
+                      <a:prstDash val="solid"/>
+                      <a:round/>
+                      <a:headEnd type="none" w="med" len="med"/>
+                      <a:tailEnd type="none" w="med" len="med"/>
+                    </a:lnB>
+                  </a:tcPr>
+                </a:tc>
+                <a:tc>
+                  <a:txBody>
+                    <a:bodyPr/>
+                    <a:lstStyle/>
+                    <a:p>
+                      <a:pPr algn="ctr" indent="0" marL="0">
                         <a:buNone/>
                       </a:pPr>
                       <a:r>
@@ -1558,7 +1992,7 @@
                           <a:ea typeface="신세계 민부리 Light(TTF)" pitchFamily="34" charset="-122"/>
                           <a:cs typeface="신세계 민부리 Light(TTF)" pitchFamily="34" charset="-120"/>
                         </a:rPr>
-                        <a:t>준공 시 소유권 국가 귀속 → 민간이 관리운영권</a:t>
+                        <a:t>민간</a:t>
                       </a:r>
                       <a:endParaRPr lang="en-US" sz="800" dirty="0">
                         <a:latin typeface="신세계 민부리 Light(TTF)" charset="0"/>
@@ -1567,54 +2001,51 @@
                       </a:endParaRPr>
                     </a:p>
                   </a:txBody>
-                  <a:tcPr marL="45720" marR="45720" marT="18288" marB="18288" anchor="ctr">
-                    <a:lnL w="6350" cap="flat" cmpd="sng" algn="ctr">
-                      <a:solidFill>
-                        <a:srgbClr val="BFBFBF"/>
-                      </a:solidFill>
-                      <a:prstDash val="solid"/>
-                      <a:round/>
-                      <a:headEnd type="none" w="med" len="med"/>
-                      <a:tailEnd type="none" w="med" len="med"/>
-                    </a:lnL>
-                    <a:lnR w="6350" cap="flat" cmpd="sng" algn="ctr">
-                      <a:solidFill>
-                        <a:srgbClr val="BFBFBF"/>
-                      </a:solidFill>
-                      <a:prstDash val="solid"/>
-                      <a:round/>
-                      <a:headEnd type="none" w="med" len="med"/>
-                      <a:tailEnd type="none" w="med" len="med"/>
-                    </a:lnR>
-                    <a:lnT w="6350" cap="flat" cmpd="sng" algn="ctr">
-                      <a:solidFill>
-                        <a:srgbClr val="BFBFBF"/>
-                      </a:solidFill>
-                      <a:prstDash val="solid"/>
-                      <a:round/>
-                      <a:headEnd type="none" w="med" len="med"/>
-                      <a:tailEnd type="none" w="med" len="med"/>
-                    </a:lnT>
-                    <a:lnB w="6350" cap="flat" cmpd="sng" algn="ctr">
-                      <a:solidFill>
-                        <a:srgbClr val="BFBFBF"/>
-                      </a:solidFill>
-                      <a:prstDash val="solid"/>
-                      <a:round/>
-                      <a:headEnd type="none" w="med" len="med"/>
-                      <a:tailEnd type="none" w="med" len="med"/>
-                    </a:lnB>
-                    <a:solidFill>
-                      <a:srgbClr val="EEF2F8"/>
-                    </a:solidFill>
-                  </a:tcPr>
-                </a:tc>
-                <a:tc>
-                  <a:txBody>
-                    <a:bodyPr/>
-                    <a:lstStyle/>
-                    <a:p>
-                      <a:pPr indent="0" marL="0">
+                  <a:tcPr marL="36576" marR="36576" marT="18288" marB="18288" anchor="ctr">
+                    <a:lnL w="6350" cap="flat" cmpd="sng" algn="ctr">
+                      <a:solidFill>
+                        <a:srgbClr val="BFBFBF"/>
+                      </a:solidFill>
+                      <a:prstDash val="solid"/>
+                      <a:round/>
+                      <a:headEnd type="none" w="med" len="med"/>
+                      <a:tailEnd type="none" w="med" len="med"/>
+                    </a:lnL>
+                    <a:lnR w="6350" cap="flat" cmpd="sng" algn="ctr">
+                      <a:solidFill>
+                        <a:srgbClr val="BFBFBF"/>
+                      </a:solidFill>
+                      <a:prstDash val="solid"/>
+                      <a:round/>
+                      <a:headEnd type="none" w="med" len="med"/>
+                      <a:tailEnd type="none" w="med" len="med"/>
+                    </a:lnR>
+                    <a:lnT w="6350" cap="flat" cmpd="sng" algn="ctr">
+                      <a:solidFill>
+                        <a:srgbClr val="BFBFBF"/>
+                      </a:solidFill>
+                      <a:prstDash val="solid"/>
+                      <a:round/>
+                      <a:headEnd type="none" w="med" len="med"/>
+                      <a:tailEnd type="none" w="med" len="med"/>
+                    </a:lnT>
+                    <a:lnB w="6350" cap="flat" cmpd="sng" algn="ctr">
+                      <a:solidFill>
+                        <a:srgbClr val="BFBFBF"/>
+                      </a:solidFill>
+                      <a:prstDash val="solid"/>
+                      <a:round/>
+                      <a:headEnd type="none" w="med" len="med"/>
+                      <a:tailEnd type="none" w="med" len="med"/>
+                    </a:lnB>
+                  </a:tcPr>
+                </a:tc>
+                <a:tc>
+                  <a:txBody>
+                    <a:bodyPr/>
+                    <a:lstStyle/>
+                    <a:p>
+                      <a:pPr algn="ctr" indent="0" marL="0">
                         <a:buNone/>
                       </a:pPr>
                       <a:r>
@@ -1626,7 +2057,7 @@
                           <a:ea typeface="신세계 민부리 Light(TTF)" pitchFamily="34" charset="-122"/>
                           <a:cs typeface="신세계 민부리 Light(TTF)" pitchFamily="34" charset="-120"/>
                         </a:rPr>
-                        <a:t>이용자 사용료 / 수요위험 민간</a:t>
+                        <a:t>국가</a:t>
                       </a:r>
                       <a:endParaRPr lang="en-US" sz="800" dirty="0">
                         <a:latin typeface="신세계 민부리 Light(TTF)" charset="0"/>
@@ -1635,54 +2066,51 @@
                       </a:endParaRPr>
                     </a:p>
                   </a:txBody>
-                  <a:tcPr marL="45720" marR="45720" marT="18288" marB="18288" anchor="ctr">
-                    <a:lnL w="6350" cap="flat" cmpd="sng" algn="ctr">
-                      <a:solidFill>
-                        <a:srgbClr val="BFBFBF"/>
-                      </a:solidFill>
-                      <a:prstDash val="solid"/>
-                      <a:round/>
-                      <a:headEnd type="none" w="med" len="med"/>
-                      <a:tailEnd type="none" w="med" len="med"/>
-                    </a:lnL>
-                    <a:lnR w="6350" cap="flat" cmpd="sng" algn="ctr">
-                      <a:solidFill>
-                        <a:srgbClr val="BFBFBF"/>
-                      </a:solidFill>
-                      <a:prstDash val="solid"/>
-                      <a:round/>
-                      <a:headEnd type="none" w="med" len="med"/>
-                      <a:tailEnd type="none" w="med" len="med"/>
-                    </a:lnR>
-                    <a:lnT w="6350" cap="flat" cmpd="sng" algn="ctr">
-                      <a:solidFill>
-                        <a:srgbClr val="BFBFBF"/>
-                      </a:solidFill>
-                      <a:prstDash val="solid"/>
-                      <a:round/>
-                      <a:headEnd type="none" w="med" len="med"/>
-                      <a:tailEnd type="none" w="med" len="med"/>
-                    </a:lnT>
-                    <a:lnB w="6350" cap="flat" cmpd="sng" algn="ctr">
-                      <a:solidFill>
-                        <a:srgbClr val="BFBFBF"/>
-                      </a:solidFill>
-                      <a:prstDash val="solid"/>
-                      <a:round/>
-                      <a:headEnd type="none" w="med" len="med"/>
-                      <a:tailEnd type="none" w="med" len="med"/>
-                    </a:lnB>
-                    <a:solidFill>
-                      <a:srgbClr val="EEF2F8"/>
-                    </a:solidFill>
-                  </a:tcPr>
-                </a:tc>
-                <a:tc>
-                  <a:txBody>
-                    <a:bodyPr/>
-                    <a:lstStyle/>
-                    <a:p>
-                      <a:pPr indent="0" marL="0">
+                  <a:tcPr marL="36576" marR="36576" marT="18288" marB="18288" anchor="ctr">
+                    <a:lnL w="6350" cap="flat" cmpd="sng" algn="ctr">
+                      <a:solidFill>
+                        <a:srgbClr val="BFBFBF"/>
+                      </a:solidFill>
+                      <a:prstDash val="solid"/>
+                      <a:round/>
+                      <a:headEnd type="none" w="med" len="med"/>
+                      <a:tailEnd type="none" w="med" len="med"/>
+                    </a:lnL>
+                    <a:lnR w="6350" cap="flat" cmpd="sng" algn="ctr">
+                      <a:solidFill>
+                        <a:srgbClr val="BFBFBF"/>
+                      </a:solidFill>
+                      <a:prstDash val="solid"/>
+                      <a:round/>
+                      <a:headEnd type="none" w="med" len="med"/>
+                      <a:tailEnd type="none" w="med" len="med"/>
+                    </a:lnR>
+                    <a:lnT w="6350" cap="flat" cmpd="sng" algn="ctr">
+                      <a:solidFill>
+                        <a:srgbClr val="BFBFBF"/>
+                      </a:solidFill>
+                      <a:prstDash val="solid"/>
+                      <a:round/>
+                      <a:headEnd type="none" w="med" len="med"/>
+                      <a:tailEnd type="none" w="med" len="med"/>
+                    </a:lnT>
+                    <a:lnB w="6350" cap="flat" cmpd="sng" algn="ctr">
+                      <a:solidFill>
+                        <a:srgbClr val="BFBFBF"/>
+                      </a:solidFill>
+                      <a:prstDash val="solid"/>
+                      <a:round/>
+                      <a:headEnd type="none" w="med" len="med"/>
+                      <a:tailEnd type="none" w="med" len="med"/>
+                    </a:lnB>
+                  </a:tcPr>
+                </a:tc>
+                <a:tc>
+                  <a:txBody>
+                    <a:bodyPr/>
+                    <a:lstStyle/>
+                    <a:p>
+                      <a:pPr algn="ctr" indent="0" marL="0">
                         <a:buNone/>
                       </a:pPr>
                       <a:r>
@@ -1694,7 +2122,7 @@
                           <a:ea typeface="신세계 민부리 Light(TTF)" pitchFamily="34" charset="-122"/>
                           <a:cs typeface="신세계 민부리 Light(TTF)" pitchFamily="34" charset="-120"/>
                         </a:rPr>
-                        <a:t>도로 · 철도 · MICE (잠실, 서울링)</a:t>
+                        <a:t>민간</a:t>
                       </a:r>
                       <a:endParaRPr lang="en-US" sz="800" dirty="0">
                         <a:latin typeface="신세계 민부리 Light(TTF)" charset="0"/>
@@ -1703,54 +2131,51 @@
                       </a:endParaRPr>
                     </a:p>
                   </a:txBody>
-                  <a:tcPr marL="45720" marR="45720" marT="18288" marB="18288" anchor="ctr">
-                    <a:lnL w="6350" cap="flat" cmpd="sng" algn="ctr">
-                      <a:solidFill>
-                        <a:srgbClr val="BFBFBF"/>
-                      </a:solidFill>
-                      <a:prstDash val="solid"/>
-                      <a:round/>
-                      <a:headEnd type="none" w="med" len="med"/>
-                      <a:tailEnd type="none" w="med" len="med"/>
-                    </a:lnL>
-                    <a:lnR w="6350" cap="flat" cmpd="sng" algn="ctr">
-                      <a:solidFill>
-                        <a:srgbClr val="BFBFBF"/>
-                      </a:solidFill>
-                      <a:prstDash val="solid"/>
-                      <a:round/>
-                      <a:headEnd type="none" w="med" len="med"/>
-                      <a:tailEnd type="none" w="med" len="med"/>
-                    </a:lnR>
-                    <a:lnT w="6350" cap="flat" cmpd="sng" algn="ctr">
-                      <a:solidFill>
-                        <a:srgbClr val="BFBFBF"/>
-                      </a:solidFill>
-                      <a:prstDash val="solid"/>
-                      <a:round/>
-                      <a:headEnd type="none" w="med" len="med"/>
-                      <a:tailEnd type="none" w="med" len="med"/>
-                    </a:lnT>
-                    <a:lnB w="6350" cap="flat" cmpd="sng" algn="ctr">
-                      <a:solidFill>
-                        <a:srgbClr val="BFBFBF"/>
-                      </a:solidFill>
-                      <a:prstDash val="solid"/>
-                      <a:round/>
-                      <a:headEnd type="none" w="med" len="med"/>
-                      <a:tailEnd type="none" w="med" len="med"/>
-                    </a:lnB>
-                    <a:solidFill>
-                      <a:srgbClr val="EEF2F8"/>
-                    </a:solidFill>
-                  </a:tcPr>
-                </a:tc>
-                <a:tc>
-                  <a:txBody>
-                    <a:bodyPr/>
-                    <a:lstStyle/>
-                    <a:p>
-                      <a:pPr indent="0" marL="0">
+                  <a:tcPr marL="36576" marR="36576" marT="18288" marB="18288" anchor="ctr">
+                    <a:lnL w="6350" cap="flat" cmpd="sng" algn="ctr">
+                      <a:solidFill>
+                        <a:srgbClr val="BFBFBF"/>
+                      </a:solidFill>
+                      <a:prstDash val="solid"/>
+                      <a:round/>
+                      <a:headEnd type="none" w="med" len="med"/>
+                      <a:tailEnd type="none" w="med" len="med"/>
+                    </a:lnL>
+                    <a:lnR w="6350" cap="flat" cmpd="sng" algn="ctr">
+                      <a:solidFill>
+                        <a:srgbClr val="BFBFBF"/>
+                      </a:solidFill>
+                      <a:prstDash val="solid"/>
+                      <a:round/>
+                      <a:headEnd type="none" w="med" len="med"/>
+                      <a:tailEnd type="none" w="med" len="med"/>
+                    </a:lnR>
+                    <a:lnT w="6350" cap="flat" cmpd="sng" algn="ctr">
+                      <a:solidFill>
+                        <a:srgbClr val="BFBFBF"/>
+                      </a:solidFill>
+                      <a:prstDash val="solid"/>
+                      <a:round/>
+                      <a:headEnd type="none" w="med" len="med"/>
+                      <a:tailEnd type="none" w="med" len="med"/>
+                    </a:lnT>
+                    <a:lnB w="6350" cap="flat" cmpd="sng" algn="ctr">
+                      <a:solidFill>
+                        <a:srgbClr val="BFBFBF"/>
+                      </a:solidFill>
+                      <a:prstDash val="solid"/>
+                      <a:round/>
+                      <a:headEnd type="none" w="med" len="med"/>
+                      <a:tailEnd type="none" w="med" len="med"/>
+                    </a:lnB>
+                  </a:tcPr>
+                </a:tc>
+                <a:tc>
+                  <a:txBody>
+                    <a:bodyPr/>
+                    <a:lstStyle/>
+                    <a:p>
+                      <a:pPr algn="ctr" indent="0" marL="0">
                         <a:buNone/>
                       </a:pPr>
                       <a:r>
@@ -1762,7 +2187,7 @@
                           <a:ea typeface="신세계 민부리 Light(TTF)" pitchFamily="34" charset="-122"/>
                           <a:cs typeface="신세계 민부리 Light(TTF)" pitchFamily="34" charset="-120"/>
                         </a:rPr>
-                        <a:t>운영 자율성, 초과수익 향유</a:t>
+                        <a:t>이용자 사용료</a:t>
                       </a:r>
                       <a:endParaRPr lang="en-US" sz="800" dirty="0">
                         <a:latin typeface="신세계 민부리 Light(TTF)" charset="0"/>
@@ -1771,54 +2196,51 @@
                       </a:endParaRPr>
                     </a:p>
                   </a:txBody>
-                  <a:tcPr marL="45720" marR="45720" marT="18288" marB="18288" anchor="ctr">
-                    <a:lnL w="6350" cap="flat" cmpd="sng" algn="ctr">
-                      <a:solidFill>
-                        <a:srgbClr val="BFBFBF"/>
-                      </a:solidFill>
-                      <a:prstDash val="solid"/>
-                      <a:round/>
-                      <a:headEnd type="none" w="med" len="med"/>
-                      <a:tailEnd type="none" w="med" len="med"/>
-                    </a:lnL>
-                    <a:lnR w="6350" cap="flat" cmpd="sng" algn="ctr">
-                      <a:solidFill>
-                        <a:srgbClr val="BFBFBF"/>
-                      </a:solidFill>
-                      <a:prstDash val="solid"/>
-                      <a:round/>
-                      <a:headEnd type="none" w="med" len="med"/>
-                      <a:tailEnd type="none" w="med" len="med"/>
-                    </a:lnR>
-                    <a:lnT w="6350" cap="flat" cmpd="sng" algn="ctr">
-                      <a:solidFill>
-                        <a:srgbClr val="BFBFBF"/>
-                      </a:solidFill>
-                      <a:prstDash val="solid"/>
-                      <a:round/>
-                      <a:headEnd type="none" w="med" len="med"/>
-                      <a:tailEnd type="none" w="med" len="med"/>
-                    </a:lnT>
-                    <a:lnB w="6350" cap="flat" cmpd="sng" algn="ctr">
-                      <a:solidFill>
-                        <a:srgbClr val="BFBFBF"/>
-                      </a:solidFill>
-                      <a:prstDash val="solid"/>
-                      <a:round/>
-                      <a:headEnd type="none" w="med" len="med"/>
-                      <a:tailEnd type="none" w="med" len="med"/>
-                    </a:lnB>
-                    <a:solidFill>
-                      <a:srgbClr val="EEF2F8"/>
-                    </a:solidFill>
-                  </a:tcPr>
-                </a:tc>
-                <a:tc>
-                  <a:txBody>
-                    <a:bodyPr/>
-                    <a:lstStyle/>
-                    <a:p>
-                      <a:pPr indent="0" marL="0">
+                  <a:tcPr marL="36576" marR="36576" marT="18288" marB="18288" anchor="ctr">
+                    <a:lnL w="6350" cap="flat" cmpd="sng" algn="ctr">
+                      <a:solidFill>
+                        <a:srgbClr val="BFBFBF"/>
+                      </a:solidFill>
+                      <a:prstDash val="solid"/>
+                      <a:round/>
+                      <a:headEnd type="none" w="med" len="med"/>
+                      <a:tailEnd type="none" w="med" len="med"/>
+                    </a:lnL>
+                    <a:lnR w="6350" cap="flat" cmpd="sng" algn="ctr">
+                      <a:solidFill>
+                        <a:srgbClr val="BFBFBF"/>
+                      </a:solidFill>
+                      <a:prstDash val="solid"/>
+                      <a:round/>
+                      <a:headEnd type="none" w="med" len="med"/>
+                      <a:tailEnd type="none" w="med" len="med"/>
+                    </a:lnR>
+                    <a:lnT w="6350" cap="flat" cmpd="sng" algn="ctr">
+                      <a:solidFill>
+                        <a:srgbClr val="BFBFBF"/>
+                      </a:solidFill>
+                      <a:prstDash val="solid"/>
+                      <a:round/>
+                      <a:headEnd type="none" w="med" len="med"/>
+                      <a:tailEnd type="none" w="med" len="med"/>
+                    </a:lnT>
+                    <a:lnB w="6350" cap="flat" cmpd="sng" algn="ctr">
+                      <a:solidFill>
+                        <a:srgbClr val="BFBFBF"/>
+                      </a:solidFill>
+                      <a:prstDash val="solid"/>
+                      <a:round/>
+                      <a:headEnd type="none" w="med" len="med"/>
+                      <a:tailEnd type="none" w="med" len="med"/>
+                    </a:lnB>
+                  </a:tcPr>
+                </a:tc>
+                <a:tc>
+                  <a:txBody>
+                    <a:bodyPr/>
+                    <a:lstStyle/>
+                    <a:p>
+                      <a:pPr algn="ctr" indent="0" marL="0">
                         <a:buNone/>
                       </a:pPr>
                       <a:r>
@@ -1830,7 +2252,7 @@
                           <a:ea typeface="신세계 민부리 Light(TTF)" pitchFamily="34" charset="-122"/>
                           <a:cs typeface="신세계 민부리 Light(TTF)" pitchFamily="34" charset="-120"/>
                         </a:rPr>
-                        <a:t>수요위험 부담, 소유권 없음</a:t>
+                        <a:t>민간</a:t>
                       </a:r>
                       <a:endParaRPr lang="en-US" sz="800" dirty="0">
                         <a:latin typeface="신세계 민부리 Light(TTF)" charset="0"/>
@@ -1839,194 +2261,43 @@
                       </a:endParaRPr>
                     </a:p>
                   </a:txBody>
-                  <a:tcPr marL="45720" marR="45720" marT="18288" marB="18288" anchor="ctr">
-                    <a:lnL w="6350" cap="flat" cmpd="sng" algn="ctr">
-                      <a:solidFill>
-                        <a:srgbClr val="BFBFBF"/>
-                      </a:solidFill>
-                      <a:prstDash val="solid"/>
-                      <a:round/>
-                      <a:headEnd type="none" w="med" len="med"/>
-                      <a:tailEnd type="none" w="med" len="med"/>
-                    </a:lnL>
-                    <a:lnR w="6350" cap="flat" cmpd="sng" algn="ctr">
-                      <a:solidFill>
-                        <a:srgbClr val="BFBFBF"/>
-                      </a:solidFill>
-                      <a:prstDash val="solid"/>
-                      <a:round/>
-                      <a:headEnd type="none" w="med" len="med"/>
-                      <a:tailEnd type="none" w="med" len="med"/>
-                    </a:lnR>
-                    <a:lnT w="6350" cap="flat" cmpd="sng" algn="ctr">
-                      <a:solidFill>
-                        <a:srgbClr val="BFBFBF"/>
-                      </a:solidFill>
-                      <a:prstDash val="solid"/>
-                      <a:round/>
-                      <a:headEnd type="none" w="med" len="med"/>
-                      <a:tailEnd type="none" w="med" len="med"/>
-                    </a:lnT>
-                    <a:lnB w="6350" cap="flat" cmpd="sng" algn="ctr">
-                      <a:solidFill>
-                        <a:srgbClr val="BFBFBF"/>
-                      </a:solidFill>
-                      <a:prstDash val="solid"/>
-                      <a:round/>
-                      <a:headEnd type="none" w="med" len="med"/>
-                      <a:tailEnd type="none" w="med" len="med"/>
-                    </a:lnB>
-                    <a:solidFill>
-                      <a:srgbClr val="EEF2F8"/>
-                    </a:solidFill>
-                  </a:tcPr>
-                </a:tc>
-                <a:tc>
-                  <a:txBody>
-                    <a:bodyPr/>
-                    <a:lstStyle/>
-                    <a:p>
-                      <a:pPr algn="ctr" indent="0" marL="0">
-                        <a:buNone/>
-                      </a:pPr>
-                      <a:r>
-                        <a:rPr lang="en-US" sz="1100" b="1" dirty="0">
-                          <a:solidFill>
-                            <a:srgbClr val="1F3A6E"/>
-                          </a:solidFill>
-                          <a:latin typeface="신세계 민부리 Bold(TTF)" pitchFamily="34" charset="0"/>
-                          <a:ea typeface="신세계 민부리 Bold(TTF)" pitchFamily="34" charset="-122"/>
-                          <a:cs typeface="신세계 민부리 Bold(TTF)" pitchFamily="34" charset="-120"/>
-                        </a:rPr>
-                        <a:t>◎</a:t>
-                      </a:r>
-                      <a:endParaRPr lang="en-US" sz="1100" dirty="0">
-                        <a:latin typeface="신세계 민부리 Bold(TTF)" charset="0"/>
-                        <a:ea typeface="신세계 민부리 Bold(TTF)" charset="0"/>
-                        <a:cs typeface="신세계 민부리 Bold(TTF)" charset="0"/>
-                      </a:endParaRPr>
-                    </a:p>
-                  </a:txBody>
-                  <a:tcPr marL="45720" marR="45720" marT="18288" marB="18288" anchor="ctr">
-                    <a:lnL w="6350" cap="flat" cmpd="sng" algn="ctr">
-                      <a:solidFill>
-                        <a:srgbClr val="BFBFBF"/>
-                      </a:solidFill>
-                      <a:prstDash val="solid"/>
-                      <a:round/>
-                      <a:headEnd type="none" w="med" len="med"/>
-                      <a:tailEnd type="none" w="med" len="med"/>
-                    </a:lnL>
-                    <a:lnR w="6350" cap="flat" cmpd="sng" algn="ctr">
-                      <a:solidFill>
-                        <a:srgbClr val="BFBFBF"/>
-                      </a:solidFill>
-                      <a:prstDash val="solid"/>
-                      <a:round/>
-                      <a:headEnd type="none" w="med" len="med"/>
-                      <a:tailEnd type="none" w="med" len="med"/>
-                    </a:lnR>
-                    <a:lnT w="6350" cap="flat" cmpd="sng" algn="ctr">
-                      <a:solidFill>
-                        <a:srgbClr val="BFBFBF"/>
-                      </a:solidFill>
-                      <a:prstDash val="solid"/>
-                      <a:round/>
-                      <a:headEnd type="none" w="med" len="med"/>
-                      <a:tailEnd type="none" w="med" len="med"/>
-                    </a:lnT>
-                    <a:lnB w="6350" cap="flat" cmpd="sng" algn="ctr">
-                      <a:solidFill>
-                        <a:srgbClr val="BFBFBF"/>
-                      </a:solidFill>
-                      <a:prstDash val="solid"/>
-                      <a:round/>
-                      <a:headEnd type="none" w="med" len="med"/>
-                      <a:tailEnd type="none" w="med" len="med"/>
-                    </a:lnB>
-                    <a:solidFill>
-                      <a:srgbClr val="EEF2F8"/>
-                    </a:solidFill>
-                  </a:tcPr>
-                </a:tc>
-              </a:tr>
-              <a:tr h="438912">
-                <a:tc>
-                  <a:txBody>
-                    <a:bodyPr/>
-                    <a:lstStyle/>
-                    <a:p>
-                      <a:pPr algn="ctr" indent="0" marL="0">
-                        <a:buNone/>
-                      </a:pPr>
-                      <a:r>
-                        <a:rPr lang="en-US" sz="900" b="1" dirty="0">
-                          <a:solidFill>
-                            <a:srgbClr val="000000"/>
-                          </a:solidFill>
-                          <a:latin typeface="신세계 민부리 Bold(TTF)" pitchFamily="34" charset="0"/>
-                          <a:ea typeface="신세계 민부리 Bold(TTF)" pitchFamily="34" charset="-122"/>
-                          <a:cs typeface="신세계 민부리 Bold(TTF)" pitchFamily="34" charset="-120"/>
-                        </a:rPr>
-                        <a:t>BTL</a:t>
-                      </a:r>
-                      <a:endParaRPr lang="en-US" sz="1200" dirty="0"/>
-                    </a:p>
-                    <a:p>
-                      <a:pPr algn="ctr" indent="0" marL="0">
-                        <a:buNone/>
-                      </a:pPr>
-                      <a:r>
-                        <a:rPr lang="en-US" sz="750" dirty="0">
-                          <a:solidFill>
-                            <a:srgbClr val="595959"/>
-                          </a:solidFill>
-                        </a:rPr>
-                        <a:t>임대형</a:t>
-                      </a:r>
-                      <a:endParaRPr lang="en-US" sz="1200" dirty="0"/>
-                    </a:p>
-                  </a:txBody>
-                  <a:tcPr marL="45720" marR="45720" marT="18288" marB="18288" anchor="ctr">
-                    <a:lnL w="6350" cap="flat" cmpd="sng" algn="ctr">
-                      <a:solidFill>
-                        <a:srgbClr val="BFBFBF"/>
-                      </a:solidFill>
-                      <a:prstDash val="solid"/>
-                      <a:round/>
-                      <a:headEnd type="none" w="med" len="med"/>
-                      <a:tailEnd type="none" w="med" len="med"/>
-                    </a:lnL>
-                    <a:lnR w="6350" cap="flat" cmpd="sng" algn="ctr">
-                      <a:solidFill>
-                        <a:srgbClr val="BFBFBF"/>
-                      </a:solidFill>
-                      <a:prstDash val="solid"/>
-                      <a:round/>
-                      <a:headEnd type="none" w="med" len="med"/>
-                      <a:tailEnd type="none" w="med" len="med"/>
-                    </a:lnR>
-                    <a:lnT w="6350" cap="flat" cmpd="sng" algn="ctr">
-                      <a:solidFill>
-                        <a:srgbClr val="BFBFBF"/>
-                      </a:solidFill>
-                      <a:prstDash val="solid"/>
-                      <a:round/>
-                      <a:headEnd type="none" w="med" len="med"/>
-                      <a:tailEnd type="none" w="med" len="med"/>
-                    </a:lnT>
-                    <a:lnB w="6350" cap="flat" cmpd="sng" algn="ctr">
-                      <a:solidFill>
-                        <a:srgbClr val="BFBFBF"/>
-                      </a:solidFill>
-                      <a:prstDash val="solid"/>
-                      <a:round/>
-                      <a:headEnd type="none" w="med" len="med"/>
-                      <a:tailEnd type="none" w="med" len="med"/>
-                    </a:lnB>
-                    <a:solidFill>
-                      <a:srgbClr val="F2F2F2"/>
-                    </a:solidFill>
+                  <a:tcPr marL="36576" marR="36576" marT="18288" marB="18288" anchor="ctr">
+                    <a:lnL w="6350" cap="flat" cmpd="sng" algn="ctr">
+                      <a:solidFill>
+                        <a:srgbClr val="BFBFBF"/>
+                      </a:solidFill>
+                      <a:prstDash val="solid"/>
+                      <a:round/>
+                      <a:headEnd type="none" w="med" len="med"/>
+                      <a:tailEnd type="none" w="med" len="med"/>
+                    </a:lnL>
+                    <a:lnR w="6350" cap="flat" cmpd="sng" algn="ctr">
+                      <a:solidFill>
+                        <a:srgbClr val="BFBFBF"/>
+                      </a:solidFill>
+                      <a:prstDash val="solid"/>
+                      <a:round/>
+                      <a:headEnd type="none" w="med" len="med"/>
+                      <a:tailEnd type="none" w="med" len="med"/>
+                    </a:lnR>
+                    <a:lnT w="6350" cap="flat" cmpd="sng" algn="ctr">
+                      <a:solidFill>
+                        <a:srgbClr val="BFBFBF"/>
+                      </a:solidFill>
+                      <a:prstDash val="solid"/>
+                      <a:round/>
+                      <a:headEnd type="none" w="med" len="med"/>
+                      <a:tailEnd type="none" w="med" len="med"/>
+                    </a:lnT>
+                    <a:lnB w="6350" cap="flat" cmpd="sng" algn="ctr">
+                      <a:solidFill>
+                        <a:srgbClr val="BFBFBF"/>
+                      </a:solidFill>
+                      <a:prstDash val="solid"/>
+                      <a:round/>
+                      <a:headEnd type="none" w="med" len="med"/>
+                      <a:tailEnd type="none" w="med" len="med"/>
+                    </a:lnB>
                   </a:tcPr>
                 </a:tc>
                 <a:tc>
@@ -2046,7 +2317,7 @@
                           <a:ea typeface="신세계 민부리 Light(TTF)" pitchFamily="34" charset="-122"/>
                           <a:cs typeface="신세계 민부리 Light(TTF)" pitchFamily="34" charset="-120"/>
                         </a:rPr>
-                        <a:t>준공 시 귀속 → 정부에 시설 임대</a:t>
+                        <a:t>도로 · 철도 · MICE (잠실, 서울링)</a:t>
                       </a:r>
                       <a:endParaRPr lang="en-US" sz="800" dirty="0">
                         <a:latin typeface="신세계 민부리 Light(TTF)" charset="0"/>
@@ -2055,7 +2326,7 @@
                       </a:endParaRPr>
                     </a:p>
                   </a:txBody>
-                  <a:tcPr marL="45720" marR="45720" marT="18288" marB="18288" anchor="ctr">
+                  <a:tcPr marL="36576" marR="36576" marT="18288" marB="18288" anchor="ctr">
                     <a:lnL w="6350" cap="flat" cmpd="sng" algn="ctr">
                       <a:solidFill>
                         <a:srgbClr val="BFBFBF"/>
@@ -2111,7 +2382,7 @@
                           <a:ea typeface="신세계 민부리 Light(TTF)" pitchFamily="34" charset="-122"/>
                           <a:cs typeface="신세계 민부리 Light(TTF)" pitchFamily="34" charset="-120"/>
                         </a:rPr>
-                        <a:t>정부 임대료 지급 / 수요위험 정부</a:t>
+                        <a:t>운영 자율성, 초과수익 향유</a:t>
                       </a:r>
                       <a:endParaRPr lang="en-US" sz="800" dirty="0">
                         <a:latin typeface="신세계 민부리 Light(TTF)" charset="0"/>
@@ -2120,7 +2391,7 @@
                       </a:endParaRPr>
                     </a:p>
                   </a:txBody>
-                  <a:tcPr marL="45720" marR="45720" marT="18288" marB="18288" anchor="ctr">
+                  <a:tcPr marL="36576" marR="36576" marT="18288" marB="18288" anchor="ctr">
                     <a:lnL w="6350" cap="flat" cmpd="sng" algn="ctr">
                       <a:solidFill>
                         <a:srgbClr val="BFBFBF"/>
@@ -2176,7 +2447,7 @@
                           <a:ea typeface="신세계 민부리 Light(TTF)" pitchFamily="34" charset="-122"/>
                           <a:cs typeface="신세계 민부리 Light(TTF)" pitchFamily="34" charset="-120"/>
                         </a:rPr>
-                        <a:t>학교 · 기숙사 · 문화 · 복지시설</a:t>
+                        <a:t>수요위험 부담, 소유권 없음</a:t>
                       </a:r>
                       <a:endParaRPr lang="en-US" sz="800" dirty="0">
                         <a:latin typeface="신세계 민부리 Light(TTF)" charset="0"/>
@@ -2185,51 +2456,131 @@
                       </a:endParaRPr>
                     </a:p>
                   </a:txBody>
-                  <a:tcPr marL="45720" marR="45720" marT="18288" marB="18288" anchor="ctr">
-                    <a:lnL w="6350" cap="flat" cmpd="sng" algn="ctr">
-                      <a:solidFill>
-                        <a:srgbClr val="BFBFBF"/>
-                      </a:solidFill>
-                      <a:prstDash val="solid"/>
-                      <a:round/>
-                      <a:headEnd type="none" w="med" len="med"/>
-                      <a:tailEnd type="none" w="med" len="med"/>
-                    </a:lnL>
-                    <a:lnR w="6350" cap="flat" cmpd="sng" algn="ctr">
-                      <a:solidFill>
-                        <a:srgbClr val="BFBFBF"/>
-                      </a:solidFill>
-                      <a:prstDash val="solid"/>
-                      <a:round/>
-                      <a:headEnd type="none" w="med" len="med"/>
-                      <a:tailEnd type="none" w="med" len="med"/>
-                    </a:lnR>
-                    <a:lnT w="6350" cap="flat" cmpd="sng" algn="ctr">
-                      <a:solidFill>
-                        <a:srgbClr val="BFBFBF"/>
-                      </a:solidFill>
-                      <a:prstDash val="solid"/>
-                      <a:round/>
-                      <a:headEnd type="none" w="med" len="med"/>
-                      <a:tailEnd type="none" w="med" len="med"/>
-                    </a:lnT>
-                    <a:lnB w="6350" cap="flat" cmpd="sng" algn="ctr">
-                      <a:solidFill>
-                        <a:srgbClr val="BFBFBF"/>
-                      </a:solidFill>
-                      <a:prstDash val="solid"/>
-                      <a:round/>
-                      <a:headEnd type="none" w="med" len="med"/>
-                      <a:tailEnd type="none" w="med" len="med"/>
-                    </a:lnB>
-                  </a:tcPr>
-                </a:tc>
-                <a:tc>
-                  <a:txBody>
-                    <a:bodyPr/>
-                    <a:lstStyle/>
-                    <a:p>
-                      <a:pPr indent="0" marL="0">
+                  <a:tcPr marL="36576" marR="36576" marT="18288" marB="18288" anchor="ctr">
+                    <a:lnL w="6350" cap="flat" cmpd="sng" algn="ctr">
+                      <a:solidFill>
+                        <a:srgbClr val="BFBFBF"/>
+                      </a:solidFill>
+                      <a:prstDash val="solid"/>
+                      <a:round/>
+                      <a:headEnd type="none" w="med" len="med"/>
+                      <a:tailEnd type="none" w="med" len="med"/>
+                    </a:lnL>
+                    <a:lnR w="6350" cap="flat" cmpd="sng" algn="ctr">
+                      <a:solidFill>
+                        <a:srgbClr val="BFBFBF"/>
+                      </a:solidFill>
+                      <a:prstDash val="solid"/>
+                      <a:round/>
+                      <a:headEnd type="none" w="med" len="med"/>
+                      <a:tailEnd type="none" w="med" len="med"/>
+                    </a:lnR>
+                    <a:lnT w="6350" cap="flat" cmpd="sng" algn="ctr">
+                      <a:solidFill>
+                        <a:srgbClr val="BFBFBF"/>
+                      </a:solidFill>
+                      <a:prstDash val="solid"/>
+                      <a:round/>
+                      <a:headEnd type="none" w="med" len="med"/>
+                      <a:tailEnd type="none" w="med" len="med"/>
+                    </a:lnT>
+                    <a:lnB w="6350" cap="flat" cmpd="sng" algn="ctr">
+                      <a:solidFill>
+                        <a:srgbClr val="BFBFBF"/>
+                      </a:solidFill>
+                      <a:prstDash val="solid"/>
+                      <a:round/>
+                      <a:headEnd type="none" w="med" len="med"/>
+                      <a:tailEnd type="none" w="med" len="med"/>
+                    </a:lnB>
+                  </a:tcPr>
+                </a:tc>
+              </a:tr>
+              <a:tr h="438912">
+                <a:tc vMerge="1">
+                  <a:tcPr/>
+                </a:tc>
+                <a:tc>
+                  <a:txBody>
+                    <a:bodyPr/>
+                    <a:lstStyle/>
+                    <a:p>
+                      <a:pPr algn="ctr" indent="0" marL="0">
+                        <a:buNone/>
+                      </a:pPr>
+                      <a:r>
+                        <a:rPr lang="en-US" sz="900" b="1" dirty="0">
+                          <a:solidFill>
+                            <a:srgbClr val="000000"/>
+                          </a:solidFill>
+                          <a:latin typeface="신세계 민부리 Bold(TTF)" pitchFamily="34" charset="0"/>
+                          <a:ea typeface="신세계 민부리 Bold(TTF)" pitchFamily="34" charset="-122"/>
+                          <a:cs typeface="신세계 민부리 Bold(TTF)" pitchFamily="34" charset="-120"/>
+                        </a:rPr>
+                        <a:t>BTL</a:t>
+                      </a:r>
+                      <a:endParaRPr lang="en-US" sz="1200" dirty="0"/>
+                    </a:p>
+                    <a:p>
+                      <a:pPr algn="ctr" indent="0" marL="0">
+                        <a:buNone/>
+                      </a:pPr>
+                      <a:r>
+                        <a:rPr lang="en-US" sz="750" dirty="0">
+                          <a:solidFill>
+                            <a:srgbClr val="595959"/>
+                          </a:solidFill>
+                        </a:rPr>
+                        <a:t>임대형</a:t>
+                      </a:r>
+                      <a:endParaRPr lang="en-US" sz="1200" dirty="0"/>
+                    </a:p>
+                  </a:txBody>
+                  <a:tcPr marL="36576" marR="36576" marT="18288" marB="18288" anchor="ctr">
+                    <a:lnL w="6350" cap="flat" cmpd="sng" algn="ctr">
+                      <a:solidFill>
+                        <a:srgbClr val="BFBFBF"/>
+                      </a:solidFill>
+                      <a:prstDash val="solid"/>
+                      <a:round/>
+                      <a:headEnd type="none" w="med" len="med"/>
+                      <a:tailEnd type="none" w="med" len="med"/>
+                    </a:lnL>
+                    <a:lnR w="6350" cap="flat" cmpd="sng" algn="ctr">
+                      <a:solidFill>
+                        <a:srgbClr val="BFBFBF"/>
+                      </a:solidFill>
+                      <a:prstDash val="solid"/>
+                      <a:round/>
+                      <a:headEnd type="none" w="med" len="med"/>
+                      <a:tailEnd type="none" w="med" len="med"/>
+                    </a:lnR>
+                    <a:lnT w="6350" cap="flat" cmpd="sng" algn="ctr">
+                      <a:solidFill>
+                        <a:srgbClr val="BFBFBF"/>
+                      </a:solidFill>
+                      <a:prstDash val="solid"/>
+                      <a:round/>
+                      <a:headEnd type="none" w="med" len="med"/>
+                      <a:tailEnd type="none" w="med" len="med"/>
+                    </a:lnT>
+                    <a:lnB w="6350" cap="flat" cmpd="sng" algn="ctr">
+                      <a:solidFill>
+                        <a:srgbClr val="BFBFBF"/>
+                      </a:solidFill>
+                      <a:prstDash val="solid"/>
+                      <a:round/>
+                      <a:headEnd type="none" w="med" len="med"/>
+                      <a:tailEnd type="none" w="med" len="med"/>
+                    </a:lnB>
+                  </a:tcPr>
+                </a:tc>
+                <a:tc>
+                  <a:txBody>
+                    <a:bodyPr/>
+                    <a:lstStyle/>
+                    <a:p>
+                      <a:pPr algn="ctr" indent="0" marL="0">
                         <a:buNone/>
                       </a:pPr>
                       <a:r>
@@ -2241,7 +2592,7 @@
                           <a:ea typeface="신세계 민부리 Light(TTF)" pitchFamily="34" charset="-122"/>
                           <a:cs typeface="신세계 민부리 Light(TTF)" pitchFamily="34" charset="-120"/>
                         </a:rPr>
-                        <a:t>정부 지급으로 수익 안정</a:t>
+                        <a:t>민간</a:t>
                       </a:r>
                       <a:endParaRPr lang="en-US" sz="800" dirty="0">
                         <a:latin typeface="신세계 민부리 Light(TTF)" charset="0"/>
@@ -2250,51 +2601,51 @@
                       </a:endParaRPr>
                     </a:p>
                   </a:txBody>
-                  <a:tcPr marL="45720" marR="45720" marT="18288" marB="18288" anchor="ctr">
-                    <a:lnL w="6350" cap="flat" cmpd="sng" algn="ctr">
-                      <a:solidFill>
-                        <a:srgbClr val="BFBFBF"/>
-                      </a:solidFill>
-                      <a:prstDash val="solid"/>
-                      <a:round/>
-                      <a:headEnd type="none" w="med" len="med"/>
-                      <a:tailEnd type="none" w="med" len="med"/>
-                    </a:lnL>
-                    <a:lnR w="6350" cap="flat" cmpd="sng" algn="ctr">
-                      <a:solidFill>
-                        <a:srgbClr val="BFBFBF"/>
-                      </a:solidFill>
-                      <a:prstDash val="solid"/>
-                      <a:round/>
-                      <a:headEnd type="none" w="med" len="med"/>
-                      <a:tailEnd type="none" w="med" len="med"/>
-                    </a:lnR>
-                    <a:lnT w="6350" cap="flat" cmpd="sng" algn="ctr">
-                      <a:solidFill>
-                        <a:srgbClr val="BFBFBF"/>
-                      </a:solidFill>
-                      <a:prstDash val="solid"/>
-                      <a:round/>
-                      <a:headEnd type="none" w="med" len="med"/>
-                      <a:tailEnd type="none" w="med" len="med"/>
-                    </a:lnT>
-                    <a:lnB w="6350" cap="flat" cmpd="sng" algn="ctr">
-                      <a:solidFill>
-                        <a:srgbClr val="BFBFBF"/>
-                      </a:solidFill>
-                      <a:prstDash val="solid"/>
-                      <a:round/>
-                      <a:headEnd type="none" w="med" len="med"/>
-                      <a:tailEnd type="none" w="med" len="med"/>
-                    </a:lnB>
-                  </a:tcPr>
-                </a:tc>
-                <a:tc>
-                  <a:txBody>
-                    <a:bodyPr/>
-                    <a:lstStyle/>
-                    <a:p>
-                      <a:pPr indent="0" marL="0">
+                  <a:tcPr marL="36576" marR="36576" marT="18288" marB="18288" anchor="ctr">
+                    <a:lnL w="6350" cap="flat" cmpd="sng" algn="ctr">
+                      <a:solidFill>
+                        <a:srgbClr val="BFBFBF"/>
+                      </a:solidFill>
+                      <a:prstDash val="solid"/>
+                      <a:round/>
+                      <a:headEnd type="none" w="med" len="med"/>
+                      <a:tailEnd type="none" w="med" len="med"/>
+                    </a:lnL>
+                    <a:lnR w="6350" cap="flat" cmpd="sng" algn="ctr">
+                      <a:solidFill>
+                        <a:srgbClr val="BFBFBF"/>
+                      </a:solidFill>
+                      <a:prstDash val="solid"/>
+                      <a:round/>
+                      <a:headEnd type="none" w="med" len="med"/>
+                      <a:tailEnd type="none" w="med" len="med"/>
+                    </a:lnR>
+                    <a:lnT w="6350" cap="flat" cmpd="sng" algn="ctr">
+                      <a:solidFill>
+                        <a:srgbClr val="BFBFBF"/>
+                      </a:solidFill>
+                      <a:prstDash val="solid"/>
+                      <a:round/>
+                      <a:headEnd type="none" w="med" len="med"/>
+                      <a:tailEnd type="none" w="med" len="med"/>
+                    </a:lnT>
+                    <a:lnB w="6350" cap="flat" cmpd="sng" algn="ctr">
+                      <a:solidFill>
+                        <a:srgbClr val="BFBFBF"/>
+                      </a:solidFill>
+                      <a:prstDash val="solid"/>
+                      <a:round/>
+                      <a:headEnd type="none" w="med" len="med"/>
+                      <a:tailEnd type="none" w="med" len="med"/>
+                    </a:lnB>
+                  </a:tcPr>
+                </a:tc>
+                <a:tc>
+                  <a:txBody>
+                    <a:bodyPr/>
+                    <a:lstStyle/>
+                    <a:p>
+                      <a:pPr algn="ctr" indent="0" marL="0">
                         <a:buNone/>
                       </a:pPr>
                       <a:r>
@@ -2306,7 +2657,7 @@
                           <a:ea typeface="신세계 민부리 Light(TTF)" pitchFamily="34" charset="-122"/>
                           <a:cs typeface="신세계 민부리 Light(TTF)" pitchFamily="34" charset="-120"/>
                         </a:rPr>
-                        <a:t>수익률 상한, 상업시설 부적합</a:t>
+                        <a:t>국가</a:t>
                       </a:r>
                       <a:endParaRPr lang="en-US" sz="800" dirty="0">
                         <a:latin typeface="신세계 민부리 Light(TTF)" charset="0"/>
@@ -2315,7 +2666,7 @@
                       </a:endParaRPr>
                     </a:p>
                   </a:txBody>
-                  <a:tcPr marL="45720" marR="45720" marT="18288" marB="18288" anchor="ctr">
+                  <a:tcPr marL="36576" marR="36576" marT="18288" marB="18288" anchor="ctr">
                     <a:lnL w="6350" cap="flat" cmpd="sng" algn="ctr">
                       <a:solidFill>
                         <a:srgbClr val="BFBFBF"/>
@@ -2360,137 +2711,6 @@
                     <a:lstStyle/>
                     <a:p>
                       <a:pPr algn="ctr" indent="0" marL="0">
-                        <a:buNone/>
-                      </a:pPr>
-                      <a:r>
-                        <a:rPr lang="en-US" sz="1100" b="1" dirty="0">
-                          <a:solidFill>
-                            <a:srgbClr val="A6A6A6"/>
-                          </a:solidFill>
-                          <a:latin typeface="신세계 민부리 Bold(TTF)" pitchFamily="34" charset="0"/>
-                          <a:ea typeface="신세계 민부리 Bold(TTF)" pitchFamily="34" charset="-122"/>
-                          <a:cs typeface="신세계 민부리 Bold(TTF)" pitchFamily="34" charset="-120"/>
-                        </a:rPr>
-                        <a:t>✕</a:t>
-                      </a:r>
-                      <a:endParaRPr lang="en-US" sz="1100" dirty="0">
-                        <a:latin typeface="신세계 민부리 Bold(TTF)" charset="0"/>
-                        <a:ea typeface="신세계 민부리 Bold(TTF)" charset="0"/>
-                        <a:cs typeface="신세계 민부리 Bold(TTF)" charset="0"/>
-                      </a:endParaRPr>
-                    </a:p>
-                  </a:txBody>
-                  <a:tcPr marL="45720" marR="45720" marT="18288" marB="18288" anchor="ctr">
-                    <a:lnL w="6350" cap="flat" cmpd="sng" algn="ctr">
-                      <a:solidFill>
-                        <a:srgbClr val="BFBFBF"/>
-                      </a:solidFill>
-                      <a:prstDash val="solid"/>
-                      <a:round/>
-                      <a:headEnd type="none" w="med" len="med"/>
-                      <a:tailEnd type="none" w="med" len="med"/>
-                    </a:lnL>
-                    <a:lnR w="6350" cap="flat" cmpd="sng" algn="ctr">
-                      <a:solidFill>
-                        <a:srgbClr val="BFBFBF"/>
-                      </a:solidFill>
-                      <a:prstDash val="solid"/>
-                      <a:round/>
-                      <a:headEnd type="none" w="med" len="med"/>
-                      <a:tailEnd type="none" w="med" len="med"/>
-                    </a:lnR>
-                    <a:lnT w="6350" cap="flat" cmpd="sng" algn="ctr">
-                      <a:solidFill>
-                        <a:srgbClr val="BFBFBF"/>
-                      </a:solidFill>
-                      <a:prstDash val="solid"/>
-                      <a:round/>
-                      <a:headEnd type="none" w="med" len="med"/>
-                      <a:tailEnd type="none" w="med" len="med"/>
-                    </a:lnT>
-                    <a:lnB w="6350" cap="flat" cmpd="sng" algn="ctr">
-                      <a:solidFill>
-                        <a:srgbClr val="BFBFBF"/>
-                      </a:solidFill>
-                      <a:prstDash val="solid"/>
-                      <a:round/>
-                      <a:headEnd type="none" w="med" len="med"/>
-                      <a:tailEnd type="none" w="med" len="med"/>
-                    </a:lnB>
-                  </a:tcPr>
-                </a:tc>
-              </a:tr>
-              <a:tr h="438912">
-                <a:tc>
-                  <a:txBody>
-                    <a:bodyPr/>
-                    <a:lstStyle/>
-                    <a:p>
-                      <a:pPr algn="ctr" indent="0" marL="0">
-                        <a:buNone/>
-                      </a:pPr>
-                      <a:r>
-                        <a:rPr lang="en-US" sz="900" b="1" dirty="0">
-                          <a:solidFill>
-                            <a:srgbClr val="000000"/>
-                          </a:solidFill>
-                          <a:latin typeface="신세계 민부리 Bold(TTF)" pitchFamily="34" charset="0"/>
-                          <a:ea typeface="신세계 민부리 Bold(TTF)" pitchFamily="34" charset="-122"/>
-                          <a:cs typeface="신세계 민부리 Bold(TTF)" pitchFamily="34" charset="-120"/>
-                        </a:rPr>
-                        <a:t>BOT</a:t>
-                      </a:r>
-                      <a:endParaRPr lang="en-US" sz="1200" dirty="0"/>
-                    </a:p>
-                  </a:txBody>
-                  <a:tcPr marL="45720" marR="45720" marT="18288" marB="18288" anchor="ctr">
-                    <a:lnL w="6350" cap="flat" cmpd="sng" algn="ctr">
-                      <a:solidFill>
-                        <a:srgbClr val="BFBFBF"/>
-                      </a:solidFill>
-                      <a:prstDash val="solid"/>
-                      <a:round/>
-                      <a:headEnd type="none" w="med" len="med"/>
-                      <a:tailEnd type="none" w="med" len="med"/>
-                    </a:lnL>
-                    <a:lnR w="6350" cap="flat" cmpd="sng" algn="ctr">
-                      <a:solidFill>
-                        <a:srgbClr val="BFBFBF"/>
-                      </a:solidFill>
-                      <a:prstDash val="solid"/>
-                      <a:round/>
-                      <a:headEnd type="none" w="med" len="med"/>
-                      <a:tailEnd type="none" w="med" len="med"/>
-                    </a:lnR>
-                    <a:lnT w="6350" cap="flat" cmpd="sng" algn="ctr">
-                      <a:solidFill>
-                        <a:srgbClr val="BFBFBF"/>
-                      </a:solidFill>
-                      <a:prstDash val="solid"/>
-                      <a:round/>
-                      <a:headEnd type="none" w="med" len="med"/>
-                      <a:tailEnd type="none" w="med" len="med"/>
-                    </a:lnT>
-                    <a:lnB w="6350" cap="flat" cmpd="sng" algn="ctr">
-                      <a:solidFill>
-                        <a:srgbClr val="BFBFBF"/>
-                      </a:solidFill>
-                      <a:prstDash val="solid"/>
-                      <a:round/>
-                      <a:headEnd type="none" w="med" len="med"/>
-                      <a:tailEnd type="none" w="med" len="med"/>
-                    </a:lnB>
-                    <a:solidFill>
-                      <a:srgbClr val="F2F2F2"/>
-                    </a:solidFill>
-                  </a:tcPr>
-                </a:tc>
-                <a:tc>
-                  <a:txBody>
-                    <a:bodyPr/>
-                    <a:lstStyle/>
-                    <a:p>
-                      <a:pPr indent="0" marL="0">
                         <a:buNone/>
                       </a:pPr>
                       <a:r>
@@ -2502,7 +2722,7 @@
                           <a:ea typeface="신세계 민부리 Light(TTF)" pitchFamily="34" charset="-122"/>
                           <a:cs typeface="신세계 민부리 Light(TTF)" pitchFamily="34" charset="-120"/>
                         </a:rPr>
-                        <a:t>운영기간 민간 소유 → 종료 후 귀속</a:t>
+                        <a:t>민간*</a:t>
                       </a:r>
                       <a:endParaRPr lang="en-US" sz="800" dirty="0">
                         <a:latin typeface="신세계 민부리 Light(TTF)" charset="0"/>
@@ -2511,51 +2731,51 @@
                       </a:endParaRPr>
                     </a:p>
                   </a:txBody>
-                  <a:tcPr marL="45720" marR="45720" marT="18288" marB="18288" anchor="ctr">
-                    <a:lnL w="6350" cap="flat" cmpd="sng" algn="ctr">
-                      <a:solidFill>
-                        <a:srgbClr val="BFBFBF"/>
-                      </a:solidFill>
-                      <a:prstDash val="solid"/>
-                      <a:round/>
-                      <a:headEnd type="none" w="med" len="med"/>
-                      <a:tailEnd type="none" w="med" len="med"/>
-                    </a:lnL>
-                    <a:lnR w="6350" cap="flat" cmpd="sng" algn="ctr">
-                      <a:solidFill>
-                        <a:srgbClr val="BFBFBF"/>
-                      </a:solidFill>
-                      <a:prstDash val="solid"/>
-                      <a:round/>
-                      <a:headEnd type="none" w="med" len="med"/>
-                      <a:tailEnd type="none" w="med" len="med"/>
-                    </a:lnR>
-                    <a:lnT w="6350" cap="flat" cmpd="sng" algn="ctr">
-                      <a:solidFill>
-                        <a:srgbClr val="BFBFBF"/>
-                      </a:solidFill>
-                      <a:prstDash val="solid"/>
-                      <a:round/>
-                      <a:headEnd type="none" w="med" len="med"/>
-                      <a:tailEnd type="none" w="med" len="med"/>
-                    </a:lnT>
-                    <a:lnB w="6350" cap="flat" cmpd="sng" algn="ctr">
-                      <a:solidFill>
-                        <a:srgbClr val="BFBFBF"/>
-                      </a:solidFill>
-                      <a:prstDash val="solid"/>
-                      <a:round/>
-                      <a:headEnd type="none" w="med" len="med"/>
-                      <a:tailEnd type="none" w="med" len="med"/>
-                    </a:lnB>
-                  </a:tcPr>
-                </a:tc>
-                <a:tc>
-                  <a:txBody>
-                    <a:bodyPr/>
-                    <a:lstStyle/>
-                    <a:p>
-                      <a:pPr indent="0" marL="0">
+                  <a:tcPr marL="36576" marR="36576" marT="18288" marB="18288" anchor="ctr">
+                    <a:lnL w="6350" cap="flat" cmpd="sng" algn="ctr">
+                      <a:solidFill>
+                        <a:srgbClr val="BFBFBF"/>
+                      </a:solidFill>
+                      <a:prstDash val="solid"/>
+                      <a:round/>
+                      <a:headEnd type="none" w="med" len="med"/>
+                      <a:tailEnd type="none" w="med" len="med"/>
+                    </a:lnL>
+                    <a:lnR w="6350" cap="flat" cmpd="sng" algn="ctr">
+                      <a:solidFill>
+                        <a:srgbClr val="BFBFBF"/>
+                      </a:solidFill>
+                      <a:prstDash val="solid"/>
+                      <a:round/>
+                      <a:headEnd type="none" w="med" len="med"/>
+                      <a:tailEnd type="none" w="med" len="med"/>
+                    </a:lnR>
+                    <a:lnT w="6350" cap="flat" cmpd="sng" algn="ctr">
+                      <a:solidFill>
+                        <a:srgbClr val="BFBFBF"/>
+                      </a:solidFill>
+                      <a:prstDash val="solid"/>
+                      <a:round/>
+                      <a:headEnd type="none" w="med" len="med"/>
+                      <a:tailEnd type="none" w="med" len="med"/>
+                    </a:lnT>
+                    <a:lnB w="6350" cap="flat" cmpd="sng" algn="ctr">
+                      <a:solidFill>
+                        <a:srgbClr val="BFBFBF"/>
+                      </a:solidFill>
+                      <a:prstDash val="solid"/>
+                      <a:round/>
+                      <a:headEnd type="none" w="med" len="med"/>
+                      <a:tailEnd type="none" w="med" len="med"/>
+                    </a:lnB>
+                  </a:tcPr>
+                </a:tc>
+                <a:tc>
+                  <a:txBody>
+                    <a:bodyPr/>
+                    <a:lstStyle/>
+                    <a:p>
+                      <a:pPr algn="ctr" indent="0" marL="0">
                         <a:buNone/>
                       </a:pPr>
                       <a:r>
@@ -2567,7 +2787,7 @@
                           <a:ea typeface="신세계 민부리 Light(TTF)" pitchFamily="34" charset="-122"/>
                           <a:cs typeface="신세계 민부리 Light(TTF)" pitchFamily="34" charset="-120"/>
                         </a:rPr>
-                        <a:t>이용자 사용료 / 수요위험 민간</a:t>
+                        <a:t>정부 임대료</a:t>
                       </a:r>
                       <a:endParaRPr lang="en-US" sz="800" dirty="0">
                         <a:latin typeface="신세계 민부리 Light(TTF)" charset="0"/>
@@ -2576,51 +2796,51 @@
                       </a:endParaRPr>
                     </a:p>
                   </a:txBody>
-                  <a:tcPr marL="45720" marR="45720" marT="18288" marB="18288" anchor="ctr">
-                    <a:lnL w="6350" cap="flat" cmpd="sng" algn="ctr">
-                      <a:solidFill>
-                        <a:srgbClr val="BFBFBF"/>
-                      </a:solidFill>
-                      <a:prstDash val="solid"/>
-                      <a:round/>
-                      <a:headEnd type="none" w="med" len="med"/>
-                      <a:tailEnd type="none" w="med" len="med"/>
-                    </a:lnL>
-                    <a:lnR w="6350" cap="flat" cmpd="sng" algn="ctr">
-                      <a:solidFill>
-                        <a:srgbClr val="BFBFBF"/>
-                      </a:solidFill>
-                      <a:prstDash val="solid"/>
-                      <a:round/>
-                      <a:headEnd type="none" w="med" len="med"/>
-                      <a:tailEnd type="none" w="med" len="med"/>
-                    </a:lnR>
-                    <a:lnT w="6350" cap="flat" cmpd="sng" algn="ctr">
-                      <a:solidFill>
-                        <a:srgbClr val="BFBFBF"/>
-                      </a:solidFill>
-                      <a:prstDash val="solid"/>
-                      <a:round/>
-                      <a:headEnd type="none" w="med" len="med"/>
-                      <a:tailEnd type="none" w="med" len="med"/>
-                    </a:lnT>
-                    <a:lnB w="6350" cap="flat" cmpd="sng" algn="ctr">
-                      <a:solidFill>
-                        <a:srgbClr val="BFBFBF"/>
-                      </a:solidFill>
-                      <a:prstDash val="solid"/>
-                      <a:round/>
-                      <a:headEnd type="none" w="med" len="med"/>
-                      <a:tailEnd type="none" w="med" len="med"/>
-                    </a:lnB>
-                  </a:tcPr>
-                </a:tc>
-                <a:tc>
-                  <a:txBody>
-                    <a:bodyPr/>
-                    <a:lstStyle/>
-                    <a:p>
-                      <a:pPr indent="0" marL="0">
+                  <a:tcPr marL="36576" marR="36576" marT="18288" marB="18288" anchor="ctr">
+                    <a:lnL w="6350" cap="flat" cmpd="sng" algn="ctr">
+                      <a:solidFill>
+                        <a:srgbClr val="BFBFBF"/>
+                      </a:solidFill>
+                      <a:prstDash val="solid"/>
+                      <a:round/>
+                      <a:headEnd type="none" w="med" len="med"/>
+                      <a:tailEnd type="none" w="med" len="med"/>
+                    </a:lnL>
+                    <a:lnR w="6350" cap="flat" cmpd="sng" algn="ctr">
+                      <a:solidFill>
+                        <a:srgbClr val="BFBFBF"/>
+                      </a:solidFill>
+                      <a:prstDash val="solid"/>
+                      <a:round/>
+                      <a:headEnd type="none" w="med" len="med"/>
+                      <a:tailEnd type="none" w="med" len="med"/>
+                    </a:lnR>
+                    <a:lnT w="6350" cap="flat" cmpd="sng" algn="ctr">
+                      <a:solidFill>
+                        <a:srgbClr val="BFBFBF"/>
+                      </a:solidFill>
+                      <a:prstDash val="solid"/>
+                      <a:round/>
+                      <a:headEnd type="none" w="med" len="med"/>
+                      <a:tailEnd type="none" w="med" len="med"/>
+                    </a:lnT>
+                    <a:lnB w="6350" cap="flat" cmpd="sng" algn="ctr">
+                      <a:solidFill>
+                        <a:srgbClr val="BFBFBF"/>
+                      </a:solidFill>
+                      <a:prstDash val="solid"/>
+                      <a:round/>
+                      <a:headEnd type="none" w="med" len="med"/>
+                      <a:tailEnd type="none" w="med" len="med"/>
+                    </a:lnB>
+                  </a:tcPr>
+                </a:tc>
+                <a:tc>
+                  <a:txBody>
+                    <a:bodyPr/>
+                    <a:lstStyle/>
+                    <a:p>
+                      <a:pPr algn="ctr" indent="0" marL="0">
                         <a:buNone/>
                       </a:pPr>
                       <a:r>
@@ -2632,7 +2852,7 @@
                           <a:ea typeface="신세계 민부리 Light(TTF)" pitchFamily="34" charset="-122"/>
                           <a:cs typeface="신세계 민부리 Light(TTF)" pitchFamily="34" charset="-120"/>
                         </a:rPr>
-                        <a:t>세빛섬 (現 협약)</a:t>
+                        <a:t>정부</a:t>
                       </a:r>
                       <a:endParaRPr lang="en-US" sz="800" dirty="0">
                         <a:latin typeface="신세계 민부리 Light(TTF)" charset="0"/>
@@ -2641,7 +2861,7 @@
                       </a:endParaRPr>
                     </a:p>
                   </a:txBody>
-                  <a:tcPr marL="45720" marR="45720" marT="18288" marB="18288" anchor="ctr">
+                  <a:tcPr marL="36576" marR="36576" marT="18288" marB="18288" anchor="ctr">
                     <a:lnL w="6350" cap="flat" cmpd="sng" algn="ctr">
                       <a:solidFill>
                         <a:srgbClr val="BFBFBF"/>
@@ -2697,7 +2917,7 @@
                           <a:ea typeface="신세계 민부리 Light(TTF)" pitchFamily="34" charset="-122"/>
                           <a:cs typeface="신세계 민부리 Light(TTF)" pitchFamily="34" charset="-120"/>
                         </a:rPr>
-                        <a:t>소유권 보유 → 담보 · 운영 자율성</a:t>
+                        <a:t>학교 · 기숙사 · 문화 · 복지시설</a:t>
                       </a:r>
                       <a:endParaRPr lang="en-US" sz="800" dirty="0">
                         <a:latin typeface="신세계 민부리 Light(TTF)" charset="0"/>
@@ -2706,7 +2926,7 @@
                       </a:endParaRPr>
                     </a:p>
                   </a:txBody>
-                  <a:tcPr marL="45720" marR="45720" marT="18288" marB="18288" anchor="ctr">
+                  <a:tcPr marL="36576" marR="36576" marT="18288" marB="18288" anchor="ctr">
                     <a:lnL w="6350" cap="flat" cmpd="sng" algn="ctr">
                       <a:solidFill>
                         <a:srgbClr val="BFBFBF"/>
@@ -2762,7 +2982,7 @@
                           <a:ea typeface="신세계 민부리 Light(TTF)" pitchFamily="34" charset="-122"/>
                           <a:cs typeface="신세계 민부리 Light(TTF)" pitchFamily="34" charset="-120"/>
                         </a:rPr>
-                        <a:t>손상차손 · 배임 이슈</a:t>
+                        <a:t>정부 지급으로 수익 안정</a:t>
                       </a:r>
                       <a:endParaRPr lang="en-US" sz="800" dirty="0">
                         <a:latin typeface="신세계 민부리 Light(TTF)" charset="0"/>
@@ -2771,174 +2991,43 @@
                       </a:endParaRPr>
                     </a:p>
                   </a:txBody>
-                  <a:tcPr marL="45720" marR="45720" marT="18288" marB="18288" anchor="ctr">
-                    <a:lnL w="6350" cap="flat" cmpd="sng" algn="ctr">
-                      <a:solidFill>
-                        <a:srgbClr val="BFBFBF"/>
-                      </a:solidFill>
-                      <a:prstDash val="solid"/>
-                      <a:round/>
-                      <a:headEnd type="none" w="med" len="med"/>
-                      <a:tailEnd type="none" w="med" len="med"/>
-                    </a:lnL>
-                    <a:lnR w="6350" cap="flat" cmpd="sng" algn="ctr">
-                      <a:solidFill>
-                        <a:srgbClr val="BFBFBF"/>
-                      </a:solidFill>
-                      <a:prstDash val="solid"/>
-                      <a:round/>
-                      <a:headEnd type="none" w="med" len="med"/>
-                      <a:tailEnd type="none" w="med" len="med"/>
-                    </a:lnR>
-                    <a:lnT w="6350" cap="flat" cmpd="sng" algn="ctr">
-                      <a:solidFill>
-                        <a:srgbClr val="BFBFBF"/>
-                      </a:solidFill>
-                      <a:prstDash val="solid"/>
-                      <a:round/>
-                      <a:headEnd type="none" w="med" len="med"/>
-                      <a:tailEnd type="none" w="med" len="med"/>
-                    </a:lnT>
-                    <a:lnB w="6350" cap="flat" cmpd="sng" algn="ctr">
-                      <a:solidFill>
-                        <a:srgbClr val="BFBFBF"/>
-                      </a:solidFill>
-                      <a:prstDash val="solid"/>
-                      <a:round/>
-                      <a:headEnd type="none" w="med" len="med"/>
-                      <a:tailEnd type="none" w="med" len="med"/>
-                    </a:lnB>
-                  </a:tcPr>
-                </a:tc>
-                <a:tc>
-                  <a:txBody>
-                    <a:bodyPr/>
-                    <a:lstStyle/>
-                    <a:p>
-                      <a:pPr algn="ctr" indent="0" marL="0">
-                        <a:buNone/>
-                      </a:pPr>
-                      <a:r>
-                        <a:rPr lang="en-US" sz="1100" b="1" dirty="0">
-                          <a:solidFill>
-                            <a:srgbClr val="595959"/>
-                          </a:solidFill>
-                          <a:latin typeface="신세계 민부리 Bold(TTF)" pitchFamily="34" charset="0"/>
-                          <a:ea typeface="신세계 민부리 Bold(TTF)" pitchFamily="34" charset="-122"/>
-                          <a:cs typeface="신세계 민부리 Bold(TTF)" pitchFamily="34" charset="-120"/>
-                        </a:rPr>
-                        <a:t>△</a:t>
-                      </a:r>
-                      <a:endParaRPr lang="en-US" sz="1100" dirty="0">
-                        <a:latin typeface="신세계 민부리 Bold(TTF)" charset="0"/>
-                        <a:ea typeface="신세계 민부리 Bold(TTF)" charset="0"/>
-                        <a:cs typeface="신세계 민부리 Bold(TTF)" charset="0"/>
-                      </a:endParaRPr>
-                    </a:p>
-                  </a:txBody>
-                  <a:tcPr marL="45720" marR="45720" marT="18288" marB="18288" anchor="ctr">
-                    <a:lnL w="6350" cap="flat" cmpd="sng" algn="ctr">
-                      <a:solidFill>
-                        <a:srgbClr val="BFBFBF"/>
-                      </a:solidFill>
-                      <a:prstDash val="solid"/>
-                      <a:round/>
-                      <a:headEnd type="none" w="med" len="med"/>
-                      <a:tailEnd type="none" w="med" len="med"/>
-                    </a:lnL>
-                    <a:lnR w="6350" cap="flat" cmpd="sng" algn="ctr">
-                      <a:solidFill>
-                        <a:srgbClr val="BFBFBF"/>
-                      </a:solidFill>
-                      <a:prstDash val="solid"/>
-                      <a:round/>
-                      <a:headEnd type="none" w="med" len="med"/>
-                      <a:tailEnd type="none" w="med" len="med"/>
-                    </a:lnR>
-                    <a:lnT w="6350" cap="flat" cmpd="sng" algn="ctr">
-                      <a:solidFill>
-                        <a:srgbClr val="BFBFBF"/>
-                      </a:solidFill>
-                      <a:prstDash val="solid"/>
-                      <a:round/>
-                      <a:headEnd type="none" w="med" len="med"/>
-                      <a:tailEnd type="none" w="med" len="med"/>
-                    </a:lnT>
-                    <a:lnB w="6350" cap="flat" cmpd="sng" algn="ctr">
-                      <a:solidFill>
-                        <a:srgbClr val="BFBFBF"/>
-                      </a:solidFill>
-                      <a:prstDash val="solid"/>
-                      <a:round/>
-                      <a:headEnd type="none" w="med" len="med"/>
-                      <a:tailEnd type="none" w="med" len="med"/>
-                    </a:lnB>
-                  </a:tcPr>
-                </a:tc>
-              </a:tr>
-              <a:tr h="438912">
-                <a:tc>
-                  <a:txBody>
-                    <a:bodyPr/>
-                    <a:lstStyle/>
-                    <a:p>
-                      <a:pPr algn="ctr" indent="0" marL="0">
-                        <a:buNone/>
-                      </a:pPr>
-                      <a:r>
-                        <a:rPr lang="en-US" sz="900" b="1" dirty="0">
-                          <a:solidFill>
-                            <a:srgbClr val="000000"/>
-                          </a:solidFill>
-                          <a:latin typeface="신세계 민부리 Bold(TTF)" pitchFamily="34" charset="0"/>
-                          <a:ea typeface="신세계 민부리 Bold(TTF)" pitchFamily="34" charset="-122"/>
-                          <a:cs typeface="신세계 민부리 Bold(TTF)" pitchFamily="34" charset="-120"/>
-                        </a:rPr>
-                        <a:t>BOO</a:t>
-                      </a:r>
-                      <a:endParaRPr lang="en-US" sz="1200" dirty="0"/>
-                    </a:p>
-                  </a:txBody>
-                  <a:tcPr marL="45720" marR="45720" marT="18288" marB="18288" anchor="ctr">
-                    <a:lnL w="6350" cap="flat" cmpd="sng" algn="ctr">
-                      <a:solidFill>
-                        <a:srgbClr val="BFBFBF"/>
-                      </a:solidFill>
-                      <a:prstDash val="solid"/>
-                      <a:round/>
-                      <a:headEnd type="none" w="med" len="med"/>
-                      <a:tailEnd type="none" w="med" len="med"/>
-                    </a:lnL>
-                    <a:lnR w="6350" cap="flat" cmpd="sng" algn="ctr">
-                      <a:solidFill>
-                        <a:srgbClr val="BFBFBF"/>
-                      </a:solidFill>
-                      <a:prstDash val="solid"/>
-                      <a:round/>
-                      <a:headEnd type="none" w="med" len="med"/>
-                      <a:tailEnd type="none" w="med" len="med"/>
-                    </a:lnR>
-                    <a:lnT w="6350" cap="flat" cmpd="sng" algn="ctr">
-                      <a:solidFill>
-                        <a:srgbClr val="BFBFBF"/>
-                      </a:solidFill>
-                      <a:prstDash val="solid"/>
-                      <a:round/>
-                      <a:headEnd type="none" w="med" len="med"/>
-                      <a:tailEnd type="none" w="med" len="med"/>
-                    </a:lnT>
-                    <a:lnB w="6350" cap="flat" cmpd="sng" algn="ctr">
-                      <a:solidFill>
-                        <a:srgbClr val="BFBFBF"/>
-                      </a:solidFill>
-                      <a:prstDash val="solid"/>
-                      <a:round/>
-                      <a:headEnd type="none" w="med" len="med"/>
-                      <a:tailEnd type="none" w="med" len="med"/>
-                    </a:lnB>
-                    <a:solidFill>
-                      <a:srgbClr val="F2F2F2"/>
-                    </a:solidFill>
+                  <a:tcPr marL="36576" marR="36576" marT="18288" marB="18288" anchor="ctr">
+                    <a:lnL w="6350" cap="flat" cmpd="sng" algn="ctr">
+                      <a:solidFill>
+                        <a:srgbClr val="BFBFBF"/>
+                      </a:solidFill>
+                      <a:prstDash val="solid"/>
+                      <a:round/>
+                      <a:headEnd type="none" w="med" len="med"/>
+                      <a:tailEnd type="none" w="med" len="med"/>
+                    </a:lnL>
+                    <a:lnR w="6350" cap="flat" cmpd="sng" algn="ctr">
+                      <a:solidFill>
+                        <a:srgbClr val="BFBFBF"/>
+                      </a:solidFill>
+                      <a:prstDash val="solid"/>
+                      <a:round/>
+                      <a:headEnd type="none" w="med" len="med"/>
+                      <a:tailEnd type="none" w="med" len="med"/>
+                    </a:lnR>
+                    <a:lnT w="6350" cap="flat" cmpd="sng" algn="ctr">
+                      <a:solidFill>
+                        <a:srgbClr val="BFBFBF"/>
+                      </a:solidFill>
+                      <a:prstDash val="solid"/>
+                      <a:round/>
+                      <a:headEnd type="none" w="med" len="med"/>
+                      <a:tailEnd type="none" w="med" len="med"/>
+                    </a:lnT>
+                    <a:lnB w="6350" cap="flat" cmpd="sng" algn="ctr">
+                      <a:solidFill>
+                        <a:srgbClr val="BFBFBF"/>
+                      </a:solidFill>
+                      <a:prstDash val="solid"/>
+                      <a:round/>
+                      <a:headEnd type="none" w="med" len="med"/>
+                      <a:tailEnd type="none" w="med" len="med"/>
+                    </a:lnB>
                   </a:tcPr>
                 </a:tc>
                 <a:tc>
@@ -2958,7 +3047,7 @@
                           <a:ea typeface="신세계 민부리 Light(TTF)" pitchFamily="34" charset="-122"/>
                           <a:cs typeface="신세계 민부리 Light(TTF)" pitchFamily="34" charset="-120"/>
                         </a:rPr>
-                        <a:t>민간이 영구 소유 · 운영 (귀속 없음)</a:t>
+                        <a:t>수익률 상한, 상업시설 부적합</a:t>
                       </a:r>
                       <a:endParaRPr lang="en-US" sz="800" dirty="0">
                         <a:latin typeface="신세계 민부리 Light(TTF)" charset="0"/>
@@ -2967,51 +3056,117 @@
                       </a:endParaRPr>
                     </a:p>
                   </a:txBody>
-                  <a:tcPr marL="45720" marR="45720" marT="18288" marB="18288" anchor="ctr">
-                    <a:lnL w="6350" cap="flat" cmpd="sng" algn="ctr">
-                      <a:solidFill>
-                        <a:srgbClr val="BFBFBF"/>
-                      </a:solidFill>
-                      <a:prstDash val="solid"/>
-                      <a:round/>
-                      <a:headEnd type="none" w="med" len="med"/>
-                      <a:tailEnd type="none" w="med" len="med"/>
-                    </a:lnL>
-                    <a:lnR w="6350" cap="flat" cmpd="sng" algn="ctr">
-                      <a:solidFill>
-                        <a:srgbClr val="BFBFBF"/>
-                      </a:solidFill>
-                      <a:prstDash val="solid"/>
-                      <a:round/>
-                      <a:headEnd type="none" w="med" len="med"/>
-                      <a:tailEnd type="none" w="med" len="med"/>
-                    </a:lnR>
-                    <a:lnT w="6350" cap="flat" cmpd="sng" algn="ctr">
-                      <a:solidFill>
-                        <a:srgbClr val="BFBFBF"/>
-                      </a:solidFill>
-                      <a:prstDash val="solid"/>
-                      <a:round/>
-                      <a:headEnd type="none" w="med" len="med"/>
-                      <a:tailEnd type="none" w="med" len="med"/>
-                    </a:lnT>
-                    <a:lnB w="6350" cap="flat" cmpd="sng" algn="ctr">
-                      <a:solidFill>
-                        <a:srgbClr val="BFBFBF"/>
-                      </a:solidFill>
-                      <a:prstDash val="solid"/>
-                      <a:round/>
-                      <a:headEnd type="none" w="med" len="med"/>
-                      <a:tailEnd type="none" w="med" len="med"/>
-                    </a:lnB>
-                  </a:tcPr>
-                </a:tc>
-                <a:tc>
-                  <a:txBody>
-                    <a:bodyPr/>
-                    <a:lstStyle/>
-                    <a:p>
-                      <a:pPr indent="0" marL="0">
+                  <a:tcPr marL="36576" marR="36576" marT="18288" marB="18288" anchor="ctr">
+                    <a:lnL w="6350" cap="flat" cmpd="sng" algn="ctr">
+                      <a:solidFill>
+                        <a:srgbClr val="BFBFBF"/>
+                      </a:solidFill>
+                      <a:prstDash val="solid"/>
+                      <a:round/>
+                      <a:headEnd type="none" w="med" len="med"/>
+                      <a:tailEnd type="none" w="med" len="med"/>
+                    </a:lnL>
+                    <a:lnR w="6350" cap="flat" cmpd="sng" algn="ctr">
+                      <a:solidFill>
+                        <a:srgbClr val="BFBFBF"/>
+                      </a:solidFill>
+                      <a:prstDash val="solid"/>
+                      <a:round/>
+                      <a:headEnd type="none" w="med" len="med"/>
+                      <a:tailEnd type="none" w="med" len="med"/>
+                    </a:lnR>
+                    <a:lnT w="6350" cap="flat" cmpd="sng" algn="ctr">
+                      <a:solidFill>
+                        <a:srgbClr val="BFBFBF"/>
+                      </a:solidFill>
+                      <a:prstDash val="solid"/>
+                      <a:round/>
+                      <a:headEnd type="none" w="med" len="med"/>
+                      <a:tailEnd type="none" w="med" len="med"/>
+                    </a:lnT>
+                    <a:lnB w="6350" cap="flat" cmpd="sng" algn="ctr">
+                      <a:solidFill>
+                        <a:srgbClr val="BFBFBF"/>
+                      </a:solidFill>
+                      <a:prstDash val="solid"/>
+                      <a:round/>
+                      <a:headEnd type="none" w="med" len="med"/>
+                      <a:tailEnd type="none" w="med" len="med"/>
+                    </a:lnB>
+                  </a:tcPr>
+                </a:tc>
+              </a:tr>
+              <a:tr h="438912">
+                <a:tc vMerge="1">
+                  <a:tcPr/>
+                </a:tc>
+                <a:tc>
+                  <a:txBody>
+                    <a:bodyPr/>
+                    <a:lstStyle/>
+                    <a:p>
+                      <a:pPr algn="ctr" indent="0" marL="0">
+                        <a:buNone/>
+                      </a:pPr>
+                      <a:r>
+                        <a:rPr lang="en-US" sz="900" b="1" dirty="0">
+                          <a:solidFill>
+                            <a:srgbClr val="000000"/>
+                          </a:solidFill>
+                          <a:latin typeface="신세계 민부리 Bold(TTF)" pitchFamily="34" charset="0"/>
+                          <a:ea typeface="신세계 민부리 Bold(TTF)" pitchFamily="34" charset="-122"/>
+                          <a:cs typeface="신세계 민부리 Bold(TTF)" pitchFamily="34" charset="-120"/>
+                        </a:rPr>
+                        <a:t>BOT</a:t>
+                      </a:r>
+                      <a:endParaRPr lang="en-US" sz="1200" dirty="0"/>
+                    </a:p>
+                  </a:txBody>
+                  <a:tcPr marL="36576" marR="36576" marT="18288" marB="18288" anchor="ctr">
+                    <a:lnL w="6350" cap="flat" cmpd="sng" algn="ctr">
+                      <a:solidFill>
+                        <a:srgbClr val="BFBFBF"/>
+                      </a:solidFill>
+                      <a:prstDash val="solid"/>
+                      <a:round/>
+                      <a:headEnd type="none" w="med" len="med"/>
+                      <a:tailEnd type="none" w="med" len="med"/>
+                    </a:lnL>
+                    <a:lnR w="6350" cap="flat" cmpd="sng" algn="ctr">
+                      <a:solidFill>
+                        <a:srgbClr val="BFBFBF"/>
+                      </a:solidFill>
+                      <a:prstDash val="solid"/>
+                      <a:round/>
+                      <a:headEnd type="none" w="med" len="med"/>
+                      <a:tailEnd type="none" w="med" len="med"/>
+                    </a:lnR>
+                    <a:lnT w="6350" cap="flat" cmpd="sng" algn="ctr">
+                      <a:solidFill>
+                        <a:srgbClr val="BFBFBF"/>
+                      </a:solidFill>
+                      <a:prstDash val="solid"/>
+                      <a:round/>
+                      <a:headEnd type="none" w="med" len="med"/>
+                      <a:tailEnd type="none" w="med" len="med"/>
+                    </a:lnT>
+                    <a:lnB w="6350" cap="flat" cmpd="sng" algn="ctr">
+                      <a:solidFill>
+                        <a:srgbClr val="BFBFBF"/>
+                      </a:solidFill>
+                      <a:prstDash val="solid"/>
+                      <a:round/>
+                      <a:headEnd type="none" w="med" len="med"/>
+                      <a:tailEnd type="none" w="med" len="med"/>
+                    </a:lnB>
+                  </a:tcPr>
+                </a:tc>
+                <a:tc>
+                  <a:txBody>
+                    <a:bodyPr/>
+                    <a:lstStyle/>
+                    <a:p>
+                      <a:pPr algn="ctr" indent="0" marL="0">
                         <a:buNone/>
                       </a:pPr>
                       <a:r>
@@ -3023,7 +3178,7 @@
                           <a:ea typeface="신세계 민부리 Light(TTF)" pitchFamily="34" charset="-122"/>
                           <a:cs typeface="신세계 민부리 Light(TTF)" pitchFamily="34" charset="-120"/>
                         </a:rPr>
-                        <a:t>이용자 사용료 / 수요위험 민간</a:t>
+                        <a:t>민간</a:t>
                       </a:r>
                       <a:endParaRPr lang="en-US" sz="800" dirty="0">
                         <a:latin typeface="신세계 민부리 Light(TTF)" charset="0"/>
@@ -3032,51 +3187,51 @@
                       </a:endParaRPr>
                     </a:p>
                   </a:txBody>
-                  <a:tcPr marL="45720" marR="45720" marT="18288" marB="18288" anchor="ctr">
-                    <a:lnL w="6350" cap="flat" cmpd="sng" algn="ctr">
-                      <a:solidFill>
-                        <a:srgbClr val="BFBFBF"/>
-                      </a:solidFill>
-                      <a:prstDash val="solid"/>
-                      <a:round/>
-                      <a:headEnd type="none" w="med" len="med"/>
-                      <a:tailEnd type="none" w="med" len="med"/>
-                    </a:lnL>
-                    <a:lnR w="6350" cap="flat" cmpd="sng" algn="ctr">
-                      <a:solidFill>
-                        <a:srgbClr val="BFBFBF"/>
-                      </a:solidFill>
-                      <a:prstDash val="solid"/>
-                      <a:round/>
-                      <a:headEnd type="none" w="med" len="med"/>
-                      <a:tailEnd type="none" w="med" len="med"/>
-                    </a:lnR>
-                    <a:lnT w="6350" cap="flat" cmpd="sng" algn="ctr">
-                      <a:solidFill>
-                        <a:srgbClr val="BFBFBF"/>
-                      </a:solidFill>
-                      <a:prstDash val="solid"/>
-                      <a:round/>
-                      <a:headEnd type="none" w="med" len="med"/>
-                      <a:tailEnd type="none" w="med" len="med"/>
-                    </a:lnT>
-                    <a:lnB w="6350" cap="flat" cmpd="sng" algn="ctr">
-                      <a:solidFill>
-                        <a:srgbClr val="BFBFBF"/>
-                      </a:solidFill>
-                      <a:prstDash val="solid"/>
-                      <a:round/>
-                      <a:headEnd type="none" w="med" len="med"/>
-                      <a:tailEnd type="none" w="med" len="med"/>
-                    </a:lnB>
-                  </a:tcPr>
-                </a:tc>
-                <a:tc>
-                  <a:txBody>
-                    <a:bodyPr/>
-                    <a:lstStyle/>
-                    <a:p>
-                      <a:pPr indent="0" marL="0">
+                  <a:tcPr marL="36576" marR="36576" marT="18288" marB="18288" anchor="ctr">
+                    <a:lnL w="6350" cap="flat" cmpd="sng" algn="ctr">
+                      <a:solidFill>
+                        <a:srgbClr val="BFBFBF"/>
+                      </a:solidFill>
+                      <a:prstDash val="solid"/>
+                      <a:round/>
+                      <a:headEnd type="none" w="med" len="med"/>
+                      <a:tailEnd type="none" w="med" len="med"/>
+                    </a:lnL>
+                    <a:lnR w="6350" cap="flat" cmpd="sng" algn="ctr">
+                      <a:solidFill>
+                        <a:srgbClr val="BFBFBF"/>
+                      </a:solidFill>
+                      <a:prstDash val="solid"/>
+                      <a:round/>
+                      <a:headEnd type="none" w="med" len="med"/>
+                      <a:tailEnd type="none" w="med" len="med"/>
+                    </a:lnR>
+                    <a:lnT w="6350" cap="flat" cmpd="sng" algn="ctr">
+                      <a:solidFill>
+                        <a:srgbClr val="BFBFBF"/>
+                      </a:solidFill>
+                      <a:prstDash val="solid"/>
+                      <a:round/>
+                      <a:headEnd type="none" w="med" len="med"/>
+                      <a:tailEnd type="none" w="med" len="med"/>
+                    </a:lnT>
+                    <a:lnB w="6350" cap="flat" cmpd="sng" algn="ctr">
+                      <a:solidFill>
+                        <a:srgbClr val="BFBFBF"/>
+                      </a:solidFill>
+                      <a:prstDash val="solid"/>
+                      <a:round/>
+                      <a:headEnd type="none" w="med" len="med"/>
+                      <a:tailEnd type="none" w="med" len="med"/>
+                    </a:lnB>
+                  </a:tcPr>
+                </a:tc>
+                <a:tc>
+                  <a:txBody>
+                    <a:bodyPr/>
+                    <a:lstStyle/>
+                    <a:p>
+                      <a:pPr algn="ctr" indent="0" marL="0">
                         <a:buNone/>
                       </a:pPr>
                       <a:r>
@@ -3088,7 +3243,7 @@
                           <a:ea typeface="신세계 민부리 Light(TTF)" pitchFamily="34" charset="-122"/>
                           <a:cs typeface="신세계 민부리 Light(TTF)" pitchFamily="34" charset="-120"/>
                         </a:rPr>
-                        <a:t>발전 · 에너지 시설</a:t>
+                        <a:t>민간 → 국가</a:t>
                       </a:r>
                       <a:endParaRPr lang="en-US" sz="800" dirty="0">
                         <a:latin typeface="신세계 민부리 Light(TTF)" charset="0"/>
@@ -3097,51 +3252,51 @@
                       </a:endParaRPr>
                     </a:p>
                   </a:txBody>
-                  <a:tcPr marL="45720" marR="45720" marT="18288" marB="18288" anchor="ctr">
-                    <a:lnL w="6350" cap="flat" cmpd="sng" algn="ctr">
-                      <a:solidFill>
-                        <a:srgbClr val="BFBFBF"/>
-                      </a:solidFill>
-                      <a:prstDash val="solid"/>
-                      <a:round/>
-                      <a:headEnd type="none" w="med" len="med"/>
-                      <a:tailEnd type="none" w="med" len="med"/>
-                    </a:lnL>
-                    <a:lnR w="6350" cap="flat" cmpd="sng" algn="ctr">
-                      <a:solidFill>
-                        <a:srgbClr val="BFBFBF"/>
-                      </a:solidFill>
-                      <a:prstDash val="solid"/>
-                      <a:round/>
-                      <a:headEnd type="none" w="med" len="med"/>
-                      <a:tailEnd type="none" w="med" len="med"/>
-                    </a:lnR>
-                    <a:lnT w="6350" cap="flat" cmpd="sng" algn="ctr">
-                      <a:solidFill>
-                        <a:srgbClr val="BFBFBF"/>
-                      </a:solidFill>
-                      <a:prstDash val="solid"/>
-                      <a:round/>
-                      <a:headEnd type="none" w="med" len="med"/>
-                      <a:tailEnd type="none" w="med" len="med"/>
-                    </a:lnT>
-                    <a:lnB w="6350" cap="flat" cmpd="sng" algn="ctr">
-                      <a:solidFill>
-                        <a:srgbClr val="BFBFBF"/>
-                      </a:solidFill>
-                      <a:prstDash val="solid"/>
-                      <a:round/>
-                      <a:headEnd type="none" w="med" len="med"/>
-                      <a:tailEnd type="none" w="med" len="med"/>
-                    </a:lnB>
-                  </a:tcPr>
-                </a:tc>
-                <a:tc>
-                  <a:txBody>
-                    <a:bodyPr/>
-                    <a:lstStyle/>
-                    <a:p>
-                      <a:pPr indent="0" marL="0">
+                  <a:tcPr marL="36576" marR="36576" marT="18288" marB="18288" anchor="ctr">
+                    <a:lnL w="6350" cap="flat" cmpd="sng" algn="ctr">
+                      <a:solidFill>
+                        <a:srgbClr val="BFBFBF"/>
+                      </a:solidFill>
+                      <a:prstDash val="solid"/>
+                      <a:round/>
+                      <a:headEnd type="none" w="med" len="med"/>
+                      <a:tailEnd type="none" w="med" len="med"/>
+                    </a:lnL>
+                    <a:lnR w="6350" cap="flat" cmpd="sng" algn="ctr">
+                      <a:solidFill>
+                        <a:srgbClr val="BFBFBF"/>
+                      </a:solidFill>
+                      <a:prstDash val="solid"/>
+                      <a:round/>
+                      <a:headEnd type="none" w="med" len="med"/>
+                      <a:tailEnd type="none" w="med" len="med"/>
+                    </a:lnR>
+                    <a:lnT w="6350" cap="flat" cmpd="sng" algn="ctr">
+                      <a:solidFill>
+                        <a:srgbClr val="BFBFBF"/>
+                      </a:solidFill>
+                      <a:prstDash val="solid"/>
+                      <a:round/>
+                      <a:headEnd type="none" w="med" len="med"/>
+                      <a:tailEnd type="none" w="med" len="med"/>
+                    </a:lnT>
+                    <a:lnB w="6350" cap="flat" cmpd="sng" algn="ctr">
+                      <a:solidFill>
+                        <a:srgbClr val="BFBFBF"/>
+                      </a:solidFill>
+                      <a:prstDash val="solid"/>
+                      <a:round/>
+                      <a:headEnd type="none" w="med" len="med"/>
+                      <a:tailEnd type="none" w="med" len="med"/>
+                    </a:lnB>
+                  </a:tcPr>
+                </a:tc>
+                <a:tc>
+                  <a:txBody>
+                    <a:bodyPr/>
+                    <a:lstStyle/>
+                    <a:p>
+                      <a:pPr algn="ctr" indent="0" marL="0">
                         <a:buNone/>
                       </a:pPr>
                       <a:r>
@@ -3153,7 +3308,7 @@
                           <a:ea typeface="신세계 민부리 Light(TTF)" pitchFamily="34" charset="-122"/>
                           <a:cs typeface="신세계 민부리 Light(TTF)" pitchFamily="34" charset="-120"/>
                         </a:rPr>
-                        <a:t>영구 소유</a:t>
+                        <a:t>민간</a:t>
                       </a:r>
                       <a:endParaRPr lang="en-US" sz="800" dirty="0">
                         <a:latin typeface="신세계 민부리 Light(TTF)" charset="0"/>
@@ -3162,51 +3317,51 @@
                       </a:endParaRPr>
                     </a:p>
                   </a:txBody>
-                  <a:tcPr marL="45720" marR="45720" marT="18288" marB="18288" anchor="ctr">
-                    <a:lnL w="6350" cap="flat" cmpd="sng" algn="ctr">
-                      <a:solidFill>
-                        <a:srgbClr val="BFBFBF"/>
-                      </a:solidFill>
-                      <a:prstDash val="solid"/>
-                      <a:round/>
-                      <a:headEnd type="none" w="med" len="med"/>
-                      <a:tailEnd type="none" w="med" len="med"/>
-                    </a:lnL>
-                    <a:lnR w="6350" cap="flat" cmpd="sng" algn="ctr">
-                      <a:solidFill>
-                        <a:srgbClr val="BFBFBF"/>
-                      </a:solidFill>
-                      <a:prstDash val="solid"/>
-                      <a:round/>
-                      <a:headEnd type="none" w="med" len="med"/>
-                      <a:tailEnd type="none" w="med" len="med"/>
-                    </a:lnR>
-                    <a:lnT w="6350" cap="flat" cmpd="sng" algn="ctr">
-                      <a:solidFill>
-                        <a:srgbClr val="BFBFBF"/>
-                      </a:solidFill>
-                      <a:prstDash val="solid"/>
-                      <a:round/>
-                      <a:headEnd type="none" w="med" len="med"/>
-                      <a:tailEnd type="none" w="med" len="med"/>
-                    </a:lnT>
-                    <a:lnB w="6350" cap="flat" cmpd="sng" algn="ctr">
-                      <a:solidFill>
-                        <a:srgbClr val="BFBFBF"/>
-                      </a:solidFill>
-                      <a:prstDash val="solid"/>
-                      <a:round/>
-                      <a:headEnd type="none" w="med" len="med"/>
-                      <a:tailEnd type="none" w="med" len="med"/>
-                    </a:lnB>
-                  </a:tcPr>
-                </a:tc>
-                <a:tc>
-                  <a:txBody>
-                    <a:bodyPr/>
-                    <a:lstStyle/>
-                    <a:p>
-                      <a:pPr indent="0" marL="0">
+                  <a:tcPr marL="36576" marR="36576" marT="18288" marB="18288" anchor="ctr">
+                    <a:lnL w="6350" cap="flat" cmpd="sng" algn="ctr">
+                      <a:solidFill>
+                        <a:srgbClr val="BFBFBF"/>
+                      </a:solidFill>
+                      <a:prstDash val="solid"/>
+                      <a:round/>
+                      <a:headEnd type="none" w="med" len="med"/>
+                      <a:tailEnd type="none" w="med" len="med"/>
+                    </a:lnL>
+                    <a:lnR w="6350" cap="flat" cmpd="sng" algn="ctr">
+                      <a:solidFill>
+                        <a:srgbClr val="BFBFBF"/>
+                      </a:solidFill>
+                      <a:prstDash val="solid"/>
+                      <a:round/>
+                      <a:headEnd type="none" w="med" len="med"/>
+                      <a:tailEnd type="none" w="med" len="med"/>
+                    </a:lnR>
+                    <a:lnT w="6350" cap="flat" cmpd="sng" algn="ctr">
+                      <a:solidFill>
+                        <a:srgbClr val="BFBFBF"/>
+                      </a:solidFill>
+                      <a:prstDash val="solid"/>
+                      <a:round/>
+                      <a:headEnd type="none" w="med" len="med"/>
+                      <a:tailEnd type="none" w="med" len="med"/>
+                    </a:lnT>
+                    <a:lnB w="6350" cap="flat" cmpd="sng" algn="ctr">
+                      <a:solidFill>
+                        <a:srgbClr val="BFBFBF"/>
+                      </a:solidFill>
+                      <a:prstDash val="solid"/>
+                      <a:round/>
+                      <a:headEnd type="none" w="med" len="med"/>
+                      <a:tailEnd type="none" w="med" len="med"/>
+                    </a:lnB>
+                  </a:tcPr>
+                </a:tc>
+                <a:tc>
+                  <a:txBody>
+                    <a:bodyPr/>
+                    <a:lstStyle/>
+                    <a:p>
+                      <a:pPr algn="ctr" indent="0" marL="0">
                         <a:buNone/>
                       </a:pPr>
                       <a:r>
@@ -3218,7 +3373,7 @@
                           <a:ea typeface="신세계 민부리 Light(TTF)" pitchFamily="34" charset="-122"/>
                           <a:cs typeface="신세계 민부리 Light(TTF)" pitchFamily="34" charset="-120"/>
                         </a:rPr>
-                        <a:t>한강 공유수면 시설 적용 곤란</a:t>
+                        <a:t>이용자 사용료</a:t>
                       </a:r>
                       <a:endParaRPr lang="en-US" sz="800" dirty="0">
                         <a:latin typeface="신세계 민부리 Light(TTF)" charset="0"/>
@@ -3227,7 +3382,7 @@
                       </a:endParaRPr>
                     </a:p>
                   </a:txBody>
-                  <a:tcPr marL="45720" marR="45720" marT="18288" marB="18288" anchor="ctr">
+                  <a:tcPr marL="36576" marR="36576" marT="18288" marB="18288" anchor="ctr">
                     <a:lnL w="6350" cap="flat" cmpd="sng" algn="ctr">
                       <a:solidFill>
                         <a:srgbClr val="BFBFBF"/>
@@ -3272,137 +3427,6 @@
                     <a:lstStyle/>
                     <a:p>
                       <a:pPr algn="ctr" indent="0" marL="0">
-                        <a:buNone/>
-                      </a:pPr>
-                      <a:r>
-                        <a:rPr lang="en-US" sz="1100" b="1" dirty="0">
-                          <a:solidFill>
-                            <a:srgbClr val="A6A6A6"/>
-                          </a:solidFill>
-                          <a:latin typeface="신세계 민부리 Bold(TTF)" pitchFamily="34" charset="0"/>
-                          <a:ea typeface="신세계 민부리 Bold(TTF)" pitchFamily="34" charset="-122"/>
-                          <a:cs typeface="신세계 민부리 Bold(TTF)" pitchFamily="34" charset="-120"/>
-                        </a:rPr>
-                        <a:t>✕</a:t>
-                      </a:r>
-                      <a:endParaRPr lang="en-US" sz="1100" dirty="0">
-                        <a:latin typeface="신세계 민부리 Bold(TTF)" charset="0"/>
-                        <a:ea typeface="신세계 민부리 Bold(TTF)" charset="0"/>
-                        <a:cs typeface="신세계 민부리 Bold(TTF)" charset="0"/>
-                      </a:endParaRPr>
-                    </a:p>
-                  </a:txBody>
-                  <a:tcPr marL="45720" marR="45720" marT="18288" marB="18288" anchor="ctr">
-                    <a:lnL w="6350" cap="flat" cmpd="sng" algn="ctr">
-                      <a:solidFill>
-                        <a:srgbClr val="BFBFBF"/>
-                      </a:solidFill>
-                      <a:prstDash val="solid"/>
-                      <a:round/>
-                      <a:headEnd type="none" w="med" len="med"/>
-                      <a:tailEnd type="none" w="med" len="med"/>
-                    </a:lnL>
-                    <a:lnR w="6350" cap="flat" cmpd="sng" algn="ctr">
-                      <a:solidFill>
-                        <a:srgbClr val="BFBFBF"/>
-                      </a:solidFill>
-                      <a:prstDash val="solid"/>
-                      <a:round/>
-                      <a:headEnd type="none" w="med" len="med"/>
-                      <a:tailEnd type="none" w="med" len="med"/>
-                    </a:lnR>
-                    <a:lnT w="6350" cap="flat" cmpd="sng" algn="ctr">
-                      <a:solidFill>
-                        <a:srgbClr val="BFBFBF"/>
-                      </a:solidFill>
-                      <a:prstDash val="solid"/>
-                      <a:round/>
-                      <a:headEnd type="none" w="med" len="med"/>
-                      <a:tailEnd type="none" w="med" len="med"/>
-                    </a:lnT>
-                    <a:lnB w="6350" cap="flat" cmpd="sng" algn="ctr">
-                      <a:solidFill>
-                        <a:srgbClr val="BFBFBF"/>
-                      </a:solidFill>
-                      <a:prstDash val="solid"/>
-                      <a:round/>
-                      <a:headEnd type="none" w="med" len="med"/>
-                      <a:tailEnd type="none" w="med" len="med"/>
-                    </a:lnB>
-                  </a:tcPr>
-                </a:tc>
-              </a:tr>
-              <a:tr h="438912">
-                <a:tc>
-                  <a:txBody>
-                    <a:bodyPr/>
-                    <a:lstStyle/>
-                    <a:p>
-                      <a:pPr algn="ctr" indent="0" marL="0">
-                        <a:buNone/>
-                      </a:pPr>
-                      <a:r>
-                        <a:rPr lang="en-US" sz="900" b="1" dirty="0">
-                          <a:solidFill>
-                            <a:srgbClr val="000000"/>
-                          </a:solidFill>
-                          <a:latin typeface="신세계 민부리 Bold(TTF)" pitchFamily="34" charset="0"/>
-                          <a:ea typeface="신세계 민부리 Bold(TTF)" pitchFamily="34" charset="-122"/>
-                          <a:cs typeface="신세계 민부리 Bold(TTF)" pitchFamily="34" charset="-120"/>
-                        </a:rPr>
-                        <a:t>BLT</a:t>
-                      </a:r>
-                      <a:endParaRPr lang="en-US" sz="1200" dirty="0"/>
-                    </a:p>
-                  </a:txBody>
-                  <a:tcPr marL="45720" marR="45720" marT="18288" marB="18288" anchor="ctr">
-                    <a:lnL w="6350" cap="flat" cmpd="sng" algn="ctr">
-                      <a:solidFill>
-                        <a:srgbClr val="BFBFBF"/>
-                      </a:solidFill>
-                      <a:prstDash val="solid"/>
-                      <a:round/>
-                      <a:headEnd type="none" w="med" len="med"/>
-                      <a:tailEnd type="none" w="med" len="med"/>
-                    </a:lnL>
-                    <a:lnR w="6350" cap="flat" cmpd="sng" algn="ctr">
-                      <a:solidFill>
-                        <a:srgbClr val="BFBFBF"/>
-                      </a:solidFill>
-                      <a:prstDash val="solid"/>
-                      <a:round/>
-                      <a:headEnd type="none" w="med" len="med"/>
-                      <a:tailEnd type="none" w="med" len="med"/>
-                    </a:lnR>
-                    <a:lnT w="6350" cap="flat" cmpd="sng" algn="ctr">
-                      <a:solidFill>
-                        <a:srgbClr val="BFBFBF"/>
-                      </a:solidFill>
-                      <a:prstDash val="solid"/>
-                      <a:round/>
-                      <a:headEnd type="none" w="med" len="med"/>
-                      <a:tailEnd type="none" w="med" len="med"/>
-                    </a:lnT>
-                    <a:lnB w="6350" cap="flat" cmpd="sng" algn="ctr">
-                      <a:solidFill>
-                        <a:srgbClr val="BFBFBF"/>
-                      </a:solidFill>
-                      <a:prstDash val="solid"/>
-                      <a:round/>
-                      <a:headEnd type="none" w="med" len="med"/>
-                      <a:tailEnd type="none" w="med" len="med"/>
-                    </a:lnB>
-                    <a:solidFill>
-                      <a:srgbClr val="F2F2F2"/>
-                    </a:solidFill>
-                  </a:tcPr>
-                </a:tc>
-                <a:tc>
-                  <a:txBody>
-                    <a:bodyPr/>
-                    <a:lstStyle/>
-                    <a:p>
-                      <a:pPr indent="0" marL="0">
                         <a:buNone/>
                       </a:pPr>
                       <a:r>
@@ -3414,7 +3438,7 @@
                           <a:ea typeface="신세계 민부리 Light(TTF)" pitchFamily="34" charset="-122"/>
                           <a:cs typeface="신세계 민부리 Light(TTF)" pitchFamily="34" charset="-120"/>
                         </a:rPr>
-                        <a:t>민간 소유 · 정부에 임대 → 종료 후 귀속</a:t>
+                        <a:t>민간</a:t>
                       </a:r>
                       <a:endParaRPr lang="en-US" sz="800" dirty="0">
                         <a:latin typeface="신세계 민부리 Light(TTF)" charset="0"/>
@@ -3423,7 +3447,7 @@
                       </a:endParaRPr>
                     </a:p>
                   </a:txBody>
-                  <a:tcPr marL="45720" marR="45720" marT="18288" marB="18288" anchor="ctr">
+                  <a:tcPr marL="36576" marR="36576" marT="18288" marB="18288" anchor="ctr">
                     <a:lnL w="6350" cap="flat" cmpd="sng" algn="ctr">
                       <a:solidFill>
                         <a:srgbClr val="BFBFBF"/>
@@ -3479,7 +3503,7 @@
                           <a:ea typeface="신세계 민부리 Light(TTF)" pitchFamily="34" charset="-122"/>
                           <a:cs typeface="신세계 민부리 Light(TTF)" pitchFamily="34" charset="-120"/>
                         </a:rPr>
-                        <a:t>정부 임대료 / 수요위험 정부</a:t>
+                        <a:t>세빛섬 (現 협약)</a:t>
                       </a:r>
                       <a:endParaRPr lang="en-US" sz="800" dirty="0">
                         <a:latin typeface="신세계 민부리 Light(TTF)" charset="0"/>
@@ -3488,7 +3512,7 @@
                       </a:endParaRPr>
                     </a:p>
                   </a:txBody>
-                  <a:tcPr marL="45720" marR="45720" marT="18288" marB="18288" anchor="ctr">
+                  <a:tcPr marL="36576" marR="36576" marT="18288" marB="18288" anchor="ctr">
                     <a:lnL w="6350" cap="flat" cmpd="sng" algn="ctr">
                       <a:solidFill>
                         <a:srgbClr val="BFBFBF"/>
@@ -3544,7 +3568,7 @@
                           <a:ea typeface="신세계 민부리 Light(TTF)" pitchFamily="34" charset="-122"/>
                           <a:cs typeface="신세계 민부리 Light(TTF)" pitchFamily="34" charset="-120"/>
                         </a:rPr>
-                        <a:t>활용 사례 적음</a:t>
+                        <a:t>소유권 보유 → 담보 · 운영 자율성</a:t>
                       </a:r>
                       <a:endParaRPr lang="en-US" sz="800" dirty="0">
                         <a:latin typeface="신세계 민부리 Light(TTF)" charset="0"/>
@@ -3553,7 +3577,7 @@
                       </a:endParaRPr>
                     </a:p>
                   </a:txBody>
-                  <a:tcPr marL="45720" marR="45720" marT="18288" marB="18288" anchor="ctr">
+                  <a:tcPr marL="36576" marR="36576" marT="18288" marB="18288" anchor="ctr">
                     <a:lnL w="6350" cap="flat" cmpd="sng" algn="ctr">
                       <a:solidFill>
                         <a:srgbClr val="BFBFBF"/>
@@ -3609,7 +3633,7 @@
                           <a:ea typeface="신세계 민부리 Light(TTF)" pitchFamily="34" charset="-122"/>
                           <a:cs typeface="신세계 민부리 Light(TTF)" pitchFamily="34" charset="-120"/>
                         </a:rPr>
-                        <a:t>정부 지급 안정성</a:t>
+                        <a:t>손상차손 · 배임 이슈</a:t>
                       </a:r>
                       <a:endParaRPr lang="en-US" sz="800" dirty="0">
                         <a:latin typeface="신세계 민부리 Light(TTF)" charset="0"/>
@@ -3618,51 +3642,117 @@
                       </a:endParaRPr>
                     </a:p>
                   </a:txBody>
-                  <a:tcPr marL="45720" marR="45720" marT="18288" marB="18288" anchor="ctr">
-                    <a:lnL w="6350" cap="flat" cmpd="sng" algn="ctr">
-                      <a:solidFill>
-                        <a:srgbClr val="BFBFBF"/>
-                      </a:solidFill>
-                      <a:prstDash val="solid"/>
-                      <a:round/>
-                      <a:headEnd type="none" w="med" len="med"/>
-                      <a:tailEnd type="none" w="med" len="med"/>
-                    </a:lnL>
-                    <a:lnR w="6350" cap="flat" cmpd="sng" algn="ctr">
-                      <a:solidFill>
-                        <a:srgbClr val="BFBFBF"/>
-                      </a:solidFill>
-                      <a:prstDash val="solid"/>
-                      <a:round/>
-                      <a:headEnd type="none" w="med" len="med"/>
-                      <a:tailEnd type="none" w="med" len="med"/>
-                    </a:lnR>
-                    <a:lnT w="6350" cap="flat" cmpd="sng" algn="ctr">
-                      <a:solidFill>
-                        <a:srgbClr val="BFBFBF"/>
-                      </a:solidFill>
-                      <a:prstDash val="solid"/>
-                      <a:round/>
-                      <a:headEnd type="none" w="med" len="med"/>
-                      <a:tailEnd type="none" w="med" len="med"/>
-                    </a:lnT>
-                    <a:lnB w="6350" cap="flat" cmpd="sng" algn="ctr">
-                      <a:solidFill>
-                        <a:srgbClr val="BFBFBF"/>
-                      </a:solidFill>
-                      <a:prstDash val="solid"/>
-                      <a:round/>
-                      <a:headEnd type="none" w="med" len="med"/>
-                      <a:tailEnd type="none" w="med" len="med"/>
-                    </a:lnB>
-                  </a:tcPr>
-                </a:tc>
-                <a:tc>
-                  <a:txBody>
-                    <a:bodyPr/>
-                    <a:lstStyle/>
-                    <a:p>
-                      <a:pPr indent="0" marL="0">
+                  <a:tcPr marL="36576" marR="36576" marT="18288" marB="18288" anchor="ctr">
+                    <a:lnL w="6350" cap="flat" cmpd="sng" algn="ctr">
+                      <a:solidFill>
+                        <a:srgbClr val="BFBFBF"/>
+                      </a:solidFill>
+                      <a:prstDash val="solid"/>
+                      <a:round/>
+                      <a:headEnd type="none" w="med" len="med"/>
+                      <a:tailEnd type="none" w="med" len="med"/>
+                    </a:lnL>
+                    <a:lnR w="6350" cap="flat" cmpd="sng" algn="ctr">
+                      <a:solidFill>
+                        <a:srgbClr val="BFBFBF"/>
+                      </a:solidFill>
+                      <a:prstDash val="solid"/>
+                      <a:round/>
+                      <a:headEnd type="none" w="med" len="med"/>
+                      <a:tailEnd type="none" w="med" len="med"/>
+                    </a:lnR>
+                    <a:lnT w="6350" cap="flat" cmpd="sng" algn="ctr">
+                      <a:solidFill>
+                        <a:srgbClr val="BFBFBF"/>
+                      </a:solidFill>
+                      <a:prstDash val="solid"/>
+                      <a:round/>
+                      <a:headEnd type="none" w="med" len="med"/>
+                      <a:tailEnd type="none" w="med" len="med"/>
+                    </a:lnT>
+                    <a:lnB w="6350" cap="flat" cmpd="sng" algn="ctr">
+                      <a:solidFill>
+                        <a:srgbClr val="BFBFBF"/>
+                      </a:solidFill>
+                      <a:prstDash val="solid"/>
+                      <a:round/>
+                      <a:headEnd type="none" w="med" len="med"/>
+                      <a:tailEnd type="none" w="med" len="med"/>
+                    </a:lnB>
+                  </a:tcPr>
+                </a:tc>
+              </a:tr>
+              <a:tr h="384048">
+                <a:tc vMerge="1">
+                  <a:tcPr/>
+                </a:tc>
+                <a:tc>
+                  <a:txBody>
+                    <a:bodyPr/>
+                    <a:lstStyle/>
+                    <a:p>
+                      <a:pPr algn="ctr" indent="0" marL="0">
+                        <a:buNone/>
+                      </a:pPr>
+                      <a:r>
+                        <a:rPr lang="en-US" sz="900" b="1" dirty="0">
+                          <a:solidFill>
+                            <a:srgbClr val="000000"/>
+                          </a:solidFill>
+                          <a:latin typeface="신세계 민부리 Bold(TTF)" pitchFamily="34" charset="0"/>
+                          <a:ea typeface="신세계 민부리 Bold(TTF)" pitchFamily="34" charset="-122"/>
+                          <a:cs typeface="신세계 민부리 Bold(TTF)" pitchFamily="34" charset="-120"/>
+                        </a:rPr>
+                        <a:t>BOO</a:t>
+                      </a:r>
+                      <a:endParaRPr lang="en-US" sz="1200" dirty="0"/>
+                    </a:p>
+                  </a:txBody>
+                  <a:tcPr marL="36576" marR="36576" marT="18288" marB="18288" anchor="ctr">
+                    <a:lnL w="6350" cap="flat" cmpd="sng" algn="ctr">
+                      <a:solidFill>
+                        <a:srgbClr val="BFBFBF"/>
+                      </a:solidFill>
+                      <a:prstDash val="solid"/>
+                      <a:round/>
+                      <a:headEnd type="none" w="med" len="med"/>
+                      <a:tailEnd type="none" w="med" len="med"/>
+                    </a:lnL>
+                    <a:lnR w="6350" cap="flat" cmpd="sng" algn="ctr">
+                      <a:solidFill>
+                        <a:srgbClr val="BFBFBF"/>
+                      </a:solidFill>
+                      <a:prstDash val="solid"/>
+                      <a:round/>
+                      <a:headEnd type="none" w="med" len="med"/>
+                      <a:tailEnd type="none" w="med" len="med"/>
+                    </a:lnR>
+                    <a:lnT w="6350" cap="flat" cmpd="sng" algn="ctr">
+                      <a:solidFill>
+                        <a:srgbClr val="BFBFBF"/>
+                      </a:solidFill>
+                      <a:prstDash val="solid"/>
+                      <a:round/>
+                      <a:headEnd type="none" w="med" len="med"/>
+                      <a:tailEnd type="none" w="med" len="med"/>
+                    </a:lnT>
+                    <a:lnB w="6350" cap="flat" cmpd="sng" algn="ctr">
+                      <a:solidFill>
+                        <a:srgbClr val="BFBFBF"/>
+                      </a:solidFill>
+                      <a:prstDash val="solid"/>
+                      <a:round/>
+                      <a:headEnd type="none" w="med" len="med"/>
+                      <a:tailEnd type="none" w="med" len="med"/>
+                    </a:lnB>
+                  </a:tcPr>
+                </a:tc>
+                <a:tc gridSpan="3">
+                  <a:txBody>
+                    <a:bodyPr/>
+                    <a:lstStyle/>
+                    <a:p>
+                      <a:pPr algn="ctr" indent="0" marL="0">
                         <a:buNone/>
                       </a:pPr>
                       <a:r>
@@ -3674,7 +3764,7 @@
                           <a:ea typeface="신세계 민부리 Light(TTF)" pitchFamily="34" charset="-122"/>
                           <a:cs typeface="신세계 민부리 Light(TTF)" pitchFamily="34" charset="-120"/>
                         </a:rPr>
-                        <a:t>자산 보유 부담 + 수익 상한</a:t>
+                        <a:t>민간 (국가 귀속 없음)</a:t>
                       </a:r>
                       <a:endParaRPr lang="en-US" sz="800" dirty="0">
                         <a:latin typeface="신세계 민부리 Light(TTF)" charset="0"/>
@@ -3683,44 +3773,50 @@
                       </a:endParaRPr>
                     </a:p>
                   </a:txBody>
-                  <a:tcPr marL="45720" marR="45720" marT="18288" marB="18288" anchor="ctr">
-                    <a:lnL w="6350" cap="flat" cmpd="sng" algn="ctr">
-                      <a:solidFill>
-                        <a:srgbClr val="BFBFBF"/>
-                      </a:solidFill>
-                      <a:prstDash val="solid"/>
-                      <a:round/>
-                      <a:headEnd type="none" w="med" len="med"/>
-                      <a:tailEnd type="none" w="med" len="med"/>
-                    </a:lnL>
-                    <a:lnR w="6350" cap="flat" cmpd="sng" algn="ctr">
-                      <a:solidFill>
-                        <a:srgbClr val="BFBFBF"/>
-                      </a:solidFill>
-                      <a:prstDash val="solid"/>
-                      <a:round/>
-                      <a:headEnd type="none" w="med" len="med"/>
-                      <a:tailEnd type="none" w="med" len="med"/>
-                    </a:lnR>
-                    <a:lnT w="6350" cap="flat" cmpd="sng" algn="ctr">
-                      <a:solidFill>
-                        <a:srgbClr val="BFBFBF"/>
-                      </a:solidFill>
-                      <a:prstDash val="solid"/>
-                      <a:round/>
-                      <a:headEnd type="none" w="med" len="med"/>
-                      <a:tailEnd type="none" w="med" len="med"/>
-                    </a:lnT>
-                    <a:lnB w="6350" cap="flat" cmpd="sng" algn="ctr">
-                      <a:solidFill>
-                        <a:srgbClr val="BFBFBF"/>
-                      </a:solidFill>
-                      <a:prstDash val="solid"/>
-                      <a:round/>
-                      <a:headEnd type="none" w="med" len="med"/>
-                      <a:tailEnd type="none" w="med" len="med"/>
-                    </a:lnB>
-                  </a:tcPr>
+                  <a:tcPr marL="36576" marR="36576" marT="18288" marB="18288" anchor="ctr">
+                    <a:lnL w="6350" cap="flat" cmpd="sng" algn="ctr">
+                      <a:solidFill>
+                        <a:srgbClr val="BFBFBF"/>
+                      </a:solidFill>
+                      <a:prstDash val="solid"/>
+                      <a:round/>
+                      <a:headEnd type="none" w="med" len="med"/>
+                      <a:tailEnd type="none" w="med" len="med"/>
+                    </a:lnL>
+                    <a:lnR w="6350" cap="flat" cmpd="sng" algn="ctr">
+                      <a:solidFill>
+                        <a:srgbClr val="BFBFBF"/>
+                      </a:solidFill>
+                      <a:prstDash val="solid"/>
+                      <a:round/>
+                      <a:headEnd type="none" w="med" len="med"/>
+                      <a:tailEnd type="none" w="med" len="med"/>
+                    </a:lnR>
+                    <a:lnT w="6350" cap="flat" cmpd="sng" algn="ctr">
+                      <a:solidFill>
+                        <a:srgbClr val="BFBFBF"/>
+                      </a:solidFill>
+                      <a:prstDash val="solid"/>
+                      <a:round/>
+                      <a:headEnd type="none" w="med" len="med"/>
+                      <a:tailEnd type="none" w="med" len="med"/>
+                    </a:lnT>
+                    <a:lnB w="6350" cap="flat" cmpd="sng" algn="ctr">
+                      <a:solidFill>
+                        <a:srgbClr val="BFBFBF"/>
+                      </a:solidFill>
+                      <a:prstDash val="solid"/>
+                      <a:round/>
+                      <a:headEnd type="none" w="med" len="med"/>
+                      <a:tailEnd type="none" w="med" len="med"/>
+                    </a:lnB>
+                  </a:tcPr>
+                </a:tc>
+                <a:tc hMerge="1">
+                  <a:tcPr/>
+                </a:tc>
+                <a:tc hMerge="1">
+                  <a:tcPr/>
                 </a:tc>
                 <a:tc>
                   <a:txBody>
@@ -3728,151 +3824,6 @@
                     <a:lstStyle/>
                     <a:p>
                       <a:pPr algn="ctr" indent="0" marL="0">
-                        <a:buNone/>
-                      </a:pPr>
-                      <a:r>
-                        <a:rPr lang="en-US" sz="1100" b="1" dirty="0">
-                          <a:solidFill>
-                            <a:srgbClr val="A6A6A6"/>
-                          </a:solidFill>
-                          <a:latin typeface="신세계 민부리 Bold(TTF)" pitchFamily="34" charset="0"/>
-                          <a:ea typeface="신세계 민부리 Bold(TTF)" pitchFamily="34" charset="-122"/>
-                          <a:cs typeface="신세계 민부리 Bold(TTF)" pitchFamily="34" charset="-120"/>
-                        </a:rPr>
-                        <a:t>✕</a:t>
-                      </a:r>
-                      <a:endParaRPr lang="en-US" sz="1100" dirty="0">
-                        <a:latin typeface="신세계 민부리 Bold(TTF)" charset="0"/>
-                        <a:ea typeface="신세계 민부리 Bold(TTF)" charset="0"/>
-                        <a:cs typeface="신세계 민부리 Bold(TTF)" charset="0"/>
-                      </a:endParaRPr>
-                    </a:p>
-                  </a:txBody>
-                  <a:tcPr marL="45720" marR="45720" marT="18288" marB="18288" anchor="ctr">
-                    <a:lnL w="6350" cap="flat" cmpd="sng" algn="ctr">
-                      <a:solidFill>
-                        <a:srgbClr val="BFBFBF"/>
-                      </a:solidFill>
-                      <a:prstDash val="solid"/>
-                      <a:round/>
-                      <a:headEnd type="none" w="med" len="med"/>
-                      <a:tailEnd type="none" w="med" len="med"/>
-                    </a:lnL>
-                    <a:lnR w="6350" cap="flat" cmpd="sng" algn="ctr">
-                      <a:solidFill>
-                        <a:srgbClr val="BFBFBF"/>
-                      </a:solidFill>
-                      <a:prstDash val="solid"/>
-                      <a:round/>
-                      <a:headEnd type="none" w="med" len="med"/>
-                      <a:tailEnd type="none" w="med" len="med"/>
-                    </a:lnR>
-                    <a:lnT w="6350" cap="flat" cmpd="sng" algn="ctr">
-                      <a:solidFill>
-                        <a:srgbClr val="BFBFBF"/>
-                      </a:solidFill>
-                      <a:prstDash val="solid"/>
-                      <a:round/>
-                      <a:headEnd type="none" w="med" len="med"/>
-                      <a:tailEnd type="none" w="med" len="med"/>
-                    </a:lnT>
-                    <a:lnB w="6350" cap="flat" cmpd="sng" algn="ctr">
-                      <a:solidFill>
-                        <a:srgbClr val="BFBFBF"/>
-                      </a:solidFill>
-                      <a:prstDash val="solid"/>
-                      <a:round/>
-                      <a:headEnd type="none" w="med" len="med"/>
-                      <a:tailEnd type="none" w="med" len="med"/>
-                    </a:lnB>
-                  </a:tcPr>
-                </a:tc>
-              </a:tr>
-              <a:tr h="438912">
-                <a:tc>
-                  <a:txBody>
-                    <a:bodyPr/>
-                    <a:lstStyle/>
-                    <a:p>
-                      <a:pPr algn="ctr" indent="0" marL="0">
-                        <a:buNone/>
-                      </a:pPr>
-                      <a:r>
-                        <a:rPr lang="en-US" sz="900" b="1" dirty="0">
-                          <a:solidFill>
-                            <a:srgbClr val="000000"/>
-                          </a:solidFill>
-                          <a:latin typeface="신세계 민부리 Bold(TTF)" pitchFamily="34" charset="0"/>
-                          <a:ea typeface="신세계 민부리 Bold(TTF)" pitchFamily="34" charset="-122"/>
-                          <a:cs typeface="신세계 민부리 Bold(TTF)" pitchFamily="34" charset="-120"/>
-                        </a:rPr>
-                        <a:t>ROT · RTL</a:t>
-                      </a:r>
-                      <a:endParaRPr lang="en-US" sz="1200" dirty="0"/>
-                    </a:p>
-                    <a:p>
-                      <a:pPr algn="ctr" indent="0" marL="0">
-                        <a:buNone/>
-                      </a:pPr>
-                      <a:r>
-                        <a:rPr lang="en-US" sz="750" dirty="0">
-                          <a:solidFill>
-                            <a:srgbClr val="595959"/>
-                          </a:solidFill>
-                        </a:rPr>
-                        <a:t>개량운영형</a:t>
-                      </a:r>
-                      <a:endParaRPr lang="en-US" sz="1200" dirty="0"/>
-                    </a:p>
-                  </a:txBody>
-                  <a:tcPr marL="45720" marR="45720" marT="18288" marB="18288" anchor="ctr">
-                    <a:lnL w="6350" cap="flat" cmpd="sng" algn="ctr">
-                      <a:solidFill>
-                        <a:srgbClr val="BFBFBF"/>
-                      </a:solidFill>
-                      <a:prstDash val="solid"/>
-                      <a:round/>
-                      <a:headEnd type="none" w="med" len="med"/>
-                      <a:tailEnd type="none" w="med" len="med"/>
-                    </a:lnL>
-                    <a:lnR w="6350" cap="flat" cmpd="sng" algn="ctr">
-                      <a:solidFill>
-                        <a:srgbClr val="BFBFBF"/>
-                      </a:solidFill>
-                      <a:prstDash val="solid"/>
-                      <a:round/>
-                      <a:headEnd type="none" w="med" len="med"/>
-                      <a:tailEnd type="none" w="med" len="med"/>
-                    </a:lnR>
-                    <a:lnT w="6350" cap="flat" cmpd="sng" algn="ctr">
-                      <a:solidFill>
-                        <a:srgbClr val="BFBFBF"/>
-                      </a:solidFill>
-                      <a:prstDash val="solid"/>
-                      <a:round/>
-                      <a:headEnd type="none" w="med" len="med"/>
-                      <a:tailEnd type="none" w="med" len="med"/>
-                    </a:lnT>
-                    <a:lnB w="6350" cap="flat" cmpd="sng" algn="ctr">
-                      <a:solidFill>
-                        <a:srgbClr val="BFBFBF"/>
-                      </a:solidFill>
-                      <a:prstDash val="solid"/>
-                      <a:round/>
-                      <a:headEnd type="none" w="med" len="med"/>
-                      <a:tailEnd type="none" w="med" len="med"/>
-                    </a:lnB>
-                    <a:solidFill>
-                      <a:srgbClr val="F2F2F2"/>
-                    </a:solidFill>
-                  </a:tcPr>
-                </a:tc>
-                <a:tc>
-                  <a:txBody>
-                    <a:bodyPr/>
-                    <a:lstStyle/>
-                    <a:p>
-                      <a:pPr indent="0" marL="0">
                         <a:buNone/>
                       </a:pPr>
                       <a:r>
@@ -3884,7 +3835,7 @@
                           <a:ea typeface="신세계 민부리 Light(TTF)" pitchFamily="34" charset="-122"/>
                           <a:cs typeface="신세계 민부리 Light(TTF)" pitchFamily="34" charset="-120"/>
                         </a:rPr>
-                        <a:t>기존 시설 개량 · 증설 → 관리운영권 (RTL은 정부 임대)</a:t>
+                        <a:t>이용자 사용료</a:t>
                       </a:r>
                       <a:endParaRPr lang="en-US" sz="800" dirty="0">
                         <a:latin typeface="신세계 민부리 Light(TTF)" charset="0"/>
@@ -3893,54 +3844,51 @@
                       </a:endParaRPr>
                     </a:p>
                   </a:txBody>
-                  <a:tcPr marL="45720" marR="45720" marT="18288" marB="18288" anchor="ctr">
-                    <a:lnL w="6350" cap="flat" cmpd="sng" algn="ctr">
-                      <a:solidFill>
-                        <a:srgbClr val="BFBFBF"/>
-                      </a:solidFill>
-                      <a:prstDash val="solid"/>
-                      <a:round/>
-                      <a:headEnd type="none" w="med" len="med"/>
-                      <a:tailEnd type="none" w="med" len="med"/>
-                    </a:lnL>
-                    <a:lnR w="6350" cap="flat" cmpd="sng" algn="ctr">
-                      <a:solidFill>
-                        <a:srgbClr val="BFBFBF"/>
-                      </a:solidFill>
-                      <a:prstDash val="solid"/>
-                      <a:round/>
-                      <a:headEnd type="none" w="med" len="med"/>
-                      <a:tailEnd type="none" w="med" len="med"/>
-                    </a:lnR>
-                    <a:lnT w="6350" cap="flat" cmpd="sng" algn="ctr">
-                      <a:solidFill>
-                        <a:srgbClr val="BFBFBF"/>
-                      </a:solidFill>
-                      <a:prstDash val="solid"/>
-                      <a:round/>
-                      <a:headEnd type="none" w="med" len="med"/>
-                      <a:tailEnd type="none" w="med" len="med"/>
-                    </a:lnT>
-                    <a:lnB w="6350" cap="flat" cmpd="sng" algn="ctr">
-                      <a:solidFill>
-                        <a:srgbClr val="BFBFBF"/>
-                      </a:solidFill>
-                      <a:prstDash val="solid"/>
-                      <a:round/>
-                      <a:headEnd type="none" w="med" len="med"/>
-                      <a:tailEnd type="none" w="med" len="med"/>
-                    </a:lnB>
-                    <a:solidFill>
-                      <a:srgbClr val="EEF2F8"/>
-                    </a:solidFill>
-                  </a:tcPr>
-                </a:tc>
-                <a:tc>
-                  <a:txBody>
-                    <a:bodyPr/>
-                    <a:lstStyle/>
-                    <a:p>
-                      <a:pPr indent="0" marL="0">
+                  <a:tcPr marL="36576" marR="36576" marT="18288" marB="18288" anchor="ctr">
+                    <a:lnL w="6350" cap="flat" cmpd="sng" algn="ctr">
+                      <a:solidFill>
+                        <a:srgbClr val="BFBFBF"/>
+                      </a:solidFill>
+                      <a:prstDash val="solid"/>
+                      <a:round/>
+                      <a:headEnd type="none" w="med" len="med"/>
+                      <a:tailEnd type="none" w="med" len="med"/>
+                    </a:lnL>
+                    <a:lnR w="6350" cap="flat" cmpd="sng" algn="ctr">
+                      <a:solidFill>
+                        <a:srgbClr val="BFBFBF"/>
+                      </a:solidFill>
+                      <a:prstDash val="solid"/>
+                      <a:round/>
+                      <a:headEnd type="none" w="med" len="med"/>
+                      <a:tailEnd type="none" w="med" len="med"/>
+                    </a:lnR>
+                    <a:lnT w="6350" cap="flat" cmpd="sng" algn="ctr">
+                      <a:solidFill>
+                        <a:srgbClr val="BFBFBF"/>
+                      </a:solidFill>
+                      <a:prstDash val="solid"/>
+                      <a:round/>
+                      <a:headEnd type="none" w="med" len="med"/>
+                      <a:tailEnd type="none" w="med" len="med"/>
+                    </a:lnT>
+                    <a:lnB w="6350" cap="flat" cmpd="sng" algn="ctr">
+                      <a:solidFill>
+                        <a:srgbClr val="BFBFBF"/>
+                      </a:solidFill>
+                      <a:prstDash val="solid"/>
+                      <a:round/>
+                      <a:headEnd type="none" w="med" len="med"/>
+                      <a:tailEnd type="none" w="med" len="med"/>
+                    </a:lnB>
+                  </a:tcPr>
+                </a:tc>
+                <a:tc>
+                  <a:txBody>
+                    <a:bodyPr/>
+                    <a:lstStyle/>
+                    <a:p>
+                      <a:pPr algn="ctr" indent="0" marL="0">
                         <a:buNone/>
                       </a:pPr>
                       <a:r>
@@ -3952,7 +3900,7 @@
                           <a:ea typeface="신세계 민부리 Light(TTF)" pitchFamily="34" charset="-122"/>
                           <a:cs typeface="신세계 민부리 Light(TTF)" pitchFamily="34" charset="-120"/>
                         </a:rPr>
-                        <a:t>이용료 (RTL : 임대료)</a:t>
+                        <a:t>민간</a:t>
                       </a:r>
                       <a:endParaRPr lang="en-US" sz="800" dirty="0">
                         <a:latin typeface="신세계 민부리 Light(TTF)" charset="0"/>
@@ -3961,46 +3909,43 @@
                       </a:endParaRPr>
                     </a:p>
                   </a:txBody>
-                  <a:tcPr marL="45720" marR="45720" marT="18288" marB="18288" anchor="ctr">
-                    <a:lnL w="6350" cap="flat" cmpd="sng" algn="ctr">
-                      <a:solidFill>
-                        <a:srgbClr val="BFBFBF"/>
-                      </a:solidFill>
-                      <a:prstDash val="solid"/>
-                      <a:round/>
-                      <a:headEnd type="none" w="med" len="med"/>
-                      <a:tailEnd type="none" w="med" len="med"/>
-                    </a:lnL>
-                    <a:lnR w="6350" cap="flat" cmpd="sng" algn="ctr">
-                      <a:solidFill>
-                        <a:srgbClr val="BFBFBF"/>
-                      </a:solidFill>
-                      <a:prstDash val="solid"/>
-                      <a:round/>
-                      <a:headEnd type="none" w="med" len="med"/>
-                      <a:tailEnd type="none" w="med" len="med"/>
-                    </a:lnR>
-                    <a:lnT w="6350" cap="flat" cmpd="sng" algn="ctr">
-                      <a:solidFill>
-                        <a:srgbClr val="BFBFBF"/>
-                      </a:solidFill>
-                      <a:prstDash val="solid"/>
-                      <a:round/>
-                      <a:headEnd type="none" w="med" len="med"/>
-                      <a:tailEnd type="none" w="med" len="med"/>
-                    </a:lnT>
-                    <a:lnB w="6350" cap="flat" cmpd="sng" algn="ctr">
-                      <a:solidFill>
-                        <a:srgbClr val="BFBFBF"/>
-                      </a:solidFill>
-                      <a:prstDash val="solid"/>
-                      <a:round/>
-                      <a:headEnd type="none" w="med" len="med"/>
-                      <a:tailEnd type="none" w="med" len="med"/>
-                    </a:lnB>
-                    <a:solidFill>
-                      <a:srgbClr val="EEF2F8"/>
-                    </a:solidFill>
+                  <a:tcPr marL="36576" marR="36576" marT="18288" marB="18288" anchor="ctr">
+                    <a:lnL w="6350" cap="flat" cmpd="sng" algn="ctr">
+                      <a:solidFill>
+                        <a:srgbClr val="BFBFBF"/>
+                      </a:solidFill>
+                      <a:prstDash val="solid"/>
+                      <a:round/>
+                      <a:headEnd type="none" w="med" len="med"/>
+                      <a:tailEnd type="none" w="med" len="med"/>
+                    </a:lnL>
+                    <a:lnR w="6350" cap="flat" cmpd="sng" algn="ctr">
+                      <a:solidFill>
+                        <a:srgbClr val="BFBFBF"/>
+                      </a:solidFill>
+                      <a:prstDash val="solid"/>
+                      <a:round/>
+                      <a:headEnd type="none" w="med" len="med"/>
+                      <a:tailEnd type="none" w="med" len="med"/>
+                    </a:lnR>
+                    <a:lnT w="6350" cap="flat" cmpd="sng" algn="ctr">
+                      <a:solidFill>
+                        <a:srgbClr val="BFBFBF"/>
+                      </a:solidFill>
+                      <a:prstDash val="solid"/>
+                      <a:round/>
+                      <a:headEnd type="none" w="med" len="med"/>
+                      <a:tailEnd type="none" w="med" len="med"/>
+                    </a:lnT>
+                    <a:lnB w="6350" cap="flat" cmpd="sng" algn="ctr">
+                      <a:solidFill>
+                        <a:srgbClr val="BFBFBF"/>
+                      </a:solidFill>
+                      <a:prstDash val="solid"/>
+                      <a:round/>
+                      <a:headEnd type="none" w="med" len="med"/>
+                      <a:tailEnd type="none" w="med" len="med"/>
+                    </a:lnB>
                   </a:tcPr>
                 </a:tc>
                 <a:tc>
@@ -4020,7 +3965,7 @@
                           <a:ea typeface="신세계 민부리 Light(TTF)" pitchFamily="34" charset="-122"/>
                           <a:cs typeface="신세계 민부리 Light(TTF)" pitchFamily="34" charset="-120"/>
                         </a:rPr>
-                        <a:t>노후 SOC 리모델링</a:t>
+                        <a:t>발전 · 에너지 시설</a:t>
                       </a:r>
                       <a:endParaRPr lang="en-US" sz="800" dirty="0">
                         <a:latin typeface="신세계 민부리 Light(TTF)" charset="0"/>
@@ -4029,46 +3974,43 @@
                       </a:endParaRPr>
                     </a:p>
                   </a:txBody>
-                  <a:tcPr marL="45720" marR="45720" marT="18288" marB="18288" anchor="ctr">
-                    <a:lnL w="6350" cap="flat" cmpd="sng" algn="ctr">
-                      <a:solidFill>
-                        <a:srgbClr val="BFBFBF"/>
-                      </a:solidFill>
-                      <a:prstDash val="solid"/>
-                      <a:round/>
-                      <a:headEnd type="none" w="med" len="med"/>
-                      <a:tailEnd type="none" w="med" len="med"/>
-                    </a:lnL>
-                    <a:lnR w="6350" cap="flat" cmpd="sng" algn="ctr">
-                      <a:solidFill>
-                        <a:srgbClr val="BFBFBF"/>
-                      </a:solidFill>
-                      <a:prstDash val="solid"/>
-                      <a:round/>
-                      <a:headEnd type="none" w="med" len="med"/>
-                      <a:tailEnd type="none" w="med" len="med"/>
-                    </a:lnR>
-                    <a:lnT w="6350" cap="flat" cmpd="sng" algn="ctr">
-                      <a:solidFill>
-                        <a:srgbClr val="BFBFBF"/>
-                      </a:solidFill>
-                      <a:prstDash val="solid"/>
-                      <a:round/>
-                      <a:headEnd type="none" w="med" len="med"/>
-                      <a:tailEnd type="none" w="med" len="med"/>
-                    </a:lnT>
-                    <a:lnB w="6350" cap="flat" cmpd="sng" algn="ctr">
-                      <a:solidFill>
-                        <a:srgbClr val="BFBFBF"/>
-                      </a:solidFill>
-                      <a:prstDash val="solid"/>
-                      <a:round/>
-                      <a:headEnd type="none" w="med" len="med"/>
-                      <a:tailEnd type="none" w="med" len="med"/>
-                    </a:lnB>
-                    <a:solidFill>
-                      <a:srgbClr val="EEF2F8"/>
-                    </a:solidFill>
+                  <a:tcPr marL="36576" marR="36576" marT="18288" marB="18288" anchor="ctr">
+                    <a:lnL w="6350" cap="flat" cmpd="sng" algn="ctr">
+                      <a:solidFill>
+                        <a:srgbClr val="BFBFBF"/>
+                      </a:solidFill>
+                      <a:prstDash val="solid"/>
+                      <a:round/>
+                      <a:headEnd type="none" w="med" len="med"/>
+                      <a:tailEnd type="none" w="med" len="med"/>
+                    </a:lnL>
+                    <a:lnR w="6350" cap="flat" cmpd="sng" algn="ctr">
+                      <a:solidFill>
+                        <a:srgbClr val="BFBFBF"/>
+                      </a:solidFill>
+                      <a:prstDash val="solid"/>
+                      <a:round/>
+                      <a:headEnd type="none" w="med" len="med"/>
+                      <a:tailEnd type="none" w="med" len="med"/>
+                    </a:lnR>
+                    <a:lnT w="6350" cap="flat" cmpd="sng" algn="ctr">
+                      <a:solidFill>
+                        <a:srgbClr val="BFBFBF"/>
+                      </a:solidFill>
+                      <a:prstDash val="solid"/>
+                      <a:round/>
+                      <a:headEnd type="none" w="med" len="med"/>
+                      <a:tailEnd type="none" w="med" len="med"/>
+                    </a:lnT>
+                    <a:lnB w="6350" cap="flat" cmpd="sng" algn="ctr">
+                      <a:solidFill>
+                        <a:srgbClr val="BFBFBF"/>
+                      </a:solidFill>
+                      <a:prstDash val="solid"/>
+                      <a:round/>
+                      <a:headEnd type="none" w="med" len="med"/>
+                      <a:tailEnd type="none" w="med" len="med"/>
+                    </a:lnB>
                   </a:tcPr>
                 </a:tc>
                 <a:tc>
@@ -4088,7 +4030,7 @@
                           <a:ea typeface="신세계 민부리 Light(TTF)" pitchFamily="34" charset="-122"/>
                           <a:cs typeface="신세계 민부리 Light(TTF)" pitchFamily="34" charset="-120"/>
                         </a:rPr>
-                        <a:t>’24 활성화 방안 : 최대 100년 연장 허용</a:t>
+                        <a:t>영구 소유</a:t>
                       </a:r>
                       <a:endParaRPr lang="en-US" sz="800" dirty="0">
                         <a:latin typeface="신세계 민부리 Light(TTF)" charset="0"/>
@@ -4097,46 +4039,43 @@
                       </a:endParaRPr>
                     </a:p>
                   </a:txBody>
-                  <a:tcPr marL="45720" marR="45720" marT="18288" marB="18288" anchor="ctr">
-                    <a:lnL w="6350" cap="flat" cmpd="sng" algn="ctr">
-                      <a:solidFill>
-                        <a:srgbClr val="BFBFBF"/>
-                      </a:solidFill>
-                      <a:prstDash val="solid"/>
-                      <a:round/>
-                      <a:headEnd type="none" w="med" len="med"/>
-                      <a:tailEnd type="none" w="med" len="med"/>
-                    </a:lnL>
-                    <a:lnR w="6350" cap="flat" cmpd="sng" algn="ctr">
-                      <a:solidFill>
-                        <a:srgbClr val="BFBFBF"/>
-                      </a:solidFill>
-                      <a:prstDash val="solid"/>
-                      <a:round/>
-                      <a:headEnd type="none" w="med" len="med"/>
-                      <a:tailEnd type="none" w="med" len="med"/>
-                    </a:lnR>
-                    <a:lnT w="6350" cap="flat" cmpd="sng" algn="ctr">
-                      <a:solidFill>
-                        <a:srgbClr val="BFBFBF"/>
-                      </a:solidFill>
-                      <a:prstDash val="solid"/>
-                      <a:round/>
-                      <a:headEnd type="none" w="med" len="med"/>
-                      <a:tailEnd type="none" w="med" len="med"/>
-                    </a:lnT>
-                    <a:lnB w="6350" cap="flat" cmpd="sng" algn="ctr">
-                      <a:solidFill>
-                        <a:srgbClr val="BFBFBF"/>
-                      </a:solidFill>
-                      <a:prstDash val="solid"/>
-                      <a:round/>
-                      <a:headEnd type="none" w="med" len="med"/>
-                      <a:tailEnd type="none" w="med" len="med"/>
-                    </a:lnB>
-                    <a:solidFill>
-                      <a:srgbClr val="EEF2F8"/>
-                    </a:solidFill>
+                  <a:tcPr marL="36576" marR="36576" marT="18288" marB="18288" anchor="ctr">
+                    <a:lnL w="6350" cap="flat" cmpd="sng" algn="ctr">
+                      <a:solidFill>
+                        <a:srgbClr val="BFBFBF"/>
+                      </a:solidFill>
+                      <a:prstDash val="solid"/>
+                      <a:round/>
+                      <a:headEnd type="none" w="med" len="med"/>
+                      <a:tailEnd type="none" w="med" len="med"/>
+                    </a:lnL>
+                    <a:lnR w="6350" cap="flat" cmpd="sng" algn="ctr">
+                      <a:solidFill>
+                        <a:srgbClr val="BFBFBF"/>
+                      </a:solidFill>
+                      <a:prstDash val="solid"/>
+                      <a:round/>
+                      <a:headEnd type="none" w="med" len="med"/>
+                      <a:tailEnd type="none" w="med" len="med"/>
+                    </a:lnR>
+                    <a:lnT w="6350" cap="flat" cmpd="sng" algn="ctr">
+                      <a:solidFill>
+                        <a:srgbClr val="BFBFBF"/>
+                      </a:solidFill>
+                      <a:prstDash val="solid"/>
+                      <a:round/>
+                      <a:headEnd type="none" w="med" len="med"/>
+                      <a:tailEnd type="none" w="med" len="med"/>
+                    </a:lnT>
+                    <a:lnB w="6350" cap="flat" cmpd="sng" algn="ctr">
+                      <a:solidFill>
+                        <a:srgbClr val="BFBFBF"/>
+                      </a:solidFill>
+                      <a:prstDash val="solid"/>
+                      <a:round/>
+                      <a:headEnd type="none" w="med" len="med"/>
+                      <a:tailEnd type="none" w="med" len="med"/>
+                    </a:lnB>
                   </a:tcPr>
                 </a:tc>
                 <a:tc>
@@ -4156,7 +4095,7 @@
                           <a:ea typeface="신세계 민부리 Light(TTF)" pitchFamily="34" charset="-122"/>
                           <a:cs typeface="신세계 민부리 Light(TTF)" pitchFamily="34" charset="-120"/>
                         </a:rPr>
-                        <a:t>기존 시설 인수 · 가치평가 필요</a:t>
+                        <a:t>한강 공유수면 시설 적용 곤란</a:t>
                       </a:r>
                       <a:endParaRPr lang="en-US" sz="800" dirty="0">
                         <a:latin typeface="신세계 민부리 Light(TTF)" charset="0"/>
@@ -4165,7 +4104,152 @@
                       </a:endParaRPr>
                     </a:p>
                   </a:txBody>
-                  <a:tcPr marL="45720" marR="45720" marT="18288" marB="18288" anchor="ctr">
+                  <a:tcPr marL="36576" marR="36576" marT="18288" marB="18288" anchor="ctr">
+                    <a:lnL w="6350" cap="flat" cmpd="sng" algn="ctr">
+                      <a:solidFill>
+                        <a:srgbClr val="BFBFBF"/>
+                      </a:solidFill>
+                      <a:prstDash val="solid"/>
+                      <a:round/>
+                      <a:headEnd type="none" w="med" len="med"/>
+                      <a:tailEnd type="none" w="med" len="med"/>
+                    </a:lnL>
+                    <a:lnR w="6350" cap="flat" cmpd="sng" algn="ctr">
+                      <a:solidFill>
+                        <a:srgbClr val="BFBFBF"/>
+                      </a:solidFill>
+                      <a:prstDash val="solid"/>
+                      <a:round/>
+                      <a:headEnd type="none" w="med" len="med"/>
+                      <a:tailEnd type="none" w="med" len="med"/>
+                    </a:lnR>
+                    <a:lnT w="6350" cap="flat" cmpd="sng" algn="ctr">
+                      <a:solidFill>
+                        <a:srgbClr val="BFBFBF"/>
+                      </a:solidFill>
+                      <a:prstDash val="solid"/>
+                      <a:round/>
+                      <a:headEnd type="none" w="med" len="med"/>
+                      <a:tailEnd type="none" w="med" len="med"/>
+                    </a:lnT>
+                    <a:lnB w="6350" cap="flat" cmpd="sng" algn="ctr">
+                      <a:solidFill>
+                        <a:srgbClr val="BFBFBF"/>
+                      </a:solidFill>
+                      <a:prstDash val="solid"/>
+                      <a:round/>
+                      <a:headEnd type="none" w="med" len="med"/>
+                      <a:tailEnd type="none" w="med" len="med"/>
+                    </a:lnB>
+                  </a:tcPr>
+                </a:tc>
+              </a:tr>
+              <a:tr h="502920">
+                <a:tc rowSpan="2">
+                  <a:txBody>
+                    <a:bodyPr/>
+                    <a:lstStyle/>
+                    <a:p>
+                      <a:pPr algn="ctr" indent="0" marL="0">
+                        <a:buNone/>
+                      </a:pPr>
+                      <a:r>
+                        <a:rPr lang="en-US" sz="900" b="1" dirty="0">
+                          <a:solidFill>
+                            <a:srgbClr val="262626"/>
+                          </a:solidFill>
+                          <a:latin typeface="신세계 민부리 Bold(TTF)" pitchFamily="34" charset="0"/>
+                          <a:ea typeface="신세계 민부리 Bold(TTF)" pitchFamily="34" charset="-122"/>
+                          <a:cs typeface="신세계 민부리 Bold(TTF)" pitchFamily="34" charset="-120"/>
+                        </a:rPr>
+                        <a:t>개량</a:t>
+                      </a:r>
+                      <a:endParaRPr lang="en-US" sz="900" dirty="0">
+                        <a:latin typeface="신세계 민부리 Bold(TTF)" charset="0"/>
+                        <a:ea typeface="신세계 민부리 Bold(TTF)" charset="0"/>
+                        <a:cs typeface="신세계 민부리 Bold(TTF)" charset="0"/>
+                      </a:endParaRPr>
+                    </a:p>
+                  </a:txBody>
+                  <a:tcPr marL="36576" marR="36576" marT="18288" marB="18288" anchor="ctr">
+                    <a:lnL w="6350" cap="flat" cmpd="sng" algn="ctr">
+                      <a:solidFill>
+                        <a:srgbClr val="BFBFBF"/>
+                      </a:solidFill>
+                      <a:prstDash val="solid"/>
+                      <a:round/>
+                      <a:headEnd type="none" w="med" len="med"/>
+                      <a:tailEnd type="none" w="med" len="med"/>
+                    </a:lnL>
+                    <a:lnR w="6350" cap="flat" cmpd="sng" algn="ctr">
+                      <a:solidFill>
+                        <a:srgbClr val="BFBFBF"/>
+                      </a:solidFill>
+                      <a:prstDash val="solid"/>
+                      <a:round/>
+                      <a:headEnd type="none" w="med" len="med"/>
+                      <a:tailEnd type="none" w="med" len="med"/>
+                    </a:lnR>
+                    <a:lnT w="6350" cap="flat" cmpd="sng" algn="ctr">
+                      <a:solidFill>
+                        <a:srgbClr val="BFBFBF"/>
+                      </a:solidFill>
+                      <a:prstDash val="solid"/>
+                      <a:round/>
+                      <a:headEnd type="none" w="med" len="med"/>
+                      <a:tailEnd type="none" w="med" len="med"/>
+                    </a:lnT>
+                    <a:lnB w="6350" cap="flat" cmpd="sng" algn="ctr">
+                      <a:solidFill>
+                        <a:srgbClr val="BFBFBF"/>
+                      </a:solidFill>
+                      <a:prstDash val="solid"/>
+                      <a:round/>
+                      <a:headEnd type="none" w="med" len="med"/>
+                      <a:tailEnd type="none" w="med" len="med"/>
+                    </a:lnB>
+                    <a:solidFill>
+                      <a:srgbClr val="F2F2F2"/>
+                    </a:solidFill>
+                  </a:tcPr>
+                </a:tc>
+                <a:tc>
+                  <a:txBody>
+                    <a:bodyPr/>
+                    <a:lstStyle/>
+                    <a:p>
+                      <a:pPr algn="ctr" indent="0" marL="0">
+                        <a:buNone/>
+                      </a:pPr>
+                      <a:r>
+                        <a:rPr lang="en-US" sz="900" b="1" dirty="0">
+                          <a:solidFill>
+                            <a:srgbClr val="000000"/>
+                          </a:solidFill>
+                          <a:latin typeface="신세계 민부리 Bold(TTF)" pitchFamily="34" charset="0"/>
+                          <a:ea typeface="신세계 민부리 Bold(TTF)" pitchFamily="34" charset="-122"/>
+                          <a:cs typeface="신세계 민부리 Bold(TTF)" pitchFamily="34" charset="-120"/>
+                        </a:rPr>
+                        <a:t>ROT</a:t>
+                      </a:r>
+                      <a:endParaRPr lang="en-US" sz="1200" dirty="0"/>
+                    </a:p>
+                    <a:p>
+                      <a:pPr algn="ctr" indent="0" marL="0">
+                        <a:buNone/>
+                      </a:pPr>
+                      <a:r>
+                        <a:rPr lang="en-US" sz="750" dirty="0">
+                          <a:solidFill>
+                            <a:srgbClr val="595959"/>
+                          </a:solidFill>
+                        </a:rPr>
+                        <a:t>개량운영형</a:t>
+                      </a:r>
+                      <a:endParaRPr lang="en-US" sz="1200" dirty="0"/>
+                    </a:p>
+                  </a:txBody>
+                  <a:tcPr marL="36576" marR="36576" marT="18288" marB="18288" anchor="ctr">
                     <a:lnL w="6350" cap="flat" cmpd="sng" algn="ctr">
                       <a:solidFill>
                         <a:srgbClr val="BFBFBF"/>
@@ -4216,154 +4300,6 @@
                         <a:buNone/>
                       </a:pPr>
                       <a:r>
-                        <a:rPr lang="en-US" sz="1100" b="1" dirty="0">
-                          <a:solidFill>
-                            <a:srgbClr val="1F3A6E"/>
-                          </a:solidFill>
-                          <a:latin typeface="신세계 민부리 Bold(TTF)" pitchFamily="34" charset="0"/>
-                          <a:ea typeface="신세계 민부리 Bold(TTF)" pitchFamily="34" charset="-122"/>
-                          <a:cs typeface="신세계 민부리 Bold(TTF)" pitchFamily="34" charset="-120"/>
-                        </a:rPr>
-                        <a:t>◎</a:t>
-                      </a:r>
-                      <a:endParaRPr lang="en-US" sz="1100" dirty="0">
-                        <a:latin typeface="신세계 민부리 Bold(TTF)" charset="0"/>
-                        <a:ea typeface="신세계 민부리 Bold(TTF)" charset="0"/>
-                        <a:cs typeface="신세계 민부리 Bold(TTF)" charset="0"/>
-                      </a:endParaRPr>
-                    </a:p>
-                  </a:txBody>
-                  <a:tcPr marL="45720" marR="45720" marT="18288" marB="18288" anchor="ctr">
-                    <a:lnL w="6350" cap="flat" cmpd="sng" algn="ctr">
-                      <a:solidFill>
-                        <a:srgbClr val="BFBFBF"/>
-                      </a:solidFill>
-                      <a:prstDash val="solid"/>
-                      <a:round/>
-                      <a:headEnd type="none" w="med" len="med"/>
-                      <a:tailEnd type="none" w="med" len="med"/>
-                    </a:lnL>
-                    <a:lnR w="6350" cap="flat" cmpd="sng" algn="ctr">
-                      <a:solidFill>
-                        <a:srgbClr val="BFBFBF"/>
-                      </a:solidFill>
-                      <a:prstDash val="solid"/>
-                      <a:round/>
-                      <a:headEnd type="none" w="med" len="med"/>
-                      <a:tailEnd type="none" w="med" len="med"/>
-                    </a:lnR>
-                    <a:lnT w="6350" cap="flat" cmpd="sng" algn="ctr">
-                      <a:solidFill>
-                        <a:srgbClr val="BFBFBF"/>
-                      </a:solidFill>
-                      <a:prstDash val="solid"/>
-                      <a:round/>
-                      <a:headEnd type="none" w="med" len="med"/>
-                      <a:tailEnd type="none" w="med" len="med"/>
-                    </a:lnT>
-                    <a:lnB w="6350" cap="flat" cmpd="sng" algn="ctr">
-                      <a:solidFill>
-                        <a:srgbClr val="BFBFBF"/>
-                      </a:solidFill>
-                      <a:prstDash val="solid"/>
-                      <a:round/>
-                      <a:headEnd type="none" w="med" len="med"/>
-                      <a:tailEnd type="none" w="med" len="med"/>
-                    </a:lnB>
-                    <a:solidFill>
-                      <a:srgbClr val="EEF2F8"/>
-                    </a:solidFill>
-                  </a:tcPr>
-                </a:tc>
-              </a:tr>
-              <a:tr h="438912">
-                <a:tc>
-                  <a:txBody>
-                    <a:bodyPr/>
-                    <a:lstStyle/>
-                    <a:p>
-                      <a:pPr algn="ctr" indent="0" marL="0">
-                        <a:buNone/>
-                      </a:pPr>
-                      <a:r>
-                        <a:rPr lang="en-US" sz="900" b="1" dirty="0">
-                          <a:solidFill>
-                            <a:srgbClr val="000000"/>
-                          </a:solidFill>
-                          <a:latin typeface="신세계 민부리 Bold(TTF)" pitchFamily="34" charset="0"/>
-                          <a:ea typeface="신세계 민부리 Bold(TTF)" pitchFamily="34" charset="-122"/>
-                          <a:cs typeface="신세계 민부리 Bold(TTF)" pitchFamily="34" charset="-120"/>
-                        </a:rPr>
-                        <a:t>BTO-rs · a</a:t>
-                      </a:r>
-                      <a:endParaRPr lang="en-US" sz="1200" dirty="0"/>
-                    </a:p>
-                    <a:p>
-                      <a:pPr algn="ctr" indent="0" marL="0">
-                        <a:buNone/>
-                      </a:pPr>
-                      <a:r>
-                        <a:rPr lang="en-US" sz="750" dirty="0">
-                          <a:solidFill>
-                            <a:srgbClr val="595959"/>
-                          </a:solidFill>
-                        </a:rPr>
-                        <a:t>위험분담형</a:t>
-                      </a:r>
-                      <a:endParaRPr lang="en-US" sz="1200" dirty="0"/>
-                    </a:p>
-                  </a:txBody>
-                  <a:tcPr marL="45720" marR="45720" marT="18288" marB="18288" anchor="ctr">
-                    <a:lnL w="6350" cap="flat" cmpd="sng" algn="ctr">
-                      <a:solidFill>
-                        <a:srgbClr val="BFBFBF"/>
-                      </a:solidFill>
-                      <a:prstDash val="solid"/>
-                      <a:round/>
-                      <a:headEnd type="none" w="med" len="med"/>
-                      <a:tailEnd type="none" w="med" len="med"/>
-                    </a:lnL>
-                    <a:lnR w="6350" cap="flat" cmpd="sng" algn="ctr">
-                      <a:solidFill>
-                        <a:srgbClr val="BFBFBF"/>
-                      </a:solidFill>
-                      <a:prstDash val="solid"/>
-                      <a:round/>
-                      <a:headEnd type="none" w="med" len="med"/>
-                      <a:tailEnd type="none" w="med" len="med"/>
-                    </a:lnR>
-                    <a:lnT w="6350" cap="flat" cmpd="sng" algn="ctr">
-                      <a:solidFill>
-                        <a:srgbClr val="BFBFBF"/>
-                      </a:solidFill>
-                      <a:prstDash val="solid"/>
-                      <a:round/>
-                      <a:headEnd type="none" w="med" len="med"/>
-                      <a:tailEnd type="none" w="med" len="med"/>
-                    </a:lnT>
-                    <a:lnB w="6350" cap="flat" cmpd="sng" algn="ctr">
-                      <a:solidFill>
-                        <a:srgbClr val="BFBFBF"/>
-                      </a:solidFill>
-                      <a:prstDash val="solid"/>
-                      <a:round/>
-                      <a:headEnd type="none" w="med" len="med"/>
-                      <a:tailEnd type="none" w="med" len="med"/>
-                    </a:lnB>
-                    <a:solidFill>
-                      <a:srgbClr val="F2F2F2"/>
-                    </a:solidFill>
-                  </a:tcPr>
-                </a:tc>
-                <a:tc>
-                  <a:txBody>
-                    <a:bodyPr/>
-                    <a:lstStyle/>
-                    <a:p>
-                      <a:pPr indent="0" marL="0">
-                        <a:buNone/>
-                      </a:pPr>
-                      <a:r>
                         <a:rPr lang="en-US" sz="800" dirty="0">
                           <a:solidFill>
                             <a:srgbClr val="000000"/>
@@ -4372,7 +4308,7 @@
                           <a:ea typeface="신세계 민부리 Light(TTF)" pitchFamily="34" charset="-122"/>
                           <a:cs typeface="신세계 민부리 Light(TTF)" pitchFamily="34" charset="-120"/>
                         </a:rPr>
-                        <a:t>BTO 구조 + 정부가 투자위험 일부 분담</a:t>
+                        <a:t>민간</a:t>
                       </a:r>
                       <a:endParaRPr lang="en-US" sz="800" dirty="0">
                         <a:latin typeface="신세계 민부리 Light(TTF)" charset="0"/>
@@ -4381,51 +4317,54 @@
                       </a:endParaRPr>
                     </a:p>
                   </a:txBody>
-                  <a:tcPr marL="45720" marR="45720" marT="18288" marB="18288" anchor="ctr">
-                    <a:lnL w="6350" cap="flat" cmpd="sng" algn="ctr">
-                      <a:solidFill>
-                        <a:srgbClr val="BFBFBF"/>
-                      </a:solidFill>
-                      <a:prstDash val="solid"/>
-                      <a:round/>
-                      <a:headEnd type="none" w="med" len="med"/>
-                      <a:tailEnd type="none" w="med" len="med"/>
-                    </a:lnL>
-                    <a:lnR w="6350" cap="flat" cmpd="sng" algn="ctr">
-                      <a:solidFill>
-                        <a:srgbClr val="BFBFBF"/>
-                      </a:solidFill>
-                      <a:prstDash val="solid"/>
-                      <a:round/>
-                      <a:headEnd type="none" w="med" len="med"/>
-                      <a:tailEnd type="none" w="med" len="med"/>
-                    </a:lnR>
-                    <a:lnT w="6350" cap="flat" cmpd="sng" algn="ctr">
-                      <a:solidFill>
-                        <a:srgbClr val="BFBFBF"/>
-                      </a:solidFill>
-                      <a:prstDash val="solid"/>
-                      <a:round/>
-                      <a:headEnd type="none" w="med" len="med"/>
-                      <a:tailEnd type="none" w="med" len="med"/>
-                    </a:lnT>
-                    <a:lnB w="6350" cap="flat" cmpd="sng" algn="ctr">
-                      <a:solidFill>
-                        <a:srgbClr val="BFBFBF"/>
-                      </a:solidFill>
-                      <a:prstDash val="solid"/>
-                      <a:round/>
-                      <a:headEnd type="none" w="med" len="med"/>
-                      <a:tailEnd type="none" w="med" len="med"/>
-                    </a:lnB>
-                  </a:tcPr>
-                </a:tc>
-                <a:tc>
-                  <a:txBody>
-                    <a:bodyPr/>
-                    <a:lstStyle/>
-                    <a:p>
-                      <a:pPr indent="0" marL="0">
+                  <a:tcPr marL="36576" marR="36576" marT="18288" marB="18288" anchor="ctr">
+                    <a:lnL w="6350" cap="flat" cmpd="sng" algn="ctr">
+                      <a:solidFill>
+                        <a:srgbClr val="BFBFBF"/>
+                      </a:solidFill>
+                      <a:prstDash val="solid"/>
+                      <a:round/>
+                      <a:headEnd type="none" w="med" len="med"/>
+                      <a:tailEnd type="none" w="med" len="med"/>
+                    </a:lnL>
+                    <a:lnR w="6350" cap="flat" cmpd="sng" algn="ctr">
+                      <a:solidFill>
+                        <a:srgbClr val="BFBFBF"/>
+                      </a:solidFill>
+                      <a:prstDash val="solid"/>
+                      <a:round/>
+                      <a:headEnd type="none" w="med" len="med"/>
+                      <a:tailEnd type="none" w="med" len="med"/>
+                    </a:lnR>
+                    <a:lnT w="6350" cap="flat" cmpd="sng" algn="ctr">
+                      <a:solidFill>
+                        <a:srgbClr val="BFBFBF"/>
+                      </a:solidFill>
+                      <a:prstDash val="solid"/>
+                      <a:round/>
+                      <a:headEnd type="none" w="med" len="med"/>
+                      <a:tailEnd type="none" w="med" len="med"/>
+                    </a:lnT>
+                    <a:lnB w="6350" cap="flat" cmpd="sng" algn="ctr">
+                      <a:solidFill>
+                        <a:srgbClr val="BFBFBF"/>
+                      </a:solidFill>
+                      <a:prstDash val="solid"/>
+                      <a:round/>
+                      <a:headEnd type="none" w="med" len="med"/>
+                      <a:tailEnd type="none" w="med" len="med"/>
+                    </a:lnB>
+                    <a:solidFill>
+                      <a:srgbClr val="EEF2F8"/>
+                    </a:solidFill>
+                  </a:tcPr>
+                </a:tc>
+                <a:tc>
+                  <a:txBody>
+                    <a:bodyPr/>
+                    <a:lstStyle/>
+                    <a:p>
+                      <a:pPr algn="ctr" indent="0" marL="0">
                         <a:buNone/>
                       </a:pPr>
                       <a:r>
@@ -4437,7 +4376,7 @@
                           <a:ea typeface="신세계 민부리 Light(TTF)" pitchFamily="34" charset="-122"/>
                           <a:cs typeface="신세계 민부리 Light(TTF)" pitchFamily="34" charset="-120"/>
                         </a:rPr>
-                        <a:t>rs : 손익 공유 / a : 손실 일부 보전</a:t>
+                        <a:t>국가</a:t>
                       </a:r>
                       <a:endParaRPr lang="en-US" sz="800" dirty="0">
                         <a:latin typeface="신세계 민부리 Light(TTF)" charset="0"/>
@@ -4446,51 +4385,54 @@
                       </a:endParaRPr>
                     </a:p>
                   </a:txBody>
-                  <a:tcPr marL="45720" marR="45720" marT="18288" marB="18288" anchor="ctr">
-                    <a:lnL w="6350" cap="flat" cmpd="sng" algn="ctr">
-                      <a:solidFill>
-                        <a:srgbClr val="BFBFBF"/>
-                      </a:solidFill>
-                      <a:prstDash val="solid"/>
-                      <a:round/>
-                      <a:headEnd type="none" w="med" len="med"/>
-                      <a:tailEnd type="none" w="med" len="med"/>
-                    </a:lnL>
-                    <a:lnR w="6350" cap="flat" cmpd="sng" algn="ctr">
-                      <a:solidFill>
-                        <a:srgbClr val="BFBFBF"/>
-                      </a:solidFill>
-                      <a:prstDash val="solid"/>
-                      <a:round/>
-                      <a:headEnd type="none" w="med" len="med"/>
-                      <a:tailEnd type="none" w="med" len="med"/>
-                    </a:lnR>
-                    <a:lnT w="6350" cap="flat" cmpd="sng" algn="ctr">
-                      <a:solidFill>
-                        <a:srgbClr val="BFBFBF"/>
-                      </a:solidFill>
-                      <a:prstDash val="solid"/>
-                      <a:round/>
-                      <a:headEnd type="none" w="med" len="med"/>
-                      <a:tailEnd type="none" w="med" len="med"/>
-                    </a:lnT>
-                    <a:lnB w="6350" cap="flat" cmpd="sng" algn="ctr">
-                      <a:solidFill>
-                        <a:srgbClr val="BFBFBF"/>
-                      </a:solidFill>
-                      <a:prstDash val="solid"/>
-                      <a:round/>
-                      <a:headEnd type="none" w="med" len="med"/>
-                      <a:tailEnd type="none" w="med" len="med"/>
-                    </a:lnB>
-                  </a:tcPr>
-                </a:tc>
-                <a:tc>
-                  <a:txBody>
-                    <a:bodyPr/>
-                    <a:lstStyle/>
-                    <a:p>
-                      <a:pPr indent="0" marL="0">
+                  <a:tcPr marL="36576" marR="36576" marT="18288" marB="18288" anchor="ctr">
+                    <a:lnL w="6350" cap="flat" cmpd="sng" algn="ctr">
+                      <a:solidFill>
+                        <a:srgbClr val="BFBFBF"/>
+                      </a:solidFill>
+                      <a:prstDash val="solid"/>
+                      <a:round/>
+                      <a:headEnd type="none" w="med" len="med"/>
+                      <a:tailEnd type="none" w="med" len="med"/>
+                    </a:lnL>
+                    <a:lnR w="6350" cap="flat" cmpd="sng" algn="ctr">
+                      <a:solidFill>
+                        <a:srgbClr val="BFBFBF"/>
+                      </a:solidFill>
+                      <a:prstDash val="solid"/>
+                      <a:round/>
+                      <a:headEnd type="none" w="med" len="med"/>
+                      <a:tailEnd type="none" w="med" len="med"/>
+                    </a:lnR>
+                    <a:lnT w="6350" cap="flat" cmpd="sng" algn="ctr">
+                      <a:solidFill>
+                        <a:srgbClr val="BFBFBF"/>
+                      </a:solidFill>
+                      <a:prstDash val="solid"/>
+                      <a:round/>
+                      <a:headEnd type="none" w="med" len="med"/>
+                      <a:tailEnd type="none" w="med" len="med"/>
+                    </a:lnT>
+                    <a:lnB w="6350" cap="flat" cmpd="sng" algn="ctr">
+                      <a:solidFill>
+                        <a:srgbClr val="BFBFBF"/>
+                      </a:solidFill>
+                      <a:prstDash val="solid"/>
+                      <a:round/>
+                      <a:headEnd type="none" w="med" len="med"/>
+                      <a:tailEnd type="none" w="med" len="med"/>
+                    </a:lnB>
+                    <a:solidFill>
+                      <a:srgbClr val="EEF2F8"/>
+                    </a:solidFill>
+                  </a:tcPr>
+                </a:tc>
+                <a:tc>
+                  <a:txBody>
+                    <a:bodyPr/>
+                    <a:lstStyle/>
+                    <a:p>
+                      <a:pPr algn="ctr" indent="0" marL="0">
                         <a:buNone/>
                       </a:pPr>
                       <a:r>
@@ -4502,7 +4444,7 @@
                           <a:ea typeface="신세계 민부리 Light(TTF)" pitchFamily="34" charset="-122"/>
                           <a:cs typeface="신세계 민부리 Light(TTF)" pitchFamily="34" charset="-120"/>
                         </a:rPr>
-                        <a:t>경전철 · 하수 · 환경시설</a:t>
+                        <a:t>민간</a:t>
                       </a:r>
                       <a:endParaRPr lang="en-US" sz="800" dirty="0">
                         <a:latin typeface="신세계 민부리 Light(TTF)" charset="0"/>
@@ -4511,51 +4453,54 @@
                       </a:endParaRPr>
                     </a:p>
                   </a:txBody>
-                  <a:tcPr marL="45720" marR="45720" marT="18288" marB="18288" anchor="ctr">
-                    <a:lnL w="6350" cap="flat" cmpd="sng" algn="ctr">
-                      <a:solidFill>
-                        <a:srgbClr val="BFBFBF"/>
-                      </a:solidFill>
-                      <a:prstDash val="solid"/>
-                      <a:round/>
-                      <a:headEnd type="none" w="med" len="med"/>
-                      <a:tailEnd type="none" w="med" len="med"/>
-                    </a:lnL>
-                    <a:lnR w="6350" cap="flat" cmpd="sng" algn="ctr">
-                      <a:solidFill>
-                        <a:srgbClr val="BFBFBF"/>
-                      </a:solidFill>
-                      <a:prstDash val="solid"/>
-                      <a:round/>
-                      <a:headEnd type="none" w="med" len="med"/>
-                      <a:tailEnd type="none" w="med" len="med"/>
-                    </a:lnR>
-                    <a:lnT w="6350" cap="flat" cmpd="sng" algn="ctr">
-                      <a:solidFill>
-                        <a:srgbClr val="BFBFBF"/>
-                      </a:solidFill>
-                      <a:prstDash val="solid"/>
-                      <a:round/>
-                      <a:headEnd type="none" w="med" len="med"/>
-                      <a:tailEnd type="none" w="med" len="med"/>
-                    </a:lnT>
-                    <a:lnB w="6350" cap="flat" cmpd="sng" algn="ctr">
-                      <a:solidFill>
-                        <a:srgbClr val="BFBFBF"/>
-                      </a:solidFill>
-                      <a:prstDash val="solid"/>
-                      <a:round/>
-                      <a:headEnd type="none" w="med" len="med"/>
-                      <a:tailEnd type="none" w="med" len="med"/>
-                    </a:lnB>
-                  </a:tcPr>
-                </a:tc>
-                <a:tc>
-                  <a:txBody>
-                    <a:bodyPr/>
-                    <a:lstStyle/>
-                    <a:p>
-                      <a:pPr indent="0" marL="0">
+                  <a:tcPr marL="36576" marR="36576" marT="18288" marB="18288" anchor="ctr">
+                    <a:lnL w="6350" cap="flat" cmpd="sng" algn="ctr">
+                      <a:solidFill>
+                        <a:srgbClr val="BFBFBF"/>
+                      </a:solidFill>
+                      <a:prstDash val="solid"/>
+                      <a:round/>
+                      <a:headEnd type="none" w="med" len="med"/>
+                      <a:tailEnd type="none" w="med" len="med"/>
+                    </a:lnL>
+                    <a:lnR w="6350" cap="flat" cmpd="sng" algn="ctr">
+                      <a:solidFill>
+                        <a:srgbClr val="BFBFBF"/>
+                      </a:solidFill>
+                      <a:prstDash val="solid"/>
+                      <a:round/>
+                      <a:headEnd type="none" w="med" len="med"/>
+                      <a:tailEnd type="none" w="med" len="med"/>
+                    </a:lnR>
+                    <a:lnT w="6350" cap="flat" cmpd="sng" algn="ctr">
+                      <a:solidFill>
+                        <a:srgbClr val="BFBFBF"/>
+                      </a:solidFill>
+                      <a:prstDash val="solid"/>
+                      <a:round/>
+                      <a:headEnd type="none" w="med" len="med"/>
+                      <a:tailEnd type="none" w="med" len="med"/>
+                    </a:lnT>
+                    <a:lnB w="6350" cap="flat" cmpd="sng" algn="ctr">
+                      <a:solidFill>
+                        <a:srgbClr val="BFBFBF"/>
+                      </a:solidFill>
+                      <a:prstDash val="solid"/>
+                      <a:round/>
+                      <a:headEnd type="none" w="med" len="med"/>
+                      <a:tailEnd type="none" w="med" len="med"/>
+                    </a:lnB>
+                    <a:solidFill>
+                      <a:srgbClr val="EEF2F8"/>
+                    </a:solidFill>
+                  </a:tcPr>
+                </a:tc>
+                <a:tc>
+                  <a:txBody>
+                    <a:bodyPr/>
+                    <a:lstStyle/>
+                    <a:p>
+                      <a:pPr algn="ctr" indent="0" marL="0">
                         <a:buNone/>
                       </a:pPr>
                       <a:r>
@@ -4567,7 +4512,7 @@
                           <a:ea typeface="신세계 민부리 Light(TTF)" pitchFamily="34" charset="-122"/>
                           <a:cs typeface="신세계 민부리 Light(TTF)" pitchFamily="34" charset="-120"/>
                         </a:rPr>
-                        <a:t>수요위험 완화</a:t>
+                        <a:t>이용자 사용료</a:t>
                       </a:r>
                       <a:endParaRPr lang="en-US" sz="800" dirty="0">
                         <a:latin typeface="신세계 민부리 Light(TTF)" charset="0"/>
@@ -4576,51 +4521,54 @@
                       </a:endParaRPr>
                     </a:p>
                   </a:txBody>
-                  <a:tcPr marL="45720" marR="45720" marT="18288" marB="18288" anchor="ctr">
-                    <a:lnL w="6350" cap="flat" cmpd="sng" algn="ctr">
-                      <a:solidFill>
-                        <a:srgbClr val="BFBFBF"/>
-                      </a:solidFill>
-                      <a:prstDash val="solid"/>
-                      <a:round/>
-                      <a:headEnd type="none" w="med" len="med"/>
-                      <a:tailEnd type="none" w="med" len="med"/>
-                    </a:lnL>
-                    <a:lnR w="6350" cap="flat" cmpd="sng" algn="ctr">
-                      <a:solidFill>
-                        <a:srgbClr val="BFBFBF"/>
-                      </a:solidFill>
-                      <a:prstDash val="solid"/>
-                      <a:round/>
-                      <a:headEnd type="none" w="med" len="med"/>
-                      <a:tailEnd type="none" w="med" len="med"/>
-                    </a:lnR>
-                    <a:lnT w="6350" cap="flat" cmpd="sng" algn="ctr">
-                      <a:solidFill>
-                        <a:srgbClr val="BFBFBF"/>
-                      </a:solidFill>
-                      <a:prstDash val="solid"/>
-                      <a:round/>
-                      <a:headEnd type="none" w="med" len="med"/>
-                      <a:tailEnd type="none" w="med" len="med"/>
-                    </a:lnT>
-                    <a:lnB w="6350" cap="flat" cmpd="sng" algn="ctr">
-                      <a:solidFill>
-                        <a:srgbClr val="BFBFBF"/>
-                      </a:solidFill>
-                      <a:prstDash val="solid"/>
-                      <a:round/>
-                      <a:headEnd type="none" w="med" len="med"/>
-                      <a:tailEnd type="none" w="med" len="med"/>
-                    </a:lnB>
-                  </a:tcPr>
-                </a:tc>
-                <a:tc>
-                  <a:txBody>
-                    <a:bodyPr/>
-                    <a:lstStyle/>
-                    <a:p>
-                      <a:pPr indent="0" marL="0">
+                  <a:tcPr marL="36576" marR="36576" marT="18288" marB="18288" anchor="ctr">
+                    <a:lnL w="6350" cap="flat" cmpd="sng" algn="ctr">
+                      <a:solidFill>
+                        <a:srgbClr val="BFBFBF"/>
+                      </a:solidFill>
+                      <a:prstDash val="solid"/>
+                      <a:round/>
+                      <a:headEnd type="none" w="med" len="med"/>
+                      <a:tailEnd type="none" w="med" len="med"/>
+                    </a:lnL>
+                    <a:lnR w="6350" cap="flat" cmpd="sng" algn="ctr">
+                      <a:solidFill>
+                        <a:srgbClr val="BFBFBF"/>
+                      </a:solidFill>
+                      <a:prstDash val="solid"/>
+                      <a:round/>
+                      <a:headEnd type="none" w="med" len="med"/>
+                      <a:tailEnd type="none" w="med" len="med"/>
+                    </a:lnR>
+                    <a:lnT w="6350" cap="flat" cmpd="sng" algn="ctr">
+                      <a:solidFill>
+                        <a:srgbClr val="BFBFBF"/>
+                      </a:solidFill>
+                      <a:prstDash val="solid"/>
+                      <a:round/>
+                      <a:headEnd type="none" w="med" len="med"/>
+                      <a:tailEnd type="none" w="med" len="med"/>
+                    </a:lnT>
+                    <a:lnB w="6350" cap="flat" cmpd="sng" algn="ctr">
+                      <a:solidFill>
+                        <a:srgbClr val="BFBFBF"/>
+                      </a:solidFill>
+                      <a:prstDash val="solid"/>
+                      <a:round/>
+                      <a:headEnd type="none" w="med" len="med"/>
+                      <a:tailEnd type="none" w="med" len="med"/>
+                    </a:lnB>
+                    <a:solidFill>
+                      <a:srgbClr val="EEF2F8"/>
+                    </a:solidFill>
+                  </a:tcPr>
+                </a:tc>
+                <a:tc>
+                  <a:txBody>
+                    <a:bodyPr/>
+                    <a:lstStyle/>
+                    <a:p>
+                      <a:pPr algn="ctr" indent="0" marL="0">
                         <a:buNone/>
                       </a:pPr>
                       <a:r>
@@ -4632,7 +4580,7 @@
                           <a:ea typeface="신세계 민부리 Light(TTF)" pitchFamily="34" charset="-122"/>
                           <a:cs typeface="신세계 민부리 Light(TTF)" pitchFamily="34" charset="-120"/>
                         </a:rPr>
-                        <a:t>초과수익 공유, 사용료 인하 요구</a:t>
+                        <a:t>민간</a:t>
                       </a:r>
                       <a:endParaRPr lang="en-US" sz="800" dirty="0">
                         <a:latin typeface="신세계 민부리 Light(TTF)" charset="0"/>
@@ -4641,44 +4589,256 @@
                       </a:endParaRPr>
                     </a:p>
                   </a:txBody>
-                  <a:tcPr marL="45720" marR="45720" marT="18288" marB="18288" anchor="ctr">
-                    <a:lnL w="6350" cap="flat" cmpd="sng" algn="ctr">
-                      <a:solidFill>
-                        <a:srgbClr val="BFBFBF"/>
-                      </a:solidFill>
-                      <a:prstDash val="solid"/>
-                      <a:round/>
-                      <a:headEnd type="none" w="med" len="med"/>
-                      <a:tailEnd type="none" w="med" len="med"/>
-                    </a:lnL>
-                    <a:lnR w="6350" cap="flat" cmpd="sng" algn="ctr">
-                      <a:solidFill>
-                        <a:srgbClr val="BFBFBF"/>
-                      </a:solidFill>
-                      <a:prstDash val="solid"/>
-                      <a:round/>
-                      <a:headEnd type="none" w="med" len="med"/>
-                      <a:tailEnd type="none" w="med" len="med"/>
-                    </a:lnR>
-                    <a:lnT w="6350" cap="flat" cmpd="sng" algn="ctr">
-                      <a:solidFill>
-                        <a:srgbClr val="BFBFBF"/>
-                      </a:solidFill>
-                      <a:prstDash val="solid"/>
-                      <a:round/>
-                      <a:headEnd type="none" w="med" len="med"/>
-                      <a:tailEnd type="none" w="med" len="med"/>
-                    </a:lnT>
-                    <a:lnB w="6350" cap="flat" cmpd="sng" algn="ctr">
-                      <a:solidFill>
-                        <a:srgbClr val="BFBFBF"/>
-                      </a:solidFill>
-                      <a:prstDash val="solid"/>
-                      <a:round/>
-                      <a:headEnd type="none" w="med" len="med"/>
-                      <a:tailEnd type="none" w="med" len="med"/>
-                    </a:lnB>
-                  </a:tcPr>
+                  <a:tcPr marL="36576" marR="36576" marT="18288" marB="18288" anchor="ctr">
+                    <a:lnL w="6350" cap="flat" cmpd="sng" algn="ctr">
+                      <a:solidFill>
+                        <a:srgbClr val="BFBFBF"/>
+                      </a:solidFill>
+                      <a:prstDash val="solid"/>
+                      <a:round/>
+                      <a:headEnd type="none" w="med" len="med"/>
+                      <a:tailEnd type="none" w="med" len="med"/>
+                    </a:lnL>
+                    <a:lnR w="6350" cap="flat" cmpd="sng" algn="ctr">
+                      <a:solidFill>
+                        <a:srgbClr val="BFBFBF"/>
+                      </a:solidFill>
+                      <a:prstDash val="solid"/>
+                      <a:round/>
+                      <a:headEnd type="none" w="med" len="med"/>
+                      <a:tailEnd type="none" w="med" len="med"/>
+                    </a:lnR>
+                    <a:lnT w="6350" cap="flat" cmpd="sng" algn="ctr">
+                      <a:solidFill>
+                        <a:srgbClr val="BFBFBF"/>
+                      </a:solidFill>
+                      <a:prstDash val="solid"/>
+                      <a:round/>
+                      <a:headEnd type="none" w="med" len="med"/>
+                      <a:tailEnd type="none" w="med" len="med"/>
+                    </a:lnT>
+                    <a:lnB w="6350" cap="flat" cmpd="sng" algn="ctr">
+                      <a:solidFill>
+                        <a:srgbClr val="BFBFBF"/>
+                      </a:solidFill>
+                      <a:prstDash val="solid"/>
+                      <a:round/>
+                      <a:headEnd type="none" w="med" len="med"/>
+                      <a:tailEnd type="none" w="med" len="med"/>
+                    </a:lnB>
+                    <a:solidFill>
+                      <a:srgbClr val="EEF2F8"/>
+                    </a:solidFill>
+                  </a:tcPr>
+                </a:tc>
+                <a:tc>
+                  <a:txBody>
+                    <a:bodyPr/>
+                    <a:lstStyle/>
+                    <a:p>
+                      <a:pPr indent="0" marL="0">
+                        <a:buNone/>
+                      </a:pPr>
+                      <a:r>
+                        <a:rPr lang="en-US" sz="800" dirty="0">
+                          <a:solidFill>
+                            <a:srgbClr val="000000"/>
+                          </a:solidFill>
+                          <a:latin typeface="신세계 민부리 Light(TTF)" pitchFamily="34" charset="0"/>
+                          <a:ea typeface="신세계 민부리 Light(TTF)" pitchFamily="34" charset="-122"/>
+                          <a:cs typeface="신세계 민부리 Light(TTF)" pitchFamily="34" charset="-120"/>
+                        </a:rPr>
+                        <a:t>노후 SOC · 기존 시설 리모델링</a:t>
+                      </a:r>
+                      <a:endParaRPr lang="en-US" sz="800" dirty="0">
+                        <a:latin typeface="신세계 민부리 Light(TTF)" charset="0"/>
+                        <a:ea typeface="신세계 민부리 Light(TTF)" charset="0"/>
+                        <a:cs typeface="신세계 민부리 Light(TTF)" charset="0"/>
+                      </a:endParaRPr>
+                    </a:p>
+                  </a:txBody>
+                  <a:tcPr marL="36576" marR="36576" marT="18288" marB="18288" anchor="ctr">
+                    <a:lnL w="6350" cap="flat" cmpd="sng" algn="ctr">
+                      <a:solidFill>
+                        <a:srgbClr val="BFBFBF"/>
+                      </a:solidFill>
+                      <a:prstDash val="solid"/>
+                      <a:round/>
+                      <a:headEnd type="none" w="med" len="med"/>
+                      <a:tailEnd type="none" w="med" len="med"/>
+                    </a:lnL>
+                    <a:lnR w="6350" cap="flat" cmpd="sng" algn="ctr">
+                      <a:solidFill>
+                        <a:srgbClr val="BFBFBF"/>
+                      </a:solidFill>
+                      <a:prstDash val="solid"/>
+                      <a:round/>
+                      <a:headEnd type="none" w="med" len="med"/>
+                      <a:tailEnd type="none" w="med" len="med"/>
+                    </a:lnR>
+                    <a:lnT w="6350" cap="flat" cmpd="sng" algn="ctr">
+                      <a:solidFill>
+                        <a:srgbClr val="BFBFBF"/>
+                      </a:solidFill>
+                      <a:prstDash val="solid"/>
+                      <a:round/>
+                      <a:headEnd type="none" w="med" len="med"/>
+                      <a:tailEnd type="none" w="med" len="med"/>
+                    </a:lnT>
+                    <a:lnB w="6350" cap="flat" cmpd="sng" algn="ctr">
+                      <a:solidFill>
+                        <a:srgbClr val="BFBFBF"/>
+                      </a:solidFill>
+                      <a:prstDash val="solid"/>
+                      <a:round/>
+                      <a:headEnd type="none" w="med" len="med"/>
+                      <a:tailEnd type="none" w="med" len="med"/>
+                    </a:lnB>
+                    <a:solidFill>
+                      <a:srgbClr val="EEF2F8"/>
+                    </a:solidFill>
+                  </a:tcPr>
+                </a:tc>
+                <a:tc>
+                  <a:txBody>
+                    <a:bodyPr/>
+                    <a:lstStyle/>
+                    <a:p>
+                      <a:pPr indent="0" marL="0">
+                        <a:buNone/>
+                      </a:pPr>
+                      <a:r>
+                        <a:rPr lang="en-US" sz="800" dirty="0">
+                          <a:solidFill>
+                            <a:srgbClr val="000000"/>
+                          </a:solidFill>
+                          <a:latin typeface="신세계 민부리 Light(TTF)" pitchFamily="34" charset="0"/>
+                          <a:ea typeface="신세계 민부리 Light(TTF)" pitchFamily="34" charset="-122"/>
+                          <a:cs typeface="신세계 민부리 Light(TTF)" pitchFamily="34" charset="-120"/>
+                        </a:rPr>
+                        <a:t>관리운영권 최대 100년 연장 허용 (’24)</a:t>
+                      </a:r>
+                      <a:endParaRPr lang="en-US" sz="800" dirty="0">
+                        <a:latin typeface="신세계 민부리 Light(TTF)" charset="0"/>
+                        <a:ea typeface="신세계 민부리 Light(TTF)" charset="0"/>
+                        <a:cs typeface="신세계 민부리 Light(TTF)" charset="0"/>
+                      </a:endParaRPr>
+                    </a:p>
+                  </a:txBody>
+                  <a:tcPr marL="36576" marR="36576" marT="18288" marB="18288" anchor="ctr">
+                    <a:lnL w="6350" cap="flat" cmpd="sng" algn="ctr">
+                      <a:solidFill>
+                        <a:srgbClr val="BFBFBF"/>
+                      </a:solidFill>
+                      <a:prstDash val="solid"/>
+                      <a:round/>
+                      <a:headEnd type="none" w="med" len="med"/>
+                      <a:tailEnd type="none" w="med" len="med"/>
+                    </a:lnL>
+                    <a:lnR w="6350" cap="flat" cmpd="sng" algn="ctr">
+                      <a:solidFill>
+                        <a:srgbClr val="BFBFBF"/>
+                      </a:solidFill>
+                      <a:prstDash val="solid"/>
+                      <a:round/>
+                      <a:headEnd type="none" w="med" len="med"/>
+                      <a:tailEnd type="none" w="med" len="med"/>
+                    </a:lnR>
+                    <a:lnT w="6350" cap="flat" cmpd="sng" algn="ctr">
+                      <a:solidFill>
+                        <a:srgbClr val="BFBFBF"/>
+                      </a:solidFill>
+                      <a:prstDash val="solid"/>
+                      <a:round/>
+                      <a:headEnd type="none" w="med" len="med"/>
+                      <a:tailEnd type="none" w="med" len="med"/>
+                    </a:lnT>
+                    <a:lnB w="6350" cap="flat" cmpd="sng" algn="ctr">
+                      <a:solidFill>
+                        <a:srgbClr val="BFBFBF"/>
+                      </a:solidFill>
+                      <a:prstDash val="solid"/>
+                      <a:round/>
+                      <a:headEnd type="none" w="med" len="med"/>
+                      <a:tailEnd type="none" w="med" len="med"/>
+                    </a:lnB>
+                    <a:solidFill>
+                      <a:srgbClr val="EEF2F8"/>
+                    </a:solidFill>
+                  </a:tcPr>
+                </a:tc>
+                <a:tc>
+                  <a:txBody>
+                    <a:bodyPr/>
+                    <a:lstStyle/>
+                    <a:p>
+                      <a:pPr indent="0" marL="0">
+                        <a:buNone/>
+                      </a:pPr>
+                      <a:r>
+                        <a:rPr lang="en-US" sz="800" dirty="0">
+                          <a:solidFill>
+                            <a:srgbClr val="000000"/>
+                          </a:solidFill>
+                          <a:latin typeface="신세계 민부리 Light(TTF)" pitchFamily="34" charset="0"/>
+                          <a:ea typeface="신세계 민부리 Light(TTF)" pitchFamily="34" charset="-122"/>
+                          <a:cs typeface="신세계 민부리 Light(TTF)" pitchFamily="34" charset="-120"/>
+                        </a:rPr>
+                        <a:t>기존 시설 인수 · 가치평가 필요</a:t>
+                      </a:r>
+                      <a:endParaRPr lang="en-US" sz="800" dirty="0">
+                        <a:latin typeface="신세계 민부리 Light(TTF)" charset="0"/>
+                        <a:ea typeface="신세계 민부리 Light(TTF)" charset="0"/>
+                        <a:cs typeface="신세계 민부리 Light(TTF)" charset="0"/>
+                      </a:endParaRPr>
+                    </a:p>
+                  </a:txBody>
+                  <a:tcPr marL="36576" marR="36576" marT="18288" marB="18288" anchor="ctr">
+                    <a:lnL w="6350" cap="flat" cmpd="sng" algn="ctr">
+                      <a:solidFill>
+                        <a:srgbClr val="BFBFBF"/>
+                      </a:solidFill>
+                      <a:prstDash val="solid"/>
+                      <a:round/>
+                      <a:headEnd type="none" w="med" len="med"/>
+                      <a:tailEnd type="none" w="med" len="med"/>
+                    </a:lnL>
+                    <a:lnR w="6350" cap="flat" cmpd="sng" algn="ctr">
+                      <a:solidFill>
+                        <a:srgbClr val="BFBFBF"/>
+                      </a:solidFill>
+                      <a:prstDash val="solid"/>
+                      <a:round/>
+                      <a:headEnd type="none" w="med" len="med"/>
+                      <a:tailEnd type="none" w="med" len="med"/>
+                    </a:lnR>
+                    <a:lnT w="6350" cap="flat" cmpd="sng" algn="ctr">
+                      <a:solidFill>
+                        <a:srgbClr val="BFBFBF"/>
+                      </a:solidFill>
+                      <a:prstDash val="solid"/>
+                      <a:round/>
+                      <a:headEnd type="none" w="med" len="med"/>
+                      <a:tailEnd type="none" w="med" len="med"/>
+                    </a:lnT>
+                    <a:lnB w="6350" cap="flat" cmpd="sng" algn="ctr">
+                      <a:solidFill>
+                        <a:srgbClr val="BFBFBF"/>
+                      </a:solidFill>
+                      <a:prstDash val="solid"/>
+                      <a:round/>
+                      <a:headEnd type="none" w="med" len="med"/>
+                      <a:tailEnd type="none" w="med" len="med"/>
+                    </a:lnB>
+                    <a:solidFill>
+                      <a:srgbClr val="EEF2F8"/>
+                    </a:solidFill>
+                  </a:tcPr>
+                </a:tc>
+              </a:tr>
+              <a:tr h="438912">
+                <a:tc vMerge="1">
+                  <a:tcPr/>
                 </a:tc>
                 <a:tc>
                   <a:txBody>
@@ -4689,24 +4849,554 @@
                         <a:buNone/>
                       </a:pPr>
                       <a:r>
-                        <a:rPr lang="en-US" sz="1100" b="1" dirty="0">
-                          <a:solidFill>
-                            <a:srgbClr val="1F3A6E"/>
+                        <a:rPr lang="en-US" sz="900" b="1" dirty="0">
+                          <a:solidFill>
+                            <a:srgbClr val="000000"/>
                           </a:solidFill>
                           <a:latin typeface="신세계 민부리 Bold(TTF)" pitchFamily="34" charset="0"/>
                           <a:ea typeface="신세계 민부리 Bold(TTF)" pitchFamily="34" charset="-122"/>
                           <a:cs typeface="신세계 민부리 Bold(TTF)" pitchFamily="34" charset="-120"/>
                         </a:rPr>
-                        <a:t>○</a:t>
-                      </a:r>
-                      <a:endParaRPr lang="en-US" sz="1100" dirty="0">
-                        <a:latin typeface="신세계 민부리 Bold(TTF)" charset="0"/>
-                        <a:ea typeface="신세계 민부리 Bold(TTF)" charset="0"/>
-                        <a:cs typeface="신세계 민부리 Bold(TTF)" charset="0"/>
-                      </a:endParaRPr>
-                    </a:p>
-                  </a:txBody>
-                  <a:tcPr marL="45720" marR="45720" marT="18288" marB="18288" anchor="ctr">
+                        <a:t>RTL</a:t>
+                      </a:r>
+                      <a:endParaRPr lang="en-US" sz="1200" dirty="0"/>
+                    </a:p>
+                    <a:p>
+                      <a:pPr algn="ctr" indent="0" marL="0">
+                        <a:buNone/>
+                      </a:pPr>
+                      <a:r>
+                        <a:rPr lang="en-US" sz="750" dirty="0">
+                          <a:solidFill>
+                            <a:srgbClr val="595959"/>
+                          </a:solidFill>
+                        </a:rPr>
+                        <a:t>개량임대형</a:t>
+                      </a:r>
+                      <a:endParaRPr lang="en-US" sz="1200" dirty="0"/>
+                    </a:p>
+                  </a:txBody>
+                  <a:tcPr marL="36576" marR="36576" marT="18288" marB="18288" anchor="ctr">
+                    <a:lnL w="6350" cap="flat" cmpd="sng" algn="ctr">
+                      <a:solidFill>
+                        <a:srgbClr val="BFBFBF"/>
+                      </a:solidFill>
+                      <a:prstDash val="solid"/>
+                      <a:round/>
+                      <a:headEnd type="none" w="med" len="med"/>
+                      <a:tailEnd type="none" w="med" len="med"/>
+                    </a:lnL>
+                    <a:lnR w="6350" cap="flat" cmpd="sng" algn="ctr">
+                      <a:solidFill>
+                        <a:srgbClr val="BFBFBF"/>
+                      </a:solidFill>
+                      <a:prstDash val="solid"/>
+                      <a:round/>
+                      <a:headEnd type="none" w="med" len="med"/>
+                      <a:tailEnd type="none" w="med" len="med"/>
+                    </a:lnR>
+                    <a:lnT w="6350" cap="flat" cmpd="sng" algn="ctr">
+                      <a:solidFill>
+                        <a:srgbClr val="BFBFBF"/>
+                      </a:solidFill>
+                      <a:prstDash val="solid"/>
+                      <a:round/>
+                      <a:headEnd type="none" w="med" len="med"/>
+                      <a:tailEnd type="none" w="med" len="med"/>
+                    </a:lnT>
+                    <a:lnB w="6350" cap="flat" cmpd="sng" algn="ctr">
+                      <a:solidFill>
+                        <a:srgbClr val="BFBFBF"/>
+                      </a:solidFill>
+                      <a:prstDash val="solid"/>
+                      <a:round/>
+                      <a:headEnd type="none" w="med" len="med"/>
+                      <a:tailEnd type="none" w="med" len="med"/>
+                    </a:lnB>
+                  </a:tcPr>
+                </a:tc>
+                <a:tc>
+                  <a:txBody>
+                    <a:bodyPr/>
+                    <a:lstStyle/>
+                    <a:p>
+                      <a:pPr algn="ctr" indent="0" marL="0">
+                        <a:buNone/>
+                      </a:pPr>
+                      <a:r>
+                        <a:rPr lang="en-US" sz="800" dirty="0">
+                          <a:solidFill>
+                            <a:srgbClr val="000000"/>
+                          </a:solidFill>
+                          <a:latin typeface="신세계 민부리 Light(TTF)" pitchFamily="34" charset="0"/>
+                          <a:ea typeface="신세계 민부리 Light(TTF)" pitchFamily="34" charset="-122"/>
+                          <a:cs typeface="신세계 민부리 Light(TTF)" pitchFamily="34" charset="-120"/>
+                        </a:rPr>
+                        <a:t>민간</a:t>
+                      </a:r>
+                      <a:endParaRPr lang="en-US" sz="800" dirty="0">
+                        <a:latin typeface="신세계 민부리 Light(TTF)" charset="0"/>
+                        <a:ea typeface="신세계 민부리 Light(TTF)" charset="0"/>
+                        <a:cs typeface="신세계 민부리 Light(TTF)" charset="0"/>
+                      </a:endParaRPr>
+                    </a:p>
+                  </a:txBody>
+                  <a:tcPr marL="36576" marR="36576" marT="18288" marB="18288" anchor="ctr">
+                    <a:lnL w="6350" cap="flat" cmpd="sng" algn="ctr">
+                      <a:solidFill>
+                        <a:srgbClr val="BFBFBF"/>
+                      </a:solidFill>
+                      <a:prstDash val="solid"/>
+                      <a:round/>
+                      <a:headEnd type="none" w="med" len="med"/>
+                      <a:tailEnd type="none" w="med" len="med"/>
+                    </a:lnL>
+                    <a:lnR w="6350" cap="flat" cmpd="sng" algn="ctr">
+                      <a:solidFill>
+                        <a:srgbClr val="BFBFBF"/>
+                      </a:solidFill>
+                      <a:prstDash val="solid"/>
+                      <a:round/>
+                      <a:headEnd type="none" w="med" len="med"/>
+                      <a:tailEnd type="none" w="med" len="med"/>
+                    </a:lnR>
+                    <a:lnT w="6350" cap="flat" cmpd="sng" algn="ctr">
+                      <a:solidFill>
+                        <a:srgbClr val="BFBFBF"/>
+                      </a:solidFill>
+                      <a:prstDash val="solid"/>
+                      <a:round/>
+                      <a:headEnd type="none" w="med" len="med"/>
+                      <a:tailEnd type="none" w="med" len="med"/>
+                    </a:lnT>
+                    <a:lnB w="6350" cap="flat" cmpd="sng" algn="ctr">
+                      <a:solidFill>
+                        <a:srgbClr val="BFBFBF"/>
+                      </a:solidFill>
+                      <a:prstDash val="solid"/>
+                      <a:round/>
+                      <a:headEnd type="none" w="med" len="med"/>
+                      <a:tailEnd type="none" w="med" len="med"/>
+                    </a:lnB>
+                  </a:tcPr>
+                </a:tc>
+                <a:tc>
+                  <a:txBody>
+                    <a:bodyPr/>
+                    <a:lstStyle/>
+                    <a:p>
+                      <a:pPr algn="ctr" indent="0" marL="0">
+                        <a:buNone/>
+                      </a:pPr>
+                      <a:r>
+                        <a:rPr lang="en-US" sz="800" dirty="0">
+                          <a:solidFill>
+                            <a:srgbClr val="000000"/>
+                          </a:solidFill>
+                          <a:latin typeface="신세계 민부리 Light(TTF)" pitchFamily="34" charset="0"/>
+                          <a:ea typeface="신세계 민부리 Light(TTF)" pitchFamily="34" charset="-122"/>
+                          <a:cs typeface="신세계 민부리 Light(TTF)" pitchFamily="34" charset="-120"/>
+                        </a:rPr>
+                        <a:t>국가</a:t>
+                      </a:r>
+                      <a:endParaRPr lang="en-US" sz="800" dirty="0">
+                        <a:latin typeface="신세계 민부리 Light(TTF)" charset="0"/>
+                        <a:ea typeface="신세계 민부리 Light(TTF)" charset="0"/>
+                        <a:cs typeface="신세계 민부리 Light(TTF)" charset="0"/>
+                      </a:endParaRPr>
+                    </a:p>
+                  </a:txBody>
+                  <a:tcPr marL="36576" marR="36576" marT="18288" marB="18288" anchor="ctr">
+                    <a:lnL w="6350" cap="flat" cmpd="sng" algn="ctr">
+                      <a:solidFill>
+                        <a:srgbClr val="BFBFBF"/>
+                      </a:solidFill>
+                      <a:prstDash val="solid"/>
+                      <a:round/>
+                      <a:headEnd type="none" w="med" len="med"/>
+                      <a:tailEnd type="none" w="med" len="med"/>
+                    </a:lnL>
+                    <a:lnR w="6350" cap="flat" cmpd="sng" algn="ctr">
+                      <a:solidFill>
+                        <a:srgbClr val="BFBFBF"/>
+                      </a:solidFill>
+                      <a:prstDash val="solid"/>
+                      <a:round/>
+                      <a:headEnd type="none" w="med" len="med"/>
+                      <a:tailEnd type="none" w="med" len="med"/>
+                    </a:lnR>
+                    <a:lnT w="6350" cap="flat" cmpd="sng" algn="ctr">
+                      <a:solidFill>
+                        <a:srgbClr val="BFBFBF"/>
+                      </a:solidFill>
+                      <a:prstDash val="solid"/>
+                      <a:round/>
+                      <a:headEnd type="none" w="med" len="med"/>
+                      <a:tailEnd type="none" w="med" len="med"/>
+                    </a:lnT>
+                    <a:lnB w="6350" cap="flat" cmpd="sng" algn="ctr">
+                      <a:solidFill>
+                        <a:srgbClr val="BFBFBF"/>
+                      </a:solidFill>
+                      <a:prstDash val="solid"/>
+                      <a:round/>
+                      <a:headEnd type="none" w="med" len="med"/>
+                      <a:tailEnd type="none" w="med" len="med"/>
+                    </a:lnB>
+                  </a:tcPr>
+                </a:tc>
+                <a:tc>
+                  <a:txBody>
+                    <a:bodyPr/>
+                    <a:lstStyle/>
+                    <a:p>
+                      <a:pPr algn="ctr" indent="0" marL="0">
+                        <a:buNone/>
+                      </a:pPr>
+                      <a:r>
+                        <a:rPr lang="en-US" sz="800" dirty="0">
+                          <a:solidFill>
+                            <a:srgbClr val="000000"/>
+                          </a:solidFill>
+                          <a:latin typeface="신세계 민부리 Light(TTF)" pitchFamily="34" charset="0"/>
+                          <a:ea typeface="신세계 민부리 Light(TTF)" pitchFamily="34" charset="-122"/>
+                          <a:cs typeface="신세계 민부리 Light(TTF)" pitchFamily="34" charset="-120"/>
+                        </a:rPr>
+                        <a:t>민간*</a:t>
+                      </a:r>
+                      <a:endParaRPr lang="en-US" sz="800" dirty="0">
+                        <a:latin typeface="신세계 민부리 Light(TTF)" charset="0"/>
+                        <a:ea typeface="신세계 민부리 Light(TTF)" charset="0"/>
+                        <a:cs typeface="신세계 민부리 Light(TTF)" charset="0"/>
+                      </a:endParaRPr>
+                    </a:p>
+                  </a:txBody>
+                  <a:tcPr marL="36576" marR="36576" marT="18288" marB="18288" anchor="ctr">
+                    <a:lnL w="6350" cap="flat" cmpd="sng" algn="ctr">
+                      <a:solidFill>
+                        <a:srgbClr val="BFBFBF"/>
+                      </a:solidFill>
+                      <a:prstDash val="solid"/>
+                      <a:round/>
+                      <a:headEnd type="none" w="med" len="med"/>
+                      <a:tailEnd type="none" w="med" len="med"/>
+                    </a:lnL>
+                    <a:lnR w="6350" cap="flat" cmpd="sng" algn="ctr">
+                      <a:solidFill>
+                        <a:srgbClr val="BFBFBF"/>
+                      </a:solidFill>
+                      <a:prstDash val="solid"/>
+                      <a:round/>
+                      <a:headEnd type="none" w="med" len="med"/>
+                      <a:tailEnd type="none" w="med" len="med"/>
+                    </a:lnR>
+                    <a:lnT w="6350" cap="flat" cmpd="sng" algn="ctr">
+                      <a:solidFill>
+                        <a:srgbClr val="BFBFBF"/>
+                      </a:solidFill>
+                      <a:prstDash val="solid"/>
+                      <a:round/>
+                      <a:headEnd type="none" w="med" len="med"/>
+                      <a:tailEnd type="none" w="med" len="med"/>
+                    </a:lnT>
+                    <a:lnB w="6350" cap="flat" cmpd="sng" algn="ctr">
+                      <a:solidFill>
+                        <a:srgbClr val="BFBFBF"/>
+                      </a:solidFill>
+                      <a:prstDash val="solid"/>
+                      <a:round/>
+                      <a:headEnd type="none" w="med" len="med"/>
+                      <a:tailEnd type="none" w="med" len="med"/>
+                    </a:lnB>
+                  </a:tcPr>
+                </a:tc>
+                <a:tc>
+                  <a:txBody>
+                    <a:bodyPr/>
+                    <a:lstStyle/>
+                    <a:p>
+                      <a:pPr algn="ctr" indent="0" marL="0">
+                        <a:buNone/>
+                      </a:pPr>
+                      <a:r>
+                        <a:rPr lang="en-US" sz="800" dirty="0">
+                          <a:solidFill>
+                            <a:srgbClr val="000000"/>
+                          </a:solidFill>
+                          <a:latin typeface="신세계 민부리 Light(TTF)" pitchFamily="34" charset="0"/>
+                          <a:ea typeface="신세계 민부리 Light(TTF)" pitchFamily="34" charset="-122"/>
+                          <a:cs typeface="신세계 민부리 Light(TTF)" pitchFamily="34" charset="-120"/>
+                        </a:rPr>
+                        <a:t>정부 임대료</a:t>
+                      </a:r>
+                      <a:endParaRPr lang="en-US" sz="800" dirty="0">
+                        <a:latin typeface="신세계 민부리 Light(TTF)" charset="0"/>
+                        <a:ea typeface="신세계 민부리 Light(TTF)" charset="0"/>
+                        <a:cs typeface="신세계 민부리 Light(TTF)" charset="0"/>
+                      </a:endParaRPr>
+                    </a:p>
+                  </a:txBody>
+                  <a:tcPr marL="36576" marR="36576" marT="18288" marB="18288" anchor="ctr">
+                    <a:lnL w="6350" cap="flat" cmpd="sng" algn="ctr">
+                      <a:solidFill>
+                        <a:srgbClr val="BFBFBF"/>
+                      </a:solidFill>
+                      <a:prstDash val="solid"/>
+                      <a:round/>
+                      <a:headEnd type="none" w="med" len="med"/>
+                      <a:tailEnd type="none" w="med" len="med"/>
+                    </a:lnL>
+                    <a:lnR w="6350" cap="flat" cmpd="sng" algn="ctr">
+                      <a:solidFill>
+                        <a:srgbClr val="BFBFBF"/>
+                      </a:solidFill>
+                      <a:prstDash val="solid"/>
+                      <a:round/>
+                      <a:headEnd type="none" w="med" len="med"/>
+                      <a:tailEnd type="none" w="med" len="med"/>
+                    </a:lnR>
+                    <a:lnT w="6350" cap="flat" cmpd="sng" algn="ctr">
+                      <a:solidFill>
+                        <a:srgbClr val="BFBFBF"/>
+                      </a:solidFill>
+                      <a:prstDash val="solid"/>
+                      <a:round/>
+                      <a:headEnd type="none" w="med" len="med"/>
+                      <a:tailEnd type="none" w="med" len="med"/>
+                    </a:lnT>
+                    <a:lnB w="6350" cap="flat" cmpd="sng" algn="ctr">
+                      <a:solidFill>
+                        <a:srgbClr val="BFBFBF"/>
+                      </a:solidFill>
+                      <a:prstDash val="solid"/>
+                      <a:round/>
+                      <a:headEnd type="none" w="med" len="med"/>
+                      <a:tailEnd type="none" w="med" len="med"/>
+                    </a:lnB>
+                  </a:tcPr>
+                </a:tc>
+                <a:tc>
+                  <a:txBody>
+                    <a:bodyPr/>
+                    <a:lstStyle/>
+                    <a:p>
+                      <a:pPr algn="ctr" indent="0" marL="0">
+                        <a:buNone/>
+                      </a:pPr>
+                      <a:r>
+                        <a:rPr lang="en-US" sz="800" dirty="0">
+                          <a:solidFill>
+                            <a:srgbClr val="000000"/>
+                          </a:solidFill>
+                          <a:latin typeface="신세계 민부리 Light(TTF)" pitchFamily="34" charset="0"/>
+                          <a:ea typeface="신세계 민부리 Light(TTF)" pitchFamily="34" charset="-122"/>
+                          <a:cs typeface="신세계 민부리 Light(TTF)" pitchFamily="34" charset="-120"/>
+                        </a:rPr>
+                        <a:t>정부</a:t>
+                      </a:r>
+                      <a:endParaRPr lang="en-US" sz="800" dirty="0">
+                        <a:latin typeface="신세계 민부리 Light(TTF)" charset="0"/>
+                        <a:ea typeface="신세계 민부리 Light(TTF)" charset="0"/>
+                        <a:cs typeface="신세계 민부리 Light(TTF)" charset="0"/>
+                      </a:endParaRPr>
+                    </a:p>
+                  </a:txBody>
+                  <a:tcPr marL="36576" marR="36576" marT="18288" marB="18288" anchor="ctr">
+                    <a:lnL w="6350" cap="flat" cmpd="sng" algn="ctr">
+                      <a:solidFill>
+                        <a:srgbClr val="BFBFBF"/>
+                      </a:solidFill>
+                      <a:prstDash val="solid"/>
+                      <a:round/>
+                      <a:headEnd type="none" w="med" len="med"/>
+                      <a:tailEnd type="none" w="med" len="med"/>
+                    </a:lnL>
+                    <a:lnR w="6350" cap="flat" cmpd="sng" algn="ctr">
+                      <a:solidFill>
+                        <a:srgbClr val="BFBFBF"/>
+                      </a:solidFill>
+                      <a:prstDash val="solid"/>
+                      <a:round/>
+                      <a:headEnd type="none" w="med" len="med"/>
+                      <a:tailEnd type="none" w="med" len="med"/>
+                    </a:lnR>
+                    <a:lnT w="6350" cap="flat" cmpd="sng" algn="ctr">
+                      <a:solidFill>
+                        <a:srgbClr val="BFBFBF"/>
+                      </a:solidFill>
+                      <a:prstDash val="solid"/>
+                      <a:round/>
+                      <a:headEnd type="none" w="med" len="med"/>
+                      <a:tailEnd type="none" w="med" len="med"/>
+                    </a:lnT>
+                    <a:lnB w="6350" cap="flat" cmpd="sng" algn="ctr">
+                      <a:solidFill>
+                        <a:srgbClr val="BFBFBF"/>
+                      </a:solidFill>
+                      <a:prstDash val="solid"/>
+                      <a:round/>
+                      <a:headEnd type="none" w="med" len="med"/>
+                      <a:tailEnd type="none" w="med" len="med"/>
+                    </a:lnB>
+                  </a:tcPr>
+                </a:tc>
+                <a:tc>
+                  <a:txBody>
+                    <a:bodyPr/>
+                    <a:lstStyle/>
+                    <a:p>
+                      <a:pPr indent="0" marL="0">
+                        <a:buNone/>
+                      </a:pPr>
+                      <a:r>
+                        <a:rPr lang="en-US" sz="800" dirty="0">
+                          <a:solidFill>
+                            <a:srgbClr val="000000"/>
+                          </a:solidFill>
+                          <a:latin typeface="신세계 민부리 Light(TTF)" pitchFamily="34" charset="0"/>
+                          <a:ea typeface="신세계 민부리 Light(TTF)" pitchFamily="34" charset="-122"/>
+                          <a:cs typeface="신세계 민부리 Light(TTF)" pitchFamily="34" charset="-120"/>
+                        </a:rPr>
+                        <a:t>노후 학교 · 공공청사 개량</a:t>
+                      </a:r>
+                      <a:endParaRPr lang="en-US" sz="800" dirty="0">
+                        <a:latin typeface="신세계 민부리 Light(TTF)" charset="0"/>
+                        <a:ea typeface="신세계 민부리 Light(TTF)" charset="0"/>
+                        <a:cs typeface="신세계 민부리 Light(TTF)" charset="0"/>
+                      </a:endParaRPr>
+                    </a:p>
+                  </a:txBody>
+                  <a:tcPr marL="36576" marR="36576" marT="18288" marB="18288" anchor="ctr">
+                    <a:lnL w="6350" cap="flat" cmpd="sng" algn="ctr">
+                      <a:solidFill>
+                        <a:srgbClr val="BFBFBF"/>
+                      </a:solidFill>
+                      <a:prstDash val="solid"/>
+                      <a:round/>
+                      <a:headEnd type="none" w="med" len="med"/>
+                      <a:tailEnd type="none" w="med" len="med"/>
+                    </a:lnL>
+                    <a:lnR w="6350" cap="flat" cmpd="sng" algn="ctr">
+                      <a:solidFill>
+                        <a:srgbClr val="BFBFBF"/>
+                      </a:solidFill>
+                      <a:prstDash val="solid"/>
+                      <a:round/>
+                      <a:headEnd type="none" w="med" len="med"/>
+                      <a:tailEnd type="none" w="med" len="med"/>
+                    </a:lnR>
+                    <a:lnT w="6350" cap="flat" cmpd="sng" algn="ctr">
+                      <a:solidFill>
+                        <a:srgbClr val="BFBFBF"/>
+                      </a:solidFill>
+                      <a:prstDash val="solid"/>
+                      <a:round/>
+                      <a:headEnd type="none" w="med" len="med"/>
+                      <a:tailEnd type="none" w="med" len="med"/>
+                    </a:lnT>
+                    <a:lnB w="6350" cap="flat" cmpd="sng" algn="ctr">
+                      <a:solidFill>
+                        <a:srgbClr val="BFBFBF"/>
+                      </a:solidFill>
+                      <a:prstDash val="solid"/>
+                      <a:round/>
+                      <a:headEnd type="none" w="med" len="med"/>
+                      <a:tailEnd type="none" w="med" len="med"/>
+                    </a:lnB>
+                  </a:tcPr>
+                </a:tc>
+                <a:tc>
+                  <a:txBody>
+                    <a:bodyPr/>
+                    <a:lstStyle/>
+                    <a:p>
+                      <a:pPr indent="0" marL="0">
+                        <a:buNone/>
+                      </a:pPr>
+                      <a:r>
+                        <a:rPr lang="en-US" sz="800" dirty="0">
+                          <a:solidFill>
+                            <a:srgbClr val="000000"/>
+                          </a:solidFill>
+                          <a:latin typeface="신세계 민부리 Light(TTF)" pitchFamily="34" charset="0"/>
+                          <a:ea typeface="신세계 민부리 Light(TTF)" pitchFamily="34" charset="-122"/>
+                          <a:cs typeface="신세계 민부리 Light(TTF)" pitchFamily="34" charset="-120"/>
+                        </a:rPr>
+                        <a:t>정부 지급으로 수익 안정</a:t>
+                      </a:r>
+                      <a:endParaRPr lang="en-US" sz="800" dirty="0">
+                        <a:latin typeface="신세계 민부리 Light(TTF)" charset="0"/>
+                        <a:ea typeface="신세계 민부리 Light(TTF)" charset="0"/>
+                        <a:cs typeface="신세계 민부리 Light(TTF)" charset="0"/>
+                      </a:endParaRPr>
+                    </a:p>
+                  </a:txBody>
+                  <a:tcPr marL="36576" marR="36576" marT="18288" marB="18288" anchor="ctr">
+                    <a:lnL w="6350" cap="flat" cmpd="sng" algn="ctr">
+                      <a:solidFill>
+                        <a:srgbClr val="BFBFBF"/>
+                      </a:solidFill>
+                      <a:prstDash val="solid"/>
+                      <a:round/>
+                      <a:headEnd type="none" w="med" len="med"/>
+                      <a:tailEnd type="none" w="med" len="med"/>
+                    </a:lnL>
+                    <a:lnR w="6350" cap="flat" cmpd="sng" algn="ctr">
+                      <a:solidFill>
+                        <a:srgbClr val="BFBFBF"/>
+                      </a:solidFill>
+                      <a:prstDash val="solid"/>
+                      <a:round/>
+                      <a:headEnd type="none" w="med" len="med"/>
+                      <a:tailEnd type="none" w="med" len="med"/>
+                    </a:lnR>
+                    <a:lnT w="6350" cap="flat" cmpd="sng" algn="ctr">
+                      <a:solidFill>
+                        <a:srgbClr val="BFBFBF"/>
+                      </a:solidFill>
+                      <a:prstDash val="solid"/>
+                      <a:round/>
+                      <a:headEnd type="none" w="med" len="med"/>
+                      <a:tailEnd type="none" w="med" len="med"/>
+                    </a:lnT>
+                    <a:lnB w="6350" cap="flat" cmpd="sng" algn="ctr">
+                      <a:solidFill>
+                        <a:srgbClr val="BFBFBF"/>
+                      </a:solidFill>
+                      <a:prstDash val="solid"/>
+                      <a:round/>
+                      <a:headEnd type="none" w="med" len="med"/>
+                      <a:tailEnd type="none" w="med" len="med"/>
+                    </a:lnB>
+                  </a:tcPr>
+                </a:tc>
+                <a:tc>
+                  <a:txBody>
+                    <a:bodyPr/>
+                    <a:lstStyle/>
+                    <a:p>
+                      <a:pPr indent="0" marL="0">
+                        <a:buNone/>
+                      </a:pPr>
+                      <a:r>
+                        <a:rPr lang="en-US" sz="800" dirty="0">
+                          <a:solidFill>
+                            <a:srgbClr val="000000"/>
+                          </a:solidFill>
+                          <a:latin typeface="신세계 민부리 Light(TTF)" pitchFamily="34" charset="0"/>
+                          <a:ea typeface="신세계 민부리 Light(TTF)" pitchFamily="34" charset="-122"/>
+                          <a:cs typeface="신세계 민부리 Light(TTF)" pitchFamily="34" charset="-120"/>
+                        </a:rPr>
+                        <a:t>수익률 상한, 상업시설 부적합</a:t>
+                      </a:r>
+                      <a:endParaRPr lang="en-US" sz="800" dirty="0">
+                        <a:latin typeface="신세계 민부리 Light(TTF)" charset="0"/>
+                        <a:ea typeface="신세계 민부리 Light(TTF)" charset="0"/>
+                        <a:cs typeface="신세계 민부리 Light(TTF)" charset="0"/>
+                      </a:endParaRPr>
+                    </a:p>
+                  </a:txBody>
+                  <a:tcPr marL="36576" marR="36576" marT="18288" marB="18288" anchor="ctr">
                     <a:lnL w="6350" cap="flat" cmpd="sng" algn="ctr">
                       <a:solidFill>
                         <a:srgbClr val="BFBFBF"/>
@@ -4758,7 +5448,7 @@
         </p:nvSpPr>
         <p:spPr>
           <a:xfrm>
-            <a:off x="274320" y="4288536"/>
+            <a:off x="274320" y="4087368"/>
             <a:ext cx="6309360" cy="182880"/>
           </a:xfrm>
           <a:prstGeom prst="rect">
@@ -4783,7 +5473,7 @@
                 <a:ea typeface="신세계 민부리 Bold(TTF)" pitchFamily="34" charset="-122"/>
                 <a:cs typeface="신세계 민부리 Bold(TTF)" pitchFamily="34" charset="-120"/>
               </a:rPr>
-              <a:t>＊ 관리운영권 : 기본계획상 최장 50년 / ’24.9 활성화 방안 개량운영형 최대 100년      ◎ 적합  ○ 검토  △ 기존 구조  ✕ 부적합</a:t>
+              <a:t>＊ 관리운영권 : 기본계획상 최장 50년 (’24.9 활성화 방안 : 개량운영형 최대 100년)   /   * 민간이 유지관리, 정부가 시설 사용</a:t>
             </a:r>
             <a:endParaRPr lang="en-US" sz="750" dirty="0"/>
           </a:p>
@@ -4797,7 +5487,7 @@
         </p:nvSpPr>
         <p:spPr>
           <a:xfrm>
-            <a:off x="274320" y="4544568"/>
+            <a:off x="274320" y="4343400"/>
             <a:ext cx="6309360" cy="310896"/>
           </a:xfrm>
           <a:prstGeom prst="rect">

--- a/Appendix_민간투자방식_비교_및_사례.pptx
+++ b/Appendix_민간투자방식_비교_및_사례.pptx
@@ -2317,7 +2317,7 @@
                           <a:ea typeface="신세계 민부리 Light(TTF)" pitchFamily="34" charset="-122"/>
                           <a:cs typeface="신세계 민부리 Light(TTF)" pitchFamily="34" charset="-120"/>
                         </a:rPr>
-                        <a:t>도로 · 철도 · MICE (잠실, 서울링)</a:t>
+                        <a:t>도로 · 철도 · MICE (잠실)</a:t>
                       </a:r>
                       <a:endParaRPr lang="en-US" sz="800" dirty="0">
                         <a:latin typeface="신세계 민부리 Light(TTF)" charset="0"/>
@@ -2917,7 +2917,7 @@
                           <a:ea typeface="신세계 민부리 Light(TTF)" pitchFamily="34" charset="-122"/>
                           <a:cs typeface="신세계 민부리 Light(TTF)" pitchFamily="34" charset="-120"/>
                         </a:rPr>
-                        <a:t>학교 · 기숙사 · 문화 · 복지시설</a:t>
+                        <a:t>학교 · 기숙사 · 박물관 (국립해양박물관)</a:t>
                       </a:r>
                       <a:endParaRPr lang="en-US" sz="800" dirty="0">
                         <a:latin typeface="신세계 민부리 Light(TTF)" charset="0"/>
@@ -3503,7 +3503,7 @@
                           <a:ea typeface="신세계 민부리 Light(TTF)" pitchFamily="34" charset="-122"/>
                           <a:cs typeface="신세계 민부리 Light(TTF)" pitchFamily="34" charset="-120"/>
                         </a:rPr>
-                        <a:t>세빛섬 (現 협약)</a:t>
+                        <a:t>수변 관광시설 (세빛섬, 서울마리나)</a:t>
                       </a:r>
                       <a:endParaRPr lang="en-US" sz="800" dirty="0">
                         <a:latin typeface="신세계 민부리 Light(TTF)" charset="0"/>
@@ -5556,7 +5556,7 @@
         </p:nvSpPr>
         <p:spPr>
           <a:xfrm>
-            <a:off x="274320" y="5074920"/>
+            <a:off x="274320" y="4818888"/>
             <a:ext cx="6309360" cy="237744"/>
           </a:xfrm>
           <a:prstGeom prst="rect">
@@ -5602,7 +5602,7 @@
           </p:nvPr>
         </p:nvGraphicFramePr>
         <p:xfrm>
-          <a:off x="274320" y="5385816"/>
+          <a:off x="274320" y="5129784"/>
           <a:ext cx="6309360" cy="914400"/>
         </p:xfrm>
         <a:graphic>
@@ -5610,12 +5610,13 @@
             <a:tbl>
               <a:tblPr/>
               <a:tblGrid>
-                <a:gridCol w="740664"/>
-                <a:gridCol w="1856232"/>
-                <a:gridCol w="1856232"/>
-                <a:gridCol w="1856232"/>
+                <a:gridCol w="676656"/>
+                <a:gridCol w="1408176"/>
+                <a:gridCol w="1408176"/>
+                <a:gridCol w="1408176"/>
+                <a:gridCol w="1408176"/>
               </a:tblGrid>
-              <a:tr h="274320">
+              <a:tr h="365760">
                 <a:tc>
                   <a:txBody>
                     <a:bodyPr/>
@@ -5693,7 +5694,7 @@
                         <a:buNone/>
                       </a:pPr>
                       <a:r>
-                        <a:rPr lang="en-US" sz="950" b="1" dirty="0">
+                        <a:rPr lang="en-US" sz="800" b="1" dirty="0">
                           <a:solidFill>
                             <a:srgbClr val="FFFFFF"/>
                           </a:solidFill>
@@ -5701,14 +5702,35 @@
                           <a:ea typeface="신세계 민부리 Bold(TTF)" pitchFamily="34" charset="-122"/>
                           <a:cs typeface="신세계 민부리 Bold(TTF)" pitchFamily="34" charset="-120"/>
                         </a:rPr>
-                        <a:t>잠실 스포츠 · MICE</a:t>
-                      </a:r>
-                      <a:endParaRPr lang="en-US" sz="950" dirty="0">
+                        <a:t>BTO</a:t>
+                      </a:r>
+                      <a:endParaRPr lang="en-US" sz="1200" dirty="0">
                         <a:latin typeface="신세계 민부리 Bold(TTF)" charset="0"/>
                         <a:ea typeface="신세계 민부리 Bold(TTF)" charset="0"/>
                         <a:cs typeface="신세계 민부리 Bold(TTF)" charset="0"/>
                       </a:endParaRPr>
                     </a:p>
+                    <a:p>
+                      <a:pPr algn="ctr" indent="0" marL="0">
+                        <a:buNone/>
+                      </a:pPr>
+                      <a:r>
+                        <a:rPr lang="en-US" sz="950" b="1" dirty="0">
+                          <a:solidFill>
+                            <a:srgbClr val="FFFFFF"/>
+                          </a:solidFill>
+                          <a:latin typeface="신세계 민부리 Bold(TTF)" pitchFamily="34" charset="0"/>
+                          <a:ea typeface="신세계 민부리 Bold(TTF)" pitchFamily="34" charset="-122"/>
+                          <a:cs typeface="신세계 민부리 Bold(TTF)" pitchFamily="34" charset="-120"/>
+                        </a:rPr>
+                        <a:t>잠실 스포츠 · MICE</a:t>
+                      </a:r>
+                      <a:endParaRPr lang="en-US" sz="1200" dirty="0">
+                        <a:latin typeface="신세계 민부리 Bold(TTF)" charset="0"/>
+                        <a:ea typeface="신세계 민부리 Bold(TTF)" charset="0"/>
+                        <a:cs typeface="신세계 민부리 Bold(TTF)" charset="0"/>
+                      </a:endParaRPr>
+                    </a:p>
                   </a:txBody>
                   <a:tcPr marL="54864" marR="54864" marT="27432" marB="27432" anchor="ctr">
                     <a:lnL w="6350" cap="flat" cmpd="sng" algn="ctr">
@@ -5761,7 +5783,7 @@
                         <a:buNone/>
                       </a:pPr>
                       <a:r>
-                        <a:rPr lang="en-US" sz="950" b="1" dirty="0">
+                        <a:rPr lang="en-US" sz="800" b="1" dirty="0">
                           <a:solidFill>
                             <a:srgbClr val="FFFFFF"/>
                           </a:solidFill>
@@ -5769,14 +5791,35 @@
                           <a:ea typeface="신세계 민부리 Bold(TTF)" pitchFamily="34" charset="-122"/>
                           <a:cs typeface="신세계 민부리 Bold(TTF)" pitchFamily="34" charset="-120"/>
                         </a:rPr>
-                        <a:t>서울링 (대관람차)</a:t>
-                      </a:r>
-                      <a:endParaRPr lang="en-US" sz="950" dirty="0">
+                        <a:t>BTL</a:t>
+                      </a:r>
+                      <a:endParaRPr lang="en-US" sz="1200" dirty="0">
                         <a:latin typeface="신세계 민부리 Bold(TTF)" charset="0"/>
                         <a:ea typeface="신세계 민부리 Bold(TTF)" charset="0"/>
                         <a:cs typeface="신세계 민부리 Bold(TTF)" charset="0"/>
                       </a:endParaRPr>
                     </a:p>
+                    <a:p>
+                      <a:pPr algn="ctr" indent="0" marL="0">
+                        <a:buNone/>
+                      </a:pPr>
+                      <a:r>
+                        <a:rPr lang="en-US" sz="950" b="1" dirty="0">
+                          <a:solidFill>
+                            <a:srgbClr val="FFFFFF"/>
+                          </a:solidFill>
+                          <a:latin typeface="신세계 민부리 Bold(TTF)" pitchFamily="34" charset="0"/>
+                          <a:ea typeface="신세계 민부리 Bold(TTF)" pitchFamily="34" charset="-122"/>
+                          <a:cs typeface="신세계 민부리 Bold(TTF)" pitchFamily="34" charset="-120"/>
+                        </a:rPr>
+                        <a:t>국립해양박물관</a:t>
+                      </a:r>
+                      <a:endParaRPr lang="en-US" sz="1200" dirty="0">
+                        <a:latin typeface="신세계 민부리 Bold(TTF)" charset="0"/>
+                        <a:ea typeface="신세계 민부리 Bold(TTF)" charset="0"/>
+                        <a:cs typeface="신세계 민부리 Bold(TTF)" charset="0"/>
+                      </a:endParaRPr>
+                    </a:p>
                   </a:txBody>
                   <a:tcPr marL="54864" marR="54864" marT="27432" marB="27432" anchor="ctr">
                     <a:lnL w="6350" cap="flat" cmpd="sng" algn="ctr">
@@ -5829,7 +5872,7 @@
                         <a:buNone/>
                       </a:pPr>
                       <a:r>
-                        <a:rPr lang="en-US" sz="950" b="1" dirty="0">
+                        <a:rPr lang="en-US" sz="800" b="1" dirty="0">
                           <a:solidFill>
                             <a:srgbClr val="FFFFFF"/>
                           </a:solidFill>
@@ -5837,14 +5880,35 @@
                           <a:ea typeface="신세계 민부리 Bold(TTF)" pitchFamily="34" charset="-122"/>
                           <a:cs typeface="신세계 민부리 Bold(TTF)" pitchFamily="34" charset="-120"/>
                         </a:rPr>
-                        <a:t>영등포역 상업시설</a:t>
-                      </a:r>
-                      <a:endParaRPr lang="en-US" sz="950" dirty="0">
+                        <a:t>BOT</a:t>
+                      </a:r>
+                      <a:endParaRPr lang="en-US" sz="1200" dirty="0">
                         <a:latin typeface="신세계 민부리 Bold(TTF)" charset="0"/>
                         <a:ea typeface="신세계 민부리 Bold(TTF)" charset="0"/>
                         <a:cs typeface="신세계 민부리 Bold(TTF)" charset="0"/>
                       </a:endParaRPr>
                     </a:p>
+                    <a:p>
+                      <a:pPr algn="ctr" indent="0" marL="0">
+                        <a:buNone/>
+                      </a:pPr>
+                      <a:r>
+                        <a:rPr lang="en-US" sz="950" b="1" dirty="0">
+                          <a:solidFill>
+                            <a:srgbClr val="FFFFFF"/>
+                          </a:solidFill>
+                          <a:latin typeface="신세계 민부리 Bold(TTF)" pitchFamily="34" charset="0"/>
+                          <a:ea typeface="신세계 민부리 Bold(TTF)" pitchFamily="34" charset="-122"/>
+                          <a:cs typeface="신세계 민부리 Bold(TTF)" pitchFamily="34" charset="-120"/>
+                        </a:rPr>
+                        <a:t>여의도 서울마리나</a:t>
+                      </a:r>
+                      <a:endParaRPr lang="en-US" sz="1200" dirty="0">
+                        <a:latin typeface="신세계 민부리 Bold(TTF)" charset="0"/>
+                        <a:ea typeface="신세계 민부리 Bold(TTF)" charset="0"/>
+                        <a:cs typeface="신세계 민부리 Bold(TTF)" charset="0"/>
+                      </a:endParaRPr>
+                    </a:p>
                   </a:txBody>
                   <a:tcPr marL="54864" marR="54864" marT="27432" marB="27432" anchor="ctr">
                     <a:lnL w="6350" cap="flat" cmpd="sng" algn="ctr">
@@ -5888,8 +5952,97 @@
                     </a:solidFill>
                   </a:tcPr>
                 </a:tc>
+                <a:tc>
+                  <a:txBody>
+                    <a:bodyPr/>
+                    <a:lstStyle/>
+                    <a:p>
+                      <a:pPr algn="ctr" indent="0" marL="0">
+                        <a:buNone/>
+                      </a:pPr>
+                      <a:r>
+                        <a:rPr lang="en-US" sz="800" b="1" dirty="0">
+                          <a:solidFill>
+                            <a:srgbClr val="FFFFFF"/>
+                          </a:solidFill>
+                          <a:latin typeface="신세계 민부리 Bold(TTF)" pitchFamily="34" charset="0"/>
+                          <a:ea typeface="신세계 민부리 Bold(TTF)" pitchFamily="34" charset="-122"/>
+                          <a:cs typeface="신세계 민부리 Bold(TTF)" pitchFamily="34" charset="-120"/>
+                        </a:rPr>
+                        <a:t>국가 귀속 후 재공모</a:t>
+                      </a:r>
+                      <a:endParaRPr lang="en-US" sz="1200" dirty="0">
+                        <a:latin typeface="신세계 민부리 Bold(TTF)" charset="0"/>
+                        <a:ea typeface="신세계 민부리 Bold(TTF)" charset="0"/>
+                        <a:cs typeface="신세계 민부리 Bold(TTF)" charset="0"/>
+                      </a:endParaRPr>
+                    </a:p>
+                    <a:p>
+                      <a:pPr algn="ctr" indent="0" marL="0">
+                        <a:buNone/>
+                      </a:pPr>
+                      <a:r>
+                        <a:rPr lang="en-US" sz="950" b="1" dirty="0">
+                          <a:solidFill>
+                            <a:srgbClr val="FFFFFF"/>
+                          </a:solidFill>
+                          <a:latin typeface="신세계 민부리 Bold(TTF)" pitchFamily="34" charset="0"/>
+                          <a:ea typeface="신세계 민부리 Bold(TTF)" pitchFamily="34" charset="-122"/>
+                          <a:cs typeface="신세계 민부리 Bold(TTF)" pitchFamily="34" charset="-120"/>
+                        </a:rPr>
+                        <a:t>영등포역 상업시설</a:t>
+                      </a:r>
+                      <a:endParaRPr lang="en-US" sz="1200" dirty="0">
+                        <a:latin typeface="신세계 민부리 Bold(TTF)" charset="0"/>
+                        <a:ea typeface="신세계 민부리 Bold(TTF)" charset="0"/>
+                        <a:cs typeface="신세계 민부리 Bold(TTF)" charset="0"/>
+                      </a:endParaRPr>
+                    </a:p>
+                  </a:txBody>
+                  <a:tcPr marL="54864" marR="54864" marT="27432" marB="27432" anchor="ctr">
+                    <a:lnL w="6350" cap="flat" cmpd="sng" algn="ctr">
+                      <a:solidFill>
+                        <a:srgbClr val="BFBFBF"/>
+                      </a:solidFill>
+                      <a:prstDash val="solid"/>
+                      <a:round/>
+                      <a:headEnd type="none" w="med" len="med"/>
+                      <a:tailEnd type="none" w="med" len="med"/>
+                    </a:lnL>
+                    <a:lnR w="6350" cap="flat" cmpd="sng" algn="ctr">
+                      <a:solidFill>
+                        <a:srgbClr val="BFBFBF"/>
+                      </a:solidFill>
+                      <a:prstDash val="solid"/>
+                      <a:round/>
+                      <a:headEnd type="none" w="med" len="med"/>
+                      <a:tailEnd type="none" w="med" len="med"/>
+                    </a:lnR>
+                    <a:lnT w="6350" cap="flat" cmpd="sng" algn="ctr">
+                      <a:solidFill>
+                        <a:srgbClr val="BFBFBF"/>
+                      </a:solidFill>
+                      <a:prstDash val="solid"/>
+                      <a:round/>
+                      <a:headEnd type="none" w="med" len="med"/>
+                      <a:tailEnd type="none" w="med" len="med"/>
+                    </a:lnT>
+                    <a:lnB w="6350" cap="flat" cmpd="sng" algn="ctr">
+                      <a:solidFill>
+                        <a:srgbClr val="BFBFBF"/>
+                      </a:solidFill>
+                      <a:prstDash val="solid"/>
+                      <a:round/>
+                      <a:headEnd type="none" w="med" len="med"/>
+                      <a:tailEnd type="none" w="med" len="med"/>
+                    </a:lnB>
+                    <a:solidFill>
+                      <a:srgbClr val="1F3A6E"/>
+                    </a:solidFill>
+                  </a:tcPr>
+                </a:tc>
               </a:tr>
-              <a:tr h="502920">
+              <a:tr h="603504">
                 <a:tc>
                   <a:txBody>
                     <a:bodyPr/>
@@ -5975,7 +6128,7 @@
                           <a:ea typeface="신세계 민부리 Light(TTF)" pitchFamily="34" charset="-122"/>
                           <a:cs typeface="신세계 민부리 Light(TTF)" pitchFamily="34" charset="-120"/>
                         </a:rPr>
-                        <a:t>전시 (8.9만㎡) · 컨벤션 (1.9만㎡) + 돔야구장 + 호텔 · 업무 · 상업 복합단지 (코엑스의 2.5배)</a:t>
+                        <a:t>전시 · 컨벤션 + 돔야구장 + 호텔 · 업무 · 상업 복합단지 (코엑스의 2.5배)</a:t>
                       </a:r>
                       <a:endParaRPr lang="en-US" sz="850" dirty="0">
                         <a:latin typeface="신세계 민부리 Light(TTF)" charset="0"/>
@@ -6040,7 +6193,7 @@
                           <a:ea typeface="신세계 민부리 Light(TTF)" pitchFamily="34" charset="-122"/>
                           <a:cs typeface="신세계 민부리 Light(TTF)" pitchFamily="34" charset="-120"/>
                         </a:rPr>
-                        <a:t>높이 180m 고리형 대관람차 (캡슐 36개, 각 25인) — 고리형 기준 세계 최대</a:t>
+                        <a:t>국내 최대 해양 전문 박물관 (연면적 2.5만㎡, 지상 4층)</a:t>
                       </a:r>
                       <a:endParaRPr lang="en-US" sz="850" dirty="0">
                         <a:latin typeface="신세계 민부리 Light(TTF)" charset="0"/>
@@ -6105,7 +6258,7 @@
                           <a:ea typeface="신세계 민부리 Light(TTF)" pitchFamily="34" charset="-122"/>
                           <a:cs typeface="신세계 민부리 Light(TTF)" pitchFamily="34" charset="-120"/>
                         </a:rPr>
-                        <a:t>철도 민자역사 내 백화점 (롯데百 영등포점) 등 상업시설 — 국가 귀속 후 재운영</a:t>
+                        <a:t>한강 요트 마리나 — 계류시설 (요트 약 90척) · 클럽하우스</a:t>
                       </a:r>
                       <a:endParaRPr lang="en-US" sz="850" dirty="0">
                         <a:latin typeface="신세계 민부리 Light(TTF)" charset="0"/>
@@ -6153,8 +6306,73 @@
                     </a:lnB>
                   </a:tcPr>
                 </a:tc>
+                <a:tc>
+                  <a:txBody>
+                    <a:bodyPr/>
+                    <a:lstStyle/>
+                    <a:p>
+                      <a:pPr indent="0" marL="0">
+                        <a:buNone/>
+                      </a:pPr>
+                      <a:r>
+                        <a:rPr lang="en-US" sz="850" dirty="0">
+                          <a:solidFill>
+                            <a:srgbClr val="262626"/>
+                          </a:solidFill>
+                          <a:latin typeface="신세계 민부리 Light(TTF)" pitchFamily="34" charset="0"/>
+                          <a:ea typeface="신세계 민부리 Light(TTF)" pitchFamily="34" charset="-122"/>
+                          <a:cs typeface="신세계 민부리 Light(TTF)" pitchFamily="34" charset="-120"/>
+                        </a:rPr>
+                        <a:t>민자역사 내 백화점 (롯데百 영등포점) 등 상업시설</a:t>
+                      </a:r>
+                      <a:endParaRPr lang="en-US" sz="850" dirty="0">
+                        <a:latin typeface="신세계 민부리 Light(TTF)" charset="0"/>
+                        <a:ea typeface="신세계 민부리 Light(TTF)" charset="0"/>
+                        <a:cs typeface="신세계 민부리 Light(TTF)" charset="0"/>
+                      </a:endParaRPr>
+                    </a:p>
+                  </a:txBody>
+                  <a:tcPr marL="54864" marR="54864" marT="27432" marB="27432" anchor="ctr">
+                    <a:lnL w="6350" cap="flat" cmpd="sng" algn="ctr">
+                      <a:solidFill>
+                        <a:srgbClr val="BFBFBF"/>
+                      </a:solidFill>
+                      <a:prstDash val="solid"/>
+                      <a:round/>
+                      <a:headEnd type="none" w="med" len="med"/>
+                      <a:tailEnd type="none" w="med" len="med"/>
+                    </a:lnL>
+                    <a:lnR w="6350" cap="flat" cmpd="sng" algn="ctr">
+                      <a:solidFill>
+                        <a:srgbClr val="BFBFBF"/>
+                      </a:solidFill>
+                      <a:prstDash val="solid"/>
+                      <a:round/>
+                      <a:headEnd type="none" w="med" len="med"/>
+                      <a:tailEnd type="none" w="med" len="med"/>
+                    </a:lnR>
+                    <a:lnT w="6350" cap="flat" cmpd="sng" algn="ctr">
+                      <a:solidFill>
+                        <a:srgbClr val="BFBFBF"/>
+                      </a:solidFill>
+                      <a:prstDash val="solid"/>
+                      <a:round/>
+                      <a:headEnd type="none" w="med" len="med"/>
+                      <a:tailEnd type="none" w="med" len="med"/>
+                    </a:lnT>
+                    <a:lnB w="6350" cap="flat" cmpd="sng" algn="ctr">
+                      <a:solidFill>
+                        <a:srgbClr val="BFBFBF"/>
+                      </a:solidFill>
+                      <a:prstDash val="solid"/>
+                      <a:round/>
+                      <a:headEnd type="none" w="med" len="med"/>
+                      <a:tailEnd type="none" w="med" len="med"/>
+                    </a:lnB>
+                  </a:tcPr>
+                </a:tc>
               </a:tr>
-              <a:tr h="457200">
+              <a:tr h="502920">
                 <a:tc>
                   <a:txBody>
                     <a:bodyPr/>
@@ -6240,7 +6458,7 @@
                           <a:ea typeface="신세계 민부리 Light(TTF)" pitchFamily="34" charset="-122"/>
                           <a:cs typeface="신세계 민부리 Light(TTF)" pitchFamily="34" charset="-120"/>
                         </a:rPr>
-                        <a:t>송파구 잠실종합운동장 일대 약 35만㎡ / 총사업비 2.7조</a:t>
+                        <a:t>송파구 잠실종합운동장 일대 35만㎡ / 총사업비 2.7조</a:t>
                       </a:r>
                       <a:endParaRPr lang="en-US" sz="850" dirty="0">
                         <a:latin typeface="신세계 민부리 Light(TTF)" charset="0"/>
@@ -6305,7 +6523,7 @@
                           <a:ea typeface="신세계 민부리 Light(TTF)" pitchFamily="34" charset="-122"/>
                           <a:cs typeface="신세계 민부리 Light(TTF)" pitchFamily="34" charset="-120"/>
                         </a:rPr>
-                        <a:t>마포구 상암동 (하늘공원 → 평화의공원 변경) / 사업비 4,000억 → 1.08조</a:t>
+                        <a:t>부산 영도구 동삼동 / 총사업비 1,142억 (민간 1,019억)</a:t>
                       </a:r>
                       <a:endParaRPr lang="en-US" sz="850" dirty="0">
                         <a:latin typeface="신세계 민부리 Light(TTF)" charset="0"/>
@@ -6370,7 +6588,7 @@
                           <a:ea typeface="신세계 민부리 Light(TTF)" pitchFamily="34" charset="-122"/>
                           <a:cs typeface="신세계 민부리 Light(TTF)" pitchFamily="34" charset="-120"/>
                         </a:rPr>
-                        <a:t>영등포구 영등포역사 / 국가철도공단 관리 (국유재산)</a:t>
+                        <a:t>여의도 한강공원 (국회 앞) / 市 수역 · 진입로, 민간 시설 투자</a:t>
                       </a:r>
                       <a:endParaRPr lang="en-US" sz="850" dirty="0">
                         <a:latin typeface="신세계 민부리 Light(TTF)" charset="0"/>
@@ -6418,8 +6636,73 @@
                     </a:lnB>
                   </a:tcPr>
                 </a:tc>
+                <a:tc>
+                  <a:txBody>
+                    <a:bodyPr/>
+                    <a:lstStyle/>
+                    <a:p>
+                      <a:pPr indent="0" marL="0">
+                        <a:buNone/>
+                      </a:pPr>
+                      <a:r>
+                        <a:rPr lang="en-US" sz="850" dirty="0">
+                          <a:solidFill>
+                            <a:srgbClr val="262626"/>
+                          </a:solidFill>
+                          <a:latin typeface="신세계 민부리 Light(TTF)" pitchFamily="34" charset="0"/>
+                          <a:ea typeface="신세계 민부리 Light(TTF)" pitchFamily="34" charset="-122"/>
+                          <a:cs typeface="신세계 민부리 Light(TTF)" pitchFamily="34" charset="-120"/>
+                        </a:rPr>
+                        <a:t>영등포구 영등포역사 / 국가철도공단 관리 (국유재산)</a:t>
+                      </a:r>
+                      <a:endParaRPr lang="en-US" sz="850" dirty="0">
+                        <a:latin typeface="신세계 민부리 Light(TTF)" charset="0"/>
+                        <a:ea typeface="신세계 민부리 Light(TTF)" charset="0"/>
+                        <a:cs typeface="신세계 민부리 Light(TTF)" charset="0"/>
+                      </a:endParaRPr>
+                    </a:p>
+                  </a:txBody>
+                  <a:tcPr marL="54864" marR="54864" marT="27432" marB="27432" anchor="ctr">
+                    <a:lnL w="6350" cap="flat" cmpd="sng" algn="ctr">
+                      <a:solidFill>
+                        <a:srgbClr val="BFBFBF"/>
+                      </a:solidFill>
+                      <a:prstDash val="solid"/>
+                      <a:round/>
+                      <a:headEnd type="none" w="med" len="med"/>
+                      <a:tailEnd type="none" w="med" len="med"/>
+                    </a:lnL>
+                    <a:lnR w="6350" cap="flat" cmpd="sng" algn="ctr">
+                      <a:solidFill>
+                        <a:srgbClr val="BFBFBF"/>
+                      </a:solidFill>
+                      <a:prstDash val="solid"/>
+                      <a:round/>
+                      <a:headEnd type="none" w="med" len="med"/>
+                      <a:tailEnd type="none" w="med" len="med"/>
+                    </a:lnR>
+                    <a:lnT w="6350" cap="flat" cmpd="sng" algn="ctr">
+                      <a:solidFill>
+                        <a:srgbClr val="BFBFBF"/>
+                      </a:solidFill>
+                      <a:prstDash val="solid"/>
+                      <a:round/>
+                      <a:headEnd type="none" w="med" len="med"/>
+                      <a:tailEnd type="none" w="med" len="med"/>
+                    </a:lnT>
+                    <a:lnB w="6350" cap="flat" cmpd="sng" algn="ctr">
+                      <a:solidFill>
+                        <a:srgbClr val="BFBFBF"/>
+                      </a:solidFill>
+                      <a:prstDash val="solid"/>
+                      <a:round/>
+                      <a:headEnd type="none" w="med" len="med"/>
+                      <a:tailEnd type="none" w="med" len="med"/>
+                    </a:lnB>
+                  </a:tcPr>
+                </a:tc>
               </a:tr>
-              <a:tr h="411480">
+              <a:tr h="502920">
                 <a:tc>
                   <a:txBody>
                     <a:bodyPr/>
@@ -6522,7 +6805,7 @@
                           <a:ea typeface="신세계 민부리 Light(TTF)" pitchFamily="34" charset="-122"/>
                           <a:cs typeface="신세계 민부리 Light(TTF)" pitchFamily="34" charset="-120"/>
                         </a:rPr>
-                        <a:t>운영 40년</a:t>
+                        <a:t>운영 40년, 이용료로 회수</a:t>
                       </a:r>
                       <a:endParaRPr lang="en-US" sz="850" dirty="0"/>
                     </a:p>
@@ -6583,7 +6866,7 @@
                           <a:ea typeface="신세계 민부리 Bold(TTF)" pitchFamily="34" charset="-122"/>
                           <a:cs typeface="신세계 민부리 Bold(TTF)" pitchFamily="34" charset="-120"/>
                         </a:rPr>
-                        <a:t>BTO (민간제안)</a:t>
+                        <a:t>BTL</a:t>
                       </a:r>
                       <a:endParaRPr lang="en-US" sz="850" dirty="0"/>
                     </a:p>
@@ -6600,7 +6883,7 @@
                           <a:ea typeface="신세계 민부리 Light(TTF)" pitchFamily="34" charset="-122"/>
                           <a:cs typeface="신세계 민부리 Light(TTF)" pitchFamily="34" charset="-120"/>
                         </a:rPr>
-                        <a:t>운영기간 협상 전</a:t>
+                        <a:t>운영 20년, 정부 임대료로 회수</a:t>
                       </a:r>
                       <a:endParaRPr lang="en-US" sz="850" dirty="0"/>
                     </a:p>
@@ -6661,7 +6944,7 @@
                           <a:ea typeface="신세계 민부리 Bold(TTF)" pitchFamily="34" charset="-122"/>
                           <a:cs typeface="신세계 민부리 Bold(TTF)" pitchFamily="34" charset="-120"/>
                         </a:rPr>
-                        <a:t>민자역사 → 국가 귀속</a:t>
+                        <a:t>BOT</a:t>
                       </a:r>
                       <a:endParaRPr lang="en-US" sz="850" dirty="0"/>
                     </a:p>
@@ -6678,6 +6961,84 @@
                           <a:ea typeface="신세계 민부리 Light(TTF)" pitchFamily="34" charset="-122"/>
                           <a:cs typeface="신세계 민부리 Light(TTF)" pitchFamily="34" charset="-120"/>
                         </a:rPr>
+                        <a:t>20년 운영 후 ’31 서울시 기부채납</a:t>
+                      </a:r>
+                      <a:endParaRPr lang="en-US" sz="850" dirty="0"/>
+                    </a:p>
+                  </a:txBody>
+                  <a:tcPr marL="54864" marR="54864" marT="27432" marB="27432" anchor="ctr">
+                    <a:lnL w="6350" cap="flat" cmpd="sng" algn="ctr">
+                      <a:solidFill>
+                        <a:srgbClr val="BFBFBF"/>
+                      </a:solidFill>
+                      <a:prstDash val="solid"/>
+                      <a:round/>
+                      <a:headEnd type="none" w="med" len="med"/>
+                      <a:tailEnd type="none" w="med" len="med"/>
+                    </a:lnL>
+                    <a:lnR w="6350" cap="flat" cmpd="sng" algn="ctr">
+                      <a:solidFill>
+                        <a:srgbClr val="BFBFBF"/>
+                      </a:solidFill>
+                      <a:prstDash val="solid"/>
+                      <a:round/>
+                      <a:headEnd type="none" w="med" len="med"/>
+                      <a:tailEnd type="none" w="med" len="med"/>
+                    </a:lnR>
+                    <a:lnT w="6350" cap="flat" cmpd="sng" algn="ctr">
+                      <a:solidFill>
+                        <a:srgbClr val="BFBFBF"/>
+                      </a:solidFill>
+                      <a:prstDash val="solid"/>
+                      <a:round/>
+                      <a:headEnd type="none" w="med" len="med"/>
+                      <a:tailEnd type="none" w="med" len="med"/>
+                    </a:lnT>
+                    <a:lnB w="6350" cap="flat" cmpd="sng" algn="ctr">
+                      <a:solidFill>
+                        <a:srgbClr val="BFBFBF"/>
+                      </a:solidFill>
+                      <a:prstDash val="solid"/>
+                      <a:round/>
+                      <a:headEnd type="none" w="med" len="med"/>
+                      <a:tailEnd type="none" w="med" len="med"/>
+                    </a:lnB>
+                  </a:tcPr>
+                </a:tc>
+                <a:tc>
+                  <a:txBody>
+                    <a:bodyPr/>
+                    <a:lstStyle/>
+                    <a:p>
+                      <a:pPr indent="0" marL="0">
+                        <a:buNone/>
+                      </a:pPr>
+                      <a:r>
+                        <a:rPr lang="en-US" sz="850" b="1" dirty="0">
+                          <a:solidFill>
+                            <a:srgbClr val="262626"/>
+                          </a:solidFill>
+                          <a:latin typeface="신세계 민부리 Bold(TTF)" pitchFamily="34" charset="0"/>
+                          <a:ea typeface="신세계 민부리 Bold(TTF)" pitchFamily="34" charset="-122"/>
+                          <a:cs typeface="신세계 민부리 Bold(TTF)" pitchFamily="34" charset="-120"/>
+                        </a:rPr>
+                        <a:t>민자역사 → 국가 귀속</a:t>
+                      </a:r>
+                      <a:endParaRPr lang="en-US" sz="850" dirty="0"/>
+                    </a:p>
+                    <a:p>
+                      <a:pPr indent="0" marL="0">
+                        <a:buNone/>
+                      </a:pPr>
+                      <a:r>
+                        <a:rPr lang="en-US" sz="850" dirty="0">
+                          <a:solidFill>
+                            <a:srgbClr val="262626"/>
+                          </a:solidFill>
+                          <a:latin typeface="신세계 민부리 Light(TTF)" pitchFamily="34" charset="0"/>
+                          <a:ea typeface="신세계 민부리 Light(TTF)" pitchFamily="34" charset="-122"/>
+                          <a:cs typeface="신세계 민부리 Light(TTF)" pitchFamily="34" charset="-120"/>
+                        </a:rPr>
                         <a:t>사용허가 5년 + 갱신 (최장 10년)</a:t>
                       </a:r>
                       <a:endParaRPr lang="en-US" sz="850" dirty="0"/>
@@ -6723,7 +7084,7 @@
                   </a:tcPr>
                 </a:tc>
               </a:tr>
-              <a:tr h="365760">
+              <a:tr h="603504">
                 <a:tc>
                   <a:txBody>
                     <a:bodyPr/>
@@ -6874,7 +7235,7 @@
                           <a:ea typeface="신세계 민부리 Light(TTF)" pitchFamily="34" charset="-122"/>
                           <a:cs typeface="신세계 민부리 Light(TTF)" pitchFamily="34" charset="-120"/>
                         </a:rPr>
-                        <a:t>민간 제안 컨소시엄 (제3자 공고 후 확정)</a:t>
+                        <a:t>해양문화㈜ (태영건설 컨소시엄) — 시설 유지관리, 전시 운영은 공공</a:t>
                       </a:r>
                       <a:endParaRPr lang="en-US" sz="850" dirty="0">
                         <a:latin typeface="신세계 민부리 Light(TTF)" charset="0"/>
@@ -6939,7 +7300,7 @@
                           <a:ea typeface="신세계 민부리 Light(TTF)" pitchFamily="34" charset="-122"/>
                           <a:cs typeface="신세계 민부리 Light(TTF)" pitchFamily="34" charset="-120"/>
                         </a:rPr>
-                        <a:t>롯데쇼핑 (기존 운영자 재선정)</a:t>
+                        <a:t>민간 운영사 (요트 계류 · 클럽하우스 운영)</a:t>
                       </a:r>
                       <a:endParaRPr lang="en-US" sz="850" dirty="0">
                         <a:latin typeface="신세계 민부리 Light(TTF)" charset="0"/>
@@ -6987,8 +7348,73 @@
                     </a:lnB>
                   </a:tcPr>
                 </a:tc>
+                <a:tc>
+                  <a:txBody>
+                    <a:bodyPr/>
+                    <a:lstStyle/>
+                    <a:p>
+                      <a:pPr indent="0" marL="0">
+                        <a:buNone/>
+                      </a:pPr>
+                      <a:r>
+                        <a:rPr lang="en-US" sz="850" dirty="0">
+                          <a:solidFill>
+                            <a:srgbClr val="262626"/>
+                          </a:solidFill>
+                          <a:latin typeface="신세계 민부리 Light(TTF)" pitchFamily="34" charset="0"/>
+                          <a:ea typeface="신세계 민부리 Light(TTF)" pitchFamily="34" charset="-122"/>
+                          <a:cs typeface="신세계 민부리 Light(TTF)" pitchFamily="34" charset="-120"/>
+                        </a:rPr>
+                        <a:t>롯데쇼핑 (기존 운영자 재선정)</a:t>
+                      </a:r>
+                      <a:endParaRPr lang="en-US" sz="850" dirty="0">
+                        <a:latin typeface="신세계 민부리 Light(TTF)" charset="0"/>
+                        <a:ea typeface="신세계 민부리 Light(TTF)" charset="0"/>
+                        <a:cs typeface="신세계 민부리 Light(TTF)" charset="0"/>
+                      </a:endParaRPr>
+                    </a:p>
+                  </a:txBody>
+                  <a:tcPr marL="54864" marR="54864" marT="27432" marB="27432" anchor="ctr">
+                    <a:lnL w="6350" cap="flat" cmpd="sng" algn="ctr">
+                      <a:solidFill>
+                        <a:srgbClr val="BFBFBF"/>
+                      </a:solidFill>
+                      <a:prstDash val="solid"/>
+                      <a:round/>
+                      <a:headEnd type="none" w="med" len="med"/>
+                      <a:tailEnd type="none" w="med" len="med"/>
+                    </a:lnL>
+                    <a:lnR w="6350" cap="flat" cmpd="sng" algn="ctr">
+                      <a:solidFill>
+                        <a:srgbClr val="BFBFBF"/>
+                      </a:solidFill>
+                      <a:prstDash val="solid"/>
+                      <a:round/>
+                      <a:headEnd type="none" w="med" len="med"/>
+                      <a:tailEnd type="none" w="med" len="med"/>
+                    </a:lnR>
+                    <a:lnT w="6350" cap="flat" cmpd="sng" algn="ctr">
+                      <a:solidFill>
+                        <a:srgbClr val="BFBFBF"/>
+                      </a:solidFill>
+                      <a:prstDash val="solid"/>
+                      <a:round/>
+                      <a:headEnd type="none" w="med" len="med"/>
+                      <a:tailEnd type="none" w="med" len="med"/>
+                    </a:lnT>
+                    <a:lnB w="6350" cap="flat" cmpd="sng" algn="ctr">
+                      <a:solidFill>
+                        <a:srgbClr val="BFBFBF"/>
+                      </a:solidFill>
+                      <a:prstDash val="solid"/>
+                      <a:round/>
+                      <a:headEnd type="none" w="med" len="med"/>
+                      <a:tailEnd type="none" w="med" len="med"/>
+                    </a:lnB>
+                  </a:tcPr>
+                </a:tc>
               </a:tr>
-              <a:tr h="658368">
+              <a:tr h="713232">
                 <a:tc>
                   <a:txBody>
                     <a:bodyPr/>
@@ -7074,7 +7500,7 @@
                           <a:ea typeface="신세계 민부리 Light(TTF)" pitchFamily="34" charset="-122"/>
                           <a:cs typeface="신세계 민부리 Light(TTF)" pitchFamily="34" charset="-120"/>
                         </a:rPr>
-                        <a:t>’16 최초제안 (무역협회) → ’21.12 한화 우선협상 선정 → ’26.7 실시협약 → ’32 준공 목표</a:t>
+                        <a:t>’16 최초제안 (무역협회) → ’21.12 한화 우선협상 → ’26.7 실시협약 → ’32 준공 목표</a:t>
                       </a:r>
                       <a:endParaRPr lang="en-US" sz="850" dirty="0">
                         <a:latin typeface="신세계 민부리 Light(TTF)" charset="0"/>
@@ -7139,7 +7565,7 @@
                           <a:ea typeface="신세계 민부리 Light(TTF)" pitchFamily="34" charset="-122"/>
                           <a:cs typeface="신세계 민부리 Light(TTF)" pitchFamily="34" charset="-120"/>
                         </a:rPr>
-                        <a:t>’23.9 민투심 대상시설 인정 → 적격성조사 → ’25.8 사업비 증가로 민투심 연기, 제3자 공고 대기</a:t>
+                        <a:t>’09.7 실시협약 → ’09.12 착공 → ’12.7 개관 → ’32 임대기간 종료</a:t>
                       </a:r>
                       <a:endParaRPr lang="en-US" sz="850" dirty="0">
                         <a:latin typeface="신세계 민부리 Light(TTF)" charset="0"/>
@@ -7204,7 +7630,7 @@
                           <a:ea typeface="신세계 민부리 Light(TTF)" pitchFamily="34" charset="-122"/>
                           <a:cs typeface="신세계 민부리 Light(TTF)" pitchFamily="34" charset="-120"/>
                         </a:rPr>
-                        <a:t>’87 민자역사 개장 → ’17.12 점용허가 30년 만료 · 국가 귀속 → ’19 공모, 롯데 재낙찰 → ’26.9 재입찰로 10년 사용권 확보</a:t>
+                        <a:t>’11 개장 → ’21 운영사 재무 악화로 경매 → ’31 기부채납 예정</a:t>
                       </a:r>
                       <a:endParaRPr lang="en-US" sz="850" dirty="0">
                         <a:latin typeface="신세계 민부리 Light(TTF)" charset="0"/>
@@ -7252,8 +7678,73 @@
                     </a:lnB>
                   </a:tcPr>
                 </a:tc>
+                <a:tc>
+                  <a:txBody>
+                    <a:bodyPr/>
+                    <a:lstStyle/>
+                    <a:p>
+                      <a:pPr indent="0" marL="0">
+                        <a:buNone/>
+                      </a:pPr>
+                      <a:r>
+                        <a:rPr lang="en-US" sz="850" dirty="0">
+                          <a:solidFill>
+                            <a:srgbClr val="262626"/>
+                          </a:solidFill>
+                          <a:latin typeface="신세계 민부리 Light(TTF)" pitchFamily="34" charset="0"/>
+                          <a:ea typeface="신세계 민부리 Light(TTF)" pitchFamily="34" charset="-122"/>
+                          <a:cs typeface="신세계 민부리 Light(TTF)" pitchFamily="34" charset="-120"/>
+                        </a:rPr>
+                        <a:t>’87 개장 → ’17.12 점용 30년 만료 · 국가 귀속 → ’19 롯데 재낙찰 → ’26.9 10년 재확보</a:t>
+                      </a:r>
+                      <a:endParaRPr lang="en-US" sz="850" dirty="0">
+                        <a:latin typeface="신세계 민부리 Light(TTF)" charset="0"/>
+                        <a:ea typeface="신세계 민부리 Light(TTF)" charset="0"/>
+                        <a:cs typeface="신세계 민부리 Light(TTF)" charset="0"/>
+                      </a:endParaRPr>
+                    </a:p>
+                  </a:txBody>
+                  <a:tcPr marL="54864" marR="54864" marT="27432" marB="27432" anchor="ctr">
+                    <a:lnL w="6350" cap="flat" cmpd="sng" algn="ctr">
+                      <a:solidFill>
+                        <a:srgbClr val="BFBFBF"/>
+                      </a:solidFill>
+                      <a:prstDash val="solid"/>
+                      <a:round/>
+                      <a:headEnd type="none" w="med" len="med"/>
+                      <a:tailEnd type="none" w="med" len="med"/>
+                    </a:lnL>
+                    <a:lnR w="6350" cap="flat" cmpd="sng" algn="ctr">
+                      <a:solidFill>
+                        <a:srgbClr val="BFBFBF"/>
+                      </a:solidFill>
+                      <a:prstDash val="solid"/>
+                      <a:round/>
+                      <a:headEnd type="none" w="med" len="med"/>
+                      <a:tailEnd type="none" w="med" len="med"/>
+                    </a:lnR>
+                    <a:lnT w="6350" cap="flat" cmpd="sng" algn="ctr">
+                      <a:solidFill>
+                        <a:srgbClr val="BFBFBF"/>
+                      </a:solidFill>
+                      <a:prstDash val="solid"/>
+                      <a:round/>
+                      <a:headEnd type="none" w="med" len="med"/>
+                      <a:tailEnd type="none" w="med" len="med"/>
+                    </a:lnT>
+                    <a:lnB w="6350" cap="flat" cmpd="sng" algn="ctr">
+                      <a:solidFill>
+                        <a:srgbClr val="BFBFBF"/>
+                      </a:solidFill>
+                      <a:prstDash val="solid"/>
+                      <a:round/>
+                      <a:headEnd type="none" w="med" len="med"/>
+                      <a:tailEnd type="none" w="med" len="med"/>
+                    </a:lnB>
+                  </a:tcPr>
+                </a:tc>
               </a:tr>
-              <a:tr h="566928">
+              <a:tr h="713232">
                 <a:tc>
                   <a:txBody>
                     <a:bodyPr/>
@@ -7339,7 +7830,7 @@
                           <a:ea typeface="신세계 민부리 Light(TTF)" pitchFamily="34" charset="-122"/>
                           <a:cs typeface="신세계 민부리 Light(TTF)" pitchFamily="34" charset="-120"/>
                         </a:rPr>
-                        <a:t>최초제안자도 경쟁에서 탈락 가능 → 제안 가점보다 콘텐츠 차별화가 관건 / 제안 → 협약 약 10년</a:t>
+                        <a:t>최초제안자도 경쟁에서 탈락 가능 → 제안 가점보다 콘텐츠 차별화가 관건</a:t>
                       </a:r>
                       <a:endParaRPr lang="en-US" sz="850" dirty="0">
                         <a:latin typeface="신세계 민부리 Light(TTF)" charset="0"/>
@@ -7407,7 +7898,7 @@
                           <a:ea typeface="신세계 민부리 Light(TTF)" pitchFamily="34" charset="-122"/>
                           <a:cs typeface="신세계 민부리 Light(TTF)" pitchFamily="34" charset="-120"/>
                         </a:rPr>
-                        <a:t>비전형 시설도 포괄주의로 민자 대상 인정 → 「세빛섬 + 푸드존 = 공공 수변시설」 논리의 선례</a:t>
+                        <a:t>수익은 안정적이나 운영 · 콘텐츠는 공공 몫 → 당사 MD · 운영 역량 활용 불가</a:t>
                       </a:r>
                       <a:endParaRPr lang="en-US" sz="850" dirty="0">
                         <a:latin typeface="신세계 민부리 Light(TTF)" charset="0"/>
@@ -7475,7 +7966,75 @@
                           <a:ea typeface="신세계 민부리 Light(TTF)" pitchFamily="34" charset="-122"/>
                           <a:cs typeface="신세계 민부리 Light(TTF)" pitchFamily="34" charset="-120"/>
                         </a:rPr>
-                        <a:t>재공모 (사용허가) 방식은 최장 10년 수준 → 세빛섬은 민투법 경로로 50년 확보 필요</a:t>
+                        <a:t>같은 한강 수상시설 선례 / 민간 소유 자산은 재무 악화 시 경매 리스크 → 운영권 구조가 유리</a:t>
+                      </a:r>
+                      <a:endParaRPr lang="en-US" sz="850" dirty="0">
+                        <a:latin typeface="신세계 민부리 Light(TTF)" charset="0"/>
+                        <a:ea typeface="신세계 민부리 Light(TTF)" charset="0"/>
+                        <a:cs typeface="신세계 민부리 Light(TTF)" charset="0"/>
+                      </a:endParaRPr>
+                    </a:p>
+                  </a:txBody>
+                  <a:tcPr marL="54864" marR="54864" marT="27432" marB="27432" anchor="ctr">
+                    <a:lnL w="6350" cap="flat" cmpd="sng" algn="ctr">
+                      <a:solidFill>
+                        <a:srgbClr val="BFBFBF"/>
+                      </a:solidFill>
+                      <a:prstDash val="solid"/>
+                      <a:round/>
+                      <a:headEnd type="none" w="med" len="med"/>
+                      <a:tailEnd type="none" w="med" len="med"/>
+                    </a:lnL>
+                    <a:lnR w="6350" cap="flat" cmpd="sng" algn="ctr">
+                      <a:solidFill>
+                        <a:srgbClr val="BFBFBF"/>
+                      </a:solidFill>
+                      <a:prstDash val="solid"/>
+                      <a:round/>
+                      <a:headEnd type="none" w="med" len="med"/>
+                      <a:tailEnd type="none" w="med" len="med"/>
+                    </a:lnR>
+                    <a:lnT w="6350" cap="flat" cmpd="sng" algn="ctr">
+                      <a:solidFill>
+                        <a:srgbClr val="BFBFBF"/>
+                      </a:solidFill>
+                      <a:prstDash val="solid"/>
+                      <a:round/>
+                      <a:headEnd type="none" w="med" len="med"/>
+                      <a:tailEnd type="none" w="med" len="med"/>
+                    </a:lnT>
+                    <a:lnB w="6350" cap="flat" cmpd="sng" algn="ctr">
+                      <a:solidFill>
+                        <a:srgbClr val="BFBFBF"/>
+                      </a:solidFill>
+                      <a:prstDash val="solid"/>
+                      <a:round/>
+                      <a:headEnd type="none" w="med" len="med"/>
+                      <a:tailEnd type="none" w="med" len="med"/>
+                    </a:lnB>
+                    <a:solidFill>
+                      <a:srgbClr val="EEF2F8"/>
+                    </a:solidFill>
+                  </a:tcPr>
+                </a:tc>
+                <a:tc>
+                  <a:txBody>
+                    <a:bodyPr/>
+                    <a:lstStyle/>
+                    <a:p>
+                      <a:pPr indent="0" marL="0">
+                        <a:buNone/>
+                      </a:pPr>
+                      <a:r>
+                        <a:rPr lang="en-US" sz="850" dirty="0">
+                          <a:solidFill>
+                            <a:srgbClr val="262626"/>
+                          </a:solidFill>
+                          <a:latin typeface="신세계 민부리 Light(TTF)" pitchFamily="34" charset="0"/>
+                          <a:ea typeface="신세계 민부리 Light(TTF)" pitchFamily="34" charset="-122"/>
+                          <a:cs typeface="신세계 민부리 Light(TTF)" pitchFamily="34" charset="-120"/>
+                        </a:rPr>
+                        <a:t>재공모 (사용허가)는 최장 10년 수준 → 세빛섬은 민투법 경로로 50년 확보 필요</a:t>
                       </a:r>
                       <a:endParaRPr lang="en-US" sz="850" dirty="0">
                         <a:latin typeface="신세계 민부리 Light(TTF)" charset="0"/>
@@ -7539,7 +8098,7 @@
         </p:nvSpPr>
         <p:spPr>
           <a:xfrm>
-            <a:off x="274320" y="8732520"/>
+            <a:off x="274320" y="9244584"/>
             <a:ext cx="6309360" cy="164592"/>
           </a:xfrm>
           <a:prstGeom prst="rect">
@@ -7564,7 +8123,7 @@
                 <a:ea typeface="신세계 민부리 Light(TTF)" pitchFamily="34" charset="-122"/>
                 <a:cs typeface="신세계 민부리 Light(TTF)" pitchFamily="34" charset="-120"/>
               </a:rPr>
-              <a:t>＊ 출처 : 서울시 · 기획재정부 보도자료 및 언론 보도 종합 (’26.10 기준) / 서울링은 진행 중 사업으로 일정 변동 가능</a:t>
+              <a:t>＊ 출처 : 서울시 · 기획재정부 보도자료 및 언론 보도 종합 (’26.10 기준) </a:t>
             </a:r>
             <a:endParaRPr lang="en-US" sz="700" dirty="0"/>
           </a:p>

--- a/Appendix_민간투자방식_비교_및_사례.pptx
+++ b/Appendix_민간투자방식_비교_및_사례.pptx
@@ -5616,7 +5616,7 @@
                 <a:gridCol w="1408176"/>
                 <a:gridCol w="1408176"/>
               </a:tblGrid>
-              <a:tr h="365760">
+              <a:tr h="256032">
                 <a:tc>
                   <a:txBody>
                     <a:bodyPr/>
@@ -5625,17 +5625,6 @@
                       <a:pPr algn="ctr" indent="0" marL="0">
                         <a:buNone/>
                       </a:pPr>
-                      <a:r>
-                        <a:rPr lang="en-US" sz="950" b="1" dirty="0">
-                          <a:solidFill>
-                            <a:srgbClr val="FFFFFF"/>
-                          </a:solidFill>
-                          <a:latin typeface="신세계 민부리 Bold(TTF)" pitchFamily="34" charset="0"/>
-                          <a:ea typeface="신세계 민부리 Bold(TTF)" pitchFamily="34" charset="-122"/>
-                          <a:cs typeface="신세계 민부리 Bold(TTF)" pitchFamily="34" charset="-120"/>
-                        </a:rPr>
-                        <a:t>사 례</a:t>
-                      </a:r>
                       <a:endParaRPr lang="en-US" sz="950" dirty="0">
                         <a:latin typeface="신세계 민부리 Bold(TTF)" charset="0"/>
                         <a:ea typeface="신세계 민부리 Bold(TTF)" charset="0"/>
@@ -5694,7 +5683,7 @@
                         <a:buNone/>
                       </a:pPr>
                       <a:r>
-                        <a:rPr lang="en-US" sz="800" b="1" dirty="0">
+                        <a:rPr lang="en-US" sz="950" b="1" dirty="0">
                           <a:solidFill>
                             <a:srgbClr val="FFFFFF"/>
                           </a:solidFill>
@@ -5704,12 +5693,59 @@
                         </a:rPr>
                         <a:t>BTO</a:t>
                       </a:r>
-                      <a:endParaRPr lang="en-US" sz="1200" dirty="0">
+                      <a:endParaRPr lang="en-US" sz="950" dirty="0">
                         <a:latin typeface="신세계 민부리 Bold(TTF)" charset="0"/>
                         <a:ea typeface="신세계 민부리 Bold(TTF)" charset="0"/>
                         <a:cs typeface="신세계 민부리 Bold(TTF)" charset="0"/>
                       </a:endParaRPr>
                     </a:p>
+                  </a:txBody>
+                  <a:tcPr marL="54864" marR="54864" marT="27432" marB="27432" anchor="ctr">
+                    <a:lnL w="6350" cap="flat" cmpd="sng" algn="ctr">
+                      <a:solidFill>
+                        <a:srgbClr val="BFBFBF"/>
+                      </a:solidFill>
+                      <a:prstDash val="solid"/>
+                      <a:round/>
+                      <a:headEnd type="none" w="med" len="med"/>
+                      <a:tailEnd type="none" w="med" len="med"/>
+                    </a:lnL>
+                    <a:lnR w="6350" cap="flat" cmpd="sng" algn="ctr">
+                      <a:solidFill>
+                        <a:srgbClr val="BFBFBF"/>
+                      </a:solidFill>
+                      <a:prstDash val="solid"/>
+                      <a:round/>
+                      <a:headEnd type="none" w="med" len="med"/>
+                      <a:tailEnd type="none" w="med" len="med"/>
+                    </a:lnR>
+                    <a:lnT w="6350" cap="flat" cmpd="sng" algn="ctr">
+                      <a:solidFill>
+                        <a:srgbClr val="BFBFBF"/>
+                      </a:solidFill>
+                      <a:prstDash val="solid"/>
+                      <a:round/>
+                      <a:headEnd type="none" w="med" len="med"/>
+                      <a:tailEnd type="none" w="med" len="med"/>
+                    </a:lnT>
+                    <a:lnB w="6350" cap="flat" cmpd="sng" algn="ctr">
+                      <a:solidFill>
+                        <a:srgbClr val="BFBFBF"/>
+                      </a:solidFill>
+                      <a:prstDash val="solid"/>
+                      <a:round/>
+                      <a:headEnd type="none" w="med" len="med"/>
+                      <a:tailEnd type="none" w="med" len="med"/>
+                    </a:lnB>
+                    <a:solidFill>
+                      <a:srgbClr val="1F3A6E"/>
+                    </a:solidFill>
+                  </a:tcPr>
+                </a:tc>
+                <a:tc>
+                  <a:txBody>
+                    <a:bodyPr/>
+                    <a:lstStyle/>
                     <a:p>
                       <a:pPr algn="ctr" indent="0" marL="0">
                         <a:buNone/>
@@ -5723,9 +5759,9 @@
                           <a:ea typeface="신세계 민부리 Bold(TTF)" pitchFamily="34" charset="-122"/>
                           <a:cs typeface="신세계 민부리 Bold(TTF)" pitchFamily="34" charset="-120"/>
                         </a:rPr>
-                        <a:t>잠실 스포츠 · MICE</a:t>
-                      </a:r>
-                      <a:endParaRPr lang="en-US" sz="1200" dirty="0">
+                        <a:t>BTL</a:t>
+                      </a:r>
+                      <a:endParaRPr lang="en-US" sz="950" dirty="0">
                         <a:latin typeface="신세계 민부리 Bold(TTF)" charset="0"/>
                         <a:ea typeface="신세계 민부리 Bold(TTF)" charset="0"/>
                         <a:cs typeface="신세계 민부리 Bold(TTF)" charset="0"/>
@@ -5783,7 +5819,7 @@
                         <a:buNone/>
                       </a:pPr>
                       <a:r>
-                        <a:rPr lang="en-US" sz="800" b="1" dirty="0">
+                        <a:rPr lang="en-US" sz="950" b="1" dirty="0">
                           <a:solidFill>
                             <a:srgbClr val="FFFFFF"/>
                           </a:solidFill>
@@ -5791,14 +5827,61 @@
                           <a:ea typeface="신세계 민부리 Bold(TTF)" pitchFamily="34" charset="-122"/>
                           <a:cs typeface="신세계 민부리 Bold(TTF)" pitchFamily="34" charset="-120"/>
                         </a:rPr>
-                        <a:t>BTL</a:t>
-                      </a:r>
-                      <a:endParaRPr lang="en-US" sz="1200" dirty="0">
+                        <a:t>BOT</a:t>
+                      </a:r>
+                      <a:endParaRPr lang="en-US" sz="950" dirty="0">
                         <a:latin typeface="신세계 민부리 Bold(TTF)" charset="0"/>
                         <a:ea typeface="신세계 민부리 Bold(TTF)" charset="0"/>
                         <a:cs typeface="신세계 민부리 Bold(TTF)" charset="0"/>
                       </a:endParaRPr>
                     </a:p>
+                  </a:txBody>
+                  <a:tcPr marL="54864" marR="54864" marT="27432" marB="27432" anchor="ctr">
+                    <a:lnL w="6350" cap="flat" cmpd="sng" algn="ctr">
+                      <a:solidFill>
+                        <a:srgbClr val="BFBFBF"/>
+                      </a:solidFill>
+                      <a:prstDash val="solid"/>
+                      <a:round/>
+                      <a:headEnd type="none" w="med" len="med"/>
+                      <a:tailEnd type="none" w="med" len="med"/>
+                    </a:lnL>
+                    <a:lnR w="6350" cap="flat" cmpd="sng" algn="ctr">
+                      <a:solidFill>
+                        <a:srgbClr val="BFBFBF"/>
+                      </a:solidFill>
+                      <a:prstDash val="solid"/>
+                      <a:round/>
+                      <a:headEnd type="none" w="med" len="med"/>
+                      <a:tailEnd type="none" w="med" len="med"/>
+                    </a:lnR>
+                    <a:lnT w="6350" cap="flat" cmpd="sng" algn="ctr">
+                      <a:solidFill>
+                        <a:srgbClr val="BFBFBF"/>
+                      </a:solidFill>
+                      <a:prstDash val="solid"/>
+                      <a:round/>
+                      <a:headEnd type="none" w="med" len="med"/>
+                      <a:tailEnd type="none" w="med" len="med"/>
+                    </a:lnT>
+                    <a:lnB w="6350" cap="flat" cmpd="sng" algn="ctr">
+                      <a:solidFill>
+                        <a:srgbClr val="BFBFBF"/>
+                      </a:solidFill>
+                      <a:prstDash val="solid"/>
+                      <a:round/>
+                      <a:headEnd type="none" w="med" len="med"/>
+                      <a:tailEnd type="none" w="med" len="med"/>
+                    </a:lnB>
+                    <a:solidFill>
+                      <a:srgbClr val="1F3A6E"/>
+                    </a:solidFill>
+                  </a:tcPr>
+                </a:tc>
+                <a:tc>
+                  <a:txBody>
+                    <a:bodyPr/>
+                    <a:lstStyle/>
                     <a:p>
                       <a:pPr algn="ctr" indent="0" marL="0">
                         <a:buNone/>
@@ -5812,9 +5895,9 @@
                           <a:ea typeface="신세계 민부리 Bold(TTF)" pitchFamily="34" charset="-122"/>
                           <a:cs typeface="신세계 민부리 Bold(TTF)" pitchFamily="34" charset="-120"/>
                         </a:rPr>
-                        <a:t>국립해양박물관</a:t>
-                      </a:r>
-                      <a:endParaRPr lang="en-US" sz="1200" dirty="0">
+                        <a:t>재공모</a:t>
+                      </a:r>
+                      <a:endParaRPr lang="en-US" sz="950" dirty="0">
                         <a:latin typeface="신세계 민부리 Bold(TTF)" charset="0"/>
                         <a:ea typeface="신세계 민부리 Bold(TTF)" charset="0"/>
                         <a:cs typeface="신세계 민부리 Bold(TTF)" charset="0"/>
@@ -5863,6 +5946,8 @@
                     </a:solidFill>
                   </a:tcPr>
                 </a:tc>
+              </a:tr>
+              <a:tr h="292608">
                 <a:tc>
                   <a:txBody>
                     <a:bodyPr/>
@@ -5872,7 +5957,7 @@
                         <a:buNone/>
                       </a:pPr>
                       <a:r>
-                        <a:rPr lang="en-US" sz="800" b="1" dirty="0">
+                        <a:rPr lang="en-US" sz="950" b="1" dirty="0">
                           <a:solidFill>
                             <a:srgbClr val="FFFFFF"/>
                           </a:solidFill>
@@ -5880,14 +5965,61 @@
                           <a:ea typeface="신세계 민부리 Bold(TTF)" pitchFamily="34" charset="-122"/>
                           <a:cs typeface="신세계 민부리 Bold(TTF)" pitchFamily="34" charset="-120"/>
                         </a:rPr>
-                        <a:t>BOT</a:t>
-                      </a:r>
-                      <a:endParaRPr lang="en-US" sz="1200" dirty="0">
+                        <a:t>사 례</a:t>
+                      </a:r>
+                      <a:endParaRPr lang="en-US" sz="950" dirty="0">
                         <a:latin typeface="신세계 민부리 Bold(TTF)" charset="0"/>
                         <a:ea typeface="신세계 민부리 Bold(TTF)" charset="0"/>
                         <a:cs typeface="신세계 민부리 Bold(TTF)" charset="0"/>
                       </a:endParaRPr>
                     </a:p>
+                  </a:txBody>
+                  <a:tcPr marL="54864" marR="54864" marT="27432" marB="27432" anchor="ctr">
+                    <a:lnL w="6350" cap="flat" cmpd="sng" algn="ctr">
+                      <a:solidFill>
+                        <a:srgbClr val="BFBFBF"/>
+                      </a:solidFill>
+                      <a:prstDash val="solid"/>
+                      <a:round/>
+                      <a:headEnd type="none" w="med" len="med"/>
+                      <a:tailEnd type="none" w="med" len="med"/>
+                    </a:lnL>
+                    <a:lnR w="6350" cap="flat" cmpd="sng" algn="ctr">
+                      <a:solidFill>
+                        <a:srgbClr val="BFBFBF"/>
+                      </a:solidFill>
+                      <a:prstDash val="solid"/>
+                      <a:round/>
+                      <a:headEnd type="none" w="med" len="med"/>
+                      <a:tailEnd type="none" w="med" len="med"/>
+                    </a:lnR>
+                    <a:lnT w="6350" cap="flat" cmpd="sng" algn="ctr">
+                      <a:solidFill>
+                        <a:srgbClr val="BFBFBF"/>
+                      </a:solidFill>
+                      <a:prstDash val="solid"/>
+                      <a:round/>
+                      <a:headEnd type="none" w="med" len="med"/>
+                      <a:tailEnd type="none" w="med" len="med"/>
+                    </a:lnT>
+                    <a:lnB w="6350" cap="flat" cmpd="sng" algn="ctr">
+                      <a:solidFill>
+                        <a:srgbClr val="BFBFBF"/>
+                      </a:solidFill>
+                      <a:prstDash val="solid"/>
+                      <a:round/>
+                      <a:headEnd type="none" w="med" len="med"/>
+                      <a:tailEnd type="none" w="med" len="med"/>
+                    </a:lnB>
+                    <a:solidFill>
+                      <a:srgbClr val="595959"/>
+                    </a:solidFill>
+                  </a:tcPr>
+                </a:tc>
+                <a:tc>
+                  <a:txBody>
+                    <a:bodyPr/>
+                    <a:lstStyle/>
                     <a:p>
                       <a:pPr algn="ctr" indent="0" marL="0">
                         <a:buNone/>
@@ -5901,9 +6033,9 @@
                           <a:ea typeface="신세계 민부리 Bold(TTF)" pitchFamily="34" charset="-122"/>
                           <a:cs typeface="신세계 민부리 Bold(TTF)" pitchFamily="34" charset="-120"/>
                         </a:rPr>
-                        <a:t>여의도 서울마리나</a:t>
-                      </a:r>
-                      <a:endParaRPr lang="en-US" sz="1200" dirty="0">
+                        <a:t>잠실 스포츠 · MICE</a:t>
+                      </a:r>
+                      <a:endParaRPr lang="en-US" sz="950" dirty="0">
                         <a:latin typeface="신세계 민부리 Bold(TTF)" charset="0"/>
                         <a:ea typeface="신세계 민부리 Bold(TTF)" charset="0"/>
                         <a:cs typeface="신세계 민부리 Bold(TTF)" charset="0"/>
@@ -5961,7 +6093,7 @@
                         <a:buNone/>
                       </a:pPr>
                       <a:r>
-                        <a:rPr lang="en-US" sz="800" b="1" dirty="0">
+                        <a:rPr lang="en-US" sz="950" b="1" dirty="0">
                           <a:solidFill>
                             <a:srgbClr val="FFFFFF"/>
                           </a:solidFill>
@@ -5969,14 +6101,61 @@
                           <a:ea typeface="신세계 민부리 Bold(TTF)" pitchFamily="34" charset="-122"/>
                           <a:cs typeface="신세계 민부리 Bold(TTF)" pitchFamily="34" charset="-120"/>
                         </a:rPr>
-                        <a:t>국가 귀속 후 재공모</a:t>
-                      </a:r>
-                      <a:endParaRPr lang="en-US" sz="1200" dirty="0">
+                        <a:t>국립해양박물관</a:t>
+                      </a:r>
+                      <a:endParaRPr lang="en-US" sz="950" dirty="0">
                         <a:latin typeface="신세계 민부리 Bold(TTF)" charset="0"/>
                         <a:ea typeface="신세계 민부리 Bold(TTF)" charset="0"/>
                         <a:cs typeface="신세계 민부리 Bold(TTF)" charset="0"/>
                       </a:endParaRPr>
                     </a:p>
+                  </a:txBody>
+                  <a:tcPr marL="54864" marR="54864" marT="27432" marB="27432" anchor="ctr">
+                    <a:lnL w="6350" cap="flat" cmpd="sng" algn="ctr">
+                      <a:solidFill>
+                        <a:srgbClr val="BFBFBF"/>
+                      </a:solidFill>
+                      <a:prstDash val="solid"/>
+                      <a:round/>
+                      <a:headEnd type="none" w="med" len="med"/>
+                      <a:tailEnd type="none" w="med" len="med"/>
+                    </a:lnL>
+                    <a:lnR w="6350" cap="flat" cmpd="sng" algn="ctr">
+                      <a:solidFill>
+                        <a:srgbClr val="BFBFBF"/>
+                      </a:solidFill>
+                      <a:prstDash val="solid"/>
+                      <a:round/>
+                      <a:headEnd type="none" w="med" len="med"/>
+                      <a:tailEnd type="none" w="med" len="med"/>
+                    </a:lnR>
+                    <a:lnT w="6350" cap="flat" cmpd="sng" algn="ctr">
+                      <a:solidFill>
+                        <a:srgbClr val="BFBFBF"/>
+                      </a:solidFill>
+                      <a:prstDash val="solid"/>
+                      <a:round/>
+                      <a:headEnd type="none" w="med" len="med"/>
+                      <a:tailEnd type="none" w="med" len="med"/>
+                    </a:lnT>
+                    <a:lnB w="6350" cap="flat" cmpd="sng" algn="ctr">
+                      <a:solidFill>
+                        <a:srgbClr val="BFBFBF"/>
+                      </a:solidFill>
+                      <a:prstDash val="solid"/>
+                      <a:round/>
+                      <a:headEnd type="none" w="med" len="med"/>
+                      <a:tailEnd type="none" w="med" len="med"/>
+                    </a:lnB>
+                    <a:solidFill>
+                      <a:srgbClr val="1F3A6E"/>
+                    </a:solidFill>
+                  </a:tcPr>
+                </a:tc>
+                <a:tc>
+                  <a:txBody>
+                    <a:bodyPr/>
+                    <a:lstStyle/>
                     <a:p>
                       <a:pPr algn="ctr" indent="0" marL="0">
                         <a:buNone/>
@@ -5990,9 +6169,9 @@
                           <a:ea typeface="신세계 민부리 Bold(TTF)" pitchFamily="34" charset="-122"/>
                           <a:cs typeface="신세계 민부리 Bold(TTF)" pitchFamily="34" charset="-120"/>
                         </a:rPr>
-                        <a:t>영등포역 상업시설</a:t>
-                      </a:r>
-                      <a:endParaRPr lang="en-US" sz="1200" dirty="0">
+                        <a:t>여의도 서울마리나</a:t>
+                      </a:r>
+                      <a:endParaRPr lang="en-US" sz="950" dirty="0">
                         <a:latin typeface="신세계 민부리 Bold(TTF)" charset="0"/>
                         <a:ea typeface="신세계 민부리 Bold(TTF)" charset="0"/>
                         <a:cs typeface="신세계 민부리 Bold(TTF)" charset="0"/>
@@ -6041,8 +6220,6 @@
                     </a:solidFill>
                   </a:tcPr>
                 </a:tc>
-              </a:tr>
-              <a:tr h="603504">
                 <a:tc>
                   <a:txBody>
                     <a:bodyPr/>
@@ -6052,15 +6229,85 @@
                         <a:buNone/>
                       </a:pPr>
                       <a:r>
-                        <a:rPr lang="en-US" sz="850" b="1" dirty="0">
-                          <a:solidFill>
-                            <a:srgbClr val="262626"/>
+                        <a:rPr lang="en-US" sz="950" b="1" dirty="0">
+                          <a:solidFill>
+                            <a:srgbClr val="FFFFFF"/>
                           </a:solidFill>
                           <a:latin typeface="신세계 민부리 Bold(TTF)" pitchFamily="34" charset="0"/>
                           <a:ea typeface="신세계 민부리 Bold(TTF)" pitchFamily="34" charset="-122"/>
                           <a:cs typeface="신세계 민부리 Bold(TTF)" pitchFamily="34" charset="-120"/>
                         </a:rPr>
-                        <a:t>사업 내용</a:t>
+                        <a:t>영등포역 상업시설</a:t>
+                      </a:r>
+                      <a:endParaRPr lang="en-US" sz="950" dirty="0">
+                        <a:latin typeface="신세계 민부리 Bold(TTF)" charset="0"/>
+                        <a:ea typeface="신세계 민부리 Bold(TTF)" charset="0"/>
+                        <a:cs typeface="신세계 민부리 Bold(TTF)" charset="0"/>
+                      </a:endParaRPr>
+                    </a:p>
+                  </a:txBody>
+                  <a:tcPr marL="54864" marR="54864" marT="27432" marB="27432" anchor="ctr">
+                    <a:lnL w="6350" cap="flat" cmpd="sng" algn="ctr">
+                      <a:solidFill>
+                        <a:srgbClr val="BFBFBF"/>
+                      </a:solidFill>
+                      <a:prstDash val="solid"/>
+                      <a:round/>
+                      <a:headEnd type="none" w="med" len="med"/>
+                      <a:tailEnd type="none" w="med" len="med"/>
+                    </a:lnL>
+                    <a:lnR w="6350" cap="flat" cmpd="sng" algn="ctr">
+                      <a:solidFill>
+                        <a:srgbClr val="BFBFBF"/>
+                      </a:solidFill>
+                      <a:prstDash val="solid"/>
+                      <a:round/>
+                      <a:headEnd type="none" w="med" len="med"/>
+                      <a:tailEnd type="none" w="med" len="med"/>
+                    </a:lnR>
+                    <a:lnT w="6350" cap="flat" cmpd="sng" algn="ctr">
+                      <a:solidFill>
+                        <a:srgbClr val="BFBFBF"/>
+                      </a:solidFill>
+                      <a:prstDash val="solid"/>
+                      <a:round/>
+                      <a:headEnd type="none" w="med" len="med"/>
+                      <a:tailEnd type="none" w="med" len="med"/>
+                    </a:lnT>
+                    <a:lnB w="6350" cap="flat" cmpd="sng" algn="ctr">
+                      <a:solidFill>
+                        <a:srgbClr val="BFBFBF"/>
+                      </a:solidFill>
+                      <a:prstDash val="solid"/>
+                      <a:round/>
+                      <a:headEnd type="none" w="med" len="med"/>
+                      <a:tailEnd type="none" w="med" len="med"/>
+                    </a:lnB>
+                    <a:solidFill>
+                      <a:srgbClr val="1F3A6E"/>
+                    </a:solidFill>
+                  </a:tcPr>
+                </a:tc>
+              </a:tr>
+              <a:tr h="457200">
+                <a:tc>
+                  <a:txBody>
+                    <a:bodyPr/>
+                    <a:lstStyle/>
+                    <a:p>
+                      <a:pPr algn="ctr" indent="0" marL="0">
+                        <a:buNone/>
+                      </a:pPr>
+                      <a:r>
+                        <a:rPr lang="en-US" sz="850" b="1" dirty="0">
+                          <a:solidFill>
+                            <a:srgbClr val="262626"/>
+                          </a:solidFill>
+                          <a:latin typeface="신세계 민부리 Bold(TTF)" pitchFamily="34" charset="0"/>
+                          <a:ea typeface="신세계 민부리 Bold(TTF)" pitchFamily="34" charset="-122"/>
+                          <a:cs typeface="신세계 민부리 Bold(TTF)" pitchFamily="34" charset="-120"/>
+                        </a:rPr>
+                        <a:t>내 용</a:t>
                       </a:r>
                       <a:endParaRPr lang="en-US" sz="850" dirty="0">
                         <a:latin typeface="신세계 민부리 Bold(TTF)" charset="0"/>
@@ -6128,7 +6375,7 @@
                           <a:ea typeface="신세계 민부리 Light(TTF)" pitchFamily="34" charset="-122"/>
                           <a:cs typeface="신세계 민부리 Light(TTF)" pitchFamily="34" charset="-120"/>
                         </a:rPr>
-                        <a:t>전시 · 컨벤션 + 돔야구장 + 호텔 · 업무 · 상업 복합단지 (코엑스의 2.5배)</a:t>
+                        <a:t>전시 · 컨벤션 + 돔야구장 + 호텔 · 업무 · 상업 복합단지</a:t>
                       </a:r>
                       <a:endParaRPr lang="en-US" sz="850" dirty="0">
                         <a:latin typeface="신세계 민부리 Light(TTF)" charset="0"/>
@@ -6193,7 +6440,7 @@
                           <a:ea typeface="신세계 민부리 Light(TTF)" pitchFamily="34" charset="-122"/>
                           <a:cs typeface="신세계 민부리 Light(TTF)" pitchFamily="34" charset="-120"/>
                         </a:rPr>
-                        <a:t>국내 최대 해양 전문 박물관 (연면적 2.5만㎡, 지상 4층)</a:t>
+                        <a:t>국내 최대 해양 전문 박물관</a:t>
                       </a:r>
                       <a:endParaRPr lang="en-US" sz="850" dirty="0">
                         <a:latin typeface="신세계 민부리 Light(TTF)" charset="0"/>
@@ -6258,7 +6505,7 @@
                           <a:ea typeface="신세계 민부리 Light(TTF)" pitchFamily="34" charset="-122"/>
                           <a:cs typeface="신세계 민부리 Light(TTF)" pitchFamily="34" charset="-120"/>
                         </a:rPr>
-                        <a:t>한강 요트 마리나 — 계류시설 (요트 약 90척) · 클럽하우스</a:t>
+                        <a:t>한강 요트 마리나 (계류시설 · 클럽하우스)</a:t>
                       </a:r>
                       <a:endParaRPr lang="en-US" sz="850" dirty="0">
                         <a:latin typeface="신세계 민부리 Light(TTF)" charset="0"/>
@@ -6323,7 +6570,7 @@
                           <a:ea typeface="신세계 민부리 Light(TTF)" pitchFamily="34" charset="-122"/>
                           <a:cs typeface="신세계 민부리 Light(TTF)" pitchFamily="34" charset="-120"/>
                         </a:rPr>
-                        <a:t>민자역사 내 백화점 (롯데百 영등포점) 등 상업시설</a:t>
+                        <a:t>민자역사 내 백화점 (롯데百 영등포점)</a:t>
                       </a:r>
                       <a:endParaRPr lang="en-US" sz="850" dirty="0">
                         <a:latin typeface="신세계 민부리 Light(TTF)" charset="0"/>
@@ -6390,7 +6637,7 @@
                           <a:ea typeface="신세계 민부리 Bold(TTF)" pitchFamily="34" charset="-122"/>
                           <a:cs typeface="신세계 민부리 Bold(TTF)" pitchFamily="34" charset="-120"/>
                         </a:rPr>
-                        <a:t>위치 · 규모</a:t>
+                        <a:t>위치 / 규모</a:t>
                       </a:r>
                       <a:endParaRPr lang="en-US" sz="850" dirty="0">
                         <a:latin typeface="신세계 민부리 Bold(TTF)" charset="0"/>
@@ -6458,7 +6705,7 @@
                           <a:ea typeface="신세계 민부리 Light(TTF)" pitchFamily="34" charset="-122"/>
                           <a:cs typeface="신세계 민부리 Light(TTF)" pitchFamily="34" charset="-120"/>
                         </a:rPr>
-                        <a:t>송파구 잠실종합운동장 일대 35만㎡ / 총사업비 2.7조</a:t>
+                        <a:t>잠실종합운동장 일대 35만㎡ (코엑스의 2.5배)</a:t>
                       </a:r>
                       <a:endParaRPr lang="en-US" sz="850" dirty="0">
                         <a:latin typeface="신세계 민부리 Light(TTF)" charset="0"/>
@@ -6523,7 +6770,7 @@
                           <a:ea typeface="신세계 민부리 Light(TTF)" pitchFamily="34" charset="-122"/>
                           <a:cs typeface="신세계 민부리 Light(TTF)" pitchFamily="34" charset="-120"/>
                         </a:rPr>
-                        <a:t>부산 영도구 동삼동 / 총사업비 1,142억 (민간 1,019억)</a:t>
+                        <a:t>부산 영도구 / 연면적 2.5만㎡, 지상 4층</a:t>
                       </a:r>
                       <a:endParaRPr lang="en-US" sz="850" dirty="0">
                         <a:latin typeface="신세계 민부리 Light(TTF)" charset="0"/>
@@ -6588,7 +6835,7 @@
                           <a:ea typeface="신세계 민부리 Light(TTF)" pitchFamily="34" charset="-122"/>
                           <a:cs typeface="신세계 민부리 Light(TTF)" pitchFamily="34" charset="-120"/>
                         </a:rPr>
-                        <a:t>여의도 한강공원 (국회 앞) / 市 수역 · 진입로, 민간 시설 투자</a:t>
+                        <a:t>여의도 한강공원 (국회 앞) / 요트 약 90척 계류</a:t>
                       </a:r>
                       <a:endParaRPr lang="en-US" sz="850" dirty="0">
                         <a:latin typeface="신세계 민부리 Light(TTF)" charset="0"/>
@@ -6720,7 +6967,7 @@
                           <a:ea typeface="신세계 민부리 Bold(TTF)" pitchFamily="34" charset="-122"/>
                           <a:cs typeface="신세계 민부리 Bold(TTF)" pitchFamily="34" charset="-120"/>
                         </a:rPr>
-                        <a:t>방식 · 기간</a:t>
+                        <a:t>사업비</a:t>
                       </a:r>
                       <a:endParaRPr lang="en-US" sz="850" dirty="0">
                         <a:latin typeface="신세계 민부리 Bold(TTF)" charset="0"/>
@@ -6780,6 +7027,268 @@
                         <a:buNone/>
                       </a:pPr>
                       <a:r>
+                        <a:rPr lang="en-US" sz="850" dirty="0">
+                          <a:solidFill>
+                            <a:srgbClr val="262626"/>
+                          </a:solidFill>
+                          <a:latin typeface="신세계 민부리 Light(TTF)" pitchFamily="34" charset="0"/>
+                          <a:ea typeface="신세계 민부리 Light(TTF)" pitchFamily="34" charset="-122"/>
+                          <a:cs typeface="신세계 민부리 Light(TTF)" pitchFamily="34" charset="-120"/>
+                        </a:rPr>
+                        <a:t>총사업비 2.7조 (민간 조달)</a:t>
+                      </a:r>
+                      <a:endParaRPr lang="en-US" sz="850" dirty="0">
+                        <a:latin typeface="신세계 민부리 Light(TTF)" charset="0"/>
+                        <a:ea typeface="신세계 민부리 Light(TTF)" charset="0"/>
+                        <a:cs typeface="신세계 민부리 Light(TTF)" charset="0"/>
+                      </a:endParaRPr>
+                    </a:p>
+                  </a:txBody>
+                  <a:tcPr marL="54864" marR="54864" marT="27432" marB="27432" anchor="ctr">
+                    <a:lnL w="6350" cap="flat" cmpd="sng" algn="ctr">
+                      <a:solidFill>
+                        <a:srgbClr val="BFBFBF"/>
+                      </a:solidFill>
+                      <a:prstDash val="solid"/>
+                      <a:round/>
+                      <a:headEnd type="none" w="med" len="med"/>
+                      <a:tailEnd type="none" w="med" len="med"/>
+                    </a:lnL>
+                    <a:lnR w="6350" cap="flat" cmpd="sng" algn="ctr">
+                      <a:solidFill>
+                        <a:srgbClr val="BFBFBF"/>
+                      </a:solidFill>
+                      <a:prstDash val="solid"/>
+                      <a:round/>
+                      <a:headEnd type="none" w="med" len="med"/>
+                      <a:tailEnd type="none" w="med" len="med"/>
+                    </a:lnR>
+                    <a:lnT w="6350" cap="flat" cmpd="sng" algn="ctr">
+                      <a:solidFill>
+                        <a:srgbClr val="BFBFBF"/>
+                      </a:solidFill>
+                      <a:prstDash val="solid"/>
+                      <a:round/>
+                      <a:headEnd type="none" w="med" len="med"/>
+                      <a:tailEnd type="none" w="med" len="med"/>
+                    </a:lnT>
+                    <a:lnB w="6350" cap="flat" cmpd="sng" algn="ctr">
+                      <a:solidFill>
+                        <a:srgbClr val="BFBFBF"/>
+                      </a:solidFill>
+                      <a:prstDash val="solid"/>
+                      <a:round/>
+                      <a:headEnd type="none" w="med" len="med"/>
+                      <a:tailEnd type="none" w="med" len="med"/>
+                    </a:lnB>
+                  </a:tcPr>
+                </a:tc>
+                <a:tc>
+                  <a:txBody>
+                    <a:bodyPr/>
+                    <a:lstStyle/>
+                    <a:p>
+                      <a:pPr indent="0" marL="0">
+                        <a:buNone/>
+                      </a:pPr>
+                      <a:r>
+                        <a:rPr lang="en-US" sz="850" dirty="0">
+                          <a:solidFill>
+                            <a:srgbClr val="262626"/>
+                          </a:solidFill>
+                          <a:latin typeface="신세계 민부리 Light(TTF)" pitchFamily="34" charset="0"/>
+                          <a:ea typeface="신세계 민부리 Light(TTF)" pitchFamily="34" charset="-122"/>
+                          <a:cs typeface="신세계 민부리 Light(TTF)" pitchFamily="34" charset="-120"/>
+                        </a:rPr>
+                        <a:t>총사업비 1,142억 (민간 1,019억 + 재정 123억)</a:t>
+                      </a:r>
+                      <a:endParaRPr lang="en-US" sz="850" dirty="0">
+                        <a:latin typeface="신세계 민부리 Light(TTF)" charset="0"/>
+                        <a:ea typeface="신세계 민부리 Light(TTF)" charset="0"/>
+                        <a:cs typeface="신세계 민부리 Light(TTF)" charset="0"/>
+                      </a:endParaRPr>
+                    </a:p>
+                  </a:txBody>
+                  <a:tcPr marL="54864" marR="54864" marT="27432" marB="27432" anchor="ctr">
+                    <a:lnL w="6350" cap="flat" cmpd="sng" algn="ctr">
+                      <a:solidFill>
+                        <a:srgbClr val="BFBFBF"/>
+                      </a:solidFill>
+                      <a:prstDash val="solid"/>
+                      <a:round/>
+                      <a:headEnd type="none" w="med" len="med"/>
+                      <a:tailEnd type="none" w="med" len="med"/>
+                    </a:lnL>
+                    <a:lnR w="6350" cap="flat" cmpd="sng" algn="ctr">
+                      <a:solidFill>
+                        <a:srgbClr val="BFBFBF"/>
+                      </a:solidFill>
+                      <a:prstDash val="solid"/>
+                      <a:round/>
+                      <a:headEnd type="none" w="med" len="med"/>
+                      <a:tailEnd type="none" w="med" len="med"/>
+                    </a:lnR>
+                    <a:lnT w="6350" cap="flat" cmpd="sng" algn="ctr">
+                      <a:solidFill>
+                        <a:srgbClr val="BFBFBF"/>
+                      </a:solidFill>
+                      <a:prstDash val="solid"/>
+                      <a:round/>
+                      <a:headEnd type="none" w="med" len="med"/>
+                      <a:tailEnd type="none" w="med" len="med"/>
+                    </a:lnT>
+                    <a:lnB w="6350" cap="flat" cmpd="sng" algn="ctr">
+                      <a:solidFill>
+                        <a:srgbClr val="BFBFBF"/>
+                      </a:solidFill>
+                      <a:prstDash val="solid"/>
+                      <a:round/>
+                      <a:headEnd type="none" w="med" len="med"/>
+                      <a:tailEnd type="none" w="med" len="med"/>
+                    </a:lnB>
+                  </a:tcPr>
+                </a:tc>
+                <a:tc>
+                  <a:txBody>
+                    <a:bodyPr/>
+                    <a:lstStyle/>
+                    <a:p>
+                      <a:pPr indent="0" marL="0">
+                        <a:buNone/>
+                      </a:pPr>
+                      <a:r>
+                        <a:rPr lang="en-US" sz="850" dirty="0">
+                          <a:solidFill>
+                            <a:srgbClr val="262626"/>
+                          </a:solidFill>
+                          <a:latin typeface="신세계 민부리 Light(TTF)" pitchFamily="34" charset="0"/>
+                          <a:ea typeface="신세계 민부리 Light(TTF)" pitchFamily="34" charset="-122"/>
+                          <a:cs typeface="신세계 민부리 Light(TTF)" pitchFamily="34" charset="-120"/>
+                        </a:rPr>
+                        <a:t>市 수역 · 진입로 조성 + 민간 계류시설 · 클럽하우스 투자</a:t>
+                      </a:r>
+                      <a:endParaRPr lang="en-US" sz="850" dirty="0">
+                        <a:latin typeface="신세계 민부리 Light(TTF)" charset="0"/>
+                        <a:ea typeface="신세계 민부리 Light(TTF)" charset="0"/>
+                        <a:cs typeface="신세계 민부리 Light(TTF)" charset="0"/>
+                      </a:endParaRPr>
+                    </a:p>
+                  </a:txBody>
+                  <a:tcPr marL="54864" marR="54864" marT="27432" marB="27432" anchor="ctr">
+                    <a:lnL w="6350" cap="flat" cmpd="sng" algn="ctr">
+                      <a:solidFill>
+                        <a:srgbClr val="BFBFBF"/>
+                      </a:solidFill>
+                      <a:prstDash val="solid"/>
+                      <a:round/>
+                      <a:headEnd type="none" w="med" len="med"/>
+                      <a:tailEnd type="none" w="med" len="med"/>
+                    </a:lnL>
+                    <a:lnR w="6350" cap="flat" cmpd="sng" algn="ctr">
+                      <a:solidFill>
+                        <a:srgbClr val="BFBFBF"/>
+                      </a:solidFill>
+                      <a:prstDash val="solid"/>
+                      <a:round/>
+                      <a:headEnd type="none" w="med" len="med"/>
+                      <a:tailEnd type="none" w="med" len="med"/>
+                    </a:lnR>
+                    <a:lnT w="6350" cap="flat" cmpd="sng" algn="ctr">
+                      <a:solidFill>
+                        <a:srgbClr val="BFBFBF"/>
+                      </a:solidFill>
+                      <a:prstDash val="solid"/>
+                      <a:round/>
+                      <a:headEnd type="none" w="med" len="med"/>
+                      <a:tailEnd type="none" w="med" len="med"/>
+                    </a:lnT>
+                    <a:lnB w="6350" cap="flat" cmpd="sng" algn="ctr">
+                      <a:solidFill>
+                        <a:srgbClr val="BFBFBF"/>
+                      </a:solidFill>
+                      <a:prstDash val="solid"/>
+                      <a:round/>
+                      <a:headEnd type="none" w="med" len="med"/>
+                      <a:tailEnd type="none" w="med" len="med"/>
+                    </a:lnB>
+                  </a:tcPr>
+                </a:tc>
+                <a:tc>
+                  <a:txBody>
+                    <a:bodyPr/>
+                    <a:lstStyle/>
+                    <a:p>
+                      <a:pPr indent="0" marL="0">
+                        <a:buNone/>
+                      </a:pPr>
+                      <a:r>
+                        <a:rPr lang="en-US" sz="850" dirty="0">
+                          <a:solidFill>
+                            <a:srgbClr val="262626"/>
+                          </a:solidFill>
+                          <a:latin typeface="신세계 민부리 Light(TTF)" pitchFamily="34" charset="0"/>
+                          <a:ea typeface="신세계 민부리 Light(TTF)" pitchFamily="34" charset="-122"/>
+                          <a:cs typeface="신세계 민부리 Light(TTF)" pitchFamily="34" charset="-120"/>
+                        </a:rPr>
+                        <a:t>신규 건설 없음 (기존 시설 사용, 국유재산 사용료 납부)</a:t>
+                      </a:r>
+                      <a:endParaRPr lang="en-US" sz="850" dirty="0">
+                        <a:latin typeface="신세계 민부리 Light(TTF)" charset="0"/>
+                        <a:ea typeface="신세계 민부리 Light(TTF)" charset="0"/>
+                        <a:cs typeface="신세계 민부리 Light(TTF)" charset="0"/>
+                      </a:endParaRPr>
+                    </a:p>
+                  </a:txBody>
+                  <a:tcPr marL="54864" marR="54864" marT="27432" marB="27432" anchor="ctr">
+                    <a:lnL w="6350" cap="flat" cmpd="sng" algn="ctr">
+                      <a:solidFill>
+                        <a:srgbClr val="BFBFBF"/>
+                      </a:solidFill>
+                      <a:prstDash val="solid"/>
+                      <a:round/>
+                      <a:headEnd type="none" w="med" len="med"/>
+                      <a:tailEnd type="none" w="med" len="med"/>
+                    </a:lnL>
+                    <a:lnR w="6350" cap="flat" cmpd="sng" algn="ctr">
+                      <a:solidFill>
+                        <a:srgbClr val="BFBFBF"/>
+                      </a:solidFill>
+                      <a:prstDash val="solid"/>
+                      <a:round/>
+                      <a:headEnd type="none" w="med" len="med"/>
+                      <a:tailEnd type="none" w="med" len="med"/>
+                    </a:lnR>
+                    <a:lnT w="6350" cap="flat" cmpd="sng" algn="ctr">
+                      <a:solidFill>
+                        <a:srgbClr val="BFBFBF"/>
+                      </a:solidFill>
+                      <a:prstDash val="solid"/>
+                      <a:round/>
+                      <a:headEnd type="none" w="med" len="med"/>
+                      <a:tailEnd type="none" w="med" len="med"/>
+                    </a:lnT>
+                    <a:lnB w="6350" cap="flat" cmpd="sng" algn="ctr">
+                      <a:solidFill>
+                        <a:srgbClr val="BFBFBF"/>
+                      </a:solidFill>
+                      <a:prstDash val="solid"/>
+                      <a:round/>
+                      <a:headEnd type="none" w="med" len="med"/>
+                      <a:tailEnd type="none" w="med" len="med"/>
+                    </a:lnB>
+                  </a:tcPr>
+                </a:tc>
+              </a:tr>
+              <a:tr h="502920">
+                <a:tc>
+                  <a:txBody>
+                    <a:bodyPr/>
+                    <a:lstStyle/>
+                    <a:p>
+                      <a:pPr algn="ctr" indent="0" marL="0">
+                        <a:buNone/>
+                      </a:pPr>
+                      <a:r>
                         <a:rPr lang="en-US" sz="850" b="1" dirty="0">
                           <a:solidFill>
                             <a:srgbClr val="262626"/>
@@ -6788,321 +7297,7 @@
                           <a:ea typeface="신세계 민부리 Bold(TTF)" pitchFamily="34" charset="-122"/>
                           <a:cs typeface="신세계 민부리 Bold(TTF)" pitchFamily="34" charset="-120"/>
                         </a:rPr>
-                        <a:t>BTO (민간제안)</a:t>
-                      </a:r>
-                      <a:endParaRPr lang="en-US" sz="850" dirty="0"/>
-                    </a:p>
-                    <a:p>
-                      <a:pPr indent="0" marL="0">
-                        <a:buNone/>
-                      </a:pPr>
-                      <a:r>
-                        <a:rPr lang="en-US" sz="850" dirty="0">
-                          <a:solidFill>
-                            <a:srgbClr val="262626"/>
-                          </a:solidFill>
-                          <a:latin typeface="신세계 민부리 Light(TTF)" pitchFamily="34" charset="0"/>
-                          <a:ea typeface="신세계 민부리 Light(TTF)" pitchFamily="34" charset="-122"/>
-                          <a:cs typeface="신세계 민부리 Light(TTF)" pitchFamily="34" charset="-120"/>
-                        </a:rPr>
-                        <a:t>운영 40년, 이용료로 회수</a:t>
-                      </a:r>
-                      <a:endParaRPr lang="en-US" sz="850" dirty="0"/>
-                    </a:p>
-                  </a:txBody>
-                  <a:tcPr marL="54864" marR="54864" marT="27432" marB="27432" anchor="ctr">
-                    <a:lnL w="6350" cap="flat" cmpd="sng" algn="ctr">
-                      <a:solidFill>
-                        <a:srgbClr val="BFBFBF"/>
-                      </a:solidFill>
-                      <a:prstDash val="solid"/>
-                      <a:round/>
-                      <a:headEnd type="none" w="med" len="med"/>
-                      <a:tailEnd type="none" w="med" len="med"/>
-                    </a:lnL>
-                    <a:lnR w="6350" cap="flat" cmpd="sng" algn="ctr">
-                      <a:solidFill>
-                        <a:srgbClr val="BFBFBF"/>
-                      </a:solidFill>
-                      <a:prstDash val="solid"/>
-                      <a:round/>
-                      <a:headEnd type="none" w="med" len="med"/>
-                      <a:tailEnd type="none" w="med" len="med"/>
-                    </a:lnR>
-                    <a:lnT w="6350" cap="flat" cmpd="sng" algn="ctr">
-                      <a:solidFill>
-                        <a:srgbClr val="BFBFBF"/>
-                      </a:solidFill>
-                      <a:prstDash val="solid"/>
-                      <a:round/>
-                      <a:headEnd type="none" w="med" len="med"/>
-                      <a:tailEnd type="none" w="med" len="med"/>
-                    </a:lnT>
-                    <a:lnB w="6350" cap="flat" cmpd="sng" algn="ctr">
-                      <a:solidFill>
-                        <a:srgbClr val="BFBFBF"/>
-                      </a:solidFill>
-                      <a:prstDash val="solid"/>
-                      <a:round/>
-                      <a:headEnd type="none" w="med" len="med"/>
-                      <a:tailEnd type="none" w="med" len="med"/>
-                    </a:lnB>
-                  </a:tcPr>
-                </a:tc>
-                <a:tc>
-                  <a:txBody>
-                    <a:bodyPr/>
-                    <a:lstStyle/>
-                    <a:p>
-                      <a:pPr indent="0" marL="0">
-                        <a:buNone/>
-                      </a:pPr>
-                      <a:r>
-                        <a:rPr lang="en-US" sz="850" b="1" dirty="0">
-                          <a:solidFill>
-                            <a:srgbClr val="262626"/>
-                          </a:solidFill>
-                          <a:latin typeface="신세계 민부리 Bold(TTF)" pitchFamily="34" charset="0"/>
-                          <a:ea typeface="신세계 민부리 Bold(TTF)" pitchFamily="34" charset="-122"/>
-                          <a:cs typeface="신세계 민부리 Bold(TTF)" pitchFamily="34" charset="-120"/>
-                        </a:rPr>
-                        <a:t>BTL</a:t>
-                      </a:r>
-                      <a:endParaRPr lang="en-US" sz="850" dirty="0"/>
-                    </a:p>
-                    <a:p>
-                      <a:pPr indent="0" marL="0">
-                        <a:buNone/>
-                      </a:pPr>
-                      <a:r>
-                        <a:rPr lang="en-US" sz="850" dirty="0">
-                          <a:solidFill>
-                            <a:srgbClr val="262626"/>
-                          </a:solidFill>
-                          <a:latin typeface="신세계 민부리 Light(TTF)" pitchFamily="34" charset="0"/>
-                          <a:ea typeface="신세계 민부리 Light(TTF)" pitchFamily="34" charset="-122"/>
-                          <a:cs typeface="신세계 민부리 Light(TTF)" pitchFamily="34" charset="-120"/>
-                        </a:rPr>
-                        <a:t>운영 20년, 정부 임대료로 회수</a:t>
-                      </a:r>
-                      <a:endParaRPr lang="en-US" sz="850" dirty="0"/>
-                    </a:p>
-                  </a:txBody>
-                  <a:tcPr marL="54864" marR="54864" marT="27432" marB="27432" anchor="ctr">
-                    <a:lnL w="6350" cap="flat" cmpd="sng" algn="ctr">
-                      <a:solidFill>
-                        <a:srgbClr val="BFBFBF"/>
-                      </a:solidFill>
-                      <a:prstDash val="solid"/>
-                      <a:round/>
-                      <a:headEnd type="none" w="med" len="med"/>
-                      <a:tailEnd type="none" w="med" len="med"/>
-                    </a:lnL>
-                    <a:lnR w="6350" cap="flat" cmpd="sng" algn="ctr">
-                      <a:solidFill>
-                        <a:srgbClr val="BFBFBF"/>
-                      </a:solidFill>
-                      <a:prstDash val="solid"/>
-                      <a:round/>
-                      <a:headEnd type="none" w="med" len="med"/>
-                      <a:tailEnd type="none" w="med" len="med"/>
-                    </a:lnR>
-                    <a:lnT w="6350" cap="flat" cmpd="sng" algn="ctr">
-                      <a:solidFill>
-                        <a:srgbClr val="BFBFBF"/>
-                      </a:solidFill>
-                      <a:prstDash val="solid"/>
-                      <a:round/>
-                      <a:headEnd type="none" w="med" len="med"/>
-                      <a:tailEnd type="none" w="med" len="med"/>
-                    </a:lnT>
-                    <a:lnB w="6350" cap="flat" cmpd="sng" algn="ctr">
-                      <a:solidFill>
-                        <a:srgbClr val="BFBFBF"/>
-                      </a:solidFill>
-                      <a:prstDash val="solid"/>
-                      <a:round/>
-                      <a:headEnd type="none" w="med" len="med"/>
-                      <a:tailEnd type="none" w="med" len="med"/>
-                    </a:lnB>
-                  </a:tcPr>
-                </a:tc>
-                <a:tc>
-                  <a:txBody>
-                    <a:bodyPr/>
-                    <a:lstStyle/>
-                    <a:p>
-                      <a:pPr indent="0" marL="0">
-                        <a:buNone/>
-                      </a:pPr>
-                      <a:r>
-                        <a:rPr lang="en-US" sz="850" b="1" dirty="0">
-                          <a:solidFill>
-                            <a:srgbClr val="262626"/>
-                          </a:solidFill>
-                          <a:latin typeface="신세계 민부리 Bold(TTF)" pitchFamily="34" charset="0"/>
-                          <a:ea typeface="신세계 민부리 Bold(TTF)" pitchFamily="34" charset="-122"/>
-                          <a:cs typeface="신세계 민부리 Bold(TTF)" pitchFamily="34" charset="-120"/>
-                        </a:rPr>
-                        <a:t>BOT</a:t>
-                      </a:r>
-                      <a:endParaRPr lang="en-US" sz="850" dirty="0"/>
-                    </a:p>
-                    <a:p>
-                      <a:pPr indent="0" marL="0">
-                        <a:buNone/>
-                      </a:pPr>
-                      <a:r>
-                        <a:rPr lang="en-US" sz="850" dirty="0">
-                          <a:solidFill>
-                            <a:srgbClr val="262626"/>
-                          </a:solidFill>
-                          <a:latin typeface="신세계 민부리 Light(TTF)" pitchFamily="34" charset="0"/>
-                          <a:ea typeface="신세계 민부리 Light(TTF)" pitchFamily="34" charset="-122"/>
-                          <a:cs typeface="신세계 민부리 Light(TTF)" pitchFamily="34" charset="-120"/>
-                        </a:rPr>
-                        <a:t>20년 운영 후 ’31 서울시 기부채납</a:t>
-                      </a:r>
-                      <a:endParaRPr lang="en-US" sz="850" dirty="0"/>
-                    </a:p>
-                  </a:txBody>
-                  <a:tcPr marL="54864" marR="54864" marT="27432" marB="27432" anchor="ctr">
-                    <a:lnL w="6350" cap="flat" cmpd="sng" algn="ctr">
-                      <a:solidFill>
-                        <a:srgbClr val="BFBFBF"/>
-                      </a:solidFill>
-                      <a:prstDash val="solid"/>
-                      <a:round/>
-                      <a:headEnd type="none" w="med" len="med"/>
-                      <a:tailEnd type="none" w="med" len="med"/>
-                    </a:lnL>
-                    <a:lnR w="6350" cap="flat" cmpd="sng" algn="ctr">
-                      <a:solidFill>
-                        <a:srgbClr val="BFBFBF"/>
-                      </a:solidFill>
-                      <a:prstDash val="solid"/>
-                      <a:round/>
-                      <a:headEnd type="none" w="med" len="med"/>
-                      <a:tailEnd type="none" w="med" len="med"/>
-                    </a:lnR>
-                    <a:lnT w="6350" cap="flat" cmpd="sng" algn="ctr">
-                      <a:solidFill>
-                        <a:srgbClr val="BFBFBF"/>
-                      </a:solidFill>
-                      <a:prstDash val="solid"/>
-                      <a:round/>
-                      <a:headEnd type="none" w="med" len="med"/>
-                      <a:tailEnd type="none" w="med" len="med"/>
-                    </a:lnT>
-                    <a:lnB w="6350" cap="flat" cmpd="sng" algn="ctr">
-                      <a:solidFill>
-                        <a:srgbClr val="BFBFBF"/>
-                      </a:solidFill>
-                      <a:prstDash val="solid"/>
-                      <a:round/>
-                      <a:headEnd type="none" w="med" len="med"/>
-                      <a:tailEnd type="none" w="med" len="med"/>
-                    </a:lnB>
-                  </a:tcPr>
-                </a:tc>
-                <a:tc>
-                  <a:txBody>
-                    <a:bodyPr/>
-                    <a:lstStyle/>
-                    <a:p>
-                      <a:pPr indent="0" marL="0">
-                        <a:buNone/>
-                      </a:pPr>
-                      <a:r>
-                        <a:rPr lang="en-US" sz="850" b="1" dirty="0">
-                          <a:solidFill>
-                            <a:srgbClr val="262626"/>
-                          </a:solidFill>
-                          <a:latin typeface="신세계 민부리 Bold(TTF)" pitchFamily="34" charset="0"/>
-                          <a:ea typeface="신세계 민부리 Bold(TTF)" pitchFamily="34" charset="-122"/>
-                          <a:cs typeface="신세계 민부리 Bold(TTF)" pitchFamily="34" charset="-120"/>
-                        </a:rPr>
-                        <a:t>민자역사 → 국가 귀속</a:t>
-                      </a:r>
-                      <a:endParaRPr lang="en-US" sz="850" dirty="0"/>
-                    </a:p>
-                    <a:p>
-                      <a:pPr indent="0" marL="0">
-                        <a:buNone/>
-                      </a:pPr>
-                      <a:r>
-                        <a:rPr lang="en-US" sz="850" dirty="0">
-                          <a:solidFill>
-                            <a:srgbClr val="262626"/>
-                          </a:solidFill>
-                          <a:latin typeface="신세계 민부리 Light(TTF)" pitchFamily="34" charset="0"/>
-                          <a:ea typeface="신세계 민부리 Light(TTF)" pitchFamily="34" charset="-122"/>
-                          <a:cs typeface="신세계 민부리 Light(TTF)" pitchFamily="34" charset="-120"/>
-                        </a:rPr>
-                        <a:t>사용허가 5년 + 갱신 (최장 10년)</a:t>
-                      </a:r>
-                      <a:endParaRPr lang="en-US" sz="850" dirty="0"/>
-                    </a:p>
-                  </a:txBody>
-                  <a:tcPr marL="54864" marR="54864" marT="27432" marB="27432" anchor="ctr">
-                    <a:lnL w="6350" cap="flat" cmpd="sng" algn="ctr">
-                      <a:solidFill>
-                        <a:srgbClr val="BFBFBF"/>
-                      </a:solidFill>
-                      <a:prstDash val="solid"/>
-                      <a:round/>
-                      <a:headEnd type="none" w="med" len="med"/>
-                      <a:tailEnd type="none" w="med" len="med"/>
-                    </a:lnL>
-                    <a:lnR w="6350" cap="flat" cmpd="sng" algn="ctr">
-                      <a:solidFill>
-                        <a:srgbClr val="BFBFBF"/>
-                      </a:solidFill>
-                      <a:prstDash val="solid"/>
-                      <a:round/>
-                      <a:headEnd type="none" w="med" len="med"/>
-                      <a:tailEnd type="none" w="med" len="med"/>
-                    </a:lnR>
-                    <a:lnT w="6350" cap="flat" cmpd="sng" algn="ctr">
-                      <a:solidFill>
-                        <a:srgbClr val="BFBFBF"/>
-                      </a:solidFill>
-                      <a:prstDash val="solid"/>
-                      <a:round/>
-                      <a:headEnd type="none" w="med" len="med"/>
-                      <a:tailEnd type="none" w="med" len="med"/>
-                    </a:lnT>
-                    <a:lnB w="6350" cap="flat" cmpd="sng" algn="ctr">
-                      <a:solidFill>
-                        <a:srgbClr val="BFBFBF"/>
-                      </a:solidFill>
-                      <a:prstDash val="solid"/>
-                      <a:round/>
-                      <a:headEnd type="none" w="med" len="med"/>
-                      <a:tailEnd type="none" w="med" len="med"/>
-                    </a:lnB>
-                  </a:tcPr>
-                </a:tc>
-              </a:tr>
-              <a:tr h="603504">
-                <a:tc>
-                  <a:txBody>
-                    <a:bodyPr/>
-                    <a:lstStyle/>
-                    <a:p>
-                      <a:pPr algn="ctr" indent="0" marL="0">
-                        <a:buNone/>
-                      </a:pPr>
-                      <a:r>
-                        <a:rPr lang="en-US" sz="850" b="1" dirty="0">
-                          <a:solidFill>
-                            <a:srgbClr val="262626"/>
-                          </a:solidFill>
-                          <a:latin typeface="신세계 민부리 Bold(TTF)" pitchFamily="34" charset="0"/>
-                          <a:ea typeface="신세계 민부리 Bold(TTF)" pitchFamily="34" charset="-122"/>
-                          <a:cs typeface="신세계 민부리 Bold(TTF)" pitchFamily="34" charset="-120"/>
-                        </a:rPr>
-                        <a:t>사업자</a:t>
+                        <a:t>방식 · 기간</a:t>
                       </a:r>
                       <a:endParaRPr lang="en-US" sz="850" dirty="0">
                         <a:latin typeface="신세계 민부리 Bold(TTF)" charset="0"/>
@@ -7162,6 +7357,388 @@
                         <a:buNone/>
                       </a:pPr>
                       <a:r>
+                        <a:rPr lang="en-US" sz="850" b="1" dirty="0">
+                          <a:solidFill>
+                            <a:srgbClr val="262626"/>
+                          </a:solidFill>
+                          <a:latin typeface="신세계 민부리 Bold(TTF)" pitchFamily="34" charset="0"/>
+                          <a:ea typeface="신세계 민부리 Bold(TTF)" pitchFamily="34" charset="-122"/>
+                          <a:cs typeface="신세계 민부리 Bold(TTF)" pitchFamily="34" charset="-120"/>
+                        </a:rPr>
+                        <a:t>BTO (민간제안)</a:t>
+                      </a:r>
+                      <a:endParaRPr lang="en-US" sz="850" dirty="0"/>
+                    </a:p>
+                    <a:p>
+                      <a:pPr indent="0" marL="0">
+                        <a:buNone/>
+                      </a:pPr>
+                      <a:r>
+                        <a:rPr lang="en-US" sz="850" dirty="0">
+                          <a:solidFill>
+                            <a:srgbClr val="262626"/>
+                          </a:solidFill>
+                          <a:latin typeface="신세계 민부리 Light(TTF)" pitchFamily="34" charset="0"/>
+                          <a:ea typeface="신세계 민부리 Light(TTF)" pitchFamily="34" charset="-122"/>
+                          <a:cs typeface="신세계 민부리 Light(TTF)" pitchFamily="34" charset="-120"/>
+                        </a:rPr>
+                        <a:t>운영 40년, 이용료로 회수</a:t>
+                      </a:r>
+                      <a:endParaRPr lang="en-US" sz="850" dirty="0"/>
+                    </a:p>
+                  </a:txBody>
+                  <a:tcPr marL="54864" marR="54864" marT="27432" marB="27432" anchor="ctr">
+                    <a:lnL w="6350" cap="flat" cmpd="sng" algn="ctr">
+                      <a:solidFill>
+                        <a:srgbClr val="BFBFBF"/>
+                      </a:solidFill>
+                      <a:prstDash val="solid"/>
+                      <a:round/>
+                      <a:headEnd type="none" w="med" len="med"/>
+                      <a:tailEnd type="none" w="med" len="med"/>
+                    </a:lnL>
+                    <a:lnR w="6350" cap="flat" cmpd="sng" algn="ctr">
+                      <a:solidFill>
+                        <a:srgbClr val="BFBFBF"/>
+                      </a:solidFill>
+                      <a:prstDash val="solid"/>
+                      <a:round/>
+                      <a:headEnd type="none" w="med" len="med"/>
+                      <a:tailEnd type="none" w="med" len="med"/>
+                    </a:lnR>
+                    <a:lnT w="6350" cap="flat" cmpd="sng" algn="ctr">
+                      <a:solidFill>
+                        <a:srgbClr val="BFBFBF"/>
+                      </a:solidFill>
+                      <a:prstDash val="solid"/>
+                      <a:round/>
+                      <a:headEnd type="none" w="med" len="med"/>
+                      <a:tailEnd type="none" w="med" len="med"/>
+                    </a:lnT>
+                    <a:lnB w="6350" cap="flat" cmpd="sng" algn="ctr">
+                      <a:solidFill>
+                        <a:srgbClr val="BFBFBF"/>
+                      </a:solidFill>
+                      <a:prstDash val="solid"/>
+                      <a:round/>
+                      <a:headEnd type="none" w="med" len="med"/>
+                      <a:tailEnd type="none" w="med" len="med"/>
+                    </a:lnB>
+                  </a:tcPr>
+                </a:tc>
+                <a:tc>
+                  <a:txBody>
+                    <a:bodyPr/>
+                    <a:lstStyle/>
+                    <a:p>
+                      <a:pPr indent="0" marL="0">
+                        <a:buNone/>
+                      </a:pPr>
+                      <a:r>
+                        <a:rPr lang="en-US" sz="850" b="1" dirty="0">
+                          <a:solidFill>
+                            <a:srgbClr val="262626"/>
+                          </a:solidFill>
+                          <a:latin typeface="신세계 민부리 Bold(TTF)" pitchFamily="34" charset="0"/>
+                          <a:ea typeface="신세계 민부리 Bold(TTF)" pitchFamily="34" charset="-122"/>
+                          <a:cs typeface="신세계 민부리 Bold(TTF)" pitchFamily="34" charset="-120"/>
+                        </a:rPr>
+                        <a:t>BTL</a:t>
+                      </a:r>
+                      <a:endParaRPr lang="en-US" sz="850" dirty="0"/>
+                    </a:p>
+                    <a:p>
+                      <a:pPr indent="0" marL="0">
+                        <a:buNone/>
+                      </a:pPr>
+                      <a:r>
+                        <a:rPr lang="en-US" sz="850" dirty="0">
+                          <a:solidFill>
+                            <a:srgbClr val="262626"/>
+                          </a:solidFill>
+                          <a:latin typeface="신세계 민부리 Light(TTF)" pitchFamily="34" charset="0"/>
+                          <a:ea typeface="신세계 민부리 Light(TTF)" pitchFamily="34" charset="-122"/>
+                          <a:cs typeface="신세계 민부리 Light(TTF)" pitchFamily="34" charset="-120"/>
+                        </a:rPr>
+                        <a:t>운영 20년, 정부 임대료로 회수</a:t>
+                      </a:r>
+                      <a:endParaRPr lang="en-US" sz="850" dirty="0"/>
+                    </a:p>
+                  </a:txBody>
+                  <a:tcPr marL="54864" marR="54864" marT="27432" marB="27432" anchor="ctr">
+                    <a:lnL w="6350" cap="flat" cmpd="sng" algn="ctr">
+                      <a:solidFill>
+                        <a:srgbClr val="BFBFBF"/>
+                      </a:solidFill>
+                      <a:prstDash val="solid"/>
+                      <a:round/>
+                      <a:headEnd type="none" w="med" len="med"/>
+                      <a:tailEnd type="none" w="med" len="med"/>
+                    </a:lnL>
+                    <a:lnR w="6350" cap="flat" cmpd="sng" algn="ctr">
+                      <a:solidFill>
+                        <a:srgbClr val="BFBFBF"/>
+                      </a:solidFill>
+                      <a:prstDash val="solid"/>
+                      <a:round/>
+                      <a:headEnd type="none" w="med" len="med"/>
+                      <a:tailEnd type="none" w="med" len="med"/>
+                    </a:lnR>
+                    <a:lnT w="6350" cap="flat" cmpd="sng" algn="ctr">
+                      <a:solidFill>
+                        <a:srgbClr val="BFBFBF"/>
+                      </a:solidFill>
+                      <a:prstDash val="solid"/>
+                      <a:round/>
+                      <a:headEnd type="none" w="med" len="med"/>
+                      <a:tailEnd type="none" w="med" len="med"/>
+                    </a:lnT>
+                    <a:lnB w="6350" cap="flat" cmpd="sng" algn="ctr">
+                      <a:solidFill>
+                        <a:srgbClr val="BFBFBF"/>
+                      </a:solidFill>
+                      <a:prstDash val="solid"/>
+                      <a:round/>
+                      <a:headEnd type="none" w="med" len="med"/>
+                      <a:tailEnd type="none" w="med" len="med"/>
+                    </a:lnB>
+                  </a:tcPr>
+                </a:tc>
+                <a:tc>
+                  <a:txBody>
+                    <a:bodyPr/>
+                    <a:lstStyle/>
+                    <a:p>
+                      <a:pPr indent="0" marL="0">
+                        <a:buNone/>
+                      </a:pPr>
+                      <a:r>
+                        <a:rPr lang="en-US" sz="850" b="1" dirty="0">
+                          <a:solidFill>
+                            <a:srgbClr val="262626"/>
+                          </a:solidFill>
+                          <a:latin typeface="신세계 민부리 Bold(TTF)" pitchFamily="34" charset="0"/>
+                          <a:ea typeface="신세계 민부리 Bold(TTF)" pitchFamily="34" charset="-122"/>
+                          <a:cs typeface="신세계 민부리 Bold(TTF)" pitchFamily="34" charset="-120"/>
+                        </a:rPr>
+                        <a:t>BOT</a:t>
+                      </a:r>
+                      <a:endParaRPr lang="en-US" sz="850" dirty="0"/>
+                    </a:p>
+                    <a:p>
+                      <a:pPr indent="0" marL="0">
+                        <a:buNone/>
+                      </a:pPr>
+                      <a:r>
+                        <a:rPr lang="en-US" sz="850" dirty="0">
+                          <a:solidFill>
+                            <a:srgbClr val="262626"/>
+                          </a:solidFill>
+                          <a:latin typeface="신세계 민부리 Light(TTF)" pitchFamily="34" charset="0"/>
+                          <a:ea typeface="신세계 민부리 Light(TTF)" pitchFamily="34" charset="-122"/>
+                          <a:cs typeface="신세계 민부리 Light(TTF)" pitchFamily="34" charset="-120"/>
+                        </a:rPr>
+                        <a:t>20년 운영 후 ’31 서울시 기부채납</a:t>
+                      </a:r>
+                      <a:endParaRPr lang="en-US" sz="850" dirty="0"/>
+                    </a:p>
+                  </a:txBody>
+                  <a:tcPr marL="54864" marR="54864" marT="27432" marB="27432" anchor="ctr">
+                    <a:lnL w="6350" cap="flat" cmpd="sng" algn="ctr">
+                      <a:solidFill>
+                        <a:srgbClr val="BFBFBF"/>
+                      </a:solidFill>
+                      <a:prstDash val="solid"/>
+                      <a:round/>
+                      <a:headEnd type="none" w="med" len="med"/>
+                      <a:tailEnd type="none" w="med" len="med"/>
+                    </a:lnL>
+                    <a:lnR w="6350" cap="flat" cmpd="sng" algn="ctr">
+                      <a:solidFill>
+                        <a:srgbClr val="BFBFBF"/>
+                      </a:solidFill>
+                      <a:prstDash val="solid"/>
+                      <a:round/>
+                      <a:headEnd type="none" w="med" len="med"/>
+                      <a:tailEnd type="none" w="med" len="med"/>
+                    </a:lnR>
+                    <a:lnT w="6350" cap="flat" cmpd="sng" algn="ctr">
+                      <a:solidFill>
+                        <a:srgbClr val="BFBFBF"/>
+                      </a:solidFill>
+                      <a:prstDash val="solid"/>
+                      <a:round/>
+                      <a:headEnd type="none" w="med" len="med"/>
+                      <a:tailEnd type="none" w="med" len="med"/>
+                    </a:lnT>
+                    <a:lnB w="6350" cap="flat" cmpd="sng" algn="ctr">
+                      <a:solidFill>
+                        <a:srgbClr val="BFBFBF"/>
+                      </a:solidFill>
+                      <a:prstDash val="solid"/>
+                      <a:round/>
+                      <a:headEnd type="none" w="med" len="med"/>
+                      <a:tailEnd type="none" w="med" len="med"/>
+                    </a:lnB>
+                  </a:tcPr>
+                </a:tc>
+                <a:tc>
+                  <a:txBody>
+                    <a:bodyPr/>
+                    <a:lstStyle/>
+                    <a:p>
+                      <a:pPr indent="0" marL="0">
+                        <a:buNone/>
+                      </a:pPr>
+                      <a:r>
+                        <a:rPr lang="en-US" sz="850" b="1" dirty="0">
+                          <a:solidFill>
+                            <a:srgbClr val="262626"/>
+                          </a:solidFill>
+                          <a:latin typeface="신세계 민부리 Bold(TTF)" pitchFamily="34" charset="0"/>
+                          <a:ea typeface="신세계 민부리 Bold(TTF)" pitchFamily="34" charset="-122"/>
+                          <a:cs typeface="신세계 민부리 Bold(TTF)" pitchFamily="34" charset="-120"/>
+                        </a:rPr>
+                        <a:t>민자역사 → 국가 귀속</a:t>
+                      </a:r>
+                      <a:endParaRPr lang="en-US" sz="850" dirty="0"/>
+                    </a:p>
+                    <a:p>
+                      <a:pPr indent="0" marL="0">
+                        <a:buNone/>
+                      </a:pPr>
+                      <a:r>
+                        <a:rPr lang="en-US" sz="850" dirty="0">
+                          <a:solidFill>
+                            <a:srgbClr val="262626"/>
+                          </a:solidFill>
+                          <a:latin typeface="신세계 민부리 Light(TTF)" pitchFamily="34" charset="0"/>
+                          <a:ea typeface="신세계 민부리 Light(TTF)" pitchFamily="34" charset="-122"/>
+                          <a:cs typeface="신세계 민부리 Light(TTF)" pitchFamily="34" charset="-120"/>
+                        </a:rPr>
+                        <a:t>사용허가 5년 + 갱신 (최장 10년)</a:t>
+                      </a:r>
+                      <a:endParaRPr lang="en-US" sz="850" dirty="0"/>
+                    </a:p>
+                  </a:txBody>
+                  <a:tcPr marL="54864" marR="54864" marT="27432" marB="27432" anchor="ctr">
+                    <a:lnL w="6350" cap="flat" cmpd="sng" algn="ctr">
+                      <a:solidFill>
+                        <a:srgbClr val="BFBFBF"/>
+                      </a:solidFill>
+                      <a:prstDash val="solid"/>
+                      <a:round/>
+                      <a:headEnd type="none" w="med" len="med"/>
+                      <a:tailEnd type="none" w="med" len="med"/>
+                    </a:lnL>
+                    <a:lnR w="6350" cap="flat" cmpd="sng" algn="ctr">
+                      <a:solidFill>
+                        <a:srgbClr val="BFBFBF"/>
+                      </a:solidFill>
+                      <a:prstDash val="solid"/>
+                      <a:round/>
+                      <a:headEnd type="none" w="med" len="med"/>
+                      <a:tailEnd type="none" w="med" len="med"/>
+                    </a:lnR>
+                    <a:lnT w="6350" cap="flat" cmpd="sng" algn="ctr">
+                      <a:solidFill>
+                        <a:srgbClr val="BFBFBF"/>
+                      </a:solidFill>
+                      <a:prstDash val="solid"/>
+                      <a:round/>
+                      <a:headEnd type="none" w="med" len="med"/>
+                      <a:tailEnd type="none" w="med" len="med"/>
+                    </a:lnT>
+                    <a:lnB w="6350" cap="flat" cmpd="sng" algn="ctr">
+                      <a:solidFill>
+                        <a:srgbClr val="BFBFBF"/>
+                      </a:solidFill>
+                      <a:prstDash val="solid"/>
+                      <a:round/>
+                      <a:headEnd type="none" w="med" len="med"/>
+                      <a:tailEnd type="none" w="med" len="med"/>
+                    </a:lnB>
+                  </a:tcPr>
+                </a:tc>
+              </a:tr>
+              <a:tr h="603504">
+                <a:tc>
+                  <a:txBody>
+                    <a:bodyPr/>
+                    <a:lstStyle/>
+                    <a:p>
+                      <a:pPr algn="ctr" indent="0" marL="0">
+                        <a:buNone/>
+                      </a:pPr>
+                      <a:r>
+                        <a:rPr lang="en-US" sz="850" b="1" dirty="0">
+                          <a:solidFill>
+                            <a:srgbClr val="262626"/>
+                          </a:solidFill>
+                          <a:latin typeface="신세계 민부리 Bold(TTF)" pitchFamily="34" charset="0"/>
+                          <a:ea typeface="신세계 민부리 Bold(TTF)" pitchFamily="34" charset="-122"/>
+                          <a:cs typeface="신세계 민부리 Bold(TTF)" pitchFamily="34" charset="-120"/>
+                        </a:rPr>
+                        <a:t>사업자</a:t>
+                      </a:r>
+                      <a:endParaRPr lang="en-US" sz="850" dirty="0">
+                        <a:latin typeface="신세계 민부리 Bold(TTF)" charset="0"/>
+                        <a:ea typeface="신세계 민부리 Bold(TTF)" charset="0"/>
+                        <a:cs typeface="신세계 민부리 Bold(TTF)" charset="0"/>
+                      </a:endParaRPr>
+                    </a:p>
+                  </a:txBody>
+                  <a:tcPr marL="54864" marR="54864" marT="27432" marB="27432" anchor="ctr">
+                    <a:lnL w="6350" cap="flat" cmpd="sng" algn="ctr">
+                      <a:solidFill>
+                        <a:srgbClr val="BFBFBF"/>
+                      </a:solidFill>
+                      <a:prstDash val="solid"/>
+                      <a:round/>
+                      <a:headEnd type="none" w="med" len="med"/>
+                      <a:tailEnd type="none" w="med" len="med"/>
+                    </a:lnL>
+                    <a:lnR w="6350" cap="flat" cmpd="sng" algn="ctr">
+                      <a:solidFill>
+                        <a:srgbClr val="BFBFBF"/>
+                      </a:solidFill>
+                      <a:prstDash val="solid"/>
+                      <a:round/>
+                      <a:headEnd type="none" w="med" len="med"/>
+                      <a:tailEnd type="none" w="med" len="med"/>
+                    </a:lnR>
+                    <a:lnT w="6350" cap="flat" cmpd="sng" algn="ctr">
+                      <a:solidFill>
+                        <a:srgbClr val="BFBFBF"/>
+                      </a:solidFill>
+                      <a:prstDash val="solid"/>
+                      <a:round/>
+                      <a:headEnd type="none" w="med" len="med"/>
+                      <a:tailEnd type="none" w="med" len="med"/>
+                    </a:lnT>
+                    <a:lnB w="6350" cap="flat" cmpd="sng" algn="ctr">
+                      <a:solidFill>
+                        <a:srgbClr val="BFBFBF"/>
+                      </a:solidFill>
+                      <a:prstDash val="solid"/>
+                      <a:round/>
+                      <a:headEnd type="none" w="med" len="med"/>
+                      <a:tailEnd type="none" w="med" len="med"/>
+                    </a:lnB>
+                    <a:solidFill>
+                      <a:srgbClr val="F2F2F2"/>
+                    </a:solidFill>
+                  </a:tcPr>
+                </a:tc>
+                <a:tc>
+                  <a:txBody>
+                    <a:bodyPr/>
+                    <a:lstStyle/>
+                    <a:p>
+                      <a:pPr indent="0" marL="0">
+                        <a:buNone/>
+                      </a:pPr>
+                      <a:r>
                         <a:rPr lang="en-US" sz="850" dirty="0">
                           <a:solidFill>
                             <a:srgbClr val="262626"/>
@@ -7414,7 +7991,7 @@
                   </a:tcPr>
                 </a:tc>
               </a:tr>
-              <a:tr h="713232">
+              <a:tr h="731520">
                 <a:tc>
                   <a:txBody>
                     <a:bodyPr/>
@@ -7741,348 +8318,6 @@
                       <a:headEnd type="none" w="med" len="med"/>
                       <a:tailEnd type="none" w="med" len="med"/>
                     </a:lnB>
-                  </a:tcPr>
-                </a:tc>
-              </a:tr>
-              <a:tr h="713232">
-                <a:tc>
-                  <a:txBody>
-                    <a:bodyPr/>
-                    <a:lstStyle/>
-                    <a:p>
-                      <a:pPr algn="ctr" indent="0" marL="0">
-                        <a:buNone/>
-                      </a:pPr>
-                      <a:r>
-                        <a:rPr lang="en-US" sz="850" b="1" dirty="0">
-                          <a:solidFill>
-                            <a:srgbClr val="262626"/>
-                          </a:solidFill>
-                          <a:latin typeface="신세계 민부리 Bold(TTF)" pitchFamily="34" charset="0"/>
-                          <a:ea typeface="신세계 민부리 Bold(TTF)" pitchFamily="34" charset="-122"/>
-                          <a:cs typeface="신세계 민부리 Bold(TTF)" pitchFamily="34" charset="-120"/>
-                        </a:rPr>
-                        <a:t>당사 시사점</a:t>
-                      </a:r>
-                      <a:endParaRPr lang="en-US" sz="850" dirty="0">
-                        <a:latin typeface="신세계 민부리 Bold(TTF)" charset="0"/>
-                        <a:ea typeface="신세계 민부리 Bold(TTF)" charset="0"/>
-                        <a:cs typeface="신세계 민부리 Bold(TTF)" charset="0"/>
-                      </a:endParaRPr>
-                    </a:p>
-                  </a:txBody>
-                  <a:tcPr marL="54864" marR="54864" marT="27432" marB="27432" anchor="ctr">
-                    <a:lnL w="6350" cap="flat" cmpd="sng" algn="ctr">
-                      <a:solidFill>
-                        <a:srgbClr val="BFBFBF"/>
-                      </a:solidFill>
-                      <a:prstDash val="solid"/>
-                      <a:round/>
-                      <a:headEnd type="none" w="med" len="med"/>
-                      <a:tailEnd type="none" w="med" len="med"/>
-                    </a:lnL>
-                    <a:lnR w="6350" cap="flat" cmpd="sng" algn="ctr">
-                      <a:solidFill>
-                        <a:srgbClr val="BFBFBF"/>
-                      </a:solidFill>
-                      <a:prstDash val="solid"/>
-                      <a:round/>
-                      <a:headEnd type="none" w="med" len="med"/>
-                      <a:tailEnd type="none" w="med" len="med"/>
-                    </a:lnR>
-                    <a:lnT w="6350" cap="flat" cmpd="sng" algn="ctr">
-                      <a:solidFill>
-                        <a:srgbClr val="BFBFBF"/>
-                      </a:solidFill>
-                      <a:prstDash val="solid"/>
-                      <a:round/>
-                      <a:headEnd type="none" w="med" len="med"/>
-                      <a:tailEnd type="none" w="med" len="med"/>
-                    </a:lnT>
-                    <a:lnB w="6350" cap="flat" cmpd="sng" algn="ctr">
-                      <a:solidFill>
-                        <a:srgbClr val="BFBFBF"/>
-                      </a:solidFill>
-                      <a:prstDash val="solid"/>
-                      <a:round/>
-                      <a:headEnd type="none" w="med" len="med"/>
-                      <a:tailEnd type="none" w="med" len="med"/>
-                    </a:lnB>
-                    <a:solidFill>
-                      <a:srgbClr val="F2F2F2"/>
-                    </a:solidFill>
-                  </a:tcPr>
-                </a:tc>
-                <a:tc>
-                  <a:txBody>
-                    <a:bodyPr/>
-                    <a:lstStyle/>
-                    <a:p>
-                      <a:pPr indent="0" marL="0">
-                        <a:buNone/>
-                      </a:pPr>
-                      <a:r>
-                        <a:rPr lang="en-US" sz="850" dirty="0">
-                          <a:solidFill>
-                            <a:srgbClr val="262626"/>
-                          </a:solidFill>
-                          <a:latin typeface="신세계 민부리 Light(TTF)" pitchFamily="34" charset="0"/>
-                          <a:ea typeface="신세계 민부리 Light(TTF)" pitchFamily="34" charset="-122"/>
-                          <a:cs typeface="신세계 민부리 Light(TTF)" pitchFamily="34" charset="-120"/>
-                        </a:rPr>
-                        <a:t>최초제안자도 경쟁에서 탈락 가능 → 제안 가점보다 콘텐츠 차별화가 관건</a:t>
-                      </a:r>
-                      <a:endParaRPr lang="en-US" sz="850" dirty="0">
-                        <a:latin typeface="신세계 민부리 Light(TTF)" charset="0"/>
-                        <a:ea typeface="신세계 민부리 Light(TTF)" charset="0"/>
-                        <a:cs typeface="신세계 민부리 Light(TTF)" charset="0"/>
-                      </a:endParaRPr>
-                    </a:p>
-                  </a:txBody>
-                  <a:tcPr marL="54864" marR="54864" marT="27432" marB="27432" anchor="ctr">
-                    <a:lnL w="6350" cap="flat" cmpd="sng" algn="ctr">
-                      <a:solidFill>
-                        <a:srgbClr val="BFBFBF"/>
-                      </a:solidFill>
-                      <a:prstDash val="solid"/>
-                      <a:round/>
-                      <a:headEnd type="none" w="med" len="med"/>
-                      <a:tailEnd type="none" w="med" len="med"/>
-                    </a:lnL>
-                    <a:lnR w="6350" cap="flat" cmpd="sng" algn="ctr">
-                      <a:solidFill>
-                        <a:srgbClr val="BFBFBF"/>
-                      </a:solidFill>
-                      <a:prstDash val="solid"/>
-                      <a:round/>
-                      <a:headEnd type="none" w="med" len="med"/>
-                      <a:tailEnd type="none" w="med" len="med"/>
-                    </a:lnR>
-                    <a:lnT w="6350" cap="flat" cmpd="sng" algn="ctr">
-                      <a:solidFill>
-                        <a:srgbClr val="BFBFBF"/>
-                      </a:solidFill>
-                      <a:prstDash val="solid"/>
-                      <a:round/>
-                      <a:headEnd type="none" w="med" len="med"/>
-                      <a:tailEnd type="none" w="med" len="med"/>
-                    </a:lnT>
-                    <a:lnB w="6350" cap="flat" cmpd="sng" algn="ctr">
-                      <a:solidFill>
-                        <a:srgbClr val="BFBFBF"/>
-                      </a:solidFill>
-                      <a:prstDash val="solid"/>
-                      <a:round/>
-                      <a:headEnd type="none" w="med" len="med"/>
-                      <a:tailEnd type="none" w="med" len="med"/>
-                    </a:lnB>
-                    <a:solidFill>
-                      <a:srgbClr val="EEF2F8"/>
-                    </a:solidFill>
-                  </a:tcPr>
-                </a:tc>
-                <a:tc>
-                  <a:txBody>
-                    <a:bodyPr/>
-                    <a:lstStyle/>
-                    <a:p>
-                      <a:pPr indent="0" marL="0">
-                        <a:buNone/>
-                      </a:pPr>
-                      <a:r>
-                        <a:rPr lang="en-US" sz="850" dirty="0">
-                          <a:solidFill>
-                            <a:srgbClr val="262626"/>
-                          </a:solidFill>
-                          <a:latin typeface="신세계 민부리 Light(TTF)" pitchFamily="34" charset="0"/>
-                          <a:ea typeface="신세계 민부리 Light(TTF)" pitchFamily="34" charset="-122"/>
-                          <a:cs typeface="신세계 민부리 Light(TTF)" pitchFamily="34" charset="-120"/>
-                        </a:rPr>
-                        <a:t>수익은 안정적이나 운영 · 콘텐츠는 공공 몫 → 당사 MD · 운영 역량 활용 불가</a:t>
-                      </a:r>
-                      <a:endParaRPr lang="en-US" sz="850" dirty="0">
-                        <a:latin typeface="신세계 민부리 Light(TTF)" charset="0"/>
-                        <a:ea typeface="신세계 민부리 Light(TTF)" charset="0"/>
-                        <a:cs typeface="신세계 민부리 Light(TTF)" charset="0"/>
-                      </a:endParaRPr>
-                    </a:p>
-                  </a:txBody>
-                  <a:tcPr marL="54864" marR="54864" marT="27432" marB="27432" anchor="ctr">
-                    <a:lnL w="6350" cap="flat" cmpd="sng" algn="ctr">
-                      <a:solidFill>
-                        <a:srgbClr val="BFBFBF"/>
-                      </a:solidFill>
-                      <a:prstDash val="solid"/>
-                      <a:round/>
-                      <a:headEnd type="none" w="med" len="med"/>
-                      <a:tailEnd type="none" w="med" len="med"/>
-                    </a:lnL>
-                    <a:lnR w="6350" cap="flat" cmpd="sng" algn="ctr">
-                      <a:solidFill>
-                        <a:srgbClr val="BFBFBF"/>
-                      </a:solidFill>
-                      <a:prstDash val="solid"/>
-                      <a:round/>
-                      <a:headEnd type="none" w="med" len="med"/>
-                      <a:tailEnd type="none" w="med" len="med"/>
-                    </a:lnR>
-                    <a:lnT w="6350" cap="flat" cmpd="sng" algn="ctr">
-                      <a:solidFill>
-                        <a:srgbClr val="BFBFBF"/>
-                      </a:solidFill>
-                      <a:prstDash val="solid"/>
-                      <a:round/>
-                      <a:headEnd type="none" w="med" len="med"/>
-                      <a:tailEnd type="none" w="med" len="med"/>
-                    </a:lnT>
-                    <a:lnB w="6350" cap="flat" cmpd="sng" algn="ctr">
-                      <a:solidFill>
-                        <a:srgbClr val="BFBFBF"/>
-                      </a:solidFill>
-                      <a:prstDash val="solid"/>
-                      <a:round/>
-                      <a:headEnd type="none" w="med" len="med"/>
-                      <a:tailEnd type="none" w="med" len="med"/>
-                    </a:lnB>
-                    <a:solidFill>
-                      <a:srgbClr val="EEF2F8"/>
-                    </a:solidFill>
-                  </a:tcPr>
-                </a:tc>
-                <a:tc>
-                  <a:txBody>
-                    <a:bodyPr/>
-                    <a:lstStyle/>
-                    <a:p>
-                      <a:pPr indent="0" marL="0">
-                        <a:buNone/>
-                      </a:pPr>
-                      <a:r>
-                        <a:rPr lang="en-US" sz="850" dirty="0">
-                          <a:solidFill>
-                            <a:srgbClr val="262626"/>
-                          </a:solidFill>
-                          <a:latin typeface="신세계 민부리 Light(TTF)" pitchFamily="34" charset="0"/>
-                          <a:ea typeface="신세계 민부리 Light(TTF)" pitchFamily="34" charset="-122"/>
-                          <a:cs typeface="신세계 민부리 Light(TTF)" pitchFamily="34" charset="-120"/>
-                        </a:rPr>
-                        <a:t>같은 한강 수상시설 선례 / 민간 소유 자산은 재무 악화 시 경매 리스크 → 운영권 구조가 유리</a:t>
-                      </a:r>
-                      <a:endParaRPr lang="en-US" sz="850" dirty="0">
-                        <a:latin typeface="신세계 민부리 Light(TTF)" charset="0"/>
-                        <a:ea typeface="신세계 민부리 Light(TTF)" charset="0"/>
-                        <a:cs typeface="신세계 민부리 Light(TTF)" charset="0"/>
-                      </a:endParaRPr>
-                    </a:p>
-                  </a:txBody>
-                  <a:tcPr marL="54864" marR="54864" marT="27432" marB="27432" anchor="ctr">
-                    <a:lnL w="6350" cap="flat" cmpd="sng" algn="ctr">
-                      <a:solidFill>
-                        <a:srgbClr val="BFBFBF"/>
-                      </a:solidFill>
-                      <a:prstDash val="solid"/>
-                      <a:round/>
-                      <a:headEnd type="none" w="med" len="med"/>
-                      <a:tailEnd type="none" w="med" len="med"/>
-                    </a:lnL>
-                    <a:lnR w="6350" cap="flat" cmpd="sng" algn="ctr">
-                      <a:solidFill>
-                        <a:srgbClr val="BFBFBF"/>
-                      </a:solidFill>
-                      <a:prstDash val="solid"/>
-                      <a:round/>
-                      <a:headEnd type="none" w="med" len="med"/>
-                      <a:tailEnd type="none" w="med" len="med"/>
-                    </a:lnR>
-                    <a:lnT w="6350" cap="flat" cmpd="sng" algn="ctr">
-                      <a:solidFill>
-                        <a:srgbClr val="BFBFBF"/>
-                      </a:solidFill>
-                      <a:prstDash val="solid"/>
-                      <a:round/>
-                      <a:headEnd type="none" w="med" len="med"/>
-                      <a:tailEnd type="none" w="med" len="med"/>
-                    </a:lnT>
-                    <a:lnB w="6350" cap="flat" cmpd="sng" algn="ctr">
-                      <a:solidFill>
-                        <a:srgbClr val="BFBFBF"/>
-                      </a:solidFill>
-                      <a:prstDash val="solid"/>
-                      <a:round/>
-                      <a:headEnd type="none" w="med" len="med"/>
-                      <a:tailEnd type="none" w="med" len="med"/>
-                    </a:lnB>
-                    <a:solidFill>
-                      <a:srgbClr val="EEF2F8"/>
-                    </a:solidFill>
-                  </a:tcPr>
-                </a:tc>
-                <a:tc>
-                  <a:txBody>
-                    <a:bodyPr/>
-                    <a:lstStyle/>
-                    <a:p>
-                      <a:pPr indent="0" marL="0">
-                        <a:buNone/>
-                      </a:pPr>
-                      <a:r>
-                        <a:rPr lang="en-US" sz="850" dirty="0">
-                          <a:solidFill>
-                            <a:srgbClr val="262626"/>
-                          </a:solidFill>
-                          <a:latin typeface="신세계 민부리 Light(TTF)" pitchFamily="34" charset="0"/>
-                          <a:ea typeface="신세계 민부리 Light(TTF)" pitchFamily="34" charset="-122"/>
-                          <a:cs typeface="신세계 민부리 Light(TTF)" pitchFamily="34" charset="-120"/>
-                        </a:rPr>
-                        <a:t>재공모 (사용허가)는 최장 10년 수준 → 세빛섬은 민투법 경로로 50년 확보 필요</a:t>
-                      </a:r>
-                      <a:endParaRPr lang="en-US" sz="850" dirty="0">
-                        <a:latin typeface="신세계 민부리 Light(TTF)" charset="0"/>
-                        <a:ea typeface="신세계 민부리 Light(TTF)" charset="0"/>
-                        <a:cs typeface="신세계 민부리 Light(TTF)" charset="0"/>
-                      </a:endParaRPr>
-                    </a:p>
-                  </a:txBody>
-                  <a:tcPr marL="54864" marR="54864" marT="27432" marB="27432" anchor="ctr">
-                    <a:lnL w="6350" cap="flat" cmpd="sng" algn="ctr">
-                      <a:solidFill>
-                        <a:srgbClr val="BFBFBF"/>
-                      </a:solidFill>
-                      <a:prstDash val="solid"/>
-                      <a:round/>
-                      <a:headEnd type="none" w="med" len="med"/>
-                      <a:tailEnd type="none" w="med" len="med"/>
-                    </a:lnL>
-                    <a:lnR w="6350" cap="flat" cmpd="sng" algn="ctr">
-                      <a:solidFill>
-                        <a:srgbClr val="BFBFBF"/>
-                      </a:solidFill>
-                      <a:prstDash val="solid"/>
-                      <a:round/>
-                      <a:headEnd type="none" w="med" len="med"/>
-                      <a:tailEnd type="none" w="med" len="med"/>
-                    </a:lnR>
-                    <a:lnT w="6350" cap="flat" cmpd="sng" algn="ctr">
-                      <a:solidFill>
-                        <a:srgbClr val="BFBFBF"/>
-                      </a:solidFill>
-                      <a:prstDash val="solid"/>
-                      <a:round/>
-                      <a:headEnd type="none" w="med" len="med"/>
-                      <a:tailEnd type="none" w="med" len="med"/>
-                    </a:lnT>
-                    <a:lnB w="6350" cap="flat" cmpd="sng" algn="ctr">
-                      <a:solidFill>
-                        <a:srgbClr val="BFBFBF"/>
-                      </a:solidFill>
-                      <a:prstDash val="solid"/>
-                      <a:round/>
-                      <a:headEnd type="none" w="med" len="med"/>
-                      <a:tailEnd type="none" w="med" len="med"/>
-                    </a:lnB>
-                    <a:solidFill>
-                      <a:srgbClr val="EEF2F8"/>
-                    </a:solidFill>
                   </a:tcPr>
                 </a:tc>
               </a:tr>
@@ -8098,7 +8333,7 @@
         </p:nvSpPr>
         <p:spPr>
           <a:xfrm>
-            <a:off x="274320" y="9244584"/>
+            <a:off x="274320" y="9089136"/>
             <a:ext cx="6309360" cy="164592"/>
           </a:xfrm>
           <a:prstGeom prst="rect">

--- a/Appendix_민간투자방식_비교_및_사례.pptx
+++ b/Appendix_민간투자방식_비교_및_사례.pptx
@@ -6619,7 +6619,7 @@
                   </a:tcPr>
                 </a:tc>
               </a:tr>
-              <a:tr h="502920">
+              <a:tr h="621792">
                 <a:tc>
                   <a:txBody>
                     <a:bodyPr/>
@@ -6835,7 +6835,7 @@
                           <a:ea typeface="신세계 민부리 Light(TTF)" pitchFamily="34" charset="-122"/>
                           <a:cs typeface="신세계 민부리 Light(TTF)" pitchFamily="34" charset="-120"/>
                         </a:rPr>
-                        <a:t>여의도 한강공원 (국회 앞) / 요트 약 90척 계류</a:t>
+                        <a:t>여의도 한강공원 (국회 뒤편) / 수역 1.46만㎡ + 육상 0.95만㎡, 요트 90척 (수상 60 · 육상 30)</a:t>
                       </a:r>
                       <a:endParaRPr lang="en-US" sz="850" dirty="0">
                         <a:latin typeface="신세계 민부리 Light(TTF)" charset="0"/>
@@ -6900,7 +6900,7 @@
                           <a:ea typeface="신세계 민부리 Light(TTF)" pitchFamily="34" charset="-122"/>
                           <a:cs typeface="신세계 민부리 Light(TTF)" pitchFamily="34" charset="-120"/>
                         </a:rPr>
-                        <a:t>영등포구 영등포역사 / 국가철도공단 관리 (국유재산)</a:t>
+                        <a:t>영등포구 영등포역사 / 지하 4층 ~ 지상 11층, 연면적 약 3.2만㎡</a:t>
                       </a:r>
                       <a:endParaRPr lang="en-US" sz="850" dirty="0">
                         <a:latin typeface="신세계 민부리 Light(TTF)" charset="0"/>
@@ -6949,7 +6949,7 @@
                   </a:tcPr>
                 </a:tc>
               </a:tr>
-              <a:tr h="502920">
+              <a:tr h="621792">
                 <a:tc>
                   <a:txBody>
                     <a:bodyPr/>
@@ -7165,7 +7165,7 @@
                           <a:ea typeface="신세계 민부리 Light(TTF)" pitchFamily="34" charset="-122"/>
                           <a:cs typeface="신세계 민부리 Light(TTF)" pitchFamily="34" charset="-120"/>
                         </a:rPr>
-                        <a:t>市 수역 · 진입로 조성 + 민간 계류시설 · 클럽하우스 투자</a:t>
+                        <a:t>민간 270억 (계류시설 · 클럽하우스 전액 민자) + 市 기반시설 (수역 · 진입로) 별도</a:t>
                       </a:r>
                       <a:endParaRPr lang="en-US" sz="850" dirty="0">
                         <a:latin typeface="신세계 민부리 Light(TTF)" charset="0"/>
@@ -7230,7 +7230,7 @@
                           <a:ea typeface="신세계 민부리 Light(TTF)" pitchFamily="34" charset="-122"/>
                           <a:cs typeface="신세계 민부리 Light(TTF)" pitchFamily="34" charset="-120"/>
                         </a:rPr>
-                        <a:t>신규 건설 없음 (기존 시설 사용, 국유재산 사용료 납부)</a:t>
+                        <a:t>신규 투자 없음 / 국가에 연 사용료 230억 납부 (’19 낙찰 시 252억)</a:t>
                       </a:r>
                       <a:endParaRPr lang="en-US" sz="850" dirty="0">
                         <a:latin typeface="신세계 민부리 Light(TTF)" charset="0"/>
@@ -7616,7 +7616,7 @@
                           <a:ea typeface="신세계 민부리 Light(TTF)" pitchFamily="34" charset="-122"/>
                           <a:cs typeface="신세계 민부리 Light(TTF)" pitchFamily="34" charset="-120"/>
                         </a:rPr>
-                        <a:t>사용허가 5년 + 갱신 (최장 10년)</a:t>
+                        <a:t>사용허가 10년 + 연장 (최장 20년, ’26 기준)</a:t>
                       </a:r>
                       <a:endParaRPr lang="en-US" sz="850" dirty="0"/>
                     </a:p>
@@ -7877,7 +7877,7 @@
                           <a:ea typeface="신세계 민부리 Light(TTF)" pitchFamily="34" charset="-122"/>
                           <a:cs typeface="신세계 민부리 Light(TTF)" pitchFamily="34" charset="-120"/>
                         </a:rPr>
-                        <a:t>민간 운영사 (요트 계류 · 클럽하우스 운영)</a:t>
+                        <a:t>㈜서울마리나 (’09 사업자 선정)</a:t>
                       </a:r>
                       <a:endParaRPr lang="en-US" sz="850" dirty="0">
                         <a:latin typeface="신세계 민부리 Light(TTF)" charset="0"/>
@@ -8207,7 +8207,7 @@
                           <a:ea typeface="신세계 민부리 Light(TTF)" pitchFamily="34" charset="-122"/>
                           <a:cs typeface="신세계 민부리 Light(TTF)" pitchFamily="34" charset="-120"/>
                         </a:rPr>
-                        <a:t>’11 개장 → ’21 운영사 재무 악화로 경매 → ’31 기부채납 예정</a:t>
+                        <a:t>’09 사업자 선정 → ’11 개장 → ’21 재무 악화로 경매 → ’31 기부채납 예정</a:t>
                       </a:r>
                       <a:endParaRPr lang="en-US" sz="850" dirty="0">
                         <a:latin typeface="신세계 민부리 Light(TTF)" charset="0"/>
@@ -8272,7 +8272,7 @@
                           <a:ea typeface="신세계 민부리 Light(TTF)" pitchFamily="34" charset="-122"/>
                           <a:cs typeface="신세계 민부리 Light(TTF)" pitchFamily="34" charset="-120"/>
                         </a:rPr>
-                        <a:t>’87 개장 → ’17.12 점용 30년 만료 · 국가 귀속 → ’19 롯데 재낙찰 → ’26.9 10년 재확보</a:t>
+                        <a:t>’87 점용허가 → ’91 롯데百 개점 → ’18.1 국가 귀속 → ’19 롯데 낙찰 → ’26 재입찰 낙찰</a:t>
                       </a:r>
                       <a:endParaRPr lang="en-US" sz="850" dirty="0">
                         <a:latin typeface="신세계 민부리 Light(TTF)" charset="0"/>
@@ -8333,7 +8333,7 @@
         </p:nvSpPr>
         <p:spPr>
           <a:xfrm>
-            <a:off x="274320" y="9089136"/>
+            <a:off x="274320" y="9326880"/>
             <a:ext cx="6309360" cy="164592"/>
           </a:xfrm>
           <a:prstGeom prst="rect">
